--- a/docs/esitlus.pptx
+++ b/docs/esitlus.pptx
@@ -5,14 +5,14 @@
     <p:sldMasterId id="2147483648" r:id="rId1"/>
   </p:sldMasterIdLst>
   <p:sldIdLst>
-    <p:sldId id="256" r:id="rId2"/>
-    <p:sldId id="257" r:id="rId3"/>
-    <p:sldId id="258" r:id="rId4"/>
-    <p:sldId id="259" r:id="rId5"/>
-    <p:sldId id="260" r:id="rId6"/>
-    <p:sldId id="261" r:id="rId7"/>
+    <p:sldId id="256" r:id="rId7"/>
+    <p:sldId id="257" r:id="rId8"/>
+    <p:sldId id="258" r:id="rId9"/>
+    <p:sldId id="259" r:id="rId10"/>
+    <p:sldId id="260" r:id="rId11"/>
+    <p:sldId id="261" r:id="rId12"/>
   </p:sldIdLst>
-  <p:sldSz cx="12188825" cy="6858000"/>
+  <p:sldSz cx="12188952" cy="6858000" type="screen4x3"/>
   <p:notesSz cx="6858000" cy="9144000"/>
   <p:defaultTextStyle>
     <a:defPPr>
@@ -109,91 +109,7 @@
       </a:defRPr>
     </a:lvl9pPr>
   </p:defaultTextStyle>
-  <p:extLst>
-    <p:ext uri="{EFAFB233-063F-42B5-8137-9DF3F51BA10A}">
-      <p15:sldGuideLst xmlns:p15="http://schemas.microsoft.com/office/powerpoint/2012/main">
-        <p15:guide id="1" orient="horz" pos="2160">
-          <p15:clr>
-            <a:srgbClr val="A4A3A4"/>
-          </p15:clr>
-        </p15:guide>
-        <p15:guide id="2" pos="2880">
-          <p15:clr>
-            <a:srgbClr val="A4A3A4"/>
-          </p15:clr>
-        </p15:guide>
-      </p15:sldGuideLst>
-    </p:ext>
-  </p:extLst>
 </p:presentation>
-</file>
-
-<file path=ppt/changesInfos/changesInfo1.xml><?xml version="1.0" encoding="utf-8"?>
-<pc:chgInfo xmlns:a="http://schemas.openxmlformats.org/drawingml/2006/main" xmlns:r="http://schemas.openxmlformats.org/officeDocument/2006/relationships" xmlns:ac="http://schemas.microsoft.com/office/drawing/2013/main/command" xmlns:pc="http://schemas.microsoft.com/office/powerpoint/2013/main/command">
-  <pc:docChgLst>
-    <pc:chgData name="Mihkel Nugis" userId="147e2f29-4501-45b3-8d2b-0a3f0bc4fbae" providerId="ADAL" clId="{19F9C2E8-51A5-4117-AA1C-CDF822D93710}"/>
-    <pc:docChg chg="modSld">
-      <pc:chgData name="Mihkel Nugis" userId="147e2f29-4501-45b3-8d2b-0a3f0bc4fbae" providerId="ADAL" clId="{19F9C2E8-51A5-4117-AA1C-CDF822D93710}" dt="2026-06-06T15:01:06.506" v="27" actId="1037"/>
-      <pc:docMkLst>
-        <pc:docMk/>
-      </pc:docMkLst>
-      <pc:sldChg chg="modSp mod">
-        <pc:chgData name="Mihkel Nugis" userId="147e2f29-4501-45b3-8d2b-0a3f0bc4fbae" providerId="ADAL" clId="{19F9C2E8-51A5-4117-AA1C-CDF822D93710}" dt="2026-06-06T15:00:45.453" v="19" actId="1035"/>
-        <pc:sldMkLst>
-          <pc:docMk/>
-          <pc:sldMk cId="0" sldId="256"/>
-        </pc:sldMkLst>
-        <pc:spChg chg="mod">
-          <ac:chgData name="Mihkel Nugis" userId="147e2f29-4501-45b3-8d2b-0a3f0bc4fbae" providerId="ADAL" clId="{19F9C2E8-51A5-4117-AA1C-CDF822D93710}" dt="2026-06-06T15:00:45.453" v="19" actId="1035"/>
-          <ac:spMkLst>
-            <pc:docMk/>
-            <pc:sldMk cId="0" sldId="256"/>
-            <ac:spMk id="2" creationId="{00000000-0000-0000-0000-000000000000}"/>
-          </ac:spMkLst>
-        </pc:spChg>
-      </pc:sldChg>
-      <pc:sldChg chg="modSp mod">
-        <pc:chgData name="Mihkel Nugis" userId="147e2f29-4501-45b3-8d2b-0a3f0bc4fbae" providerId="ADAL" clId="{19F9C2E8-51A5-4117-AA1C-CDF822D93710}" dt="2026-06-06T15:01:06.506" v="27" actId="1037"/>
-        <pc:sldMkLst>
-          <pc:docMk/>
-          <pc:sldMk cId="0" sldId="259"/>
-        </pc:sldMkLst>
-        <pc:spChg chg="mod">
-          <ac:chgData name="Mihkel Nugis" userId="147e2f29-4501-45b3-8d2b-0a3f0bc4fbae" providerId="ADAL" clId="{19F9C2E8-51A5-4117-AA1C-CDF822D93710}" dt="2026-06-06T15:01:06.506" v="27" actId="1037"/>
-          <ac:spMkLst>
-            <pc:docMk/>
-            <pc:sldMk cId="0" sldId="259"/>
-            <ac:spMk id="7" creationId="{00000000-0000-0000-0000-000000000000}"/>
-          </ac:spMkLst>
-        </pc:spChg>
-        <pc:spChg chg="mod">
-          <ac:chgData name="Mihkel Nugis" userId="147e2f29-4501-45b3-8d2b-0a3f0bc4fbae" providerId="ADAL" clId="{19F9C2E8-51A5-4117-AA1C-CDF822D93710}" dt="2026-06-06T15:01:06.506" v="27" actId="1037"/>
-          <ac:spMkLst>
-            <pc:docMk/>
-            <pc:sldMk cId="0" sldId="259"/>
-            <ac:spMk id="11" creationId="{00000000-0000-0000-0000-000000000000}"/>
-          </ac:spMkLst>
-        </pc:spChg>
-        <pc:spChg chg="mod">
-          <ac:chgData name="Mihkel Nugis" userId="147e2f29-4501-45b3-8d2b-0a3f0bc4fbae" providerId="ADAL" clId="{19F9C2E8-51A5-4117-AA1C-CDF822D93710}" dt="2026-06-06T15:01:06.506" v="27" actId="1037"/>
-          <ac:spMkLst>
-            <pc:docMk/>
-            <pc:sldMk cId="0" sldId="259"/>
-            <ac:spMk id="15" creationId="{00000000-0000-0000-0000-000000000000}"/>
-          </ac:spMkLst>
-        </pc:spChg>
-        <pc:spChg chg="mod">
-          <ac:chgData name="Mihkel Nugis" userId="147e2f29-4501-45b3-8d2b-0a3f0bc4fbae" providerId="ADAL" clId="{19F9C2E8-51A5-4117-AA1C-CDF822D93710}" dt="2026-06-06T15:01:06.506" v="27" actId="1037"/>
-          <ac:spMkLst>
-            <pc:docMk/>
-            <pc:sldMk cId="0" sldId="259"/>
-            <ac:spMk id="19" creationId="{00000000-0000-0000-0000-000000000000}"/>
-          </ac:spMkLst>
-        </pc:spChg>
-      </pc:sldChg>
-    </pc:docChg>
-  </pc:docChgLst>
-</pc:chgInfo>
 </file>
 
 <file path=ppt/slideLayouts/slideLayout1.xml><?xml version="1.0" encoding="utf-8"?>
@@ -234,9 +150,10 @@
           <a:lstStyle/>
           <a:p>
             <a:r>
-              <a:rPr lang="en-US"/>
+              <a:rPr lang="en-US" smtClean="0"/>
               <a:t>Click to edit Master title style</a:t>
             </a:r>
+            <a:endParaRPr lang="en-US"/>
           </a:p>
         </p:txBody>
       </p:sp>
@@ -352,9 +269,10 @@
           </a:lstStyle>
           <a:p>
             <a:r>
-              <a:rPr lang="en-US"/>
+              <a:rPr lang="en-US" smtClean="0"/>
               <a:t>Click to edit Master subtitle style</a:t>
             </a:r>
+            <a:endParaRPr lang="en-US"/>
           </a:p>
         </p:txBody>
       </p:sp>
@@ -375,7 +293,7 @@
           <a:p>
             <a:fld id="{5BCAD085-E8A6-8845-BD4E-CB4CCA059FC4}" type="datetimeFigureOut">
               <a:rPr lang="en-US" smtClean="0"/>
-              <a:t>6/6/2026</a:t>
+              <a:t>1/27/13</a:t>
             </a:fld>
             <a:endParaRPr lang="en-US"/>
           </a:p>
@@ -469,9 +387,10 @@
           <a:lstStyle/>
           <a:p>
             <a:r>
-              <a:rPr lang="en-US"/>
+              <a:rPr lang="en-US" smtClean="0"/>
               <a:t>Click to edit Master title style</a:t>
             </a:r>
+            <a:endParaRPr lang="en-US"/>
           </a:p>
         </p:txBody>
       </p:sp>
@@ -492,37 +411,38 @@
           <a:p>
             <a:pPr lvl="0"/>
             <a:r>
-              <a:rPr lang="en-US"/>
+              <a:rPr lang="en-US" smtClean="0"/>
               <a:t>Click to edit Master text styles</a:t>
             </a:r>
           </a:p>
           <a:p>
             <a:pPr lvl="1"/>
             <a:r>
-              <a:rPr lang="en-US"/>
+              <a:rPr lang="en-US" smtClean="0"/>
               <a:t>Second level</a:t>
             </a:r>
           </a:p>
           <a:p>
             <a:pPr lvl="2"/>
             <a:r>
-              <a:rPr lang="en-US"/>
+              <a:rPr lang="en-US" smtClean="0"/>
               <a:t>Third level</a:t>
             </a:r>
           </a:p>
           <a:p>
             <a:pPr lvl="3"/>
             <a:r>
-              <a:rPr lang="en-US"/>
+              <a:rPr lang="en-US" smtClean="0"/>
               <a:t>Fourth level</a:t>
             </a:r>
           </a:p>
           <a:p>
             <a:pPr lvl="4"/>
             <a:r>
-              <a:rPr lang="en-US"/>
+              <a:rPr lang="en-US" smtClean="0"/>
               <a:t>Fifth level</a:t>
             </a:r>
+            <a:endParaRPr lang="en-US"/>
           </a:p>
         </p:txBody>
       </p:sp>
@@ -543,7 +463,7 @@
           <a:p>
             <a:fld id="{5BCAD085-E8A6-8845-BD4E-CB4CCA059FC4}" type="datetimeFigureOut">
               <a:rPr lang="en-US" smtClean="0"/>
-              <a:t>6/6/2026</a:t>
+              <a:t>1/27/13</a:t>
             </a:fld>
             <a:endParaRPr lang="en-US"/>
           </a:p>
@@ -642,9 +562,10 @@
           <a:lstStyle/>
           <a:p>
             <a:r>
-              <a:rPr lang="en-US"/>
+              <a:rPr lang="en-US" smtClean="0"/>
               <a:t>Click to edit Master title style</a:t>
             </a:r>
+            <a:endParaRPr lang="en-US"/>
           </a:p>
         </p:txBody>
       </p:sp>
@@ -670,37 +591,38 @@
           <a:p>
             <a:pPr lvl="0"/>
             <a:r>
-              <a:rPr lang="en-US"/>
+              <a:rPr lang="en-US" smtClean="0"/>
               <a:t>Click to edit Master text styles</a:t>
             </a:r>
           </a:p>
           <a:p>
             <a:pPr lvl="1"/>
             <a:r>
-              <a:rPr lang="en-US"/>
+              <a:rPr lang="en-US" smtClean="0"/>
               <a:t>Second level</a:t>
             </a:r>
           </a:p>
           <a:p>
             <a:pPr lvl="2"/>
             <a:r>
-              <a:rPr lang="en-US"/>
+              <a:rPr lang="en-US" smtClean="0"/>
               <a:t>Third level</a:t>
             </a:r>
           </a:p>
           <a:p>
             <a:pPr lvl="3"/>
             <a:r>
-              <a:rPr lang="en-US"/>
+              <a:rPr lang="en-US" smtClean="0"/>
               <a:t>Fourth level</a:t>
             </a:r>
           </a:p>
           <a:p>
             <a:pPr lvl="4"/>
             <a:r>
-              <a:rPr lang="en-US"/>
+              <a:rPr lang="en-US" smtClean="0"/>
               <a:t>Fifth level</a:t>
             </a:r>
+            <a:endParaRPr lang="en-US"/>
           </a:p>
         </p:txBody>
       </p:sp>
@@ -721,7 +643,7 @@
           <a:p>
             <a:fld id="{5BCAD085-E8A6-8845-BD4E-CB4CCA059FC4}" type="datetimeFigureOut">
               <a:rPr lang="en-US" smtClean="0"/>
-              <a:t>6/6/2026</a:t>
+              <a:t>1/27/13</a:t>
             </a:fld>
             <a:endParaRPr lang="en-US"/>
           </a:p>
@@ -815,9 +737,10 @@
           <a:lstStyle/>
           <a:p>
             <a:r>
-              <a:rPr lang="en-US"/>
+              <a:rPr lang="en-US" smtClean="0"/>
               <a:t>Click to edit Master title style</a:t>
             </a:r>
+            <a:endParaRPr lang="en-US"/>
           </a:p>
         </p:txBody>
       </p:sp>
@@ -838,37 +761,38 @@
           <a:p>
             <a:pPr lvl="0"/>
             <a:r>
-              <a:rPr lang="en-US"/>
+              <a:rPr lang="en-US" smtClean="0"/>
               <a:t>Click to edit Master text styles</a:t>
             </a:r>
           </a:p>
           <a:p>
             <a:pPr lvl="1"/>
             <a:r>
-              <a:rPr lang="en-US"/>
+              <a:rPr lang="en-US" smtClean="0"/>
               <a:t>Second level</a:t>
             </a:r>
           </a:p>
           <a:p>
             <a:pPr lvl="2"/>
             <a:r>
-              <a:rPr lang="en-US"/>
+              <a:rPr lang="en-US" smtClean="0"/>
               <a:t>Third level</a:t>
             </a:r>
           </a:p>
           <a:p>
             <a:pPr lvl="3"/>
             <a:r>
-              <a:rPr lang="en-US"/>
+              <a:rPr lang="en-US" smtClean="0"/>
               <a:t>Fourth level</a:t>
             </a:r>
           </a:p>
           <a:p>
             <a:pPr lvl="4"/>
             <a:r>
-              <a:rPr lang="en-US"/>
+              <a:rPr lang="en-US" smtClean="0"/>
               <a:t>Fifth level</a:t>
             </a:r>
+            <a:endParaRPr lang="en-US"/>
           </a:p>
         </p:txBody>
       </p:sp>
@@ -889,7 +813,7 @@
           <a:p>
             <a:fld id="{5BCAD085-E8A6-8845-BD4E-CB4CCA059FC4}" type="datetimeFigureOut">
               <a:rPr lang="en-US" smtClean="0"/>
-              <a:t>6/6/2026</a:t>
+              <a:t>1/27/13</a:t>
             </a:fld>
             <a:endParaRPr lang="en-US"/>
           </a:p>
@@ -992,9 +916,10 @@
           </a:lstStyle>
           <a:p>
             <a:r>
-              <a:rPr lang="en-US"/>
+              <a:rPr lang="en-US" smtClean="0"/>
               <a:t>Click to edit Master title style</a:t>
             </a:r>
+            <a:endParaRPr lang="en-US"/>
           </a:p>
         </p:txBody>
       </p:sp>
@@ -1111,7 +1036,7 @@
           <a:p>
             <a:pPr lvl="0"/>
             <a:r>
-              <a:rPr lang="en-US"/>
+              <a:rPr lang="en-US" smtClean="0"/>
               <a:t>Click to edit Master text styles</a:t>
             </a:r>
           </a:p>
@@ -1134,7 +1059,7 @@
           <a:p>
             <a:fld id="{5BCAD085-E8A6-8845-BD4E-CB4CCA059FC4}" type="datetimeFigureOut">
               <a:rPr lang="en-US" smtClean="0"/>
-              <a:t>6/6/2026</a:t>
+              <a:t>1/27/13</a:t>
             </a:fld>
             <a:endParaRPr lang="en-US"/>
           </a:p>
@@ -1228,9 +1153,10 @@
           <a:lstStyle/>
           <a:p>
             <a:r>
-              <a:rPr lang="en-US"/>
+              <a:rPr lang="en-US" smtClean="0"/>
               <a:t>Click to edit Master title style</a:t>
             </a:r>
+            <a:endParaRPr lang="en-US"/>
           </a:p>
         </p:txBody>
       </p:sp>
@@ -1284,37 +1210,38 @@
           <a:p>
             <a:pPr lvl="0"/>
             <a:r>
-              <a:rPr lang="en-US"/>
+              <a:rPr lang="en-US" smtClean="0"/>
               <a:t>Click to edit Master text styles</a:t>
             </a:r>
           </a:p>
           <a:p>
             <a:pPr lvl="1"/>
             <a:r>
-              <a:rPr lang="en-US"/>
+              <a:rPr lang="en-US" smtClean="0"/>
               <a:t>Second level</a:t>
             </a:r>
           </a:p>
           <a:p>
             <a:pPr lvl="2"/>
             <a:r>
-              <a:rPr lang="en-US"/>
+              <a:rPr lang="en-US" smtClean="0"/>
               <a:t>Third level</a:t>
             </a:r>
           </a:p>
           <a:p>
             <a:pPr lvl="3"/>
             <a:r>
-              <a:rPr lang="en-US"/>
+              <a:rPr lang="en-US" smtClean="0"/>
               <a:t>Fourth level</a:t>
             </a:r>
           </a:p>
           <a:p>
             <a:pPr lvl="4"/>
             <a:r>
-              <a:rPr lang="en-US"/>
+              <a:rPr lang="en-US" smtClean="0"/>
               <a:t>Fifth level</a:t>
             </a:r>
+            <a:endParaRPr lang="en-US"/>
           </a:p>
         </p:txBody>
       </p:sp>
@@ -1368,37 +1295,38 @@
           <a:p>
             <a:pPr lvl="0"/>
             <a:r>
-              <a:rPr lang="en-US"/>
+              <a:rPr lang="en-US" smtClean="0"/>
               <a:t>Click to edit Master text styles</a:t>
             </a:r>
           </a:p>
           <a:p>
             <a:pPr lvl="1"/>
             <a:r>
-              <a:rPr lang="en-US"/>
+              <a:rPr lang="en-US" smtClean="0"/>
               <a:t>Second level</a:t>
             </a:r>
           </a:p>
           <a:p>
             <a:pPr lvl="2"/>
             <a:r>
-              <a:rPr lang="en-US"/>
+              <a:rPr lang="en-US" smtClean="0"/>
               <a:t>Third level</a:t>
             </a:r>
           </a:p>
           <a:p>
             <a:pPr lvl="3"/>
             <a:r>
-              <a:rPr lang="en-US"/>
+              <a:rPr lang="en-US" smtClean="0"/>
               <a:t>Fourth level</a:t>
             </a:r>
           </a:p>
           <a:p>
             <a:pPr lvl="4"/>
             <a:r>
-              <a:rPr lang="en-US"/>
+              <a:rPr lang="en-US" smtClean="0"/>
               <a:t>Fifth level</a:t>
             </a:r>
+            <a:endParaRPr lang="en-US"/>
           </a:p>
         </p:txBody>
       </p:sp>
@@ -1419,7 +1347,7 @@
           <a:p>
             <a:fld id="{5BCAD085-E8A6-8845-BD4E-CB4CCA059FC4}" type="datetimeFigureOut">
               <a:rPr lang="en-US" smtClean="0"/>
-              <a:t>6/6/2026</a:t>
+              <a:t>1/27/13</a:t>
             </a:fld>
             <a:endParaRPr lang="en-US"/>
           </a:p>
@@ -1517,9 +1445,10 @@
           </a:lstStyle>
           <a:p>
             <a:r>
-              <a:rPr lang="en-US"/>
+              <a:rPr lang="en-US" smtClean="0"/>
               <a:t>Click to edit Master title style</a:t>
             </a:r>
+            <a:endParaRPr lang="en-US"/>
           </a:p>
         </p:txBody>
       </p:sp>
@@ -1582,7 +1511,7 @@
           <a:p>
             <a:pPr lvl="0"/>
             <a:r>
-              <a:rPr lang="en-US"/>
+              <a:rPr lang="en-US" smtClean="0"/>
               <a:t>Click to edit Master text styles</a:t>
             </a:r>
           </a:p>
@@ -1638,37 +1567,38 @@
           <a:p>
             <a:pPr lvl="0"/>
             <a:r>
-              <a:rPr lang="en-US"/>
+              <a:rPr lang="en-US" smtClean="0"/>
               <a:t>Click to edit Master text styles</a:t>
             </a:r>
           </a:p>
           <a:p>
             <a:pPr lvl="1"/>
             <a:r>
-              <a:rPr lang="en-US"/>
+              <a:rPr lang="en-US" smtClean="0"/>
               <a:t>Second level</a:t>
             </a:r>
           </a:p>
           <a:p>
             <a:pPr lvl="2"/>
             <a:r>
-              <a:rPr lang="en-US"/>
+              <a:rPr lang="en-US" smtClean="0"/>
               <a:t>Third level</a:t>
             </a:r>
           </a:p>
           <a:p>
             <a:pPr lvl="3"/>
             <a:r>
-              <a:rPr lang="en-US"/>
+              <a:rPr lang="en-US" smtClean="0"/>
               <a:t>Fourth level</a:t>
             </a:r>
           </a:p>
           <a:p>
             <a:pPr lvl="4"/>
             <a:r>
-              <a:rPr lang="en-US"/>
+              <a:rPr lang="en-US" smtClean="0"/>
               <a:t>Fifth level</a:t>
             </a:r>
+            <a:endParaRPr lang="en-US"/>
           </a:p>
         </p:txBody>
       </p:sp>
@@ -1731,7 +1661,7 @@
           <a:p>
             <a:pPr lvl="0"/>
             <a:r>
-              <a:rPr lang="en-US"/>
+              <a:rPr lang="en-US" smtClean="0"/>
               <a:t>Click to edit Master text styles</a:t>
             </a:r>
           </a:p>
@@ -1787,37 +1717,38 @@
           <a:p>
             <a:pPr lvl="0"/>
             <a:r>
-              <a:rPr lang="en-US"/>
+              <a:rPr lang="en-US" smtClean="0"/>
               <a:t>Click to edit Master text styles</a:t>
             </a:r>
           </a:p>
           <a:p>
             <a:pPr lvl="1"/>
             <a:r>
-              <a:rPr lang="en-US"/>
+              <a:rPr lang="en-US" smtClean="0"/>
               <a:t>Second level</a:t>
             </a:r>
           </a:p>
           <a:p>
             <a:pPr lvl="2"/>
             <a:r>
-              <a:rPr lang="en-US"/>
+              <a:rPr lang="en-US" smtClean="0"/>
               <a:t>Third level</a:t>
             </a:r>
           </a:p>
           <a:p>
             <a:pPr lvl="3"/>
             <a:r>
-              <a:rPr lang="en-US"/>
+              <a:rPr lang="en-US" smtClean="0"/>
               <a:t>Fourth level</a:t>
             </a:r>
           </a:p>
           <a:p>
             <a:pPr lvl="4"/>
             <a:r>
-              <a:rPr lang="en-US"/>
+              <a:rPr lang="en-US" smtClean="0"/>
               <a:t>Fifth level</a:t>
             </a:r>
+            <a:endParaRPr lang="en-US"/>
           </a:p>
         </p:txBody>
       </p:sp>
@@ -1838,7 +1769,7 @@
           <a:p>
             <a:fld id="{5BCAD085-E8A6-8845-BD4E-CB4CCA059FC4}" type="datetimeFigureOut">
               <a:rPr lang="en-US" smtClean="0"/>
-              <a:t>6/6/2026</a:t>
+              <a:t>1/27/13</a:t>
             </a:fld>
             <a:endParaRPr lang="en-US"/>
           </a:p>
@@ -1932,9 +1863,10 @@
           <a:lstStyle/>
           <a:p>
             <a:r>
-              <a:rPr lang="en-US"/>
+              <a:rPr lang="en-US" smtClean="0"/>
               <a:t>Click to edit Master title style</a:t>
             </a:r>
+            <a:endParaRPr lang="en-US"/>
           </a:p>
         </p:txBody>
       </p:sp>
@@ -1955,7 +1887,7 @@
           <a:p>
             <a:fld id="{5BCAD085-E8A6-8845-BD4E-CB4CCA059FC4}" type="datetimeFigureOut">
               <a:rPr lang="en-US" smtClean="0"/>
-              <a:t>6/6/2026</a:t>
+              <a:t>1/27/13</a:t>
             </a:fld>
             <a:endParaRPr lang="en-US"/>
           </a:p>
@@ -2050,7 +1982,7 @@
           <a:p>
             <a:fld id="{5BCAD085-E8A6-8845-BD4E-CB4CCA059FC4}" type="datetimeFigureOut">
               <a:rPr lang="en-US" smtClean="0"/>
-              <a:t>6/6/2026</a:t>
+              <a:t>1/27/13</a:t>
             </a:fld>
             <a:endParaRPr lang="en-US"/>
           </a:p>
@@ -2153,9 +2085,10 @@
           </a:lstStyle>
           <a:p>
             <a:r>
-              <a:rPr lang="en-US"/>
+              <a:rPr lang="en-US" smtClean="0"/>
               <a:t>Click to edit Master title style</a:t>
             </a:r>
+            <a:endParaRPr lang="en-US"/>
           </a:p>
         </p:txBody>
       </p:sp>
@@ -2209,37 +2142,38 @@
           <a:p>
             <a:pPr lvl="0"/>
             <a:r>
-              <a:rPr lang="en-US"/>
+              <a:rPr lang="en-US" smtClean="0"/>
               <a:t>Click to edit Master text styles</a:t>
             </a:r>
           </a:p>
           <a:p>
             <a:pPr lvl="1"/>
             <a:r>
-              <a:rPr lang="en-US"/>
+              <a:rPr lang="en-US" smtClean="0"/>
               <a:t>Second level</a:t>
             </a:r>
           </a:p>
           <a:p>
             <a:pPr lvl="2"/>
             <a:r>
-              <a:rPr lang="en-US"/>
+              <a:rPr lang="en-US" smtClean="0"/>
               <a:t>Third level</a:t>
             </a:r>
           </a:p>
           <a:p>
             <a:pPr lvl="3"/>
             <a:r>
-              <a:rPr lang="en-US"/>
+              <a:rPr lang="en-US" smtClean="0"/>
               <a:t>Fourth level</a:t>
             </a:r>
           </a:p>
           <a:p>
             <a:pPr lvl="4"/>
             <a:r>
-              <a:rPr lang="en-US"/>
+              <a:rPr lang="en-US" smtClean="0"/>
               <a:t>Fifth level</a:t>
             </a:r>
+            <a:endParaRPr lang="en-US"/>
           </a:p>
         </p:txBody>
       </p:sp>
@@ -2302,7 +2236,7 @@
           <a:p>
             <a:pPr lvl="0"/>
             <a:r>
-              <a:rPr lang="en-US"/>
+              <a:rPr lang="en-US" smtClean="0"/>
               <a:t>Click to edit Master text styles</a:t>
             </a:r>
           </a:p>
@@ -2325,7 +2259,7 @@
           <a:p>
             <a:fld id="{5BCAD085-E8A6-8845-BD4E-CB4CCA059FC4}" type="datetimeFigureOut">
               <a:rPr lang="en-US" smtClean="0"/>
-              <a:t>6/6/2026</a:t>
+              <a:t>1/27/13</a:t>
             </a:fld>
             <a:endParaRPr lang="en-US"/>
           </a:p>
@@ -2428,9 +2362,10 @@
           </a:lstStyle>
           <a:p>
             <a:r>
-              <a:rPr lang="en-US"/>
+              <a:rPr lang="en-US" smtClean="0"/>
               <a:t>Click to edit Master title style</a:t>
             </a:r>
+            <a:endParaRPr lang="en-US"/>
           </a:p>
         </p:txBody>
       </p:sp>
@@ -2554,7 +2489,7 @@
           <a:p>
             <a:pPr lvl="0"/>
             <a:r>
-              <a:rPr lang="en-US"/>
+              <a:rPr lang="en-US" smtClean="0"/>
               <a:t>Click to edit Master text styles</a:t>
             </a:r>
           </a:p>
@@ -2577,7 +2512,7 @@
           <a:p>
             <a:fld id="{5BCAD085-E8A6-8845-BD4E-CB4CCA059FC4}" type="datetimeFigureOut">
               <a:rPr lang="en-US" smtClean="0"/>
-              <a:t>6/6/2026</a:t>
+              <a:t>1/27/13</a:t>
             </a:fld>
             <a:endParaRPr lang="en-US"/>
           </a:p>
@@ -2686,9 +2621,10 @@
           <a:lstStyle/>
           <a:p>
             <a:r>
-              <a:rPr lang="en-US"/>
+              <a:rPr lang="en-US" smtClean="0"/>
               <a:t>Click to edit Master title style</a:t>
             </a:r>
+            <a:endParaRPr lang="en-US"/>
           </a:p>
         </p:txBody>
       </p:sp>
@@ -2719,37 +2655,38 @@
           <a:p>
             <a:pPr lvl="0"/>
             <a:r>
-              <a:rPr lang="en-US"/>
+              <a:rPr lang="en-US" smtClean="0"/>
               <a:t>Click to edit Master text styles</a:t>
             </a:r>
           </a:p>
           <a:p>
             <a:pPr lvl="1"/>
             <a:r>
-              <a:rPr lang="en-US"/>
+              <a:rPr lang="en-US" smtClean="0"/>
               <a:t>Second level</a:t>
             </a:r>
           </a:p>
           <a:p>
             <a:pPr lvl="2"/>
             <a:r>
-              <a:rPr lang="en-US"/>
+              <a:rPr lang="en-US" smtClean="0"/>
               <a:t>Third level</a:t>
             </a:r>
           </a:p>
           <a:p>
             <a:pPr lvl="3"/>
             <a:r>
-              <a:rPr lang="en-US"/>
+              <a:rPr lang="en-US" smtClean="0"/>
               <a:t>Fourth level</a:t>
             </a:r>
           </a:p>
           <a:p>
             <a:pPr lvl="4"/>
             <a:r>
-              <a:rPr lang="en-US"/>
+              <a:rPr lang="en-US" smtClean="0"/>
               <a:t>Fifth level</a:t>
             </a:r>
+            <a:endParaRPr lang="en-US"/>
           </a:p>
         </p:txBody>
       </p:sp>
@@ -2788,7 +2725,7 @@
           <a:p>
             <a:fld id="{5BCAD085-E8A6-8845-BD4E-CB4CCA059FC4}" type="datetimeFigureOut">
               <a:rPr lang="en-US" smtClean="0"/>
-              <a:t>6/6/2026</a:t>
+              <a:t>1/27/13</a:t>
             </a:fld>
             <a:endParaRPr lang="en-US"/>
           </a:p>
@@ -3147,7 +3084,7 @@
 </file>
 
 <file path=ppt/slides/slide1.xml><?xml version="1.0" encoding="utf-8"?>
-<p:sld xmlns:a="http://schemas.openxmlformats.org/drawingml/2006/main" xmlns:r="http://schemas.openxmlformats.org/officeDocument/2006/relationships" xmlns:p="http://schemas.openxmlformats.org/presentationml/2006/main">
+<p:sld xmlns:a="http://schemas.openxmlformats.org/drawingml/2006/main" xmlns:p="http://schemas.openxmlformats.org/presentationml/2006/main" xmlns:r="http://schemas.openxmlformats.org/officeDocument/2006/relationships">
   <p:cSld>
     <p:bg>
       <p:bgPr>
@@ -3163,14 +3100,7 @@
         <p:cNvGrpSpPr/>
         <p:nvPr/>
       </p:nvGrpSpPr>
-      <p:grpSpPr>
-        <a:xfrm>
-          <a:off x="0" y="0"/>
-          <a:ext cx="0" cy="0"/>
-          <a:chOff x="0" y="0"/>
-          <a:chExt cx="0" cy="0"/>
-        </a:xfrm>
-      </p:grpSpPr>
+      <p:grpSpPr/>
       <p:sp>
         <p:nvSpPr>
           <p:cNvPr id="2" name="Rectangle 1"/>
@@ -3179,7 +3109,7 @@
         </p:nvSpPr>
         <p:spPr>
           <a:xfrm>
-            <a:off x="0" y="2322576"/>
+            <a:off x="0" y="2743200"/>
             <a:ext cx="12188952" cy="64008"/>
           </a:xfrm>
           <a:prstGeom prst="rect">
@@ -3211,7 +3141,6 @@
           <a:lstStyle/>
           <a:p>
             <a:pPr algn="ctr"/>
-            <a:endParaRPr/>
           </a:p>
         </p:txBody>
       </p:sp>
@@ -3278,7 +3207,7 @@
                   <a:srgbClr val="BDD7EE"/>
                 </a:solidFill>
               </a:rPr>
-              <a:t>Andmeinseneeria kursuse grupitöö  ·  2025</a:t>
+              <a:t>Andmeinseneeria kursuse grupitöö  ·  2026</a:t>
             </a:r>
           </a:p>
         </p:txBody>
@@ -3361,7 +3290,7 @@
 </file>
 
 <file path=ppt/slides/slide2.xml><?xml version="1.0" encoding="utf-8"?>
-<p:sld xmlns:a="http://schemas.openxmlformats.org/drawingml/2006/main" xmlns:r="http://schemas.openxmlformats.org/officeDocument/2006/relationships" xmlns:p="http://schemas.openxmlformats.org/presentationml/2006/main">
+<p:sld xmlns:a="http://schemas.openxmlformats.org/drawingml/2006/main" xmlns:p="http://schemas.openxmlformats.org/presentationml/2006/main" xmlns:r="http://schemas.openxmlformats.org/officeDocument/2006/relationships">
   <p:cSld>
     <p:bg>
       <p:bgPr>
@@ -3377,14 +3306,7 @@
         <p:cNvGrpSpPr/>
         <p:nvPr/>
       </p:nvGrpSpPr>
-      <p:grpSpPr>
-        <a:xfrm>
-          <a:off x="0" y="0"/>
-          <a:ext cx="0" cy="0"/>
-          <a:chOff x="0" y="0"/>
-          <a:chExt cx="0" cy="0"/>
-        </a:xfrm>
-      </p:grpSpPr>
+      <p:grpSpPr/>
       <p:sp>
         <p:nvSpPr>
           <p:cNvPr id="2" name="Rectangle 1"/>
@@ -3425,7 +3347,6 @@
           <a:lstStyle/>
           <a:p>
             <a:pPr algn="ctr"/>
-            <a:endParaRPr/>
           </a:p>
         </p:txBody>
       </p:sp>
@@ -3503,7 +3424,6 @@
           <a:lstStyle/>
           <a:p>
             <a:pPr algn="ctr"/>
-            <a:endParaRPr/>
           </a:p>
         </p:txBody>
       </p:sp>
@@ -3664,7 +3584,6 @@
           <a:lstStyle/>
           <a:p>
             <a:pPr algn="ctr"/>
-            <a:endParaRPr/>
           </a:p>
         </p:txBody>
       </p:sp>
@@ -3742,7 +3661,6 @@
           <a:lstStyle/>
           <a:p>
             <a:pPr algn="ctr"/>
-            <a:endParaRPr/>
           </a:p>
         </p:txBody>
       </p:sp>
@@ -3855,7 +3773,6 @@
           <a:lstStyle/>
           <a:p>
             <a:pPr algn="ctr"/>
-            <a:endParaRPr/>
           </a:p>
         </p:txBody>
       </p:sp>
@@ -3968,7 +3885,6 @@
           <a:lstStyle/>
           <a:p>
             <a:pPr algn="ctr"/>
-            <a:endParaRPr/>
           </a:p>
         </p:txBody>
       </p:sp>
@@ -4050,7 +3966,7 @@
 </file>
 
 <file path=ppt/slides/slide3.xml><?xml version="1.0" encoding="utf-8"?>
-<p:sld xmlns:a="http://schemas.openxmlformats.org/drawingml/2006/main" xmlns:r="http://schemas.openxmlformats.org/officeDocument/2006/relationships" xmlns:p="http://schemas.openxmlformats.org/presentationml/2006/main">
+<p:sld xmlns:a="http://schemas.openxmlformats.org/drawingml/2006/main" xmlns:p="http://schemas.openxmlformats.org/presentationml/2006/main" xmlns:r="http://schemas.openxmlformats.org/officeDocument/2006/relationships">
   <p:cSld>
     <p:bg>
       <p:bgPr>
@@ -4066,14 +3982,7 @@
         <p:cNvGrpSpPr/>
         <p:nvPr/>
       </p:nvGrpSpPr>
-      <p:grpSpPr>
-        <a:xfrm>
-          <a:off x="0" y="0"/>
-          <a:ext cx="0" cy="0"/>
-          <a:chOff x="0" y="0"/>
-          <a:chExt cx="0" cy="0"/>
-        </a:xfrm>
-      </p:grpSpPr>
+      <p:grpSpPr/>
       <p:sp>
         <p:nvSpPr>
           <p:cNvPr id="2" name="Rectangle 1"/>
@@ -4114,7 +4023,6 @@
           <a:lstStyle/>
           <a:p>
             <a:pPr algn="ctr"/>
-            <a:endParaRPr/>
           </a:p>
         </p:txBody>
       </p:sp>
@@ -4192,7 +4100,6 @@
           <a:lstStyle/>
           <a:p>
             <a:pPr algn="ctr"/>
-            <a:endParaRPr/>
           </a:p>
         </p:txBody>
       </p:sp>
@@ -4270,7 +4177,6 @@
           <a:lstStyle/>
           <a:p>
             <a:pPr algn="ctr"/>
-            <a:endParaRPr/>
           </a:p>
         </p:txBody>
       </p:sp>
@@ -4384,7 +4290,6 @@
           <a:lstStyle/>
           <a:p>
             <a:pPr algn="ctr"/>
-            <a:endParaRPr/>
           </a:p>
         </p:txBody>
       </p:sp>
@@ -4498,7 +4403,6 @@
           <a:lstStyle/>
           <a:p>
             <a:pPr algn="ctr"/>
-            <a:endParaRPr/>
           </a:p>
         </p:txBody>
       </p:sp>
@@ -4615,7 +4519,7 @@
 </file>
 
 <file path=ppt/slides/slide4.xml><?xml version="1.0" encoding="utf-8"?>
-<p:sld xmlns:a="http://schemas.openxmlformats.org/drawingml/2006/main" xmlns:r="http://schemas.openxmlformats.org/officeDocument/2006/relationships" xmlns:p="http://schemas.openxmlformats.org/presentationml/2006/main">
+<p:sld xmlns:a="http://schemas.openxmlformats.org/drawingml/2006/main" xmlns:p="http://schemas.openxmlformats.org/presentationml/2006/main" xmlns:r="http://schemas.openxmlformats.org/officeDocument/2006/relationships">
   <p:cSld>
     <p:bg>
       <p:bgPr>
@@ -4631,14 +4535,7 @@
         <p:cNvGrpSpPr/>
         <p:nvPr/>
       </p:nvGrpSpPr>
-      <p:grpSpPr>
-        <a:xfrm>
-          <a:off x="0" y="0"/>
-          <a:ext cx="0" cy="0"/>
-          <a:chOff x="0" y="0"/>
-          <a:chExt cx="0" cy="0"/>
-        </a:xfrm>
-      </p:grpSpPr>
+      <p:grpSpPr/>
       <p:sp>
         <p:nvSpPr>
           <p:cNvPr id="2" name="Rectangle 1"/>
@@ -4679,7 +4576,6 @@
           <a:lstStyle/>
           <a:p>
             <a:pPr algn="ctr"/>
-            <a:endParaRPr/>
           </a:p>
         </p:txBody>
       </p:sp>
@@ -4757,7 +4653,6 @@
           <a:lstStyle/>
           <a:p>
             <a:pPr algn="ctr"/>
-            <a:endParaRPr/>
           </a:p>
         </p:txBody>
       </p:sp>
@@ -4839,7 +4734,7 @@
         </p:nvSpPr>
         <p:spPr>
           <a:xfrm>
-            <a:off x="2258568" y="1737360"/>
+            <a:off x="2331720" y="1737360"/>
             <a:ext cx="411480" cy="548640"/>
           </a:xfrm>
           <a:prstGeom prst="rect">
@@ -4855,7 +4750,7 @@
           <a:p>
             <a:pPr algn="ctr"/>
             <a:r>
-              <a:rPr sz="2200" b="1" dirty="0">
+              <a:rPr sz="2200" b="1">
                 <a:solidFill>
                   <a:srgbClr val="ED7D31"/>
                 </a:solidFill>
@@ -4905,7 +4800,6 @@
           <a:lstStyle/>
           <a:p>
             <a:pPr algn="ctr"/>
-            <a:endParaRPr/>
           </a:p>
         </p:txBody>
       </p:sp>
@@ -4986,7 +4880,7 @@
         </p:nvSpPr>
         <p:spPr>
           <a:xfrm>
-            <a:off x="4617720" y="1737360"/>
+            <a:off x="4690872" y="1737360"/>
             <a:ext cx="411480" cy="548640"/>
           </a:xfrm>
           <a:prstGeom prst="rect">
@@ -5052,7 +4946,6 @@
           <a:lstStyle/>
           <a:p>
             <a:pPr algn="ctr"/>
-            <a:endParaRPr/>
           </a:p>
         </p:txBody>
       </p:sp>
@@ -5133,7 +5026,7 @@
         </p:nvSpPr>
         <p:spPr>
           <a:xfrm>
-            <a:off x="6976872" y="1737360"/>
+            <a:off x="7050024" y="1737360"/>
             <a:ext cx="411480" cy="548640"/>
           </a:xfrm>
           <a:prstGeom prst="rect">
@@ -5199,7 +5092,6 @@
           <a:lstStyle/>
           <a:p>
             <a:pPr algn="ctr"/>
-            <a:endParaRPr/>
           </a:p>
         </p:txBody>
       </p:sp>
@@ -5281,7 +5173,7 @@
         </p:nvSpPr>
         <p:spPr>
           <a:xfrm>
-            <a:off x="9336024" y="1737360"/>
+            <a:off x="9409176" y="1737360"/>
             <a:ext cx="411480" cy="548640"/>
           </a:xfrm>
           <a:prstGeom prst="rect">
@@ -5347,7 +5239,6 @@
           <a:lstStyle/>
           <a:p>
             <a:pPr algn="ctr"/>
-            <a:endParaRPr/>
           </a:p>
         </p:txBody>
       </p:sp>
@@ -5495,7 +5386,6 @@
           <a:lstStyle/>
           <a:p>
             <a:pPr algn="ctr"/>
-            <a:endParaRPr/>
           </a:p>
         </p:txBody>
       </p:sp>
@@ -5607,7 +5497,6 @@
           <a:lstStyle/>
           <a:p>
             <a:pPr algn="ctr"/>
-            <a:endParaRPr/>
           </a:p>
         </p:txBody>
       </p:sp>
@@ -5719,7 +5608,6 @@
           <a:lstStyle/>
           <a:p>
             <a:pPr algn="ctr"/>
-            <a:endParaRPr/>
           </a:p>
         </p:txBody>
       </p:sp>
@@ -5917,7 +5805,7 @@
 </file>
 
 <file path=ppt/slides/slide5.xml><?xml version="1.0" encoding="utf-8"?>
-<p:sld xmlns:a="http://schemas.openxmlformats.org/drawingml/2006/main" xmlns:r="http://schemas.openxmlformats.org/officeDocument/2006/relationships" xmlns:p="http://schemas.openxmlformats.org/presentationml/2006/main">
+<p:sld xmlns:a="http://schemas.openxmlformats.org/drawingml/2006/main" xmlns:p="http://schemas.openxmlformats.org/presentationml/2006/main" xmlns:r="http://schemas.openxmlformats.org/officeDocument/2006/relationships">
   <p:cSld>
     <p:bg>
       <p:bgPr>
@@ -5933,14 +5821,7 @@
         <p:cNvGrpSpPr/>
         <p:nvPr/>
       </p:nvGrpSpPr>
-      <p:grpSpPr>
-        <a:xfrm>
-          <a:off x="0" y="0"/>
-          <a:ext cx="0" cy="0"/>
-          <a:chOff x="0" y="0"/>
-          <a:chExt cx="0" cy="0"/>
-        </a:xfrm>
-      </p:grpSpPr>
+      <p:grpSpPr/>
       <p:sp>
         <p:nvSpPr>
           <p:cNvPr id="2" name="Rectangle 1"/>
@@ -5981,7 +5862,6 @@
           <a:lstStyle/>
           <a:p>
             <a:pPr algn="ctr"/>
-            <a:endParaRPr/>
           </a:p>
         </p:txBody>
       </p:sp>
@@ -6059,7 +5939,6 @@
           <a:lstStyle/>
           <a:p>
             <a:pPr algn="ctr"/>
-            <a:endParaRPr/>
           </a:p>
         </p:txBody>
       </p:sp>
@@ -6137,7 +6016,6 @@
           <a:lstStyle/>
           <a:p>
             <a:pPr algn="ctr"/>
-            <a:endParaRPr/>
           </a:p>
         </p:txBody>
       </p:sp>
@@ -6250,7 +6128,6 @@
           <a:lstStyle/>
           <a:p>
             <a:pPr algn="ctr"/>
-            <a:endParaRPr/>
           </a:p>
         </p:txBody>
       </p:sp>
@@ -6328,7 +6205,6 @@
           <a:lstStyle/>
           <a:p>
             <a:pPr algn="ctr"/>
-            <a:endParaRPr/>
           </a:p>
         </p:txBody>
       </p:sp>
@@ -6441,7 +6317,6 @@
           <a:lstStyle/>
           <a:p>
             <a:pPr algn="ctr"/>
-            <a:endParaRPr/>
           </a:p>
         </p:txBody>
       </p:sp>
@@ -6519,7 +6394,6 @@
           <a:lstStyle/>
           <a:p>
             <a:pPr algn="ctr"/>
-            <a:endParaRPr/>
           </a:p>
         </p:txBody>
       </p:sp>
@@ -6632,7 +6506,6 @@
           <a:lstStyle/>
           <a:p>
             <a:pPr algn="ctr"/>
-            <a:endParaRPr/>
           </a:p>
         </p:txBody>
       </p:sp>
@@ -6710,7 +6583,6 @@
           <a:lstStyle/>
           <a:p>
             <a:pPr algn="ctr"/>
-            <a:endParaRPr/>
           </a:p>
         </p:txBody>
       </p:sp>
@@ -6823,7 +6695,6 @@
           <a:lstStyle/>
           <a:p>
             <a:pPr algn="ctr"/>
-            <a:endParaRPr/>
           </a:p>
         </p:txBody>
       </p:sp>
@@ -6953,7 +6824,7 @@
 </file>
 
 <file path=ppt/slides/slide6.xml><?xml version="1.0" encoding="utf-8"?>
-<p:sld xmlns:a="http://schemas.openxmlformats.org/drawingml/2006/main" xmlns:r="http://schemas.openxmlformats.org/officeDocument/2006/relationships" xmlns:p="http://schemas.openxmlformats.org/presentationml/2006/main">
+<p:sld xmlns:a="http://schemas.openxmlformats.org/drawingml/2006/main" xmlns:p="http://schemas.openxmlformats.org/presentationml/2006/main" xmlns:r="http://schemas.openxmlformats.org/officeDocument/2006/relationships">
   <p:cSld>
     <p:bg>
       <p:bgPr>
@@ -6969,14 +6840,7 @@
         <p:cNvGrpSpPr/>
         <p:nvPr/>
       </p:nvGrpSpPr>
-      <p:grpSpPr>
-        <a:xfrm>
-          <a:off x="0" y="0"/>
-          <a:ext cx="0" cy="0"/>
-          <a:chOff x="0" y="0"/>
-          <a:chExt cx="0" cy="0"/>
-        </a:xfrm>
-      </p:grpSpPr>
+      <p:grpSpPr/>
       <p:sp>
         <p:nvSpPr>
           <p:cNvPr id="2" name="Rectangle 1"/>
@@ -7017,7 +6881,6 @@
           <a:lstStyle/>
           <a:p>
             <a:pPr algn="ctr"/>
-            <a:endParaRPr/>
           </a:p>
         </p:txBody>
       </p:sp>
@@ -7095,7 +6958,6 @@
           <a:lstStyle/>
           <a:p>
             <a:pPr algn="ctr"/>
-            <a:endParaRPr/>
           </a:p>
         </p:txBody>
       </p:sp>
@@ -7173,7 +7035,6 @@
           <a:lstStyle/>
           <a:p>
             <a:pPr algn="ctr"/>
-            <a:endParaRPr/>
           </a:p>
         </p:txBody>
       </p:sp>
@@ -7285,7 +7146,6 @@
           <a:lstStyle/>
           <a:p>
             <a:pPr algn="ctr"/>
-            <a:endParaRPr/>
           </a:p>
         </p:txBody>
       </p:sp>
@@ -7363,7 +7223,6 @@
           <a:lstStyle/>
           <a:p>
             <a:pPr algn="ctr"/>
-            <a:endParaRPr/>
           </a:p>
         </p:txBody>
       </p:sp>
@@ -7475,7 +7334,6 @@
           <a:lstStyle/>
           <a:p>
             <a:pPr algn="ctr"/>
-            <a:endParaRPr/>
           </a:p>
         </p:txBody>
       </p:sp>
@@ -7553,7 +7411,6 @@
           <a:lstStyle/>
           <a:p>
             <a:pPr algn="ctr"/>
-            <a:endParaRPr/>
           </a:p>
         </p:txBody>
       </p:sp>
@@ -7665,7 +7522,6 @@
           <a:lstStyle/>
           <a:p>
             <a:pPr algn="ctr"/>
-            <a:endParaRPr/>
           </a:p>
         </p:txBody>
       </p:sp>
@@ -7743,7 +7599,6 @@
           <a:lstStyle/>
           <a:p>
             <a:pPr algn="ctr"/>
-            <a:endParaRPr/>
           </a:p>
         </p:txBody>
       </p:sp>
@@ -7855,7 +7710,6 @@
           <a:lstStyle/>
           <a:p>
             <a:pPr algn="ctr"/>
-            <a:endParaRPr/>
           </a:p>
         </p:txBody>
       </p:sp>
@@ -8050,7 +7904,6 @@
           <a:lstStyle/>
           <a:p>
             <a:pPr algn="ctr"/>
-            <a:endParaRPr/>
           </a:p>
         </p:txBody>
       </p:sp>
@@ -8128,7 +7981,6 @@
           <a:lstStyle/>
           <a:p>
             <a:pPr algn="ctr"/>
-            <a:endParaRPr/>
           </a:p>
         </p:txBody>
       </p:sp>
@@ -8206,7 +8058,6 @@
           <a:lstStyle/>
           <a:p>
             <a:pPr algn="ctr"/>
-            <a:endParaRPr/>
           </a:p>
         </p:txBody>
       </p:sp>
@@ -8284,7 +8135,6 @@
           <a:lstStyle/>
           <a:p>
             <a:pPr algn="ctr"/>
-            <a:endParaRPr/>
           </a:p>
         </p:txBody>
       </p:sp>
@@ -8362,7 +8212,6 @@
           <a:lstStyle/>
           <a:p>
             <a:pPr algn="ctr"/>
-            <a:endParaRPr/>
           </a:p>
         </p:txBody>
       </p:sp>
@@ -8726,10 +8575,4 @@
   </a:objectDefaults>
   <a:extraClrSchemeLst/>
 </a:theme>
-</file>
-
-<file path=docMetadata/LabelInfo.xml><?xml version="1.0" encoding="utf-8"?>
-<clbl:labelList xmlns:clbl="http://schemas.microsoft.com/office/2020/mipLabelMetadata">
-  <clbl:label id="{2f9fb377-9e61-415d-9daf-610bc4ecb38b}" enabled="0" method="" siteId="{2f9fb377-9e61-415d-9daf-610bc4ecb38b}" removed="1"/>
-</clbl:labelList>
 </file>
--- a/docs/esitlus.pptx
+++ b/docs/esitlus.pptx
@@ -5,14 +5,14 @@
     <p:sldMasterId id="2147483648" r:id="rId1"/>
   </p:sldMasterIdLst>
   <p:sldIdLst>
-    <p:sldId id="256" r:id="rId7"/>
-    <p:sldId id="257" r:id="rId8"/>
-    <p:sldId id="258" r:id="rId9"/>
-    <p:sldId id="259" r:id="rId10"/>
-    <p:sldId id="260" r:id="rId11"/>
-    <p:sldId id="261" r:id="rId12"/>
+    <p:sldId id="256" r:id="rId2"/>
+    <p:sldId id="257" r:id="rId3"/>
+    <p:sldId id="258" r:id="rId4"/>
+    <p:sldId id="259" r:id="rId5"/>
+    <p:sldId id="260" r:id="rId6"/>
+    <p:sldId id="261" r:id="rId7"/>
   </p:sldIdLst>
-  <p:sldSz cx="12188952" cy="6858000" type="screen4x3"/>
+  <p:sldSz cx="12188825" cy="6858000"/>
   <p:notesSz cx="6858000" cy="9144000"/>
   <p:defaultTextStyle>
     <a:defPPr>
@@ -109,7 +109,91 @@
       </a:defRPr>
     </a:lvl9pPr>
   </p:defaultTextStyle>
+  <p:extLst>
+    <p:ext uri="{EFAFB233-063F-42B5-8137-9DF3F51BA10A}">
+      <p15:sldGuideLst xmlns:p15="http://schemas.microsoft.com/office/powerpoint/2012/main">
+        <p15:guide id="1" orient="horz" pos="2160">
+          <p15:clr>
+            <a:srgbClr val="A4A3A4"/>
+          </p15:clr>
+        </p15:guide>
+        <p15:guide id="2" pos="2880">
+          <p15:clr>
+            <a:srgbClr val="A4A3A4"/>
+          </p15:clr>
+        </p15:guide>
+      </p15:sldGuideLst>
+    </p:ext>
+  </p:extLst>
 </p:presentation>
+</file>
+
+<file path=ppt/changesInfos/changesInfo1.xml><?xml version="1.0" encoding="utf-8"?>
+<pc:chgInfo xmlns:a="http://schemas.openxmlformats.org/drawingml/2006/main" xmlns:r="http://schemas.openxmlformats.org/officeDocument/2006/relationships" xmlns:ac="http://schemas.microsoft.com/office/drawing/2013/main/command" xmlns:pc="http://schemas.microsoft.com/office/powerpoint/2013/main/command">
+  <pc:docChgLst>
+    <pc:chgData name="Mihkel Nugis" userId="147e2f29-4501-45b3-8d2b-0a3f0bc4fbae" providerId="ADAL" clId="{19F9C2E8-51A5-4117-AA1C-CDF822D93710}"/>
+    <pc:docChg chg="modSld">
+      <pc:chgData name="Mihkel Nugis" userId="147e2f29-4501-45b3-8d2b-0a3f0bc4fbae" providerId="ADAL" clId="{19F9C2E8-51A5-4117-AA1C-CDF822D93710}" dt="2026-06-06T15:10:46.208" v="26" actId="1037"/>
+      <pc:docMkLst>
+        <pc:docMk/>
+      </pc:docMkLst>
+      <pc:sldChg chg="modSp mod">
+        <pc:chgData name="Mihkel Nugis" userId="147e2f29-4501-45b3-8d2b-0a3f0bc4fbae" providerId="ADAL" clId="{19F9C2E8-51A5-4117-AA1C-CDF822D93710}" dt="2026-06-06T15:10:07.899" v="18" actId="1035"/>
+        <pc:sldMkLst>
+          <pc:docMk/>
+          <pc:sldMk cId="0" sldId="256"/>
+        </pc:sldMkLst>
+        <pc:spChg chg="mod">
+          <ac:chgData name="Mihkel Nugis" userId="147e2f29-4501-45b3-8d2b-0a3f0bc4fbae" providerId="ADAL" clId="{19F9C2E8-51A5-4117-AA1C-CDF822D93710}" dt="2026-06-06T15:10:07.899" v="18" actId="1035"/>
+          <ac:spMkLst>
+            <pc:docMk/>
+            <pc:sldMk cId="0" sldId="256"/>
+            <ac:spMk id="2" creationId="{00000000-0000-0000-0000-000000000000}"/>
+          </ac:spMkLst>
+        </pc:spChg>
+      </pc:sldChg>
+      <pc:sldChg chg="modSp mod">
+        <pc:chgData name="Mihkel Nugis" userId="147e2f29-4501-45b3-8d2b-0a3f0bc4fbae" providerId="ADAL" clId="{19F9C2E8-51A5-4117-AA1C-CDF822D93710}" dt="2026-06-06T15:10:46.208" v="26" actId="1037"/>
+        <pc:sldMkLst>
+          <pc:docMk/>
+          <pc:sldMk cId="0" sldId="259"/>
+        </pc:sldMkLst>
+        <pc:spChg chg="mod">
+          <ac:chgData name="Mihkel Nugis" userId="147e2f29-4501-45b3-8d2b-0a3f0bc4fbae" providerId="ADAL" clId="{19F9C2E8-51A5-4117-AA1C-CDF822D93710}" dt="2026-06-06T15:10:46.208" v="26" actId="1037"/>
+          <ac:spMkLst>
+            <pc:docMk/>
+            <pc:sldMk cId="0" sldId="259"/>
+            <ac:spMk id="7" creationId="{00000000-0000-0000-0000-000000000000}"/>
+          </ac:spMkLst>
+        </pc:spChg>
+        <pc:spChg chg="mod">
+          <ac:chgData name="Mihkel Nugis" userId="147e2f29-4501-45b3-8d2b-0a3f0bc4fbae" providerId="ADAL" clId="{19F9C2E8-51A5-4117-AA1C-CDF822D93710}" dt="2026-06-06T15:10:46.208" v="26" actId="1037"/>
+          <ac:spMkLst>
+            <pc:docMk/>
+            <pc:sldMk cId="0" sldId="259"/>
+            <ac:spMk id="11" creationId="{00000000-0000-0000-0000-000000000000}"/>
+          </ac:spMkLst>
+        </pc:spChg>
+        <pc:spChg chg="mod">
+          <ac:chgData name="Mihkel Nugis" userId="147e2f29-4501-45b3-8d2b-0a3f0bc4fbae" providerId="ADAL" clId="{19F9C2E8-51A5-4117-AA1C-CDF822D93710}" dt="2026-06-06T15:10:46.208" v="26" actId="1037"/>
+          <ac:spMkLst>
+            <pc:docMk/>
+            <pc:sldMk cId="0" sldId="259"/>
+            <ac:spMk id="15" creationId="{00000000-0000-0000-0000-000000000000}"/>
+          </ac:spMkLst>
+        </pc:spChg>
+        <pc:spChg chg="mod">
+          <ac:chgData name="Mihkel Nugis" userId="147e2f29-4501-45b3-8d2b-0a3f0bc4fbae" providerId="ADAL" clId="{19F9C2E8-51A5-4117-AA1C-CDF822D93710}" dt="2026-06-06T15:10:46.208" v="26" actId="1037"/>
+          <ac:spMkLst>
+            <pc:docMk/>
+            <pc:sldMk cId="0" sldId="259"/>
+            <ac:spMk id="19" creationId="{00000000-0000-0000-0000-000000000000}"/>
+          </ac:spMkLst>
+        </pc:spChg>
+      </pc:sldChg>
+    </pc:docChg>
+  </pc:docChgLst>
+</pc:chgInfo>
 </file>
 
 <file path=ppt/slideLayouts/slideLayout1.xml><?xml version="1.0" encoding="utf-8"?>
@@ -150,10 +234,9 @@
           <a:lstStyle/>
           <a:p>
             <a:r>
-              <a:rPr lang="en-US" smtClean="0"/>
+              <a:rPr lang="en-US"/>
               <a:t>Click to edit Master title style</a:t>
             </a:r>
-            <a:endParaRPr lang="en-US"/>
           </a:p>
         </p:txBody>
       </p:sp>
@@ -269,10 +352,9 @@
           </a:lstStyle>
           <a:p>
             <a:r>
-              <a:rPr lang="en-US" smtClean="0"/>
+              <a:rPr lang="en-US"/>
               <a:t>Click to edit Master subtitle style</a:t>
             </a:r>
-            <a:endParaRPr lang="en-US"/>
           </a:p>
         </p:txBody>
       </p:sp>
@@ -293,7 +375,7 @@
           <a:p>
             <a:fld id="{5BCAD085-E8A6-8845-BD4E-CB4CCA059FC4}" type="datetimeFigureOut">
               <a:rPr lang="en-US" smtClean="0"/>
-              <a:t>1/27/13</a:t>
+              <a:t>6/6/2026</a:t>
             </a:fld>
             <a:endParaRPr lang="en-US"/>
           </a:p>
@@ -387,10 +469,9 @@
           <a:lstStyle/>
           <a:p>
             <a:r>
-              <a:rPr lang="en-US" smtClean="0"/>
+              <a:rPr lang="en-US"/>
               <a:t>Click to edit Master title style</a:t>
             </a:r>
-            <a:endParaRPr lang="en-US"/>
           </a:p>
         </p:txBody>
       </p:sp>
@@ -411,38 +492,37 @@
           <a:p>
             <a:pPr lvl="0"/>
             <a:r>
-              <a:rPr lang="en-US" smtClean="0"/>
+              <a:rPr lang="en-US"/>
               <a:t>Click to edit Master text styles</a:t>
             </a:r>
           </a:p>
           <a:p>
             <a:pPr lvl="1"/>
             <a:r>
-              <a:rPr lang="en-US" smtClean="0"/>
+              <a:rPr lang="en-US"/>
               <a:t>Second level</a:t>
             </a:r>
           </a:p>
           <a:p>
             <a:pPr lvl="2"/>
             <a:r>
-              <a:rPr lang="en-US" smtClean="0"/>
+              <a:rPr lang="en-US"/>
               <a:t>Third level</a:t>
             </a:r>
           </a:p>
           <a:p>
             <a:pPr lvl="3"/>
             <a:r>
-              <a:rPr lang="en-US" smtClean="0"/>
+              <a:rPr lang="en-US"/>
               <a:t>Fourth level</a:t>
             </a:r>
           </a:p>
           <a:p>
             <a:pPr lvl="4"/>
             <a:r>
-              <a:rPr lang="en-US" smtClean="0"/>
+              <a:rPr lang="en-US"/>
               <a:t>Fifth level</a:t>
             </a:r>
-            <a:endParaRPr lang="en-US"/>
           </a:p>
         </p:txBody>
       </p:sp>
@@ -463,7 +543,7 @@
           <a:p>
             <a:fld id="{5BCAD085-E8A6-8845-BD4E-CB4CCA059FC4}" type="datetimeFigureOut">
               <a:rPr lang="en-US" smtClean="0"/>
-              <a:t>1/27/13</a:t>
+              <a:t>6/6/2026</a:t>
             </a:fld>
             <a:endParaRPr lang="en-US"/>
           </a:p>
@@ -562,10 +642,9 @@
           <a:lstStyle/>
           <a:p>
             <a:r>
-              <a:rPr lang="en-US" smtClean="0"/>
+              <a:rPr lang="en-US"/>
               <a:t>Click to edit Master title style</a:t>
             </a:r>
-            <a:endParaRPr lang="en-US"/>
           </a:p>
         </p:txBody>
       </p:sp>
@@ -591,38 +670,37 @@
           <a:p>
             <a:pPr lvl="0"/>
             <a:r>
-              <a:rPr lang="en-US" smtClean="0"/>
+              <a:rPr lang="en-US"/>
               <a:t>Click to edit Master text styles</a:t>
             </a:r>
           </a:p>
           <a:p>
             <a:pPr lvl="1"/>
             <a:r>
-              <a:rPr lang="en-US" smtClean="0"/>
+              <a:rPr lang="en-US"/>
               <a:t>Second level</a:t>
             </a:r>
           </a:p>
           <a:p>
             <a:pPr lvl="2"/>
             <a:r>
-              <a:rPr lang="en-US" smtClean="0"/>
+              <a:rPr lang="en-US"/>
               <a:t>Third level</a:t>
             </a:r>
           </a:p>
           <a:p>
             <a:pPr lvl="3"/>
             <a:r>
-              <a:rPr lang="en-US" smtClean="0"/>
+              <a:rPr lang="en-US"/>
               <a:t>Fourth level</a:t>
             </a:r>
           </a:p>
           <a:p>
             <a:pPr lvl="4"/>
             <a:r>
-              <a:rPr lang="en-US" smtClean="0"/>
+              <a:rPr lang="en-US"/>
               <a:t>Fifth level</a:t>
             </a:r>
-            <a:endParaRPr lang="en-US"/>
           </a:p>
         </p:txBody>
       </p:sp>
@@ -643,7 +721,7 @@
           <a:p>
             <a:fld id="{5BCAD085-E8A6-8845-BD4E-CB4CCA059FC4}" type="datetimeFigureOut">
               <a:rPr lang="en-US" smtClean="0"/>
-              <a:t>1/27/13</a:t>
+              <a:t>6/6/2026</a:t>
             </a:fld>
             <a:endParaRPr lang="en-US"/>
           </a:p>
@@ -737,10 +815,9 @@
           <a:lstStyle/>
           <a:p>
             <a:r>
-              <a:rPr lang="en-US" smtClean="0"/>
+              <a:rPr lang="en-US"/>
               <a:t>Click to edit Master title style</a:t>
             </a:r>
-            <a:endParaRPr lang="en-US"/>
           </a:p>
         </p:txBody>
       </p:sp>
@@ -761,38 +838,37 @@
           <a:p>
             <a:pPr lvl="0"/>
             <a:r>
-              <a:rPr lang="en-US" smtClean="0"/>
+              <a:rPr lang="en-US"/>
               <a:t>Click to edit Master text styles</a:t>
             </a:r>
           </a:p>
           <a:p>
             <a:pPr lvl="1"/>
             <a:r>
-              <a:rPr lang="en-US" smtClean="0"/>
+              <a:rPr lang="en-US"/>
               <a:t>Second level</a:t>
             </a:r>
           </a:p>
           <a:p>
             <a:pPr lvl="2"/>
             <a:r>
-              <a:rPr lang="en-US" smtClean="0"/>
+              <a:rPr lang="en-US"/>
               <a:t>Third level</a:t>
             </a:r>
           </a:p>
           <a:p>
             <a:pPr lvl="3"/>
             <a:r>
-              <a:rPr lang="en-US" smtClean="0"/>
+              <a:rPr lang="en-US"/>
               <a:t>Fourth level</a:t>
             </a:r>
           </a:p>
           <a:p>
             <a:pPr lvl="4"/>
             <a:r>
-              <a:rPr lang="en-US" smtClean="0"/>
+              <a:rPr lang="en-US"/>
               <a:t>Fifth level</a:t>
             </a:r>
-            <a:endParaRPr lang="en-US"/>
           </a:p>
         </p:txBody>
       </p:sp>
@@ -813,7 +889,7 @@
           <a:p>
             <a:fld id="{5BCAD085-E8A6-8845-BD4E-CB4CCA059FC4}" type="datetimeFigureOut">
               <a:rPr lang="en-US" smtClean="0"/>
-              <a:t>1/27/13</a:t>
+              <a:t>6/6/2026</a:t>
             </a:fld>
             <a:endParaRPr lang="en-US"/>
           </a:p>
@@ -916,10 +992,9 @@
           </a:lstStyle>
           <a:p>
             <a:r>
-              <a:rPr lang="en-US" smtClean="0"/>
+              <a:rPr lang="en-US"/>
               <a:t>Click to edit Master title style</a:t>
             </a:r>
-            <a:endParaRPr lang="en-US"/>
           </a:p>
         </p:txBody>
       </p:sp>
@@ -1036,7 +1111,7 @@
           <a:p>
             <a:pPr lvl="0"/>
             <a:r>
-              <a:rPr lang="en-US" smtClean="0"/>
+              <a:rPr lang="en-US"/>
               <a:t>Click to edit Master text styles</a:t>
             </a:r>
           </a:p>
@@ -1059,7 +1134,7 @@
           <a:p>
             <a:fld id="{5BCAD085-E8A6-8845-BD4E-CB4CCA059FC4}" type="datetimeFigureOut">
               <a:rPr lang="en-US" smtClean="0"/>
-              <a:t>1/27/13</a:t>
+              <a:t>6/6/2026</a:t>
             </a:fld>
             <a:endParaRPr lang="en-US"/>
           </a:p>
@@ -1153,10 +1228,9 @@
           <a:lstStyle/>
           <a:p>
             <a:r>
-              <a:rPr lang="en-US" smtClean="0"/>
+              <a:rPr lang="en-US"/>
               <a:t>Click to edit Master title style</a:t>
             </a:r>
-            <a:endParaRPr lang="en-US"/>
           </a:p>
         </p:txBody>
       </p:sp>
@@ -1210,38 +1284,37 @@
           <a:p>
             <a:pPr lvl="0"/>
             <a:r>
-              <a:rPr lang="en-US" smtClean="0"/>
+              <a:rPr lang="en-US"/>
               <a:t>Click to edit Master text styles</a:t>
             </a:r>
           </a:p>
           <a:p>
             <a:pPr lvl="1"/>
             <a:r>
-              <a:rPr lang="en-US" smtClean="0"/>
+              <a:rPr lang="en-US"/>
               <a:t>Second level</a:t>
             </a:r>
           </a:p>
           <a:p>
             <a:pPr lvl="2"/>
             <a:r>
-              <a:rPr lang="en-US" smtClean="0"/>
+              <a:rPr lang="en-US"/>
               <a:t>Third level</a:t>
             </a:r>
           </a:p>
           <a:p>
             <a:pPr lvl="3"/>
             <a:r>
-              <a:rPr lang="en-US" smtClean="0"/>
+              <a:rPr lang="en-US"/>
               <a:t>Fourth level</a:t>
             </a:r>
           </a:p>
           <a:p>
             <a:pPr lvl="4"/>
             <a:r>
-              <a:rPr lang="en-US" smtClean="0"/>
+              <a:rPr lang="en-US"/>
               <a:t>Fifth level</a:t>
             </a:r>
-            <a:endParaRPr lang="en-US"/>
           </a:p>
         </p:txBody>
       </p:sp>
@@ -1295,38 +1368,37 @@
           <a:p>
             <a:pPr lvl="0"/>
             <a:r>
-              <a:rPr lang="en-US" smtClean="0"/>
+              <a:rPr lang="en-US"/>
               <a:t>Click to edit Master text styles</a:t>
             </a:r>
           </a:p>
           <a:p>
             <a:pPr lvl="1"/>
             <a:r>
-              <a:rPr lang="en-US" smtClean="0"/>
+              <a:rPr lang="en-US"/>
               <a:t>Second level</a:t>
             </a:r>
           </a:p>
           <a:p>
             <a:pPr lvl="2"/>
             <a:r>
-              <a:rPr lang="en-US" smtClean="0"/>
+              <a:rPr lang="en-US"/>
               <a:t>Third level</a:t>
             </a:r>
           </a:p>
           <a:p>
             <a:pPr lvl="3"/>
             <a:r>
-              <a:rPr lang="en-US" smtClean="0"/>
+              <a:rPr lang="en-US"/>
               <a:t>Fourth level</a:t>
             </a:r>
           </a:p>
           <a:p>
             <a:pPr lvl="4"/>
             <a:r>
-              <a:rPr lang="en-US" smtClean="0"/>
+              <a:rPr lang="en-US"/>
               <a:t>Fifth level</a:t>
             </a:r>
-            <a:endParaRPr lang="en-US"/>
           </a:p>
         </p:txBody>
       </p:sp>
@@ -1347,7 +1419,7 @@
           <a:p>
             <a:fld id="{5BCAD085-E8A6-8845-BD4E-CB4CCA059FC4}" type="datetimeFigureOut">
               <a:rPr lang="en-US" smtClean="0"/>
-              <a:t>1/27/13</a:t>
+              <a:t>6/6/2026</a:t>
             </a:fld>
             <a:endParaRPr lang="en-US"/>
           </a:p>
@@ -1445,10 +1517,9 @@
           </a:lstStyle>
           <a:p>
             <a:r>
-              <a:rPr lang="en-US" smtClean="0"/>
+              <a:rPr lang="en-US"/>
               <a:t>Click to edit Master title style</a:t>
             </a:r>
-            <a:endParaRPr lang="en-US"/>
           </a:p>
         </p:txBody>
       </p:sp>
@@ -1511,7 +1582,7 @@
           <a:p>
             <a:pPr lvl="0"/>
             <a:r>
-              <a:rPr lang="en-US" smtClean="0"/>
+              <a:rPr lang="en-US"/>
               <a:t>Click to edit Master text styles</a:t>
             </a:r>
           </a:p>
@@ -1567,38 +1638,37 @@
           <a:p>
             <a:pPr lvl="0"/>
             <a:r>
-              <a:rPr lang="en-US" smtClean="0"/>
+              <a:rPr lang="en-US"/>
               <a:t>Click to edit Master text styles</a:t>
             </a:r>
           </a:p>
           <a:p>
             <a:pPr lvl="1"/>
             <a:r>
-              <a:rPr lang="en-US" smtClean="0"/>
+              <a:rPr lang="en-US"/>
               <a:t>Second level</a:t>
             </a:r>
           </a:p>
           <a:p>
             <a:pPr lvl="2"/>
             <a:r>
-              <a:rPr lang="en-US" smtClean="0"/>
+              <a:rPr lang="en-US"/>
               <a:t>Third level</a:t>
             </a:r>
           </a:p>
           <a:p>
             <a:pPr lvl="3"/>
             <a:r>
-              <a:rPr lang="en-US" smtClean="0"/>
+              <a:rPr lang="en-US"/>
               <a:t>Fourth level</a:t>
             </a:r>
           </a:p>
           <a:p>
             <a:pPr lvl="4"/>
             <a:r>
-              <a:rPr lang="en-US" smtClean="0"/>
+              <a:rPr lang="en-US"/>
               <a:t>Fifth level</a:t>
             </a:r>
-            <a:endParaRPr lang="en-US"/>
           </a:p>
         </p:txBody>
       </p:sp>
@@ -1661,7 +1731,7 @@
           <a:p>
             <a:pPr lvl="0"/>
             <a:r>
-              <a:rPr lang="en-US" smtClean="0"/>
+              <a:rPr lang="en-US"/>
               <a:t>Click to edit Master text styles</a:t>
             </a:r>
           </a:p>
@@ -1717,38 +1787,37 @@
           <a:p>
             <a:pPr lvl="0"/>
             <a:r>
-              <a:rPr lang="en-US" smtClean="0"/>
+              <a:rPr lang="en-US"/>
               <a:t>Click to edit Master text styles</a:t>
             </a:r>
           </a:p>
           <a:p>
             <a:pPr lvl="1"/>
             <a:r>
-              <a:rPr lang="en-US" smtClean="0"/>
+              <a:rPr lang="en-US"/>
               <a:t>Second level</a:t>
             </a:r>
           </a:p>
           <a:p>
             <a:pPr lvl="2"/>
             <a:r>
-              <a:rPr lang="en-US" smtClean="0"/>
+              <a:rPr lang="en-US"/>
               <a:t>Third level</a:t>
             </a:r>
           </a:p>
           <a:p>
             <a:pPr lvl="3"/>
             <a:r>
-              <a:rPr lang="en-US" smtClean="0"/>
+              <a:rPr lang="en-US"/>
               <a:t>Fourth level</a:t>
             </a:r>
           </a:p>
           <a:p>
             <a:pPr lvl="4"/>
             <a:r>
-              <a:rPr lang="en-US" smtClean="0"/>
+              <a:rPr lang="en-US"/>
               <a:t>Fifth level</a:t>
             </a:r>
-            <a:endParaRPr lang="en-US"/>
           </a:p>
         </p:txBody>
       </p:sp>
@@ -1769,7 +1838,7 @@
           <a:p>
             <a:fld id="{5BCAD085-E8A6-8845-BD4E-CB4CCA059FC4}" type="datetimeFigureOut">
               <a:rPr lang="en-US" smtClean="0"/>
-              <a:t>1/27/13</a:t>
+              <a:t>6/6/2026</a:t>
             </a:fld>
             <a:endParaRPr lang="en-US"/>
           </a:p>
@@ -1863,10 +1932,9 @@
           <a:lstStyle/>
           <a:p>
             <a:r>
-              <a:rPr lang="en-US" smtClean="0"/>
+              <a:rPr lang="en-US"/>
               <a:t>Click to edit Master title style</a:t>
             </a:r>
-            <a:endParaRPr lang="en-US"/>
           </a:p>
         </p:txBody>
       </p:sp>
@@ -1887,7 +1955,7 @@
           <a:p>
             <a:fld id="{5BCAD085-E8A6-8845-BD4E-CB4CCA059FC4}" type="datetimeFigureOut">
               <a:rPr lang="en-US" smtClean="0"/>
-              <a:t>1/27/13</a:t>
+              <a:t>6/6/2026</a:t>
             </a:fld>
             <a:endParaRPr lang="en-US"/>
           </a:p>
@@ -1982,7 +2050,7 @@
           <a:p>
             <a:fld id="{5BCAD085-E8A6-8845-BD4E-CB4CCA059FC4}" type="datetimeFigureOut">
               <a:rPr lang="en-US" smtClean="0"/>
-              <a:t>1/27/13</a:t>
+              <a:t>6/6/2026</a:t>
             </a:fld>
             <a:endParaRPr lang="en-US"/>
           </a:p>
@@ -2085,10 +2153,9 @@
           </a:lstStyle>
           <a:p>
             <a:r>
-              <a:rPr lang="en-US" smtClean="0"/>
+              <a:rPr lang="en-US"/>
               <a:t>Click to edit Master title style</a:t>
             </a:r>
-            <a:endParaRPr lang="en-US"/>
           </a:p>
         </p:txBody>
       </p:sp>
@@ -2142,38 +2209,37 @@
           <a:p>
             <a:pPr lvl="0"/>
             <a:r>
-              <a:rPr lang="en-US" smtClean="0"/>
+              <a:rPr lang="en-US"/>
               <a:t>Click to edit Master text styles</a:t>
             </a:r>
           </a:p>
           <a:p>
             <a:pPr lvl="1"/>
             <a:r>
-              <a:rPr lang="en-US" smtClean="0"/>
+              <a:rPr lang="en-US"/>
               <a:t>Second level</a:t>
             </a:r>
           </a:p>
           <a:p>
             <a:pPr lvl="2"/>
             <a:r>
-              <a:rPr lang="en-US" smtClean="0"/>
+              <a:rPr lang="en-US"/>
               <a:t>Third level</a:t>
             </a:r>
           </a:p>
           <a:p>
             <a:pPr lvl="3"/>
             <a:r>
-              <a:rPr lang="en-US" smtClean="0"/>
+              <a:rPr lang="en-US"/>
               <a:t>Fourth level</a:t>
             </a:r>
           </a:p>
           <a:p>
             <a:pPr lvl="4"/>
             <a:r>
-              <a:rPr lang="en-US" smtClean="0"/>
+              <a:rPr lang="en-US"/>
               <a:t>Fifth level</a:t>
             </a:r>
-            <a:endParaRPr lang="en-US"/>
           </a:p>
         </p:txBody>
       </p:sp>
@@ -2236,7 +2302,7 @@
           <a:p>
             <a:pPr lvl="0"/>
             <a:r>
-              <a:rPr lang="en-US" smtClean="0"/>
+              <a:rPr lang="en-US"/>
               <a:t>Click to edit Master text styles</a:t>
             </a:r>
           </a:p>
@@ -2259,7 +2325,7 @@
           <a:p>
             <a:fld id="{5BCAD085-E8A6-8845-BD4E-CB4CCA059FC4}" type="datetimeFigureOut">
               <a:rPr lang="en-US" smtClean="0"/>
-              <a:t>1/27/13</a:t>
+              <a:t>6/6/2026</a:t>
             </a:fld>
             <a:endParaRPr lang="en-US"/>
           </a:p>
@@ -2362,10 +2428,9 @@
           </a:lstStyle>
           <a:p>
             <a:r>
-              <a:rPr lang="en-US" smtClean="0"/>
+              <a:rPr lang="en-US"/>
               <a:t>Click to edit Master title style</a:t>
             </a:r>
-            <a:endParaRPr lang="en-US"/>
           </a:p>
         </p:txBody>
       </p:sp>
@@ -2489,7 +2554,7 @@
           <a:p>
             <a:pPr lvl="0"/>
             <a:r>
-              <a:rPr lang="en-US" smtClean="0"/>
+              <a:rPr lang="en-US"/>
               <a:t>Click to edit Master text styles</a:t>
             </a:r>
           </a:p>
@@ -2512,7 +2577,7 @@
           <a:p>
             <a:fld id="{5BCAD085-E8A6-8845-BD4E-CB4CCA059FC4}" type="datetimeFigureOut">
               <a:rPr lang="en-US" smtClean="0"/>
-              <a:t>1/27/13</a:t>
+              <a:t>6/6/2026</a:t>
             </a:fld>
             <a:endParaRPr lang="en-US"/>
           </a:p>
@@ -2621,10 +2686,9 @@
           <a:lstStyle/>
           <a:p>
             <a:r>
-              <a:rPr lang="en-US" smtClean="0"/>
+              <a:rPr lang="en-US"/>
               <a:t>Click to edit Master title style</a:t>
             </a:r>
-            <a:endParaRPr lang="en-US"/>
           </a:p>
         </p:txBody>
       </p:sp>
@@ -2655,38 +2719,37 @@
           <a:p>
             <a:pPr lvl="0"/>
             <a:r>
-              <a:rPr lang="en-US" smtClean="0"/>
+              <a:rPr lang="en-US"/>
               <a:t>Click to edit Master text styles</a:t>
             </a:r>
           </a:p>
           <a:p>
             <a:pPr lvl="1"/>
             <a:r>
-              <a:rPr lang="en-US" smtClean="0"/>
+              <a:rPr lang="en-US"/>
               <a:t>Second level</a:t>
             </a:r>
           </a:p>
           <a:p>
             <a:pPr lvl="2"/>
             <a:r>
-              <a:rPr lang="en-US" smtClean="0"/>
+              <a:rPr lang="en-US"/>
               <a:t>Third level</a:t>
             </a:r>
           </a:p>
           <a:p>
             <a:pPr lvl="3"/>
             <a:r>
-              <a:rPr lang="en-US" smtClean="0"/>
+              <a:rPr lang="en-US"/>
               <a:t>Fourth level</a:t>
             </a:r>
           </a:p>
           <a:p>
             <a:pPr lvl="4"/>
             <a:r>
-              <a:rPr lang="en-US" smtClean="0"/>
+              <a:rPr lang="en-US"/>
               <a:t>Fifth level</a:t>
             </a:r>
-            <a:endParaRPr lang="en-US"/>
           </a:p>
         </p:txBody>
       </p:sp>
@@ -2725,7 +2788,7 @@
           <a:p>
             <a:fld id="{5BCAD085-E8A6-8845-BD4E-CB4CCA059FC4}" type="datetimeFigureOut">
               <a:rPr lang="en-US" smtClean="0"/>
-              <a:t>1/27/13</a:t>
+              <a:t>6/6/2026</a:t>
             </a:fld>
             <a:endParaRPr lang="en-US"/>
           </a:p>
@@ -3084,7 +3147,7 @@
 </file>
 
 <file path=ppt/slides/slide1.xml><?xml version="1.0" encoding="utf-8"?>
-<p:sld xmlns:a="http://schemas.openxmlformats.org/drawingml/2006/main" xmlns:p="http://schemas.openxmlformats.org/presentationml/2006/main" xmlns:r="http://schemas.openxmlformats.org/officeDocument/2006/relationships">
+<p:sld xmlns:a="http://schemas.openxmlformats.org/drawingml/2006/main" xmlns:r="http://schemas.openxmlformats.org/officeDocument/2006/relationships" xmlns:p="http://schemas.openxmlformats.org/presentationml/2006/main">
   <p:cSld>
     <p:bg>
       <p:bgPr>
@@ -3100,7 +3163,14 @@
         <p:cNvGrpSpPr/>
         <p:nvPr/>
       </p:nvGrpSpPr>
-      <p:grpSpPr/>
+      <p:grpSpPr>
+        <a:xfrm>
+          <a:off x="0" y="0"/>
+          <a:ext cx="0" cy="0"/>
+          <a:chOff x="0" y="0"/>
+          <a:chExt cx="0" cy="0"/>
+        </a:xfrm>
+      </p:grpSpPr>
       <p:sp>
         <p:nvSpPr>
           <p:cNvPr id="2" name="Rectangle 1"/>
@@ -3109,7 +3179,7 @@
         </p:nvSpPr>
         <p:spPr>
           <a:xfrm>
-            <a:off x="0" y="2743200"/>
+            <a:off x="0" y="2331720"/>
             <a:ext cx="12188952" cy="64008"/>
           </a:xfrm>
           <a:prstGeom prst="rect">
@@ -3141,6 +3211,7 @@
           <a:lstStyle/>
           <a:p>
             <a:pPr algn="ctr"/>
+            <a:endParaRPr/>
           </a:p>
         </p:txBody>
       </p:sp>
@@ -3290,7 +3361,7 @@
 </file>
 
 <file path=ppt/slides/slide2.xml><?xml version="1.0" encoding="utf-8"?>
-<p:sld xmlns:a="http://schemas.openxmlformats.org/drawingml/2006/main" xmlns:p="http://schemas.openxmlformats.org/presentationml/2006/main" xmlns:r="http://schemas.openxmlformats.org/officeDocument/2006/relationships">
+<p:sld xmlns:a="http://schemas.openxmlformats.org/drawingml/2006/main" xmlns:r="http://schemas.openxmlformats.org/officeDocument/2006/relationships" xmlns:p="http://schemas.openxmlformats.org/presentationml/2006/main">
   <p:cSld>
     <p:bg>
       <p:bgPr>
@@ -3306,7 +3377,14 @@
         <p:cNvGrpSpPr/>
         <p:nvPr/>
       </p:nvGrpSpPr>
-      <p:grpSpPr/>
+      <p:grpSpPr>
+        <a:xfrm>
+          <a:off x="0" y="0"/>
+          <a:ext cx="0" cy="0"/>
+          <a:chOff x="0" y="0"/>
+          <a:chExt cx="0" cy="0"/>
+        </a:xfrm>
+      </p:grpSpPr>
       <p:sp>
         <p:nvSpPr>
           <p:cNvPr id="2" name="Rectangle 1"/>
@@ -3347,6 +3425,7 @@
           <a:lstStyle/>
           <a:p>
             <a:pPr algn="ctr"/>
+            <a:endParaRPr/>
           </a:p>
         </p:txBody>
       </p:sp>
@@ -3424,6 +3503,7 @@
           <a:lstStyle/>
           <a:p>
             <a:pPr algn="ctr"/>
+            <a:endParaRPr/>
           </a:p>
         </p:txBody>
       </p:sp>
@@ -3584,6 +3664,7 @@
           <a:lstStyle/>
           <a:p>
             <a:pPr algn="ctr"/>
+            <a:endParaRPr/>
           </a:p>
         </p:txBody>
       </p:sp>
@@ -3661,6 +3742,7 @@
           <a:lstStyle/>
           <a:p>
             <a:pPr algn="ctr"/>
+            <a:endParaRPr/>
           </a:p>
         </p:txBody>
       </p:sp>
@@ -3773,6 +3855,7 @@
           <a:lstStyle/>
           <a:p>
             <a:pPr algn="ctr"/>
+            <a:endParaRPr/>
           </a:p>
         </p:txBody>
       </p:sp>
@@ -3885,6 +3968,7 @@
           <a:lstStyle/>
           <a:p>
             <a:pPr algn="ctr"/>
+            <a:endParaRPr/>
           </a:p>
         </p:txBody>
       </p:sp>
@@ -3966,7 +4050,7 @@
 </file>
 
 <file path=ppt/slides/slide3.xml><?xml version="1.0" encoding="utf-8"?>
-<p:sld xmlns:a="http://schemas.openxmlformats.org/drawingml/2006/main" xmlns:p="http://schemas.openxmlformats.org/presentationml/2006/main" xmlns:r="http://schemas.openxmlformats.org/officeDocument/2006/relationships">
+<p:sld xmlns:a="http://schemas.openxmlformats.org/drawingml/2006/main" xmlns:r="http://schemas.openxmlformats.org/officeDocument/2006/relationships" xmlns:p="http://schemas.openxmlformats.org/presentationml/2006/main">
   <p:cSld>
     <p:bg>
       <p:bgPr>
@@ -3982,7 +4066,14 @@
         <p:cNvGrpSpPr/>
         <p:nvPr/>
       </p:nvGrpSpPr>
-      <p:grpSpPr/>
+      <p:grpSpPr>
+        <a:xfrm>
+          <a:off x="0" y="0"/>
+          <a:ext cx="0" cy="0"/>
+          <a:chOff x="0" y="0"/>
+          <a:chExt cx="0" cy="0"/>
+        </a:xfrm>
+      </p:grpSpPr>
       <p:sp>
         <p:nvSpPr>
           <p:cNvPr id="2" name="Rectangle 1"/>
@@ -4023,6 +4114,7 @@
           <a:lstStyle/>
           <a:p>
             <a:pPr algn="ctr"/>
+            <a:endParaRPr/>
           </a:p>
         </p:txBody>
       </p:sp>
@@ -4100,6 +4192,7 @@
           <a:lstStyle/>
           <a:p>
             <a:pPr algn="ctr"/>
+            <a:endParaRPr/>
           </a:p>
         </p:txBody>
       </p:sp>
@@ -4177,6 +4270,7 @@
           <a:lstStyle/>
           <a:p>
             <a:pPr algn="ctr"/>
+            <a:endParaRPr/>
           </a:p>
         </p:txBody>
       </p:sp>
@@ -4290,6 +4384,7 @@
           <a:lstStyle/>
           <a:p>
             <a:pPr algn="ctr"/>
+            <a:endParaRPr/>
           </a:p>
         </p:txBody>
       </p:sp>
@@ -4403,6 +4498,7 @@
           <a:lstStyle/>
           <a:p>
             <a:pPr algn="ctr"/>
+            <a:endParaRPr/>
           </a:p>
         </p:txBody>
       </p:sp>
@@ -4519,7 +4615,7 @@
 </file>
 
 <file path=ppt/slides/slide4.xml><?xml version="1.0" encoding="utf-8"?>
-<p:sld xmlns:a="http://schemas.openxmlformats.org/drawingml/2006/main" xmlns:p="http://schemas.openxmlformats.org/presentationml/2006/main" xmlns:r="http://schemas.openxmlformats.org/officeDocument/2006/relationships">
+<p:sld xmlns:a="http://schemas.openxmlformats.org/drawingml/2006/main" xmlns:r="http://schemas.openxmlformats.org/officeDocument/2006/relationships" xmlns:p="http://schemas.openxmlformats.org/presentationml/2006/main">
   <p:cSld>
     <p:bg>
       <p:bgPr>
@@ -4535,7 +4631,14 @@
         <p:cNvGrpSpPr/>
         <p:nvPr/>
       </p:nvGrpSpPr>
-      <p:grpSpPr/>
+      <p:grpSpPr>
+        <a:xfrm>
+          <a:off x="0" y="0"/>
+          <a:ext cx="0" cy="0"/>
+          <a:chOff x="0" y="0"/>
+          <a:chExt cx="0" cy="0"/>
+        </a:xfrm>
+      </p:grpSpPr>
       <p:sp>
         <p:nvSpPr>
           <p:cNvPr id="2" name="Rectangle 1"/>
@@ -4576,6 +4679,7 @@
           <a:lstStyle/>
           <a:p>
             <a:pPr algn="ctr"/>
+            <a:endParaRPr/>
           </a:p>
         </p:txBody>
       </p:sp>
@@ -4653,6 +4757,7 @@
           <a:lstStyle/>
           <a:p>
             <a:pPr algn="ctr"/>
+            <a:endParaRPr/>
           </a:p>
         </p:txBody>
       </p:sp>
@@ -4734,7 +4839,7 @@
         </p:nvSpPr>
         <p:spPr>
           <a:xfrm>
-            <a:off x="2331720" y="1737360"/>
+            <a:off x="2258568" y="1737360"/>
             <a:ext cx="411480" cy="548640"/>
           </a:xfrm>
           <a:prstGeom prst="rect">
@@ -4800,6 +4905,7 @@
           <a:lstStyle/>
           <a:p>
             <a:pPr algn="ctr"/>
+            <a:endParaRPr/>
           </a:p>
         </p:txBody>
       </p:sp>
@@ -4880,7 +4986,7 @@
         </p:nvSpPr>
         <p:spPr>
           <a:xfrm>
-            <a:off x="4690872" y="1737360"/>
+            <a:off x="4617720" y="1737360"/>
             <a:ext cx="411480" cy="548640"/>
           </a:xfrm>
           <a:prstGeom prst="rect">
@@ -4946,6 +5052,7 @@
           <a:lstStyle/>
           <a:p>
             <a:pPr algn="ctr"/>
+            <a:endParaRPr/>
           </a:p>
         </p:txBody>
       </p:sp>
@@ -5026,7 +5133,7 @@
         </p:nvSpPr>
         <p:spPr>
           <a:xfrm>
-            <a:off x="7050024" y="1737360"/>
+            <a:off x="6976872" y="1737360"/>
             <a:ext cx="411480" cy="548640"/>
           </a:xfrm>
           <a:prstGeom prst="rect">
@@ -5092,6 +5199,7 @@
           <a:lstStyle/>
           <a:p>
             <a:pPr algn="ctr"/>
+            <a:endParaRPr/>
           </a:p>
         </p:txBody>
       </p:sp>
@@ -5173,7 +5281,7 @@
         </p:nvSpPr>
         <p:spPr>
           <a:xfrm>
-            <a:off x="9409176" y="1737360"/>
+            <a:off x="9336024" y="1737360"/>
             <a:ext cx="411480" cy="548640"/>
           </a:xfrm>
           <a:prstGeom prst="rect">
@@ -5239,6 +5347,7 @@
           <a:lstStyle/>
           <a:p>
             <a:pPr algn="ctr"/>
+            <a:endParaRPr/>
           </a:p>
         </p:txBody>
       </p:sp>
@@ -5386,6 +5495,7 @@
           <a:lstStyle/>
           <a:p>
             <a:pPr algn="ctr"/>
+            <a:endParaRPr/>
           </a:p>
         </p:txBody>
       </p:sp>
@@ -5497,6 +5607,7 @@
           <a:lstStyle/>
           <a:p>
             <a:pPr algn="ctr"/>
+            <a:endParaRPr/>
           </a:p>
         </p:txBody>
       </p:sp>
@@ -5608,6 +5719,7 @@
           <a:lstStyle/>
           <a:p>
             <a:pPr algn="ctr"/>
+            <a:endParaRPr/>
           </a:p>
         </p:txBody>
       </p:sp>
@@ -5805,7 +5917,7 @@
 </file>
 
 <file path=ppt/slides/slide5.xml><?xml version="1.0" encoding="utf-8"?>
-<p:sld xmlns:a="http://schemas.openxmlformats.org/drawingml/2006/main" xmlns:p="http://schemas.openxmlformats.org/presentationml/2006/main" xmlns:r="http://schemas.openxmlformats.org/officeDocument/2006/relationships">
+<p:sld xmlns:a="http://schemas.openxmlformats.org/drawingml/2006/main" xmlns:r="http://schemas.openxmlformats.org/officeDocument/2006/relationships" xmlns:p="http://schemas.openxmlformats.org/presentationml/2006/main">
   <p:cSld>
     <p:bg>
       <p:bgPr>
@@ -5821,7 +5933,14 @@
         <p:cNvGrpSpPr/>
         <p:nvPr/>
       </p:nvGrpSpPr>
-      <p:grpSpPr/>
+      <p:grpSpPr>
+        <a:xfrm>
+          <a:off x="0" y="0"/>
+          <a:ext cx="0" cy="0"/>
+          <a:chOff x="0" y="0"/>
+          <a:chExt cx="0" cy="0"/>
+        </a:xfrm>
+      </p:grpSpPr>
       <p:sp>
         <p:nvSpPr>
           <p:cNvPr id="2" name="Rectangle 1"/>
@@ -5862,6 +5981,7 @@
           <a:lstStyle/>
           <a:p>
             <a:pPr algn="ctr"/>
+            <a:endParaRPr/>
           </a:p>
         </p:txBody>
       </p:sp>
@@ -5939,6 +6059,7 @@
           <a:lstStyle/>
           <a:p>
             <a:pPr algn="ctr"/>
+            <a:endParaRPr/>
           </a:p>
         </p:txBody>
       </p:sp>
@@ -6016,6 +6137,7 @@
           <a:lstStyle/>
           <a:p>
             <a:pPr algn="ctr"/>
+            <a:endParaRPr/>
           </a:p>
         </p:txBody>
       </p:sp>
@@ -6128,6 +6250,7 @@
           <a:lstStyle/>
           <a:p>
             <a:pPr algn="ctr"/>
+            <a:endParaRPr/>
           </a:p>
         </p:txBody>
       </p:sp>
@@ -6205,6 +6328,7 @@
           <a:lstStyle/>
           <a:p>
             <a:pPr algn="ctr"/>
+            <a:endParaRPr/>
           </a:p>
         </p:txBody>
       </p:sp>
@@ -6317,6 +6441,7 @@
           <a:lstStyle/>
           <a:p>
             <a:pPr algn="ctr"/>
+            <a:endParaRPr/>
           </a:p>
         </p:txBody>
       </p:sp>
@@ -6394,6 +6519,7 @@
           <a:lstStyle/>
           <a:p>
             <a:pPr algn="ctr"/>
+            <a:endParaRPr/>
           </a:p>
         </p:txBody>
       </p:sp>
@@ -6506,6 +6632,7 @@
           <a:lstStyle/>
           <a:p>
             <a:pPr algn="ctr"/>
+            <a:endParaRPr/>
           </a:p>
         </p:txBody>
       </p:sp>
@@ -6583,6 +6710,7 @@
           <a:lstStyle/>
           <a:p>
             <a:pPr algn="ctr"/>
+            <a:endParaRPr/>
           </a:p>
         </p:txBody>
       </p:sp>
@@ -6695,6 +6823,7 @@
           <a:lstStyle/>
           <a:p>
             <a:pPr algn="ctr"/>
+            <a:endParaRPr/>
           </a:p>
         </p:txBody>
       </p:sp>
@@ -6824,7 +6953,7 @@
 </file>
 
 <file path=ppt/slides/slide6.xml><?xml version="1.0" encoding="utf-8"?>
-<p:sld xmlns:a="http://schemas.openxmlformats.org/drawingml/2006/main" xmlns:p="http://schemas.openxmlformats.org/presentationml/2006/main" xmlns:r="http://schemas.openxmlformats.org/officeDocument/2006/relationships">
+<p:sld xmlns:a="http://schemas.openxmlformats.org/drawingml/2006/main" xmlns:r="http://schemas.openxmlformats.org/officeDocument/2006/relationships" xmlns:p="http://schemas.openxmlformats.org/presentationml/2006/main">
   <p:cSld>
     <p:bg>
       <p:bgPr>
@@ -6840,7 +6969,14 @@
         <p:cNvGrpSpPr/>
         <p:nvPr/>
       </p:nvGrpSpPr>
-      <p:grpSpPr/>
+      <p:grpSpPr>
+        <a:xfrm>
+          <a:off x="0" y="0"/>
+          <a:ext cx="0" cy="0"/>
+          <a:chOff x="0" y="0"/>
+          <a:chExt cx="0" cy="0"/>
+        </a:xfrm>
+      </p:grpSpPr>
       <p:sp>
         <p:nvSpPr>
           <p:cNvPr id="2" name="Rectangle 1"/>
@@ -6881,6 +7017,7 @@
           <a:lstStyle/>
           <a:p>
             <a:pPr algn="ctr"/>
+            <a:endParaRPr/>
           </a:p>
         </p:txBody>
       </p:sp>
@@ -6958,6 +7095,7 @@
           <a:lstStyle/>
           <a:p>
             <a:pPr algn="ctr"/>
+            <a:endParaRPr/>
           </a:p>
         </p:txBody>
       </p:sp>
@@ -7035,6 +7173,7 @@
           <a:lstStyle/>
           <a:p>
             <a:pPr algn="ctr"/>
+            <a:endParaRPr/>
           </a:p>
         </p:txBody>
       </p:sp>
@@ -7146,6 +7285,7 @@
           <a:lstStyle/>
           <a:p>
             <a:pPr algn="ctr"/>
+            <a:endParaRPr/>
           </a:p>
         </p:txBody>
       </p:sp>
@@ -7223,6 +7363,7 @@
           <a:lstStyle/>
           <a:p>
             <a:pPr algn="ctr"/>
+            <a:endParaRPr/>
           </a:p>
         </p:txBody>
       </p:sp>
@@ -7334,6 +7475,7 @@
           <a:lstStyle/>
           <a:p>
             <a:pPr algn="ctr"/>
+            <a:endParaRPr/>
           </a:p>
         </p:txBody>
       </p:sp>
@@ -7411,6 +7553,7 @@
           <a:lstStyle/>
           <a:p>
             <a:pPr algn="ctr"/>
+            <a:endParaRPr/>
           </a:p>
         </p:txBody>
       </p:sp>
@@ -7522,6 +7665,7 @@
           <a:lstStyle/>
           <a:p>
             <a:pPr algn="ctr"/>
+            <a:endParaRPr/>
           </a:p>
         </p:txBody>
       </p:sp>
@@ -7599,6 +7743,7 @@
           <a:lstStyle/>
           <a:p>
             <a:pPr algn="ctr"/>
+            <a:endParaRPr/>
           </a:p>
         </p:txBody>
       </p:sp>
@@ -7710,6 +7855,7 @@
           <a:lstStyle/>
           <a:p>
             <a:pPr algn="ctr"/>
+            <a:endParaRPr/>
           </a:p>
         </p:txBody>
       </p:sp>
@@ -7904,6 +8050,7 @@
           <a:lstStyle/>
           <a:p>
             <a:pPr algn="ctr"/>
+            <a:endParaRPr/>
           </a:p>
         </p:txBody>
       </p:sp>
@@ -7981,6 +8128,7 @@
           <a:lstStyle/>
           <a:p>
             <a:pPr algn="ctr"/>
+            <a:endParaRPr/>
           </a:p>
         </p:txBody>
       </p:sp>
@@ -8058,6 +8206,7 @@
           <a:lstStyle/>
           <a:p>
             <a:pPr algn="ctr"/>
+            <a:endParaRPr/>
           </a:p>
         </p:txBody>
       </p:sp>
@@ -8135,6 +8284,7 @@
           <a:lstStyle/>
           <a:p>
             <a:pPr algn="ctr"/>
+            <a:endParaRPr/>
           </a:p>
         </p:txBody>
       </p:sp>
@@ -8212,6 +8362,7 @@
           <a:lstStyle/>
           <a:p>
             <a:pPr algn="ctr"/>
+            <a:endParaRPr/>
           </a:p>
         </p:txBody>
       </p:sp>

--- a/docs/esitlus.pptx
+++ b/docs/esitlus.pptx
@@ -11,6 +11,8 @@
     <p:sldId id="259" r:id="rId5"/>
     <p:sldId id="260" r:id="rId6"/>
     <p:sldId id="261" r:id="rId7"/>
+    <p:sldId id="262" r:id="rId13"/>
+    <p:sldId id="263" r:id="rId14"/>
   </p:sldIdLst>
   <p:sldSz cx="12188825" cy="6858000"/>
   <p:notesSz cx="6858000" cy="9144000"/>
@@ -3360,6 +3362,920 @@
 </p:sld>
 </file>
 
+<file path=ppt/slides/slide10.xml><?xml version="1.0" encoding="utf-8"?>
+<p:sld xmlns:a="http://schemas.openxmlformats.org/drawingml/2006/main" xmlns:p="http://schemas.openxmlformats.org/presentationml/2006/main" xmlns:r="http://schemas.openxmlformats.org/officeDocument/2006/relationships">
+  <p:cSld>
+    <p:bg>
+      <p:bgPr>
+        <a:solidFill>
+          <a:srgbClr val="FFFFFF"/>
+        </a:solidFill>
+        <a:effectLst/>
+      </p:bgPr>
+    </p:bg>
+    <p:spTree>
+      <p:nvGrpSpPr>
+        <p:cNvPr id="1" name=""/>
+        <p:cNvGrpSpPr/>
+        <p:nvPr/>
+      </p:nvGrpSpPr>
+      <p:grpSpPr/>
+      <p:sp>
+        <p:nvSpPr>
+          <p:cNvPr id="2" name="Rectangle 1"/>
+          <p:cNvSpPr/>
+          <p:nvPr/>
+        </p:nvSpPr>
+        <p:spPr>
+          <a:xfrm>
+            <a:off x="0" y="0"/>
+            <a:ext cx="12188952" cy="1005840"/>
+          </a:xfrm>
+          <a:prstGeom prst="rect">
+            <a:avLst/>
+          </a:prstGeom>
+          <a:solidFill>
+            <a:srgbClr val="1B376B"/>
+          </a:solidFill>
+          <a:ln>
+            <a:noFill/>
+          </a:ln>
+        </p:spPr>
+        <p:style>
+          <a:lnRef idx="1">
+            <a:schemeClr val="accent1"/>
+          </a:lnRef>
+          <a:fillRef idx="3">
+            <a:schemeClr val="accent1"/>
+          </a:fillRef>
+          <a:effectRef idx="2">
+            <a:schemeClr val="accent1"/>
+          </a:effectRef>
+          <a:fontRef idx="minor">
+            <a:schemeClr val="lt1"/>
+          </a:fontRef>
+        </p:style>
+        <p:txBody>
+          <a:bodyPr rtlCol="0" anchor="ctr"/>
+          <a:lstStyle/>
+          <a:p>
+            <a:pPr algn="ctr"/>
+          </a:p>
+        </p:txBody>
+      </p:sp>
+      <p:sp>
+        <p:nvSpPr>
+          <p:cNvPr id="3" name="TextBox 2"/>
+          <p:cNvSpPr txBox="1"/>
+          <p:nvPr/>
+        </p:nvSpPr>
+        <p:spPr>
+          <a:xfrm>
+            <a:off x="365760" y="91440"/>
+            <a:ext cx="11430000" cy="777240"/>
+          </a:xfrm>
+          <a:prstGeom prst="rect">
+            <a:avLst/>
+          </a:prstGeom>
+          <a:noFill/>
+        </p:spPr>
+        <p:txBody>
+          <a:bodyPr wrap="square">
+            <a:spAutoFit/>
+          </a:bodyPr>
+          <a:lstStyle/>
+          <a:p>
+            <a:pPr algn="l"/>
+            <a:r>
+              <a:rPr sz="2800" b="1">
+                <a:solidFill>
+                  <a:srgbClr val="FFFFFF"/>
+                </a:solidFill>
+              </a:rPr>
+              <a:t>Järeldused ja ärimeetrikud</a:t>
+            </a:r>
+          </a:p>
+        </p:txBody>
+      </p:sp>
+      <p:sp>
+        <p:nvSpPr>
+          <p:cNvPr id="4" name="Rectangle 3"/>
+          <p:cNvSpPr/>
+          <p:nvPr/>
+        </p:nvSpPr>
+        <p:spPr>
+          <a:xfrm>
+            <a:off x="274320" y="1143000"/>
+            <a:ext cx="7132320" cy="4343400"/>
+          </a:xfrm>
+          <a:prstGeom prst="rect">
+            <a:avLst/>
+          </a:prstGeom>
+          <a:solidFill>
+            <a:srgbClr val="F2F2F2"/>
+          </a:solidFill>
+          <a:ln>
+            <a:noFill/>
+          </a:ln>
+        </p:spPr>
+        <p:style>
+          <a:lnRef idx="1">
+            <a:schemeClr val="accent1"/>
+          </a:lnRef>
+          <a:fillRef idx="3">
+            <a:schemeClr val="accent1"/>
+          </a:fillRef>
+          <a:effectRef idx="2">
+            <a:schemeClr val="accent1"/>
+          </a:effectRef>
+          <a:fontRef idx="minor">
+            <a:schemeClr val="lt1"/>
+          </a:fontRef>
+        </p:style>
+        <p:txBody>
+          <a:bodyPr rtlCol="0" anchor="ctr"/>
+          <a:lstStyle/>
+          <a:p>
+            <a:pPr algn="ctr"/>
+          </a:p>
+        </p:txBody>
+      </p:sp>
+      <p:sp>
+        <p:nvSpPr>
+          <p:cNvPr id="5" name="TextBox 4"/>
+          <p:cNvSpPr txBox="1"/>
+          <p:nvPr/>
+        </p:nvSpPr>
+        <p:spPr>
+          <a:xfrm>
+            <a:off x="457200" y="1207008"/>
+            <a:ext cx="6766560" cy="457200"/>
+          </a:xfrm>
+          <a:prstGeom prst="rect">
+            <a:avLst/>
+          </a:prstGeom>
+          <a:noFill/>
+        </p:spPr>
+        <p:txBody>
+          <a:bodyPr wrap="square">
+            <a:spAutoFit/>
+          </a:bodyPr>
+          <a:lstStyle/>
+          <a:p>
+            <a:pPr algn="l"/>
+            <a:r>
+              <a:rPr sz="1600" b="1">
+                <a:solidFill>
+                  <a:srgbClr val="1B376B"/>
+                </a:solidFill>
+              </a:rPr>
+              <a:t>Peamised järeldused</a:t>
+            </a:r>
+          </a:p>
+        </p:txBody>
+      </p:sp>
+      <p:sp>
+        <p:nvSpPr>
+          <p:cNvPr id="6" name="TextBox 5"/>
+          <p:cNvSpPr txBox="1"/>
+          <p:nvPr/>
+        </p:nvSpPr>
+        <p:spPr>
+          <a:xfrm>
+            <a:off x="457200" y="1737360"/>
+            <a:ext cx="6858000" cy="3566160"/>
+          </a:xfrm>
+          <a:prstGeom prst="rect">
+            <a:avLst/>
+          </a:prstGeom>
+          <a:noFill/>
+        </p:spPr>
+        <p:txBody>
+          <a:bodyPr wrap="square">
+            <a:spAutoFit/>
+          </a:bodyPr>
+          <a:lstStyle/>
+          <a:p>
+            <a:pPr>
+              <a:spcBef>
+                <a:spcPts val="300"/>
+              </a:spcBef>
+            </a:pPr>
+            <a:r>
+              <a:rPr sz="1400">
+                <a:solidFill>
+                  <a:srgbClr val="404040"/>
+                </a:solidFill>
+              </a:rPr>
+              <a:t>•  Finantsiliselt tasuvam: Kambja vald (ROI 3.4) ja Saue vald (ROI 3.36)</a:t>
+            </a:r>
+          </a:p>
+          <a:p>
+            <a:pPr>
+              <a:spcBef>
+                <a:spcPts val="300"/>
+              </a:spcBef>
+            </a:pPr>
+            <a:r>
+              <a:rPr sz="1400">
+                <a:solidFill>
+                  <a:srgbClr val="404040"/>
+                </a:solidFill>
+              </a:rPr>
+              <a:t>•  Suurim absoluutne säästupotentsiaal: Tallinn (üle 100M €/aastas)</a:t>
+            </a:r>
+          </a:p>
+          <a:p>
+            <a:pPr>
+              <a:spcBef>
+                <a:spcPts val="300"/>
+              </a:spcBef>
+            </a:pPr>
+            <a:r>
+              <a:rPr sz="1400">
+                <a:solidFill>
+                  <a:srgbClr val="404040"/>
+                </a:solidFill>
+              </a:rPr>
+              <a:t>•  Vajaduspõhiselt haavatavaimad: Lääneranna, Kihnu ja Räpina vald</a:t>
+            </a:r>
+          </a:p>
+          <a:p>
+            <a:pPr>
+              <a:spcBef>
+                <a:spcPts val="300"/>
+              </a:spcBef>
+            </a:pPr>
+            <a:r>
+              <a:rPr sz="1400">
+                <a:solidFill>
+                  <a:srgbClr val="404040"/>
+                </a:solidFill>
+              </a:rPr>
+              <a:t>•  Tallinna ja Tartu linna ROI on madalam (2.26–2.27), aga kogu mõju suurim</a:t>
+            </a:r>
+          </a:p>
+          <a:p>
+            <a:pPr>
+              <a:spcBef>
+                <a:spcPts val="300"/>
+              </a:spcBef>
+            </a:pPr>
+            <a:r>
+              <a:rPr sz="1400">
+                <a:solidFill>
+                  <a:srgbClr val="404040"/>
+                </a:solidFill>
+              </a:rPr>
+              <a:t>•  Kokkuvõte: kõrge ROI → väiksemad vallad; suur säästusumma → linnad</a:t>
+            </a:r>
+          </a:p>
+        </p:txBody>
+      </p:sp>
+      <p:sp>
+        <p:nvSpPr>
+          <p:cNvPr id="7" name="Rectangle 6"/>
+          <p:cNvSpPr/>
+          <p:nvPr/>
+        </p:nvSpPr>
+        <p:spPr>
+          <a:xfrm>
+            <a:off x="7680960" y="1143000"/>
+            <a:ext cx="4206240" cy="4343400"/>
+          </a:xfrm>
+          <a:prstGeom prst="rect">
+            <a:avLst/>
+          </a:prstGeom>
+          <a:solidFill>
+            <a:srgbClr val="1B376B"/>
+          </a:solidFill>
+          <a:ln>
+            <a:noFill/>
+          </a:ln>
+        </p:spPr>
+        <p:style>
+          <a:lnRef idx="1">
+            <a:schemeClr val="accent1"/>
+          </a:lnRef>
+          <a:fillRef idx="3">
+            <a:schemeClr val="accent1"/>
+          </a:fillRef>
+          <a:effectRef idx="2">
+            <a:schemeClr val="accent1"/>
+          </a:effectRef>
+          <a:fontRef idx="minor">
+            <a:schemeClr val="lt1"/>
+          </a:fontRef>
+        </p:style>
+        <p:txBody>
+          <a:bodyPr rtlCol="0" anchor="ctr"/>
+          <a:lstStyle/>
+          <a:p>
+            <a:pPr algn="ctr"/>
+          </a:p>
+        </p:txBody>
+      </p:sp>
+      <p:sp>
+        <p:nvSpPr>
+          <p:cNvPr id="8" name="TextBox 7"/>
+          <p:cNvSpPr txBox="1"/>
+          <p:nvPr/>
+        </p:nvSpPr>
+        <p:spPr>
+          <a:xfrm>
+            <a:off x="7818120" y="1207008"/>
+            <a:ext cx="3931920" cy="457200"/>
+          </a:xfrm>
+          <a:prstGeom prst="rect">
+            <a:avLst/>
+          </a:prstGeom>
+          <a:noFill/>
+        </p:spPr>
+        <p:txBody>
+          <a:bodyPr wrap="square">
+            <a:spAutoFit/>
+          </a:bodyPr>
+          <a:lstStyle/>
+          <a:p>
+            <a:pPr algn="l"/>
+            <a:r>
+              <a:rPr sz="1400" b="1">
+                <a:solidFill>
+                  <a:srgbClr val="FFFFFF"/>
+                </a:solidFill>
+              </a:rPr>
+              <a:t>Ärimeetrikute valemid</a:t>
+            </a:r>
+          </a:p>
+        </p:txBody>
+      </p:sp>
+      <p:sp>
+        <p:nvSpPr>
+          <p:cNvPr id="9" name="Rectangle 8"/>
+          <p:cNvSpPr/>
+          <p:nvPr/>
+        </p:nvSpPr>
+        <p:spPr>
+          <a:xfrm>
+            <a:off x="7726679" y="1783080"/>
+            <a:ext cx="4069080" cy="749808"/>
+          </a:xfrm>
+          <a:prstGeom prst="rect">
+            <a:avLst/>
+          </a:prstGeom>
+          <a:solidFill>
+            <a:srgbClr val="2E75B6"/>
+          </a:solidFill>
+          <a:ln>
+            <a:noFill/>
+          </a:ln>
+        </p:spPr>
+        <p:style>
+          <a:lnRef idx="1">
+            <a:schemeClr val="accent1"/>
+          </a:lnRef>
+          <a:fillRef idx="3">
+            <a:schemeClr val="accent1"/>
+          </a:fillRef>
+          <a:effectRef idx="2">
+            <a:schemeClr val="accent1"/>
+          </a:effectRef>
+          <a:fontRef idx="minor">
+            <a:schemeClr val="lt1"/>
+          </a:fontRef>
+        </p:style>
+        <p:txBody>
+          <a:bodyPr rtlCol="0" anchor="ctr"/>
+          <a:lstStyle/>
+          <a:p>
+            <a:pPr algn="ctr"/>
+          </a:p>
+        </p:txBody>
+      </p:sp>
+      <p:sp>
+        <p:nvSpPr>
+          <p:cNvPr id="10" name="TextBox 9"/>
+          <p:cNvSpPr txBox="1"/>
+          <p:nvPr/>
+        </p:nvSpPr>
+        <p:spPr>
+          <a:xfrm>
+            <a:off x="7836408" y="1801368"/>
+            <a:ext cx="3840480" cy="320040"/>
+          </a:xfrm>
+          <a:prstGeom prst="rect">
+            <a:avLst/>
+          </a:prstGeom>
+          <a:noFill/>
+        </p:spPr>
+        <p:txBody>
+          <a:bodyPr wrap="square">
+            <a:spAutoFit/>
+          </a:bodyPr>
+          <a:lstStyle/>
+          <a:p>
+            <a:pPr algn="l"/>
+            <a:r>
+              <a:rPr sz="1100" b="1">
+                <a:solidFill>
+                  <a:srgbClr val="FFFFFF"/>
+                </a:solidFill>
+              </a:rPr>
+              <a:t>ROI</a:t>
+            </a:r>
+          </a:p>
+        </p:txBody>
+      </p:sp>
+      <p:sp>
+        <p:nvSpPr>
+          <p:cNvPr id="11" name="TextBox 10"/>
+          <p:cNvSpPr txBox="1"/>
+          <p:nvPr/>
+        </p:nvSpPr>
+        <p:spPr>
+          <a:xfrm>
+            <a:off x="7836408" y="2130552"/>
+            <a:ext cx="3840480" cy="384048"/>
+          </a:xfrm>
+          <a:prstGeom prst="rect">
+            <a:avLst/>
+          </a:prstGeom>
+          <a:noFill/>
+        </p:spPr>
+        <p:txBody>
+          <a:bodyPr wrap="square">
+            <a:spAutoFit/>
+          </a:bodyPr>
+          <a:lstStyle/>
+          <a:p>
+            <a:pPr algn="l"/>
+            <a:r>
+              <a:rPr sz="1000" b="0">
+                <a:solidFill>
+                  <a:srgbClr val="BDD7EE"/>
+                </a:solidFill>
+              </a:rPr>
+              <a:t>sääst_eur_aastas
+/ investeering</a:t>
+            </a:r>
+          </a:p>
+        </p:txBody>
+      </p:sp>
+      <p:sp>
+        <p:nvSpPr>
+          <p:cNvPr id="12" name="Rectangle 11"/>
+          <p:cNvSpPr/>
+          <p:nvPr/>
+        </p:nvSpPr>
+        <p:spPr>
+          <a:xfrm>
+            <a:off x="7726679" y="2606040"/>
+            <a:ext cx="4069080" cy="749808"/>
+          </a:xfrm>
+          <a:prstGeom prst="rect">
+            <a:avLst/>
+          </a:prstGeom>
+          <a:solidFill>
+            <a:srgbClr val="2E75B6"/>
+          </a:solidFill>
+          <a:ln>
+            <a:noFill/>
+          </a:ln>
+        </p:spPr>
+        <p:style>
+          <a:lnRef idx="1">
+            <a:schemeClr val="accent1"/>
+          </a:lnRef>
+          <a:fillRef idx="3">
+            <a:schemeClr val="accent1"/>
+          </a:fillRef>
+          <a:effectRef idx="2">
+            <a:schemeClr val="accent1"/>
+          </a:effectRef>
+          <a:fontRef idx="minor">
+            <a:schemeClr val="lt1"/>
+          </a:fontRef>
+        </p:style>
+        <p:txBody>
+          <a:bodyPr rtlCol="0" anchor="ctr"/>
+          <a:lstStyle/>
+          <a:p>
+            <a:pPr algn="ctr"/>
+          </a:p>
+        </p:txBody>
+      </p:sp>
+      <p:sp>
+        <p:nvSpPr>
+          <p:cNvPr id="13" name="TextBox 12"/>
+          <p:cNvSpPr txBox="1"/>
+          <p:nvPr/>
+        </p:nvSpPr>
+        <p:spPr>
+          <a:xfrm>
+            <a:off x="7836408" y="2624328"/>
+            <a:ext cx="3840480" cy="320040"/>
+          </a:xfrm>
+          <a:prstGeom prst="rect">
+            <a:avLst/>
+          </a:prstGeom>
+          <a:noFill/>
+        </p:spPr>
+        <p:txBody>
+          <a:bodyPr wrap="square">
+            <a:spAutoFit/>
+          </a:bodyPr>
+          <a:lstStyle/>
+          <a:p>
+            <a:pPr algn="l"/>
+            <a:r>
+              <a:rPr sz="1100" b="1">
+                <a:solidFill>
+                  <a:srgbClr val="FFFFFF"/>
+                </a:solidFill>
+              </a:rPr>
+              <a:t>VAJADUSE SKOOR</a:t>
+            </a:r>
+          </a:p>
+        </p:txBody>
+      </p:sp>
+      <p:sp>
+        <p:nvSpPr>
+          <p:cNvPr id="14" name="TextBox 13"/>
+          <p:cNvSpPr txBox="1"/>
+          <p:nvPr/>
+        </p:nvSpPr>
+        <p:spPr>
+          <a:xfrm>
+            <a:off x="7836408" y="2953512"/>
+            <a:ext cx="3840480" cy="384048"/>
+          </a:xfrm>
+          <a:prstGeom prst="rect">
+            <a:avLst/>
+          </a:prstGeom>
+          <a:noFill/>
+        </p:spPr>
+        <p:txBody>
+          <a:bodyPr wrap="square">
+            <a:spAutoFit/>
+          </a:bodyPr>
+          <a:lstStyle/>
+          <a:p>
+            <a:pPr algn="l"/>
+            <a:r>
+              <a:rPr sz="1000" b="0">
+                <a:solidFill>
+                  <a:srgbClr val="BDD7EE"/>
+                </a:solidFill>
+              </a:rPr>
+              <a:t>soojakadu_kwh
+/ kogupindala_m²</a:t>
+            </a:r>
+          </a:p>
+        </p:txBody>
+      </p:sp>
+      <p:sp>
+        <p:nvSpPr>
+          <p:cNvPr id="15" name="Rectangle 14"/>
+          <p:cNvSpPr/>
+          <p:nvPr/>
+        </p:nvSpPr>
+        <p:spPr>
+          <a:xfrm>
+            <a:off x="7726679" y="3429000"/>
+            <a:ext cx="4069080" cy="749808"/>
+          </a:xfrm>
+          <a:prstGeom prst="rect">
+            <a:avLst/>
+          </a:prstGeom>
+          <a:solidFill>
+            <a:srgbClr val="2E75B6"/>
+          </a:solidFill>
+          <a:ln>
+            <a:noFill/>
+          </a:ln>
+        </p:spPr>
+        <p:style>
+          <a:lnRef idx="1">
+            <a:schemeClr val="accent1"/>
+          </a:lnRef>
+          <a:fillRef idx="3">
+            <a:schemeClr val="accent1"/>
+          </a:fillRef>
+          <a:effectRef idx="2">
+            <a:schemeClr val="accent1"/>
+          </a:effectRef>
+          <a:fontRef idx="minor">
+            <a:schemeClr val="lt1"/>
+          </a:fontRef>
+        </p:style>
+        <p:txBody>
+          <a:bodyPr rtlCol="0" anchor="ctr"/>
+          <a:lstStyle/>
+          <a:p>
+            <a:pPr algn="ctr"/>
+          </a:p>
+        </p:txBody>
+      </p:sp>
+      <p:sp>
+        <p:nvSpPr>
+          <p:cNvPr id="16" name="TextBox 15"/>
+          <p:cNvSpPr txBox="1"/>
+          <p:nvPr/>
+        </p:nvSpPr>
+        <p:spPr>
+          <a:xfrm>
+            <a:off x="7836408" y="3447288"/>
+            <a:ext cx="3840480" cy="320040"/>
+          </a:xfrm>
+          <a:prstGeom prst="rect">
+            <a:avLst/>
+          </a:prstGeom>
+          <a:noFill/>
+        </p:spPr>
+        <p:txBody>
+          <a:bodyPr wrap="square">
+            <a:spAutoFit/>
+          </a:bodyPr>
+          <a:lstStyle/>
+          <a:p>
+            <a:pPr algn="l"/>
+            <a:r>
+              <a:rPr sz="1100" b="1">
+                <a:solidFill>
+                  <a:srgbClr val="FFFFFF"/>
+                </a:solidFill>
+              </a:rPr>
+              <a:t>INVESTEERING</a:t>
+            </a:r>
+          </a:p>
+        </p:txBody>
+      </p:sp>
+      <p:sp>
+        <p:nvSpPr>
+          <p:cNvPr id="17" name="TextBox 16"/>
+          <p:cNvSpPr txBox="1"/>
+          <p:nvPr/>
+        </p:nvSpPr>
+        <p:spPr>
+          <a:xfrm>
+            <a:off x="7836408" y="3776472"/>
+            <a:ext cx="3840480" cy="384048"/>
+          </a:xfrm>
+          <a:prstGeom prst="rect">
+            <a:avLst/>
+          </a:prstGeom>
+          <a:noFill/>
+        </p:spPr>
+        <p:txBody>
+          <a:bodyPr wrap="square">
+            <a:spAutoFit/>
+          </a:bodyPr>
+          <a:lstStyle/>
+          <a:p>
+            <a:pPr algn="l"/>
+            <a:r>
+              <a:rPr sz="1000" b="0">
+                <a:solidFill>
+                  <a:srgbClr val="BDD7EE"/>
+                </a:solidFill>
+              </a:rPr>
+              <a:t>kogupindala_m² × 250
+(€/m² proxy)</a:t>
+            </a:r>
+          </a:p>
+        </p:txBody>
+      </p:sp>
+      <p:sp>
+        <p:nvSpPr>
+          <p:cNvPr id="18" name="Rectangle 17"/>
+          <p:cNvSpPr/>
+          <p:nvPr/>
+        </p:nvSpPr>
+        <p:spPr>
+          <a:xfrm>
+            <a:off x="7726679" y="4251960"/>
+            <a:ext cx="4069080" cy="749808"/>
+          </a:xfrm>
+          <a:prstGeom prst="rect">
+            <a:avLst/>
+          </a:prstGeom>
+          <a:solidFill>
+            <a:srgbClr val="2E75B6"/>
+          </a:solidFill>
+          <a:ln>
+            <a:noFill/>
+          </a:ln>
+        </p:spPr>
+        <p:style>
+          <a:lnRef idx="1">
+            <a:schemeClr val="accent1"/>
+          </a:lnRef>
+          <a:fillRef idx="3">
+            <a:schemeClr val="accent1"/>
+          </a:fillRef>
+          <a:effectRef idx="2">
+            <a:schemeClr val="accent1"/>
+          </a:effectRef>
+          <a:fontRef idx="minor">
+            <a:schemeClr val="lt1"/>
+          </a:fontRef>
+        </p:style>
+        <p:txBody>
+          <a:bodyPr rtlCol="0" anchor="ctr"/>
+          <a:lstStyle/>
+          <a:p>
+            <a:pPr algn="ctr"/>
+          </a:p>
+        </p:txBody>
+      </p:sp>
+      <p:sp>
+        <p:nvSpPr>
+          <p:cNvPr id="19" name="TextBox 18"/>
+          <p:cNvSpPr txBox="1"/>
+          <p:nvPr/>
+        </p:nvSpPr>
+        <p:spPr>
+          <a:xfrm>
+            <a:off x="7836408" y="4270248"/>
+            <a:ext cx="3840480" cy="320040"/>
+          </a:xfrm>
+          <a:prstGeom prst="rect">
+            <a:avLst/>
+          </a:prstGeom>
+          <a:noFill/>
+        </p:spPr>
+        <p:txBody>
+          <a:bodyPr wrap="square">
+            <a:spAutoFit/>
+          </a:bodyPr>
+          <a:lstStyle/>
+          <a:p>
+            <a:pPr algn="l"/>
+            <a:r>
+              <a:rPr sz="1100" b="1">
+                <a:solidFill>
+                  <a:srgbClr val="FFFFFF"/>
+                </a:solidFill>
+              </a:rPr>
+              <a:t>PRIORITY</a:t>
+            </a:r>
+          </a:p>
+        </p:txBody>
+      </p:sp>
+      <p:sp>
+        <p:nvSpPr>
+          <p:cNvPr id="20" name="TextBox 19"/>
+          <p:cNvSpPr txBox="1"/>
+          <p:nvPr/>
+        </p:nvSpPr>
+        <p:spPr>
+          <a:xfrm>
+            <a:off x="7836408" y="4599432"/>
+            <a:ext cx="3840480" cy="384048"/>
+          </a:xfrm>
+          <a:prstGeom prst="rect">
+            <a:avLst/>
+          </a:prstGeom>
+          <a:noFill/>
+        </p:spPr>
+        <p:txBody>
+          <a:bodyPr wrap="square">
+            <a:spAutoFit/>
+          </a:bodyPr>
+          <a:lstStyle/>
+          <a:p>
+            <a:pPr algn="l"/>
+            <a:r>
+              <a:rPr sz="1000" b="0">
+                <a:solidFill>
+                  <a:srgbClr val="BDD7EE"/>
+                </a:solidFill>
+              </a:rPr>
+              <a:t>LOG(sääst+1) × LOG(skoor+1)
+× LOG(pindala+1)</a:t>
+            </a:r>
+          </a:p>
+        </p:txBody>
+      </p:sp>
+      <p:sp>
+        <p:nvSpPr>
+          <p:cNvPr id="21" name="Rectangle 20"/>
+          <p:cNvSpPr/>
+          <p:nvPr/>
+        </p:nvSpPr>
+        <p:spPr>
+          <a:xfrm>
+            <a:off x="7726679" y="5074920"/>
+            <a:ext cx="4069080" cy="749808"/>
+          </a:xfrm>
+          <a:prstGeom prst="rect">
+            <a:avLst/>
+          </a:prstGeom>
+          <a:solidFill>
+            <a:srgbClr val="2E75B6"/>
+          </a:solidFill>
+          <a:ln>
+            <a:noFill/>
+          </a:ln>
+        </p:spPr>
+        <p:style>
+          <a:lnRef idx="1">
+            <a:schemeClr val="accent1"/>
+          </a:lnRef>
+          <a:fillRef idx="3">
+            <a:schemeClr val="accent1"/>
+          </a:fillRef>
+          <a:effectRef idx="2">
+            <a:schemeClr val="accent1"/>
+          </a:effectRef>
+          <a:fontRef idx="minor">
+            <a:schemeClr val="lt1"/>
+          </a:fontRef>
+        </p:style>
+        <p:txBody>
+          <a:bodyPr rtlCol="0" anchor="ctr"/>
+          <a:lstStyle/>
+          <a:p>
+            <a:pPr algn="ctr"/>
+          </a:p>
+        </p:txBody>
+      </p:sp>
+      <p:sp>
+        <p:nvSpPr>
+          <p:cNvPr id="22" name="TextBox 21"/>
+          <p:cNvSpPr txBox="1"/>
+          <p:nvPr/>
+        </p:nvSpPr>
+        <p:spPr>
+          <a:xfrm>
+            <a:off x="7836408" y="5093208"/>
+            <a:ext cx="3840480" cy="320040"/>
+          </a:xfrm>
+          <a:prstGeom prst="rect">
+            <a:avLst/>
+          </a:prstGeom>
+          <a:noFill/>
+        </p:spPr>
+        <p:txBody>
+          <a:bodyPr wrap="square">
+            <a:spAutoFit/>
+          </a:bodyPr>
+          <a:lstStyle/>
+          <a:p>
+            <a:pPr algn="l"/>
+            <a:r>
+              <a:rPr sz="1100" b="1">
+                <a:solidFill>
+                  <a:srgbClr val="FFFFFF"/>
+                </a:solidFill>
+              </a:rPr>
+              <a:t>TASUVUS</a:t>
+            </a:r>
+          </a:p>
+        </p:txBody>
+      </p:sp>
+      <p:sp>
+        <p:nvSpPr>
+          <p:cNvPr id="23" name="TextBox 22"/>
+          <p:cNvSpPr txBox="1"/>
+          <p:nvPr/>
+        </p:nvSpPr>
+        <p:spPr>
+          <a:xfrm>
+            <a:off x="7836408" y="5422392"/>
+            <a:ext cx="3840480" cy="384048"/>
+          </a:xfrm>
+          <a:prstGeom prst="rect">
+            <a:avLst/>
+          </a:prstGeom>
+          <a:noFill/>
+        </p:spPr>
+        <p:txBody>
+          <a:bodyPr wrap="square">
+            <a:spAutoFit/>
+          </a:bodyPr>
+          <a:lstStyle/>
+          <a:p>
+            <a:pPr algn="l"/>
+            <a:r>
+              <a:rPr sz="1000" b="0">
+                <a:solidFill>
+                  <a:srgbClr val="BDD7EE"/>
+                </a:solidFill>
+              </a:rPr>
+              <a:t>1 / NULLIF(roi, 0)</a:t>
+            </a:r>
+          </a:p>
+        </p:txBody>
+      </p:sp>
+    </p:spTree>
+  </p:cSld>
+  <p:clrMapOvr>
+    <a:masterClrMapping/>
+  </p:clrMapOvr>
+</p:sld>
+</file>
+
 <file path=ppt/slides/slide2.xml><?xml version="1.0" encoding="utf-8"?>
 <p:sld xmlns:a="http://schemas.openxmlformats.org/drawingml/2006/main" xmlns:r="http://schemas.openxmlformats.org/officeDocument/2006/relationships" xmlns:p="http://schemas.openxmlformats.org/presentationml/2006/main">
   <p:cSld>
@@ -8396,6 +9312,2686 @@
                 </a:solidFill>
               </a:rPr>
               <a:t>Docker</a:t>
+            </a:r>
+          </a:p>
+        </p:txBody>
+      </p:sp>
+    </p:spTree>
+  </p:cSld>
+  <p:clrMapOvr>
+    <a:masterClrMapping/>
+  </p:clrMapOvr>
+</p:sld>
+</file>
+
+<file path=ppt/slides/slide7.xml><?xml version="1.0" encoding="utf-8"?>
+<p:sld xmlns:a="http://schemas.openxmlformats.org/drawingml/2006/main" xmlns:p="http://schemas.openxmlformats.org/presentationml/2006/main" xmlns:r="http://schemas.openxmlformats.org/officeDocument/2006/relationships">
+  <p:cSld>
+    <p:bg>
+      <p:bgPr>
+        <a:solidFill>
+          <a:srgbClr val="FFFFFF"/>
+        </a:solidFill>
+        <a:effectLst/>
+      </p:bgPr>
+    </p:bg>
+    <p:spTree>
+      <p:nvGrpSpPr>
+        <p:cNvPr id="1" name=""/>
+        <p:cNvGrpSpPr/>
+        <p:nvPr/>
+      </p:nvGrpSpPr>
+      <p:grpSpPr/>
+      <p:sp>
+        <p:nvSpPr>
+          <p:cNvPr id="2" name="Rectangle 1"/>
+          <p:cNvSpPr/>
+          <p:nvPr/>
+        </p:nvSpPr>
+        <p:spPr>
+          <a:xfrm>
+            <a:off x="0" y="0"/>
+            <a:ext cx="12188952" cy="1005840"/>
+          </a:xfrm>
+          <a:prstGeom prst="rect">
+            <a:avLst/>
+          </a:prstGeom>
+          <a:solidFill>
+            <a:srgbClr val="1B376B"/>
+          </a:solidFill>
+          <a:ln>
+            <a:noFill/>
+          </a:ln>
+        </p:spPr>
+        <p:style>
+          <a:lnRef idx="1">
+            <a:schemeClr val="accent1"/>
+          </a:lnRef>
+          <a:fillRef idx="3">
+            <a:schemeClr val="accent1"/>
+          </a:fillRef>
+          <a:effectRef idx="2">
+            <a:schemeClr val="accent1"/>
+          </a:effectRef>
+          <a:fontRef idx="minor">
+            <a:schemeClr val="lt1"/>
+          </a:fontRef>
+        </p:style>
+        <p:txBody>
+          <a:bodyPr rtlCol="0" anchor="ctr"/>
+          <a:lstStyle/>
+          <a:p>
+            <a:pPr algn="ctr"/>
+          </a:p>
+        </p:txBody>
+      </p:sp>
+      <p:sp>
+        <p:nvSpPr>
+          <p:cNvPr id="3" name="TextBox 2"/>
+          <p:cNvSpPr txBox="1"/>
+          <p:nvPr/>
+        </p:nvSpPr>
+        <p:spPr>
+          <a:xfrm>
+            <a:off x="365760" y="91440"/>
+            <a:ext cx="11430000" cy="777240"/>
+          </a:xfrm>
+          <a:prstGeom prst="rect">
+            <a:avLst/>
+          </a:prstGeom>
+          <a:noFill/>
+        </p:spPr>
+        <p:txBody>
+          <a:bodyPr wrap="square">
+            <a:spAutoFit/>
+          </a:bodyPr>
+          <a:lstStyle/>
+          <a:p>
+            <a:pPr algn="l"/>
+            <a:r>
+              <a:rPr sz="2800" b="1">
+                <a:solidFill>
+                  <a:srgbClr val="FFFFFF"/>
+                </a:solidFill>
+              </a:rPr>
+              <a:t>Dashboard: põhitulemused</a:t>
+            </a:r>
+          </a:p>
+        </p:txBody>
+      </p:sp>
+      <p:sp>
+        <p:nvSpPr>
+          <p:cNvPr id="4" name="Rectangle 3"/>
+          <p:cNvSpPr/>
+          <p:nvPr/>
+        </p:nvSpPr>
+        <p:spPr>
+          <a:xfrm>
+            <a:off x="274320" y="1143000"/>
+            <a:ext cx="2697480" cy="1371600"/>
+          </a:xfrm>
+          <a:prstGeom prst="rect">
+            <a:avLst/>
+          </a:prstGeom>
+          <a:solidFill>
+            <a:srgbClr val="1B376B"/>
+          </a:solidFill>
+          <a:ln>
+            <a:noFill/>
+          </a:ln>
+        </p:spPr>
+        <p:style>
+          <a:lnRef idx="1">
+            <a:schemeClr val="accent1"/>
+          </a:lnRef>
+          <a:fillRef idx="3">
+            <a:schemeClr val="accent1"/>
+          </a:fillRef>
+          <a:effectRef idx="2">
+            <a:schemeClr val="accent1"/>
+          </a:effectRef>
+          <a:fontRef idx="minor">
+            <a:schemeClr val="lt1"/>
+          </a:fontRef>
+        </p:style>
+        <p:txBody>
+          <a:bodyPr rtlCol="0" anchor="ctr"/>
+          <a:lstStyle/>
+          <a:p>
+            <a:pPr algn="ctr"/>
+          </a:p>
+        </p:txBody>
+      </p:sp>
+      <p:sp>
+        <p:nvSpPr>
+          <p:cNvPr id="5" name="TextBox 4"/>
+          <p:cNvSpPr txBox="1"/>
+          <p:nvPr/>
+        </p:nvSpPr>
+        <p:spPr>
+          <a:xfrm>
+            <a:off x="365760" y="1188720"/>
+            <a:ext cx="2514600" cy="502920"/>
+          </a:xfrm>
+          <a:prstGeom prst="rect">
+            <a:avLst/>
+          </a:prstGeom>
+          <a:noFill/>
+        </p:spPr>
+        <p:txBody>
+          <a:bodyPr wrap="square">
+            <a:spAutoFit/>
+          </a:bodyPr>
+          <a:lstStyle/>
+          <a:p>
+            <a:pPr algn="ctr"/>
+            <a:r>
+              <a:rPr sz="1300" b="0">
+                <a:solidFill>
+                  <a:srgbClr val="FFFFFF"/>
+                </a:solidFill>
+              </a:rPr>
+              <a:t>Soojakadu Eestis</a:t>
+            </a:r>
+          </a:p>
+        </p:txBody>
+      </p:sp>
+      <p:sp>
+        <p:nvSpPr>
+          <p:cNvPr id="6" name="TextBox 5"/>
+          <p:cNvSpPr txBox="1"/>
+          <p:nvPr/>
+        </p:nvSpPr>
+        <p:spPr>
+          <a:xfrm>
+            <a:off x="320040" y="1691640"/>
+            <a:ext cx="2606040" cy="685800"/>
+          </a:xfrm>
+          <a:prstGeom prst="rect">
+            <a:avLst/>
+          </a:prstGeom>
+          <a:noFill/>
+        </p:spPr>
+        <p:txBody>
+          <a:bodyPr wrap="square">
+            <a:spAutoFit/>
+          </a:bodyPr>
+          <a:lstStyle/>
+          <a:p>
+            <a:pPr algn="ctr"/>
+            <a:r>
+              <a:rPr sz="2200" b="1">
+                <a:solidFill>
+                  <a:srgbClr val="FFFFFF"/>
+                </a:solidFill>
+              </a:rPr>
+              <a:t>9.26B kWh</a:t>
+            </a:r>
+          </a:p>
+        </p:txBody>
+      </p:sp>
+      <p:sp>
+        <p:nvSpPr>
+          <p:cNvPr id="7" name="Rectangle 6"/>
+          <p:cNvSpPr/>
+          <p:nvPr/>
+        </p:nvSpPr>
+        <p:spPr>
+          <a:xfrm>
+            <a:off x="3182112" y="1143000"/>
+            <a:ext cx="2697480" cy="1371600"/>
+          </a:xfrm>
+          <a:prstGeom prst="rect">
+            <a:avLst/>
+          </a:prstGeom>
+          <a:solidFill>
+            <a:srgbClr val="2E75B6"/>
+          </a:solidFill>
+          <a:ln>
+            <a:noFill/>
+          </a:ln>
+        </p:spPr>
+        <p:style>
+          <a:lnRef idx="1">
+            <a:schemeClr val="accent1"/>
+          </a:lnRef>
+          <a:fillRef idx="3">
+            <a:schemeClr val="accent1"/>
+          </a:fillRef>
+          <a:effectRef idx="2">
+            <a:schemeClr val="accent1"/>
+          </a:effectRef>
+          <a:fontRef idx="minor">
+            <a:schemeClr val="lt1"/>
+          </a:fontRef>
+        </p:style>
+        <p:txBody>
+          <a:bodyPr rtlCol="0" anchor="ctr"/>
+          <a:lstStyle/>
+          <a:p>
+            <a:pPr algn="ctr"/>
+          </a:p>
+        </p:txBody>
+      </p:sp>
+      <p:sp>
+        <p:nvSpPr>
+          <p:cNvPr id="8" name="TextBox 7"/>
+          <p:cNvSpPr txBox="1"/>
+          <p:nvPr/>
+        </p:nvSpPr>
+        <p:spPr>
+          <a:xfrm>
+            <a:off x="3273552" y="1188720"/>
+            <a:ext cx="2514600" cy="502920"/>
+          </a:xfrm>
+          <a:prstGeom prst="rect">
+            <a:avLst/>
+          </a:prstGeom>
+          <a:noFill/>
+        </p:spPr>
+        <p:txBody>
+          <a:bodyPr wrap="square">
+            <a:spAutoFit/>
+          </a:bodyPr>
+          <a:lstStyle/>
+          <a:p>
+            <a:pPr algn="ctr"/>
+            <a:r>
+              <a:rPr sz="1300" b="0">
+                <a:solidFill>
+                  <a:srgbClr val="FFFFFF"/>
+                </a:solidFill>
+              </a:rPr>
+              <a:t>Kulu</a:t>
+            </a:r>
+          </a:p>
+        </p:txBody>
+      </p:sp>
+      <p:sp>
+        <p:nvSpPr>
+          <p:cNvPr id="9" name="TextBox 8"/>
+          <p:cNvSpPr txBox="1"/>
+          <p:nvPr/>
+        </p:nvSpPr>
+        <p:spPr>
+          <a:xfrm>
+            <a:off x="3227832" y="1691640"/>
+            <a:ext cx="2606040" cy="685800"/>
+          </a:xfrm>
+          <a:prstGeom prst="rect">
+            <a:avLst/>
+          </a:prstGeom>
+          <a:noFill/>
+        </p:spPr>
+        <p:txBody>
+          <a:bodyPr wrap="square">
+            <a:spAutoFit/>
+          </a:bodyPr>
+          <a:lstStyle/>
+          <a:p>
+            <a:pPr algn="ctr"/>
+            <a:r>
+              <a:rPr sz="2200" b="1">
+                <a:solidFill>
+                  <a:srgbClr val="FFFFFF"/>
+                </a:solidFill>
+              </a:rPr>
+              <a:t>660M €</a:t>
+            </a:r>
+          </a:p>
+        </p:txBody>
+      </p:sp>
+      <p:sp>
+        <p:nvSpPr>
+          <p:cNvPr id="10" name="Rectangle 9"/>
+          <p:cNvSpPr/>
+          <p:nvPr/>
+        </p:nvSpPr>
+        <p:spPr>
+          <a:xfrm>
+            <a:off x="6089904" y="1143000"/>
+            <a:ext cx="2697480" cy="1371600"/>
+          </a:xfrm>
+          <a:prstGeom prst="rect">
+            <a:avLst/>
+          </a:prstGeom>
+          <a:solidFill>
+            <a:srgbClr val="5A9E6F"/>
+          </a:solidFill>
+          <a:ln>
+            <a:noFill/>
+          </a:ln>
+        </p:spPr>
+        <p:style>
+          <a:lnRef idx="1">
+            <a:schemeClr val="accent1"/>
+          </a:lnRef>
+          <a:fillRef idx="3">
+            <a:schemeClr val="accent1"/>
+          </a:fillRef>
+          <a:effectRef idx="2">
+            <a:schemeClr val="accent1"/>
+          </a:effectRef>
+          <a:fontRef idx="minor">
+            <a:schemeClr val="lt1"/>
+          </a:fontRef>
+        </p:style>
+        <p:txBody>
+          <a:bodyPr rtlCol="0" anchor="ctr"/>
+          <a:lstStyle/>
+          <a:p>
+            <a:pPr algn="ctr"/>
+          </a:p>
+        </p:txBody>
+      </p:sp>
+      <p:sp>
+        <p:nvSpPr>
+          <p:cNvPr id="11" name="TextBox 10"/>
+          <p:cNvSpPr txBox="1"/>
+          <p:nvPr/>
+        </p:nvSpPr>
+        <p:spPr>
+          <a:xfrm>
+            <a:off x="6181344" y="1188720"/>
+            <a:ext cx="2514600" cy="502920"/>
+          </a:xfrm>
+          <a:prstGeom prst="rect">
+            <a:avLst/>
+          </a:prstGeom>
+          <a:noFill/>
+        </p:spPr>
+        <p:txBody>
+          <a:bodyPr wrap="square">
+            <a:spAutoFit/>
+          </a:bodyPr>
+          <a:lstStyle/>
+          <a:p>
+            <a:pPr algn="ctr"/>
+            <a:r>
+              <a:rPr sz="1300" b="0">
+                <a:solidFill>
+                  <a:srgbClr val="FFFFFF"/>
+                </a:solidFill>
+              </a:rPr>
+              <a:t>Säästupotentsiaal</a:t>
+            </a:r>
+          </a:p>
+        </p:txBody>
+      </p:sp>
+      <p:sp>
+        <p:nvSpPr>
+          <p:cNvPr id="12" name="TextBox 11"/>
+          <p:cNvSpPr txBox="1"/>
+          <p:nvPr/>
+        </p:nvSpPr>
+        <p:spPr>
+          <a:xfrm>
+            <a:off x="6135624" y="1691640"/>
+            <a:ext cx="2606040" cy="685800"/>
+          </a:xfrm>
+          <a:prstGeom prst="rect">
+            <a:avLst/>
+          </a:prstGeom>
+          <a:noFill/>
+        </p:spPr>
+        <p:txBody>
+          <a:bodyPr wrap="square">
+            <a:spAutoFit/>
+          </a:bodyPr>
+          <a:lstStyle/>
+          <a:p>
+            <a:pPr algn="ctr"/>
+            <a:r>
+              <a:rPr sz="2200" b="1">
+                <a:solidFill>
+                  <a:srgbClr val="FFFFFF"/>
+                </a:solidFill>
+              </a:rPr>
+              <a:t>423M €/aastas</a:t>
+            </a:r>
+          </a:p>
+        </p:txBody>
+      </p:sp>
+      <p:sp>
+        <p:nvSpPr>
+          <p:cNvPr id="13" name="Rectangle 12"/>
+          <p:cNvSpPr/>
+          <p:nvPr/>
+        </p:nvSpPr>
+        <p:spPr>
+          <a:xfrm>
+            <a:off x="8997696" y="1143000"/>
+            <a:ext cx="2697480" cy="1371600"/>
+          </a:xfrm>
+          <a:prstGeom prst="rect">
+            <a:avLst/>
+          </a:prstGeom>
+          <a:solidFill>
+            <a:srgbClr val="ED7D31"/>
+          </a:solidFill>
+          <a:ln>
+            <a:noFill/>
+          </a:ln>
+        </p:spPr>
+        <p:style>
+          <a:lnRef idx="1">
+            <a:schemeClr val="accent1"/>
+          </a:lnRef>
+          <a:fillRef idx="3">
+            <a:schemeClr val="accent1"/>
+          </a:fillRef>
+          <a:effectRef idx="2">
+            <a:schemeClr val="accent1"/>
+          </a:effectRef>
+          <a:fontRef idx="minor">
+            <a:schemeClr val="lt1"/>
+          </a:fontRef>
+        </p:style>
+        <p:txBody>
+          <a:bodyPr rtlCol="0" anchor="ctr"/>
+          <a:lstStyle/>
+          <a:p>
+            <a:pPr algn="ctr"/>
+          </a:p>
+        </p:txBody>
+      </p:sp>
+      <p:sp>
+        <p:nvSpPr>
+          <p:cNvPr id="14" name="TextBox 13"/>
+          <p:cNvSpPr txBox="1"/>
+          <p:nvPr/>
+        </p:nvSpPr>
+        <p:spPr>
+          <a:xfrm>
+            <a:off x="9089136" y="1188720"/>
+            <a:ext cx="2514600" cy="502920"/>
+          </a:xfrm>
+          <a:prstGeom prst="rect">
+            <a:avLst/>
+          </a:prstGeom>
+          <a:noFill/>
+        </p:spPr>
+        <p:txBody>
+          <a:bodyPr wrap="square">
+            <a:spAutoFit/>
+          </a:bodyPr>
+          <a:lstStyle/>
+          <a:p>
+            <a:pPr algn="ctr"/>
+            <a:r>
+              <a:rPr sz="1300" b="0">
+                <a:solidFill>
+                  <a:srgbClr val="FFFFFF"/>
+                </a:solidFill>
+              </a:rPr>
+              <a:t>Keskmine intensiivsus</a:t>
+            </a:r>
+          </a:p>
+        </p:txBody>
+      </p:sp>
+      <p:sp>
+        <p:nvSpPr>
+          <p:cNvPr id="15" name="TextBox 14"/>
+          <p:cNvSpPr txBox="1"/>
+          <p:nvPr/>
+        </p:nvSpPr>
+        <p:spPr>
+          <a:xfrm>
+            <a:off x="9043416" y="1691640"/>
+            <a:ext cx="2606040" cy="685800"/>
+          </a:xfrm>
+          <a:prstGeom prst="rect">
+            <a:avLst/>
+          </a:prstGeom>
+          <a:noFill/>
+        </p:spPr>
+        <p:txBody>
+          <a:bodyPr wrap="square">
+            <a:spAutoFit/>
+          </a:bodyPr>
+          <a:lstStyle/>
+          <a:p>
+            <a:pPr algn="ctr"/>
+            <a:r>
+              <a:rPr sz="2200" b="1">
+                <a:solidFill>
+                  <a:srgbClr val="FFFFFF"/>
+                </a:solidFill>
+              </a:rPr>
+              <a:t>149.93 kWh/m²</a:t>
+            </a:r>
+          </a:p>
+        </p:txBody>
+      </p:sp>
+      <p:sp>
+        <p:nvSpPr>
+          <p:cNvPr id="16" name="Rectangle 15"/>
+          <p:cNvSpPr/>
+          <p:nvPr/>
+        </p:nvSpPr>
+        <p:spPr>
+          <a:xfrm>
+            <a:off x="274320" y="2743200"/>
+            <a:ext cx="3794760" cy="3474720"/>
+          </a:xfrm>
+          <a:prstGeom prst="rect">
+            <a:avLst/>
+          </a:prstGeom>
+          <a:solidFill>
+            <a:srgbClr val="F2F2F2"/>
+          </a:solidFill>
+          <a:ln>
+            <a:noFill/>
+          </a:ln>
+        </p:spPr>
+        <p:style>
+          <a:lnRef idx="1">
+            <a:schemeClr val="accent1"/>
+          </a:lnRef>
+          <a:fillRef idx="3">
+            <a:schemeClr val="accent1"/>
+          </a:fillRef>
+          <a:effectRef idx="2">
+            <a:schemeClr val="accent1"/>
+          </a:effectRef>
+          <a:fontRef idx="minor">
+            <a:schemeClr val="lt1"/>
+          </a:fontRef>
+        </p:style>
+        <p:txBody>
+          <a:bodyPr rtlCol="0" anchor="ctr"/>
+          <a:lstStyle/>
+          <a:p>
+            <a:pPr algn="ctr"/>
+          </a:p>
+        </p:txBody>
+      </p:sp>
+      <p:sp>
+        <p:nvSpPr>
+          <p:cNvPr id="17" name="TextBox 16"/>
+          <p:cNvSpPr txBox="1"/>
+          <p:nvPr/>
+        </p:nvSpPr>
+        <p:spPr>
+          <a:xfrm>
+            <a:off x="384048" y="2807208"/>
+            <a:ext cx="3566160" cy="594360"/>
+          </a:xfrm>
+          <a:prstGeom prst="rect">
+            <a:avLst/>
+          </a:prstGeom>
+          <a:noFill/>
+        </p:spPr>
+        <p:txBody>
+          <a:bodyPr wrap="square">
+            <a:spAutoFit/>
+          </a:bodyPr>
+          <a:lstStyle/>
+          <a:p>
+            <a:pPr algn="l"/>
+            <a:r>
+              <a:rPr sz="1200" b="1">
+                <a:solidFill>
+                  <a:srgbClr val="2E75B6"/>
+                </a:solidFill>
+              </a:rPr>
+              <a:t>Suurim vajadus renoveerimiseks (vajaduse skoor)</a:t>
+            </a:r>
+          </a:p>
+        </p:txBody>
+      </p:sp>
+      <p:sp>
+        <p:nvSpPr>
+          <p:cNvPr id="18" name="TextBox 17"/>
+          <p:cNvSpPr txBox="1"/>
+          <p:nvPr/>
+        </p:nvSpPr>
+        <p:spPr>
+          <a:xfrm>
+            <a:off x="384048" y="3429000"/>
+            <a:ext cx="3566160" cy="2651760"/>
+          </a:xfrm>
+          <a:prstGeom prst="rect">
+            <a:avLst/>
+          </a:prstGeom>
+          <a:noFill/>
+        </p:spPr>
+        <p:txBody>
+          <a:bodyPr wrap="square">
+            <a:spAutoFit/>
+          </a:bodyPr>
+          <a:lstStyle/>
+          <a:p>
+            <a:pPr algn="l"/>
+            <a:r>
+              <a:rPr sz="1200" b="0">
+                <a:solidFill>
+                  <a:srgbClr val="404040"/>
+                </a:solidFill>
+              </a:rPr>
+              <a:t>Lääneranna vald · Kihnu vald · Räpina vald · Toila vald · Kanepi vald
+Mõõdik: soojakadu_kwh_aastas / kogupindala_m²</a:t>
+            </a:r>
+          </a:p>
+        </p:txBody>
+      </p:sp>
+      <p:sp>
+        <p:nvSpPr>
+          <p:cNvPr id="19" name="Rectangle 18"/>
+          <p:cNvSpPr/>
+          <p:nvPr/>
+        </p:nvSpPr>
+        <p:spPr>
+          <a:xfrm>
+            <a:off x="4251959" y="2743200"/>
+            <a:ext cx="3794760" cy="3474720"/>
+          </a:xfrm>
+          <a:prstGeom prst="rect">
+            <a:avLst/>
+          </a:prstGeom>
+          <a:solidFill>
+            <a:srgbClr val="F2F2F2"/>
+          </a:solidFill>
+          <a:ln>
+            <a:noFill/>
+          </a:ln>
+        </p:spPr>
+        <p:style>
+          <a:lnRef idx="1">
+            <a:schemeClr val="accent1"/>
+          </a:lnRef>
+          <a:fillRef idx="3">
+            <a:schemeClr val="accent1"/>
+          </a:fillRef>
+          <a:effectRef idx="2">
+            <a:schemeClr val="accent1"/>
+          </a:effectRef>
+          <a:fontRef idx="minor">
+            <a:schemeClr val="lt1"/>
+          </a:fontRef>
+        </p:style>
+        <p:txBody>
+          <a:bodyPr rtlCol="0" anchor="ctr"/>
+          <a:lstStyle/>
+          <a:p>
+            <a:pPr algn="ctr"/>
+          </a:p>
+        </p:txBody>
+      </p:sp>
+      <p:sp>
+        <p:nvSpPr>
+          <p:cNvPr id="20" name="TextBox 19"/>
+          <p:cNvSpPr txBox="1"/>
+          <p:nvPr/>
+        </p:nvSpPr>
+        <p:spPr>
+          <a:xfrm>
+            <a:off x="4361688" y="2807208"/>
+            <a:ext cx="3566160" cy="594360"/>
+          </a:xfrm>
+          <a:prstGeom prst="rect">
+            <a:avLst/>
+          </a:prstGeom>
+          <a:noFill/>
+        </p:spPr>
+        <p:txBody>
+          <a:bodyPr wrap="square">
+            <a:spAutoFit/>
+          </a:bodyPr>
+          <a:lstStyle/>
+          <a:p>
+            <a:pPr algn="l"/>
+            <a:r>
+              <a:rPr sz="1200" b="1">
+                <a:solidFill>
+                  <a:srgbClr val="2E75B6"/>
+                </a:solidFill>
+              </a:rPr>
+              <a:t>TOP 10 KOV — suurim aastane säästupotentsiaal (€)</a:t>
+            </a:r>
+          </a:p>
+        </p:txBody>
+      </p:sp>
+      <p:sp>
+        <p:nvSpPr>
+          <p:cNvPr id="21" name="TextBox 20"/>
+          <p:cNvSpPr txBox="1"/>
+          <p:nvPr/>
+        </p:nvSpPr>
+        <p:spPr>
+          <a:xfrm>
+            <a:off x="4361688" y="3429000"/>
+            <a:ext cx="3566160" cy="2651760"/>
+          </a:xfrm>
+          <a:prstGeom prst="rect">
+            <a:avLst/>
+          </a:prstGeom>
+          <a:noFill/>
+        </p:spPr>
+        <p:txBody>
+          <a:bodyPr wrap="square">
+            <a:spAutoFit/>
+          </a:bodyPr>
+          <a:lstStyle/>
+          <a:p>
+            <a:pPr algn="l"/>
+            <a:r>
+              <a:rPr sz="1200" b="0">
+                <a:solidFill>
+                  <a:srgbClr val="404040"/>
+                </a:solidFill>
+              </a:rPr>
+              <a:t>Tallinn ~100M € · Tartu linn ~20M € · Pärnu linn · Narva linn
+Kohtla-Järve · Saaremaa vald · Viljandi vald · Jõgeva vald · Elva vald</a:t>
+            </a:r>
+          </a:p>
+        </p:txBody>
+      </p:sp>
+      <p:sp>
+        <p:nvSpPr>
+          <p:cNvPr id="22" name="Rectangle 21"/>
+          <p:cNvSpPr/>
+          <p:nvPr/>
+        </p:nvSpPr>
+        <p:spPr>
+          <a:xfrm>
+            <a:off x="8229600" y="2743200"/>
+            <a:ext cx="3794760" cy="3474720"/>
+          </a:xfrm>
+          <a:prstGeom prst="rect">
+            <a:avLst/>
+          </a:prstGeom>
+          <a:solidFill>
+            <a:srgbClr val="F2F2F2"/>
+          </a:solidFill>
+          <a:ln>
+            <a:noFill/>
+          </a:ln>
+        </p:spPr>
+        <p:style>
+          <a:lnRef idx="1">
+            <a:schemeClr val="accent1"/>
+          </a:lnRef>
+          <a:fillRef idx="3">
+            <a:schemeClr val="accent1"/>
+          </a:fillRef>
+          <a:effectRef idx="2">
+            <a:schemeClr val="accent1"/>
+          </a:effectRef>
+          <a:fontRef idx="minor">
+            <a:schemeClr val="lt1"/>
+          </a:fontRef>
+        </p:style>
+        <p:txBody>
+          <a:bodyPr rtlCol="0" anchor="ctr"/>
+          <a:lstStyle/>
+          <a:p>
+            <a:pPr algn="ctr"/>
+          </a:p>
+        </p:txBody>
+      </p:sp>
+      <p:sp>
+        <p:nvSpPr>
+          <p:cNvPr id="23" name="TextBox 22"/>
+          <p:cNvSpPr txBox="1"/>
+          <p:nvPr/>
+        </p:nvSpPr>
+        <p:spPr>
+          <a:xfrm>
+            <a:off x="8339327" y="2807208"/>
+            <a:ext cx="3566160" cy="594360"/>
+          </a:xfrm>
+          <a:prstGeom prst="rect">
+            <a:avLst/>
+          </a:prstGeom>
+          <a:noFill/>
+        </p:spPr>
+        <p:txBody>
+          <a:bodyPr wrap="square">
+            <a:spAutoFit/>
+          </a:bodyPr>
+          <a:lstStyle/>
+          <a:p>
+            <a:pPr algn="l"/>
+            <a:r>
+              <a:rPr sz="1200" b="1">
+                <a:solidFill>
+                  <a:srgbClr val="2E75B6"/>
+                </a:solidFill>
+              </a:rPr>
+              <a:t>Investeeringu tasuvus — ROI vs tasuvusaeg</a:t>
+            </a:r>
+          </a:p>
+        </p:txBody>
+      </p:sp>
+      <p:sp>
+        <p:nvSpPr>
+          <p:cNvPr id="24" name="TextBox 23"/>
+          <p:cNvSpPr txBox="1"/>
+          <p:nvPr/>
+        </p:nvSpPr>
+        <p:spPr>
+          <a:xfrm>
+            <a:off x="8339327" y="3429000"/>
+            <a:ext cx="3566160" cy="2651760"/>
+          </a:xfrm>
+          <a:prstGeom prst="rect">
+            <a:avLst/>
+          </a:prstGeom>
+          <a:noFill/>
+        </p:spPr>
+        <p:txBody>
+          <a:bodyPr wrap="square">
+            <a:spAutoFit/>
+          </a:bodyPr>
+          <a:lstStyle/>
+          <a:p>
+            <a:pPr algn="l"/>
+            <a:r>
+              <a:rPr sz="1200" b="0">
+                <a:solidFill>
+                  <a:srgbClr val="404040"/>
+                </a:solidFill>
+              </a:rPr>
+              <a:t>Kambja vald (ROI 3.4) · Saue vald (3.36) · Tori vald (3.31)
+Rapla vald (3.21) — finantsiliselt kõige tasuvam renoveerimine</a:t>
+            </a:r>
+          </a:p>
+        </p:txBody>
+      </p:sp>
+    </p:spTree>
+  </p:cSld>
+  <p:clrMapOvr>
+    <a:masterClrMapping/>
+  </p:clrMapOvr>
+</p:sld>
+</file>
+
+<file path=ppt/slides/slide8.xml><?xml version="1.0" encoding="utf-8"?>
+<p:sld xmlns:a="http://schemas.openxmlformats.org/drawingml/2006/main" xmlns:p="http://schemas.openxmlformats.org/presentationml/2006/main" xmlns:r="http://schemas.openxmlformats.org/officeDocument/2006/relationships">
+  <p:cSld>
+    <p:bg>
+      <p:bgPr>
+        <a:solidFill>
+          <a:srgbClr val="FFFFFF"/>
+        </a:solidFill>
+        <a:effectLst/>
+      </p:bgPr>
+    </p:bg>
+    <p:spTree>
+      <p:nvGrpSpPr>
+        <p:cNvPr id="1" name=""/>
+        <p:cNvGrpSpPr/>
+        <p:nvPr/>
+      </p:nvGrpSpPr>
+      <p:grpSpPr/>
+      <p:sp>
+        <p:nvSpPr>
+          <p:cNvPr id="2" name="Rectangle 1"/>
+          <p:cNvSpPr/>
+          <p:nvPr/>
+        </p:nvSpPr>
+        <p:spPr>
+          <a:xfrm>
+            <a:off x="0" y="0"/>
+            <a:ext cx="12188952" cy="1005840"/>
+          </a:xfrm>
+          <a:prstGeom prst="rect">
+            <a:avLst/>
+          </a:prstGeom>
+          <a:solidFill>
+            <a:srgbClr val="1B376B"/>
+          </a:solidFill>
+          <a:ln>
+            <a:noFill/>
+          </a:ln>
+        </p:spPr>
+        <p:style>
+          <a:lnRef idx="1">
+            <a:schemeClr val="accent1"/>
+          </a:lnRef>
+          <a:fillRef idx="3">
+            <a:schemeClr val="accent1"/>
+          </a:fillRef>
+          <a:effectRef idx="2">
+            <a:schemeClr val="accent1"/>
+          </a:effectRef>
+          <a:fontRef idx="minor">
+            <a:schemeClr val="lt1"/>
+          </a:fontRef>
+        </p:style>
+        <p:txBody>
+          <a:bodyPr rtlCol="0" anchor="ctr"/>
+          <a:lstStyle/>
+          <a:p>
+            <a:pPr algn="ctr"/>
+          </a:p>
+        </p:txBody>
+      </p:sp>
+      <p:sp>
+        <p:nvSpPr>
+          <p:cNvPr id="3" name="TextBox 2"/>
+          <p:cNvSpPr txBox="1"/>
+          <p:nvPr/>
+        </p:nvSpPr>
+        <p:spPr>
+          <a:xfrm>
+            <a:off x="365760" y="91440"/>
+            <a:ext cx="11430000" cy="777240"/>
+          </a:xfrm>
+          <a:prstGeom prst="rect">
+            <a:avLst/>
+          </a:prstGeom>
+          <a:noFill/>
+        </p:spPr>
+        <p:txBody>
+          <a:bodyPr wrap="square">
+            <a:spAutoFit/>
+          </a:bodyPr>
+          <a:lstStyle/>
+          <a:p>
+            <a:pPr algn="l"/>
+            <a:r>
+              <a:rPr sz="2800" b="1">
+                <a:solidFill>
+                  <a:srgbClr val="FFFFFF"/>
+                </a:solidFill>
+              </a:rPr>
+              <a:t>Järeldused ja ärimeetrikud</a:t>
+            </a:r>
+          </a:p>
+        </p:txBody>
+      </p:sp>
+      <p:sp>
+        <p:nvSpPr>
+          <p:cNvPr id="4" name="Rectangle 3"/>
+          <p:cNvSpPr/>
+          <p:nvPr/>
+        </p:nvSpPr>
+        <p:spPr>
+          <a:xfrm>
+            <a:off x="274320" y="1143000"/>
+            <a:ext cx="7132320" cy="4343400"/>
+          </a:xfrm>
+          <a:prstGeom prst="rect">
+            <a:avLst/>
+          </a:prstGeom>
+          <a:solidFill>
+            <a:srgbClr val="F2F2F2"/>
+          </a:solidFill>
+          <a:ln>
+            <a:noFill/>
+          </a:ln>
+        </p:spPr>
+        <p:style>
+          <a:lnRef idx="1">
+            <a:schemeClr val="accent1"/>
+          </a:lnRef>
+          <a:fillRef idx="3">
+            <a:schemeClr val="accent1"/>
+          </a:fillRef>
+          <a:effectRef idx="2">
+            <a:schemeClr val="accent1"/>
+          </a:effectRef>
+          <a:fontRef idx="minor">
+            <a:schemeClr val="lt1"/>
+          </a:fontRef>
+        </p:style>
+        <p:txBody>
+          <a:bodyPr rtlCol="0" anchor="ctr"/>
+          <a:lstStyle/>
+          <a:p>
+            <a:pPr algn="ctr"/>
+          </a:p>
+        </p:txBody>
+      </p:sp>
+      <p:sp>
+        <p:nvSpPr>
+          <p:cNvPr id="5" name="TextBox 4"/>
+          <p:cNvSpPr txBox="1"/>
+          <p:nvPr/>
+        </p:nvSpPr>
+        <p:spPr>
+          <a:xfrm>
+            <a:off x="457200" y="1207008"/>
+            <a:ext cx="6766560" cy="457200"/>
+          </a:xfrm>
+          <a:prstGeom prst="rect">
+            <a:avLst/>
+          </a:prstGeom>
+          <a:noFill/>
+        </p:spPr>
+        <p:txBody>
+          <a:bodyPr wrap="square">
+            <a:spAutoFit/>
+          </a:bodyPr>
+          <a:lstStyle/>
+          <a:p>
+            <a:pPr algn="l"/>
+            <a:r>
+              <a:rPr sz="1600" b="1">
+                <a:solidFill>
+                  <a:srgbClr val="1B376B"/>
+                </a:solidFill>
+              </a:rPr>
+              <a:t>Peamised järeldused</a:t>
+            </a:r>
+          </a:p>
+        </p:txBody>
+      </p:sp>
+      <p:sp>
+        <p:nvSpPr>
+          <p:cNvPr id="6" name="TextBox 5"/>
+          <p:cNvSpPr txBox="1"/>
+          <p:nvPr/>
+        </p:nvSpPr>
+        <p:spPr>
+          <a:xfrm>
+            <a:off x="457200" y="1737360"/>
+            <a:ext cx="6858000" cy="3566160"/>
+          </a:xfrm>
+          <a:prstGeom prst="rect">
+            <a:avLst/>
+          </a:prstGeom>
+          <a:noFill/>
+        </p:spPr>
+        <p:txBody>
+          <a:bodyPr wrap="square">
+            <a:spAutoFit/>
+          </a:bodyPr>
+          <a:lstStyle/>
+          <a:p>
+            <a:pPr>
+              <a:spcBef>
+                <a:spcPts val="300"/>
+              </a:spcBef>
+            </a:pPr>
+            <a:r>
+              <a:rPr sz="1400">
+                <a:solidFill>
+                  <a:srgbClr val="404040"/>
+                </a:solidFill>
+              </a:rPr>
+              <a:t>•  Finantsiliselt tasuvam: Kambja vald (ROI 3.4) ja Saue vald (ROI 3.36)</a:t>
+            </a:r>
+          </a:p>
+          <a:p>
+            <a:pPr>
+              <a:spcBef>
+                <a:spcPts val="300"/>
+              </a:spcBef>
+            </a:pPr>
+            <a:r>
+              <a:rPr sz="1400">
+                <a:solidFill>
+                  <a:srgbClr val="404040"/>
+                </a:solidFill>
+              </a:rPr>
+              <a:t>•  Suurim absoluutne säästupotentsiaal: Tallinn (üle 100M €/aastas)</a:t>
+            </a:r>
+          </a:p>
+          <a:p>
+            <a:pPr>
+              <a:spcBef>
+                <a:spcPts val="300"/>
+              </a:spcBef>
+            </a:pPr>
+            <a:r>
+              <a:rPr sz="1400">
+                <a:solidFill>
+                  <a:srgbClr val="404040"/>
+                </a:solidFill>
+              </a:rPr>
+              <a:t>•  Vajaduspõhiselt haavatavaimad: Lääneranna, Kihnu ja Räpina vald</a:t>
+            </a:r>
+          </a:p>
+          <a:p>
+            <a:pPr>
+              <a:spcBef>
+                <a:spcPts val="300"/>
+              </a:spcBef>
+            </a:pPr>
+            <a:r>
+              <a:rPr sz="1400">
+                <a:solidFill>
+                  <a:srgbClr val="404040"/>
+                </a:solidFill>
+              </a:rPr>
+              <a:t>•  Tallinna ja Tartu linna ROI on madalam (2.26–2.27), aga kogu mõju suurim</a:t>
+            </a:r>
+          </a:p>
+          <a:p>
+            <a:pPr>
+              <a:spcBef>
+                <a:spcPts val="300"/>
+              </a:spcBef>
+            </a:pPr>
+            <a:r>
+              <a:rPr sz="1400">
+                <a:solidFill>
+                  <a:srgbClr val="404040"/>
+                </a:solidFill>
+              </a:rPr>
+              <a:t>•  Kokkuvõte: kõrge ROI → väiksemad vallad; suur säästusumma → linnad</a:t>
+            </a:r>
+          </a:p>
+        </p:txBody>
+      </p:sp>
+      <p:sp>
+        <p:nvSpPr>
+          <p:cNvPr id="7" name="Rectangle 6"/>
+          <p:cNvSpPr/>
+          <p:nvPr/>
+        </p:nvSpPr>
+        <p:spPr>
+          <a:xfrm>
+            <a:off x="7680960" y="1143000"/>
+            <a:ext cx="4206240" cy="4343400"/>
+          </a:xfrm>
+          <a:prstGeom prst="rect">
+            <a:avLst/>
+          </a:prstGeom>
+          <a:solidFill>
+            <a:srgbClr val="1B376B"/>
+          </a:solidFill>
+          <a:ln>
+            <a:noFill/>
+          </a:ln>
+        </p:spPr>
+        <p:style>
+          <a:lnRef idx="1">
+            <a:schemeClr val="accent1"/>
+          </a:lnRef>
+          <a:fillRef idx="3">
+            <a:schemeClr val="accent1"/>
+          </a:fillRef>
+          <a:effectRef idx="2">
+            <a:schemeClr val="accent1"/>
+          </a:effectRef>
+          <a:fontRef idx="minor">
+            <a:schemeClr val="lt1"/>
+          </a:fontRef>
+        </p:style>
+        <p:txBody>
+          <a:bodyPr rtlCol="0" anchor="ctr"/>
+          <a:lstStyle/>
+          <a:p>
+            <a:pPr algn="ctr"/>
+          </a:p>
+        </p:txBody>
+      </p:sp>
+      <p:sp>
+        <p:nvSpPr>
+          <p:cNvPr id="8" name="TextBox 7"/>
+          <p:cNvSpPr txBox="1"/>
+          <p:nvPr/>
+        </p:nvSpPr>
+        <p:spPr>
+          <a:xfrm>
+            <a:off x="7818120" y="1207008"/>
+            <a:ext cx="3931920" cy="457200"/>
+          </a:xfrm>
+          <a:prstGeom prst="rect">
+            <a:avLst/>
+          </a:prstGeom>
+          <a:noFill/>
+        </p:spPr>
+        <p:txBody>
+          <a:bodyPr wrap="square">
+            <a:spAutoFit/>
+          </a:bodyPr>
+          <a:lstStyle/>
+          <a:p>
+            <a:pPr algn="l"/>
+            <a:r>
+              <a:rPr sz="1400" b="1">
+                <a:solidFill>
+                  <a:srgbClr val="FFFFFF"/>
+                </a:solidFill>
+              </a:rPr>
+              <a:t>Ärimeetrikute valemid</a:t>
+            </a:r>
+          </a:p>
+        </p:txBody>
+      </p:sp>
+      <p:sp>
+        <p:nvSpPr>
+          <p:cNvPr id="9" name="Rectangle 8"/>
+          <p:cNvSpPr/>
+          <p:nvPr/>
+        </p:nvSpPr>
+        <p:spPr>
+          <a:xfrm>
+            <a:off x="7726679" y="1783080"/>
+            <a:ext cx="4069080" cy="749808"/>
+          </a:xfrm>
+          <a:prstGeom prst="rect">
+            <a:avLst/>
+          </a:prstGeom>
+          <a:solidFill>
+            <a:srgbClr val="2E75B6"/>
+          </a:solidFill>
+          <a:ln>
+            <a:noFill/>
+          </a:ln>
+        </p:spPr>
+        <p:style>
+          <a:lnRef idx="1">
+            <a:schemeClr val="accent1"/>
+          </a:lnRef>
+          <a:fillRef idx="3">
+            <a:schemeClr val="accent1"/>
+          </a:fillRef>
+          <a:effectRef idx="2">
+            <a:schemeClr val="accent1"/>
+          </a:effectRef>
+          <a:fontRef idx="minor">
+            <a:schemeClr val="lt1"/>
+          </a:fontRef>
+        </p:style>
+        <p:txBody>
+          <a:bodyPr rtlCol="0" anchor="ctr"/>
+          <a:lstStyle/>
+          <a:p>
+            <a:pPr algn="ctr"/>
+          </a:p>
+        </p:txBody>
+      </p:sp>
+      <p:sp>
+        <p:nvSpPr>
+          <p:cNvPr id="10" name="TextBox 9"/>
+          <p:cNvSpPr txBox="1"/>
+          <p:nvPr/>
+        </p:nvSpPr>
+        <p:spPr>
+          <a:xfrm>
+            <a:off x="7836408" y="1801368"/>
+            <a:ext cx="3840480" cy="320040"/>
+          </a:xfrm>
+          <a:prstGeom prst="rect">
+            <a:avLst/>
+          </a:prstGeom>
+          <a:noFill/>
+        </p:spPr>
+        <p:txBody>
+          <a:bodyPr wrap="square">
+            <a:spAutoFit/>
+          </a:bodyPr>
+          <a:lstStyle/>
+          <a:p>
+            <a:pPr algn="l"/>
+            <a:r>
+              <a:rPr sz="1100" b="1">
+                <a:solidFill>
+                  <a:srgbClr val="FFFFFF"/>
+                </a:solidFill>
+              </a:rPr>
+              <a:t>ROI</a:t>
+            </a:r>
+          </a:p>
+        </p:txBody>
+      </p:sp>
+      <p:sp>
+        <p:nvSpPr>
+          <p:cNvPr id="11" name="TextBox 10"/>
+          <p:cNvSpPr txBox="1"/>
+          <p:nvPr/>
+        </p:nvSpPr>
+        <p:spPr>
+          <a:xfrm>
+            <a:off x="7836408" y="2130552"/>
+            <a:ext cx="3840480" cy="384048"/>
+          </a:xfrm>
+          <a:prstGeom prst="rect">
+            <a:avLst/>
+          </a:prstGeom>
+          <a:noFill/>
+        </p:spPr>
+        <p:txBody>
+          <a:bodyPr wrap="square">
+            <a:spAutoFit/>
+          </a:bodyPr>
+          <a:lstStyle/>
+          <a:p>
+            <a:pPr algn="l"/>
+            <a:r>
+              <a:rPr sz="1000" b="0">
+                <a:solidFill>
+                  <a:srgbClr val="BDD7EE"/>
+                </a:solidFill>
+              </a:rPr>
+              <a:t>sääst_eur_aastas
+/ investeering</a:t>
+            </a:r>
+          </a:p>
+        </p:txBody>
+      </p:sp>
+      <p:sp>
+        <p:nvSpPr>
+          <p:cNvPr id="12" name="Rectangle 11"/>
+          <p:cNvSpPr/>
+          <p:nvPr/>
+        </p:nvSpPr>
+        <p:spPr>
+          <a:xfrm>
+            <a:off x="7726679" y="2606040"/>
+            <a:ext cx="4069080" cy="749808"/>
+          </a:xfrm>
+          <a:prstGeom prst="rect">
+            <a:avLst/>
+          </a:prstGeom>
+          <a:solidFill>
+            <a:srgbClr val="2E75B6"/>
+          </a:solidFill>
+          <a:ln>
+            <a:noFill/>
+          </a:ln>
+        </p:spPr>
+        <p:style>
+          <a:lnRef idx="1">
+            <a:schemeClr val="accent1"/>
+          </a:lnRef>
+          <a:fillRef idx="3">
+            <a:schemeClr val="accent1"/>
+          </a:fillRef>
+          <a:effectRef idx="2">
+            <a:schemeClr val="accent1"/>
+          </a:effectRef>
+          <a:fontRef idx="minor">
+            <a:schemeClr val="lt1"/>
+          </a:fontRef>
+        </p:style>
+        <p:txBody>
+          <a:bodyPr rtlCol="0" anchor="ctr"/>
+          <a:lstStyle/>
+          <a:p>
+            <a:pPr algn="ctr"/>
+          </a:p>
+        </p:txBody>
+      </p:sp>
+      <p:sp>
+        <p:nvSpPr>
+          <p:cNvPr id="13" name="TextBox 12"/>
+          <p:cNvSpPr txBox="1"/>
+          <p:nvPr/>
+        </p:nvSpPr>
+        <p:spPr>
+          <a:xfrm>
+            <a:off x="7836408" y="2624328"/>
+            <a:ext cx="3840480" cy="320040"/>
+          </a:xfrm>
+          <a:prstGeom prst="rect">
+            <a:avLst/>
+          </a:prstGeom>
+          <a:noFill/>
+        </p:spPr>
+        <p:txBody>
+          <a:bodyPr wrap="square">
+            <a:spAutoFit/>
+          </a:bodyPr>
+          <a:lstStyle/>
+          <a:p>
+            <a:pPr algn="l"/>
+            <a:r>
+              <a:rPr sz="1100" b="1">
+                <a:solidFill>
+                  <a:srgbClr val="FFFFFF"/>
+                </a:solidFill>
+              </a:rPr>
+              <a:t>VAJADUSE SKOOR</a:t>
+            </a:r>
+          </a:p>
+        </p:txBody>
+      </p:sp>
+      <p:sp>
+        <p:nvSpPr>
+          <p:cNvPr id="14" name="TextBox 13"/>
+          <p:cNvSpPr txBox="1"/>
+          <p:nvPr/>
+        </p:nvSpPr>
+        <p:spPr>
+          <a:xfrm>
+            <a:off x="7836408" y="2953512"/>
+            <a:ext cx="3840480" cy="384048"/>
+          </a:xfrm>
+          <a:prstGeom prst="rect">
+            <a:avLst/>
+          </a:prstGeom>
+          <a:noFill/>
+        </p:spPr>
+        <p:txBody>
+          <a:bodyPr wrap="square">
+            <a:spAutoFit/>
+          </a:bodyPr>
+          <a:lstStyle/>
+          <a:p>
+            <a:pPr algn="l"/>
+            <a:r>
+              <a:rPr sz="1000" b="0">
+                <a:solidFill>
+                  <a:srgbClr val="BDD7EE"/>
+                </a:solidFill>
+              </a:rPr>
+              <a:t>soojakadu_kwh
+/ kogupindala_m²</a:t>
+            </a:r>
+          </a:p>
+        </p:txBody>
+      </p:sp>
+      <p:sp>
+        <p:nvSpPr>
+          <p:cNvPr id="15" name="Rectangle 14"/>
+          <p:cNvSpPr/>
+          <p:nvPr/>
+        </p:nvSpPr>
+        <p:spPr>
+          <a:xfrm>
+            <a:off x="7726679" y="3429000"/>
+            <a:ext cx="4069080" cy="749808"/>
+          </a:xfrm>
+          <a:prstGeom prst="rect">
+            <a:avLst/>
+          </a:prstGeom>
+          <a:solidFill>
+            <a:srgbClr val="2E75B6"/>
+          </a:solidFill>
+          <a:ln>
+            <a:noFill/>
+          </a:ln>
+        </p:spPr>
+        <p:style>
+          <a:lnRef idx="1">
+            <a:schemeClr val="accent1"/>
+          </a:lnRef>
+          <a:fillRef idx="3">
+            <a:schemeClr val="accent1"/>
+          </a:fillRef>
+          <a:effectRef idx="2">
+            <a:schemeClr val="accent1"/>
+          </a:effectRef>
+          <a:fontRef idx="minor">
+            <a:schemeClr val="lt1"/>
+          </a:fontRef>
+        </p:style>
+        <p:txBody>
+          <a:bodyPr rtlCol="0" anchor="ctr"/>
+          <a:lstStyle/>
+          <a:p>
+            <a:pPr algn="ctr"/>
+          </a:p>
+        </p:txBody>
+      </p:sp>
+      <p:sp>
+        <p:nvSpPr>
+          <p:cNvPr id="16" name="TextBox 15"/>
+          <p:cNvSpPr txBox="1"/>
+          <p:nvPr/>
+        </p:nvSpPr>
+        <p:spPr>
+          <a:xfrm>
+            <a:off x="7836408" y="3447288"/>
+            <a:ext cx="3840480" cy="320040"/>
+          </a:xfrm>
+          <a:prstGeom prst="rect">
+            <a:avLst/>
+          </a:prstGeom>
+          <a:noFill/>
+        </p:spPr>
+        <p:txBody>
+          <a:bodyPr wrap="square">
+            <a:spAutoFit/>
+          </a:bodyPr>
+          <a:lstStyle/>
+          <a:p>
+            <a:pPr algn="l"/>
+            <a:r>
+              <a:rPr sz="1100" b="1">
+                <a:solidFill>
+                  <a:srgbClr val="FFFFFF"/>
+                </a:solidFill>
+              </a:rPr>
+              <a:t>INVESTEERING</a:t>
+            </a:r>
+          </a:p>
+        </p:txBody>
+      </p:sp>
+      <p:sp>
+        <p:nvSpPr>
+          <p:cNvPr id="17" name="TextBox 16"/>
+          <p:cNvSpPr txBox="1"/>
+          <p:nvPr/>
+        </p:nvSpPr>
+        <p:spPr>
+          <a:xfrm>
+            <a:off x="7836408" y="3776472"/>
+            <a:ext cx="3840480" cy="384048"/>
+          </a:xfrm>
+          <a:prstGeom prst="rect">
+            <a:avLst/>
+          </a:prstGeom>
+          <a:noFill/>
+        </p:spPr>
+        <p:txBody>
+          <a:bodyPr wrap="square">
+            <a:spAutoFit/>
+          </a:bodyPr>
+          <a:lstStyle/>
+          <a:p>
+            <a:pPr algn="l"/>
+            <a:r>
+              <a:rPr sz="1000" b="0">
+                <a:solidFill>
+                  <a:srgbClr val="BDD7EE"/>
+                </a:solidFill>
+              </a:rPr>
+              <a:t>kogupindala_m² × 250
+(€/m² proxy)</a:t>
+            </a:r>
+          </a:p>
+        </p:txBody>
+      </p:sp>
+      <p:sp>
+        <p:nvSpPr>
+          <p:cNvPr id="18" name="Rectangle 17"/>
+          <p:cNvSpPr/>
+          <p:nvPr/>
+        </p:nvSpPr>
+        <p:spPr>
+          <a:xfrm>
+            <a:off x="7726679" y="4251960"/>
+            <a:ext cx="4069080" cy="749808"/>
+          </a:xfrm>
+          <a:prstGeom prst="rect">
+            <a:avLst/>
+          </a:prstGeom>
+          <a:solidFill>
+            <a:srgbClr val="2E75B6"/>
+          </a:solidFill>
+          <a:ln>
+            <a:noFill/>
+          </a:ln>
+        </p:spPr>
+        <p:style>
+          <a:lnRef idx="1">
+            <a:schemeClr val="accent1"/>
+          </a:lnRef>
+          <a:fillRef idx="3">
+            <a:schemeClr val="accent1"/>
+          </a:fillRef>
+          <a:effectRef idx="2">
+            <a:schemeClr val="accent1"/>
+          </a:effectRef>
+          <a:fontRef idx="minor">
+            <a:schemeClr val="lt1"/>
+          </a:fontRef>
+        </p:style>
+        <p:txBody>
+          <a:bodyPr rtlCol="0" anchor="ctr"/>
+          <a:lstStyle/>
+          <a:p>
+            <a:pPr algn="ctr"/>
+          </a:p>
+        </p:txBody>
+      </p:sp>
+      <p:sp>
+        <p:nvSpPr>
+          <p:cNvPr id="19" name="TextBox 18"/>
+          <p:cNvSpPr txBox="1"/>
+          <p:nvPr/>
+        </p:nvSpPr>
+        <p:spPr>
+          <a:xfrm>
+            <a:off x="7836408" y="4270248"/>
+            <a:ext cx="3840480" cy="320040"/>
+          </a:xfrm>
+          <a:prstGeom prst="rect">
+            <a:avLst/>
+          </a:prstGeom>
+          <a:noFill/>
+        </p:spPr>
+        <p:txBody>
+          <a:bodyPr wrap="square">
+            <a:spAutoFit/>
+          </a:bodyPr>
+          <a:lstStyle/>
+          <a:p>
+            <a:pPr algn="l"/>
+            <a:r>
+              <a:rPr sz="1100" b="1">
+                <a:solidFill>
+                  <a:srgbClr val="FFFFFF"/>
+                </a:solidFill>
+              </a:rPr>
+              <a:t>PRIORITY</a:t>
+            </a:r>
+          </a:p>
+        </p:txBody>
+      </p:sp>
+      <p:sp>
+        <p:nvSpPr>
+          <p:cNvPr id="20" name="TextBox 19"/>
+          <p:cNvSpPr txBox="1"/>
+          <p:nvPr/>
+        </p:nvSpPr>
+        <p:spPr>
+          <a:xfrm>
+            <a:off x="7836408" y="4599432"/>
+            <a:ext cx="3840480" cy="384048"/>
+          </a:xfrm>
+          <a:prstGeom prst="rect">
+            <a:avLst/>
+          </a:prstGeom>
+          <a:noFill/>
+        </p:spPr>
+        <p:txBody>
+          <a:bodyPr wrap="square">
+            <a:spAutoFit/>
+          </a:bodyPr>
+          <a:lstStyle/>
+          <a:p>
+            <a:pPr algn="l"/>
+            <a:r>
+              <a:rPr sz="1000" b="0">
+                <a:solidFill>
+                  <a:srgbClr val="BDD7EE"/>
+                </a:solidFill>
+              </a:rPr>
+              <a:t>LOG(sääst+1) × LOG(skoor+1)
+× LOG(pindala+1)</a:t>
+            </a:r>
+          </a:p>
+        </p:txBody>
+      </p:sp>
+      <p:sp>
+        <p:nvSpPr>
+          <p:cNvPr id="21" name="Rectangle 20"/>
+          <p:cNvSpPr/>
+          <p:nvPr/>
+        </p:nvSpPr>
+        <p:spPr>
+          <a:xfrm>
+            <a:off x="7726679" y="5074920"/>
+            <a:ext cx="4069080" cy="749808"/>
+          </a:xfrm>
+          <a:prstGeom prst="rect">
+            <a:avLst/>
+          </a:prstGeom>
+          <a:solidFill>
+            <a:srgbClr val="2E75B6"/>
+          </a:solidFill>
+          <a:ln>
+            <a:noFill/>
+          </a:ln>
+        </p:spPr>
+        <p:style>
+          <a:lnRef idx="1">
+            <a:schemeClr val="accent1"/>
+          </a:lnRef>
+          <a:fillRef idx="3">
+            <a:schemeClr val="accent1"/>
+          </a:fillRef>
+          <a:effectRef idx="2">
+            <a:schemeClr val="accent1"/>
+          </a:effectRef>
+          <a:fontRef idx="minor">
+            <a:schemeClr val="lt1"/>
+          </a:fontRef>
+        </p:style>
+        <p:txBody>
+          <a:bodyPr rtlCol="0" anchor="ctr"/>
+          <a:lstStyle/>
+          <a:p>
+            <a:pPr algn="ctr"/>
+          </a:p>
+        </p:txBody>
+      </p:sp>
+      <p:sp>
+        <p:nvSpPr>
+          <p:cNvPr id="22" name="TextBox 21"/>
+          <p:cNvSpPr txBox="1"/>
+          <p:nvPr/>
+        </p:nvSpPr>
+        <p:spPr>
+          <a:xfrm>
+            <a:off x="7836408" y="5093208"/>
+            <a:ext cx="3840480" cy="320040"/>
+          </a:xfrm>
+          <a:prstGeom prst="rect">
+            <a:avLst/>
+          </a:prstGeom>
+          <a:noFill/>
+        </p:spPr>
+        <p:txBody>
+          <a:bodyPr wrap="square">
+            <a:spAutoFit/>
+          </a:bodyPr>
+          <a:lstStyle/>
+          <a:p>
+            <a:pPr algn="l"/>
+            <a:r>
+              <a:rPr sz="1100" b="1">
+                <a:solidFill>
+                  <a:srgbClr val="FFFFFF"/>
+                </a:solidFill>
+              </a:rPr>
+              <a:t>TASUVUS</a:t>
+            </a:r>
+          </a:p>
+        </p:txBody>
+      </p:sp>
+      <p:sp>
+        <p:nvSpPr>
+          <p:cNvPr id="23" name="TextBox 22"/>
+          <p:cNvSpPr txBox="1"/>
+          <p:nvPr/>
+        </p:nvSpPr>
+        <p:spPr>
+          <a:xfrm>
+            <a:off x="7836408" y="5422392"/>
+            <a:ext cx="3840480" cy="384048"/>
+          </a:xfrm>
+          <a:prstGeom prst="rect">
+            <a:avLst/>
+          </a:prstGeom>
+          <a:noFill/>
+        </p:spPr>
+        <p:txBody>
+          <a:bodyPr wrap="square">
+            <a:spAutoFit/>
+          </a:bodyPr>
+          <a:lstStyle/>
+          <a:p>
+            <a:pPr algn="l"/>
+            <a:r>
+              <a:rPr sz="1000" b="0">
+                <a:solidFill>
+                  <a:srgbClr val="BDD7EE"/>
+                </a:solidFill>
+              </a:rPr>
+              <a:t>1 / NULLIF(roi, 0)</a:t>
+            </a:r>
+          </a:p>
+        </p:txBody>
+      </p:sp>
+    </p:spTree>
+  </p:cSld>
+  <p:clrMapOvr>
+    <a:masterClrMapping/>
+  </p:clrMapOvr>
+</p:sld>
+</file>
+
+<file path=ppt/slides/slide9.xml><?xml version="1.0" encoding="utf-8"?>
+<p:sld xmlns:a="http://schemas.openxmlformats.org/drawingml/2006/main" xmlns:p="http://schemas.openxmlformats.org/presentationml/2006/main" xmlns:r="http://schemas.openxmlformats.org/officeDocument/2006/relationships">
+  <p:cSld>
+    <p:bg>
+      <p:bgPr>
+        <a:solidFill>
+          <a:srgbClr val="FFFFFF"/>
+        </a:solidFill>
+        <a:effectLst/>
+      </p:bgPr>
+    </p:bg>
+    <p:spTree>
+      <p:nvGrpSpPr>
+        <p:cNvPr id="1" name=""/>
+        <p:cNvGrpSpPr/>
+        <p:nvPr/>
+      </p:nvGrpSpPr>
+      <p:grpSpPr/>
+      <p:sp>
+        <p:nvSpPr>
+          <p:cNvPr id="2" name="Rectangle 1"/>
+          <p:cNvSpPr/>
+          <p:nvPr/>
+        </p:nvSpPr>
+        <p:spPr>
+          <a:xfrm>
+            <a:off x="0" y="0"/>
+            <a:ext cx="12188952" cy="1005840"/>
+          </a:xfrm>
+          <a:prstGeom prst="rect">
+            <a:avLst/>
+          </a:prstGeom>
+          <a:solidFill>
+            <a:srgbClr val="1B376B"/>
+          </a:solidFill>
+          <a:ln>
+            <a:noFill/>
+          </a:ln>
+        </p:spPr>
+        <p:style>
+          <a:lnRef idx="1">
+            <a:schemeClr val="accent1"/>
+          </a:lnRef>
+          <a:fillRef idx="3">
+            <a:schemeClr val="accent1"/>
+          </a:fillRef>
+          <a:effectRef idx="2">
+            <a:schemeClr val="accent1"/>
+          </a:effectRef>
+          <a:fontRef idx="minor">
+            <a:schemeClr val="lt1"/>
+          </a:fontRef>
+        </p:style>
+        <p:txBody>
+          <a:bodyPr rtlCol="0" anchor="ctr"/>
+          <a:lstStyle/>
+          <a:p>
+            <a:pPr algn="ctr"/>
+          </a:p>
+        </p:txBody>
+      </p:sp>
+      <p:sp>
+        <p:nvSpPr>
+          <p:cNvPr id="3" name="TextBox 2"/>
+          <p:cNvSpPr txBox="1"/>
+          <p:nvPr/>
+        </p:nvSpPr>
+        <p:spPr>
+          <a:xfrm>
+            <a:off x="365760" y="91440"/>
+            <a:ext cx="11430000" cy="777240"/>
+          </a:xfrm>
+          <a:prstGeom prst="rect">
+            <a:avLst/>
+          </a:prstGeom>
+          <a:noFill/>
+        </p:spPr>
+        <p:txBody>
+          <a:bodyPr wrap="square">
+            <a:spAutoFit/>
+          </a:bodyPr>
+          <a:lstStyle/>
+          <a:p>
+            <a:pPr algn="l"/>
+            <a:r>
+              <a:rPr sz="2800" b="1">
+                <a:solidFill>
+                  <a:srgbClr val="FFFFFF"/>
+                </a:solidFill>
+              </a:rPr>
+              <a:t>Dashboard: põhitulemused</a:t>
+            </a:r>
+          </a:p>
+        </p:txBody>
+      </p:sp>
+      <p:sp>
+        <p:nvSpPr>
+          <p:cNvPr id="4" name="Rectangle 3"/>
+          <p:cNvSpPr/>
+          <p:nvPr/>
+        </p:nvSpPr>
+        <p:spPr>
+          <a:xfrm>
+            <a:off x="274320" y="1143000"/>
+            <a:ext cx="2697480" cy="1371600"/>
+          </a:xfrm>
+          <a:prstGeom prst="rect">
+            <a:avLst/>
+          </a:prstGeom>
+          <a:solidFill>
+            <a:srgbClr val="1B376B"/>
+          </a:solidFill>
+          <a:ln>
+            <a:noFill/>
+          </a:ln>
+        </p:spPr>
+        <p:style>
+          <a:lnRef idx="1">
+            <a:schemeClr val="accent1"/>
+          </a:lnRef>
+          <a:fillRef idx="3">
+            <a:schemeClr val="accent1"/>
+          </a:fillRef>
+          <a:effectRef idx="2">
+            <a:schemeClr val="accent1"/>
+          </a:effectRef>
+          <a:fontRef idx="minor">
+            <a:schemeClr val="lt1"/>
+          </a:fontRef>
+        </p:style>
+        <p:txBody>
+          <a:bodyPr rtlCol="0" anchor="ctr"/>
+          <a:lstStyle/>
+          <a:p>
+            <a:pPr algn="ctr"/>
+          </a:p>
+        </p:txBody>
+      </p:sp>
+      <p:sp>
+        <p:nvSpPr>
+          <p:cNvPr id="5" name="TextBox 4"/>
+          <p:cNvSpPr txBox="1"/>
+          <p:nvPr/>
+        </p:nvSpPr>
+        <p:spPr>
+          <a:xfrm>
+            <a:off x="365760" y="1188720"/>
+            <a:ext cx="2514600" cy="502920"/>
+          </a:xfrm>
+          <a:prstGeom prst="rect">
+            <a:avLst/>
+          </a:prstGeom>
+          <a:noFill/>
+        </p:spPr>
+        <p:txBody>
+          <a:bodyPr wrap="square">
+            <a:spAutoFit/>
+          </a:bodyPr>
+          <a:lstStyle/>
+          <a:p>
+            <a:pPr algn="ctr"/>
+            <a:r>
+              <a:rPr sz="1300" b="0">
+                <a:solidFill>
+                  <a:srgbClr val="FFFFFF"/>
+                </a:solidFill>
+              </a:rPr>
+              <a:t>Soojakadu Eestis</a:t>
+            </a:r>
+          </a:p>
+        </p:txBody>
+      </p:sp>
+      <p:sp>
+        <p:nvSpPr>
+          <p:cNvPr id="6" name="TextBox 5"/>
+          <p:cNvSpPr txBox="1"/>
+          <p:nvPr/>
+        </p:nvSpPr>
+        <p:spPr>
+          <a:xfrm>
+            <a:off x="320040" y="1691640"/>
+            <a:ext cx="2606040" cy="685800"/>
+          </a:xfrm>
+          <a:prstGeom prst="rect">
+            <a:avLst/>
+          </a:prstGeom>
+          <a:noFill/>
+        </p:spPr>
+        <p:txBody>
+          <a:bodyPr wrap="square">
+            <a:spAutoFit/>
+          </a:bodyPr>
+          <a:lstStyle/>
+          <a:p>
+            <a:pPr algn="ctr"/>
+            <a:r>
+              <a:rPr sz="2200" b="1">
+                <a:solidFill>
+                  <a:srgbClr val="FFFFFF"/>
+                </a:solidFill>
+              </a:rPr>
+              <a:t>9.26B kWh</a:t>
+            </a:r>
+          </a:p>
+        </p:txBody>
+      </p:sp>
+      <p:sp>
+        <p:nvSpPr>
+          <p:cNvPr id="7" name="Rectangle 6"/>
+          <p:cNvSpPr/>
+          <p:nvPr/>
+        </p:nvSpPr>
+        <p:spPr>
+          <a:xfrm>
+            <a:off x="3182112" y="1143000"/>
+            <a:ext cx="2697480" cy="1371600"/>
+          </a:xfrm>
+          <a:prstGeom prst="rect">
+            <a:avLst/>
+          </a:prstGeom>
+          <a:solidFill>
+            <a:srgbClr val="2E75B6"/>
+          </a:solidFill>
+          <a:ln>
+            <a:noFill/>
+          </a:ln>
+        </p:spPr>
+        <p:style>
+          <a:lnRef idx="1">
+            <a:schemeClr val="accent1"/>
+          </a:lnRef>
+          <a:fillRef idx="3">
+            <a:schemeClr val="accent1"/>
+          </a:fillRef>
+          <a:effectRef idx="2">
+            <a:schemeClr val="accent1"/>
+          </a:effectRef>
+          <a:fontRef idx="minor">
+            <a:schemeClr val="lt1"/>
+          </a:fontRef>
+        </p:style>
+        <p:txBody>
+          <a:bodyPr rtlCol="0" anchor="ctr"/>
+          <a:lstStyle/>
+          <a:p>
+            <a:pPr algn="ctr"/>
+          </a:p>
+        </p:txBody>
+      </p:sp>
+      <p:sp>
+        <p:nvSpPr>
+          <p:cNvPr id="8" name="TextBox 7"/>
+          <p:cNvSpPr txBox="1"/>
+          <p:nvPr/>
+        </p:nvSpPr>
+        <p:spPr>
+          <a:xfrm>
+            <a:off x="3273552" y="1188720"/>
+            <a:ext cx="2514600" cy="502920"/>
+          </a:xfrm>
+          <a:prstGeom prst="rect">
+            <a:avLst/>
+          </a:prstGeom>
+          <a:noFill/>
+        </p:spPr>
+        <p:txBody>
+          <a:bodyPr wrap="square">
+            <a:spAutoFit/>
+          </a:bodyPr>
+          <a:lstStyle/>
+          <a:p>
+            <a:pPr algn="ctr"/>
+            <a:r>
+              <a:rPr sz="1300" b="0">
+                <a:solidFill>
+                  <a:srgbClr val="FFFFFF"/>
+                </a:solidFill>
+              </a:rPr>
+              <a:t>Kulu</a:t>
+            </a:r>
+          </a:p>
+        </p:txBody>
+      </p:sp>
+      <p:sp>
+        <p:nvSpPr>
+          <p:cNvPr id="9" name="TextBox 8"/>
+          <p:cNvSpPr txBox="1"/>
+          <p:nvPr/>
+        </p:nvSpPr>
+        <p:spPr>
+          <a:xfrm>
+            <a:off x="3227832" y="1691640"/>
+            <a:ext cx="2606040" cy="685800"/>
+          </a:xfrm>
+          <a:prstGeom prst="rect">
+            <a:avLst/>
+          </a:prstGeom>
+          <a:noFill/>
+        </p:spPr>
+        <p:txBody>
+          <a:bodyPr wrap="square">
+            <a:spAutoFit/>
+          </a:bodyPr>
+          <a:lstStyle/>
+          <a:p>
+            <a:pPr algn="ctr"/>
+            <a:r>
+              <a:rPr sz="2200" b="1">
+                <a:solidFill>
+                  <a:srgbClr val="FFFFFF"/>
+                </a:solidFill>
+              </a:rPr>
+              <a:t>660M €</a:t>
+            </a:r>
+          </a:p>
+        </p:txBody>
+      </p:sp>
+      <p:sp>
+        <p:nvSpPr>
+          <p:cNvPr id="10" name="Rectangle 9"/>
+          <p:cNvSpPr/>
+          <p:nvPr/>
+        </p:nvSpPr>
+        <p:spPr>
+          <a:xfrm>
+            <a:off x="6089904" y="1143000"/>
+            <a:ext cx="2697480" cy="1371600"/>
+          </a:xfrm>
+          <a:prstGeom prst="rect">
+            <a:avLst/>
+          </a:prstGeom>
+          <a:solidFill>
+            <a:srgbClr val="5A9E6F"/>
+          </a:solidFill>
+          <a:ln>
+            <a:noFill/>
+          </a:ln>
+        </p:spPr>
+        <p:style>
+          <a:lnRef idx="1">
+            <a:schemeClr val="accent1"/>
+          </a:lnRef>
+          <a:fillRef idx="3">
+            <a:schemeClr val="accent1"/>
+          </a:fillRef>
+          <a:effectRef idx="2">
+            <a:schemeClr val="accent1"/>
+          </a:effectRef>
+          <a:fontRef idx="minor">
+            <a:schemeClr val="lt1"/>
+          </a:fontRef>
+        </p:style>
+        <p:txBody>
+          <a:bodyPr rtlCol="0" anchor="ctr"/>
+          <a:lstStyle/>
+          <a:p>
+            <a:pPr algn="ctr"/>
+          </a:p>
+        </p:txBody>
+      </p:sp>
+      <p:sp>
+        <p:nvSpPr>
+          <p:cNvPr id="11" name="TextBox 10"/>
+          <p:cNvSpPr txBox="1"/>
+          <p:nvPr/>
+        </p:nvSpPr>
+        <p:spPr>
+          <a:xfrm>
+            <a:off x="6181344" y="1188720"/>
+            <a:ext cx="2514600" cy="502920"/>
+          </a:xfrm>
+          <a:prstGeom prst="rect">
+            <a:avLst/>
+          </a:prstGeom>
+          <a:noFill/>
+        </p:spPr>
+        <p:txBody>
+          <a:bodyPr wrap="square">
+            <a:spAutoFit/>
+          </a:bodyPr>
+          <a:lstStyle/>
+          <a:p>
+            <a:pPr algn="ctr"/>
+            <a:r>
+              <a:rPr sz="1300" b="0">
+                <a:solidFill>
+                  <a:srgbClr val="FFFFFF"/>
+                </a:solidFill>
+              </a:rPr>
+              <a:t>Säästupotentsiaal</a:t>
+            </a:r>
+          </a:p>
+        </p:txBody>
+      </p:sp>
+      <p:sp>
+        <p:nvSpPr>
+          <p:cNvPr id="12" name="TextBox 11"/>
+          <p:cNvSpPr txBox="1"/>
+          <p:nvPr/>
+        </p:nvSpPr>
+        <p:spPr>
+          <a:xfrm>
+            <a:off x="6135624" y="1691640"/>
+            <a:ext cx="2606040" cy="685800"/>
+          </a:xfrm>
+          <a:prstGeom prst="rect">
+            <a:avLst/>
+          </a:prstGeom>
+          <a:noFill/>
+        </p:spPr>
+        <p:txBody>
+          <a:bodyPr wrap="square">
+            <a:spAutoFit/>
+          </a:bodyPr>
+          <a:lstStyle/>
+          <a:p>
+            <a:pPr algn="ctr"/>
+            <a:r>
+              <a:rPr sz="2200" b="1">
+                <a:solidFill>
+                  <a:srgbClr val="FFFFFF"/>
+                </a:solidFill>
+              </a:rPr>
+              <a:t>423M €/aastas</a:t>
+            </a:r>
+          </a:p>
+        </p:txBody>
+      </p:sp>
+      <p:sp>
+        <p:nvSpPr>
+          <p:cNvPr id="13" name="Rectangle 12"/>
+          <p:cNvSpPr/>
+          <p:nvPr/>
+        </p:nvSpPr>
+        <p:spPr>
+          <a:xfrm>
+            <a:off x="8997696" y="1143000"/>
+            <a:ext cx="2697480" cy="1371600"/>
+          </a:xfrm>
+          <a:prstGeom prst="rect">
+            <a:avLst/>
+          </a:prstGeom>
+          <a:solidFill>
+            <a:srgbClr val="ED7D31"/>
+          </a:solidFill>
+          <a:ln>
+            <a:noFill/>
+          </a:ln>
+        </p:spPr>
+        <p:style>
+          <a:lnRef idx="1">
+            <a:schemeClr val="accent1"/>
+          </a:lnRef>
+          <a:fillRef idx="3">
+            <a:schemeClr val="accent1"/>
+          </a:fillRef>
+          <a:effectRef idx="2">
+            <a:schemeClr val="accent1"/>
+          </a:effectRef>
+          <a:fontRef idx="minor">
+            <a:schemeClr val="lt1"/>
+          </a:fontRef>
+        </p:style>
+        <p:txBody>
+          <a:bodyPr rtlCol="0" anchor="ctr"/>
+          <a:lstStyle/>
+          <a:p>
+            <a:pPr algn="ctr"/>
+          </a:p>
+        </p:txBody>
+      </p:sp>
+      <p:sp>
+        <p:nvSpPr>
+          <p:cNvPr id="14" name="TextBox 13"/>
+          <p:cNvSpPr txBox="1"/>
+          <p:nvPr/>
+        </p:nvSpPr>
+        <p:spPr>
+          <a:xfrm>
+            <a:off x="9089136" y="1188720"/>
+            <a:ext cx="2514600" cy="502920"/>
+          </a:xfrm>
+          <a:prstGeom prst="rect">
+            <a:avLst/>
+          </a:prstGeom>
+          <a:noFill/>
+        </p:spPr>
+        <p:txBody>
+          <a:bodyPr wrap="square">
+            <a:spAutoFit/>
+          </a:bodyPr>
+          <a:lstStyle/>
+          <a:p>
+            <a:pPr algn="ctr"/>
+            <a:r>
+              <a:rPr sz="1300" b="0">
+                <a:solidFill>
+                  <a:srgbClr val="FFFFFF"/>
+                </a:solidFill>
+              </a:rPr>
+              <a:t>Keskmine intensiivsus</a:t>
+            </a:r>
+          </a:p>
+        </p:txBody>
+      </p:sp>
+      <p:sp>
+        <p:nvSpPr>
+          <p:cNvPr id="15" name="TextBox 14"/>
+          <p:cNvSpPr txBox="1"/>
+          <p:nvPr/>
+        </p:nvSpPr>
+        <p:spPr>
+          <a:xfrm>
+            <a:off x="9043416" y="1691640"/>
+            <a:ext cx="2606040" cy="685800"/>
+          </a:xfrm>
+          <a:prstGeom prst="rect">
+            <a:avLst/>
+          </a:prstGeom>
+          <a:noFill/>
+        </p:spPr>
+        <p:txBody>
+          <a:bodyPr wrap="square">
+            <a:spAutoFit/>
+          </a:bodyPr>
+          <a:lstStyle/>
+          <a:p>
+            <a:pPr algn="ctr"/>
+            <a:r>
+              <a:rPr sz="2200" b="1">
+                <a:solidFill>
+                  <a:srgbClr val="FFFFFF"/>
+                </a:solidFill>
+              </a:rPr>
+              <a:t>149.93 kWh/m²</a:t>
+            </a:r>
+          </a:p>
+        </p:txBody>
+      </p:sp>
+      <p:sp>
+        <p:nvSpPr>
+          <p:cNvPr id="16" name="Rectangle 15"/>
+          <p:cNvSpPr/>
+          <p:nvPr/>
+        </p:nvSpPr>
+        <p:spPr>
+          <a:xfrm>
+            <a:off x="274320" y="2743200"/>
+            <a:ext cx="3794760" cy="3474720"/>
+          </a:xfrm>
+          <a:prstGeom prst="rect">
+            <a:avLst/>
+          </a:prstGeom>
+          <a:solidFill>
+            <a:srgbClr val="F2F2F2"/>
+          </a:solidFill>
+          <a:ln>
+            <a:noFill/>
+          </a:ln>
+        </p:spPr>
+        <p:style>
+          <a:lnRef idx="1">
+            <a:schemeClr val="accent1"/>
+          </a:lnRef>
+          <a:fillRef idx="3">
+            <a:schemeClr val="accent1"/>
+          </a:fillRef>
+          <a:effectRef idx="2">
+            <a:schemeClr val="accent1"/>
+          </a:effectRef>
+          <a:fontRef idx="minor">
+            <a:schemeClr val="lt1"/>
+          </a:fontRef>
+        </p:style>
+        <p:txBody>
+          <a:bodyPr rtlCol="0" anchor="ctr"/>
+          <a:lstStyle/>
+          <a:p>
+            <a:pPr algn="ctr"/>
+          </a:p>
+        </p:txBody>
+      </p:sp>
+      <p:sp>
+        <p:nvSpPr>
+          <p:cNvPr id="17" name="TextBox 16"/>
+          <p:cNvSpPr txBox="1"/>
+          <p:nvPr/>
+        </p:nvSpPr>
+        <p:spPr>
+          <a:xfrm>
+            <a:off x="384048" y="2807208"/>
+            <a:ext cx="3566160" cy="594360"/>
+          </a:xfrm>
+          <a:prstGeom prst="rect">
+            <a:avLst/>
+          </a:prstGeom>
+          <a:noFill/>
+        </p:spPr>
+        <p:txBody>
+          <a:bodyPr wrap="square">
+            <a:spAutoFit/>
+          </a:bodyPr>
+          <a:lstStyle/>
+          <a:p>
+            <a:pPr algn="l"/>
+            <a:r>
+              <a:rPr sz="1200" b="1">
+                <a:solidFill>
+                  <a:srgbClr val="2E75B6"/>
+                </a:solidFill>
+              </a:rPr>
+              <a:t>Suurim vajadus renoveerimiseks (vajaduse skoor)</a:t>
+            </a:r>
+          </a:p>
+        </p:txBody>
+      </p:sp>
+      <p:sp>
+        <p:nvSpPr>
+          <p:cNvPr id="18" name="TextBox 17"/>
+          <p:cNvSpPr txBox="1"/>
+          <p:nvPr/>
+        </p:nvSpPr>
+        <p:spPr>
+          <a:xfrm>
+            <a:off x="384048" y="3429000"/>
+            <a:ext cx="3566160" cy="2651760"/>
+          </a:xfrm>
+          <a:prstGeom prst="rect">
+            <a:avLst/>
+          </a:prstGeom>
+          <a:noFill/>
+        </p:spPr>
+        <p:txBody>
+          <a:bodyPr wrap="square">
+            <a:spAutoFit/>
+          </a:bodyPr>
+          <a:lstStyle/>
+          <a:p>
+            <a:pPr algn="l"/>
+            <a:r>
+              <a:rPr sz="1200" b="0">
+                <a:solidFill>
+                  <a:srgbClr val="404040"/>
+                </a:solidFill>
+              </a:rPr>
+              <a:t>Lääneranna vald · Kihnu vald · Räpina vald · Toila vald · Kanepi vald
+Mõõdik: soojakadu_kwh_aastas / kogupindala_m²</a:t>
+            </a:r>
+          </a:p>
+        </p:txBody>
+      </p:sp>
+      <p:sp>
+        <p:nvSpPr>
+          <p:cNvPr id="19" name="Rectangle 18"/>
+          <p:cNvSpPr/>
+          <p:nvPr/>
+        </p:nvSpPr>
+        <p:spPr>
+          <a:xfrm>
+            <a:off x="4251959" y="2743200"/>
+            <a:ext cx="3794760" cy="3474720"/>
+          </a:xfrm>
+          <a:prstGeom prst="rect">
+            <a:avLst/>
+          </a:prstGeom>
+          <a:solidFill>
+            <a:srgbClr val="F2F2F2"/>
+          </a:solidFill>
+          <a:ln>
+            <a:noFill/>
+          </a:ln>
+        </p:spPr>
+        <p:style>
+          <a:lnRef idx="1">
+            <a:schemeClr val="accent1"/>
+          </a:lnRef>
+          <a:fillRef idx="3">
+            <a:schemeClr val="accent1"/>
+          </a:fillRef>
+          <a:effectRef idx="2">
+            <a:schemeClr val="accent1"/>
+          </a:effectRef>
+          <a:fontRef idx="minor">
+            <a:schemeClr val="lt1"/>
+          </a:fontRef>
+        </p:style>
+        <p:txBody>
+          <a:bodyPr rtlCol="0" anchor="ctr"/>
+          <a:lstStyle/>
+          <a:p>
+            <a:pPr algn="ctr"/>
+          </a:p>
+        </p:txBody>
+      </p:sp>
+      <p:sp>
+        <p:nvSpPr>
+          <p:cNvPr id="20" name="TextBox 19"/>
+          <p:cNvSpPr txBox="1"/>
+          <p:nvPr/>
+        </p:nvSpPr>
+        <p:spPr>
+          <a:xfrm>
+            <a:off x="4361688" y="2807208"/>
+            <a:ext cx="3566160" cy="594360"/>
+          </a:xfrm>
+          <a:prstGeom prst="rect">
+            <a:avLst/>
+          </a:prstGeom>
+          <a:noFill/>
+        </p:spPr>
+        <p:txBody>
+          <a:bodyPr wrap="square">
+            <a:spAutoFit/>
+          </a:bodyPr>
+          <a:lstStyle/>
+          <a:p>
+            <a:pPr algn="l"/>
+            <a:r>
+              <a:rPr sz="1200" b="1">
+                <a:solidFill>
+                  <a:srgbClr val="2E75B6"/>
+                </a:solidFill>
+              </a:rPr>
+              <a:t>TOP 10 KOV — suurim aastane säästupotentsiaal (€)</a:t>
+            </a:r>
+          </a:p>
+        </p:txBody>
+      </p:sp>
+      <p:sp>
+        <p:nvSpPr>
+          <p:cNvPr id="21" name="TextBox 20"/>
+          <p:cNvSpPr txBox="1"/>
+          <p:nvPr/>
+        </p:nvSpPr>
+        <p:spPr>
+          <a:xfrm>
+            <a:off x="4361688" y="3429000"/>
+            <a:ext cx="3566160" cy="2651760"/>
+          </a:xfrm>
+          <a:prstGeom prst="rect">
+            <a:avLst/>
+          </a:prstGeom>
+          <a:noFill/>
+        </p:spPr>
+        <p:txBody>
+          <a:bodyPr wrap="square">
+            <a:spAutoFit/>
+          </a:bodyPr>
+          <a:lstStyle/>
+          <a:p>
+            <a:pPr algn="l"/>
+            <a:r>
+              <a:rPr sz="1200" b="0">
+                <a:solidFill>
+                  <a:srgbClr val="404040"/>
+                </a:solidFill>
+              </a:rPr>
+              <a:t>Tallinn ~100M € · Tartu linn ~20M € · Pärnu linn · Narva linn
+Kohtla-Järve · Saaremaa vald · Viljandi vald · Jõgeva vald · Elva vald</a:t>
+            </a:r>
+          </a:p>
+        </p:txBody>
+      </p:sp>
+      <p:sp>
+        <p:nvSpPr>
+          <p:cNvPr id="22" name="Rectangle 21"/>
+          <p:cNvSpPr/>
+          <p:nvPr/>
+        </p:nvSpPr>
+        <p:spPr>
+          <a:xfrm>
+            <a:off x="8229600" y="2743200"/>
+            <a:ext cx="3794760" cy="3474720"/>
+          </a:xfrm>
+          <a:prstGeom prst="rect">
+            <a:avLst/>
+          </a:prstGeom>
+          <a:solidFill>
+            <a:srgbClr val="F2F2F2"/>
+          </a:solidFill>
+          <a:ln>
+            <a:noFill/>
+          </a:ln>
+        </p:spPr>
+        <p:style>
+          <a:lnRef idx="1">
+            <a:schemeClr val="accent1"/>
+          </a:lnRef>
+          <a:fillRef idx="3">
+            <a:schemeClr val="accent1"/>
+          </a:fillRef>
+          <a:effectRef idx="2">
+            <a:schemeClr val="accent1"/>
+          </a:effectRef>
+          <a:fontRef idx="minor">
+            <a:schemeClr val="lt1"/>
+          </a:fontRef>
+        </p:style>
+        <p:txBody>
+          <a:bodyPr rtlCol="0" anchor="ctr"/>
+          <a:lstStyle/>
+          <a:p>
+            <a:pPr algn="ctr"/>
+          </a:p>
+        </p:txBody>
+      </p:sp>
+      <p:sp>
+        <p:nvSpPr>
+          <p:cNvPr id="23" name="TextBox 22"/>
+          <p:cNvSpPr txBox="1"/>
+          <p:nvPr/>
+        </p:nvSpPr>
+        <p:spPr>
+          <a:xfrm>
+            <a:off x="8339327" y="2807208"/>
+            <a:ext cx="3566160" cy="594360"/>
+          </a:xfrm>
+          <a:prstGeom prst="rect">
+            <a:avLst/>
+          </a:prstGeom>
+          <a:noFill/>
+        </p:spPr>
+        <p:txBody>
+          <a:bodyPr wrap="square">
+            <a:spAutoFit/>
+          </a:bodyPr>
+          <a:lstStyle/>
+          <a:p>
+            <a:pPr algn="l"/>
+            <a:r>
+              <a:rPr sz="1200" b="1">
+                <a:solidFill>
+                  <a:srgbClr val="2E75B6"/>
+                </a:solidFill>
+              </a:rPr>
+              <a:t>Investeeringu tasuvus — ROI vs tasuvusaeg</a:t>
+            </a:r>
+          </a:p>
+        </p:txBody>
+      </p:sp>
+      <p:sp>
+        <p:nvSpPr>
+          <p:cNvPr id="24" name="TextBox 23"/>
+          <p:cNvSpPr txBox="1"/>
+          <p:nvPr/>
+        </p:nvSpPr>
+        <p:spPr>
+          <a:xfrm>
+            <a:off x="8339327" y="3429000"/>
+            <a:ext cx="3566160" cy="2651760"/>
+          </a:xfrm>
+          <a:prstGeom prst="rect">
+            <a:avLst/>
+          </a:prstGeom>
+          <a:noFill/>
+        </p:spPr>
+        <p:txBody>
+          <a:bodyPr wrap="square">
+            <a:spAutoFit/>
+          </a:bodyPr>
+          <a:lstStyle/>
+          <a:p>
+            <a:pPr algn="l"/>
+            <a:r>
+              <a:rPr sz="1200" b="0">
+                <a:solidFill>
+                  <a:srgbClr val="404040"/>
+                </a:solidFill>
+              </a:rPr>
+              <a:t>Kambja vald (ROI 3.4) · Saue vald (3.36) · Tori vald (3.31)
+Rapla vald (3.21) — finantsiliselt kõige tasuvam renoveerimine</a:t>
             </a:r>
           </a:p>
         </p:txBody>

--- a/docs/esitlus.pptx
+++ b/docs/esitlus.pptx
@@ -10,9 +10,10 @@
     <p:sldId id="258" r:id="rId4"/>
     <p:sldId id="259" r:id="rId5"/>
     <p:sldId id="260" r:id="rId6"/>
-    <p:sldId id="261" r:id="rId7"/>
-    <p:sldId id="262" r:id="rId13"/>
-    <p:sldId id="263" r:id="rId14"/>
+    <p:sldId id="262" r:id="rId7"/>
+    <p:sldId id="264" r:id="rId8"/>
+    <p:sldId id="263" r:id="rId9"/>
+    <p:sldId id="261" r:id="rId10"/>
   </p:sldIdLst>
   <p:sldSz cx="12188825" cy="6858000"/>
   <p:notesSz cx="6858000" cy="9144000"/>
@@ -134,8 +135,8 @@
 <pc:chgInfo xmlns:a="http://schemas.openxmlformats.org/drawingml/2006/main" xmlns:r="http://schemas.openxmlformats.org/officeDocument/2006/relationships" xmlns:ac="http://schemas.microsoft.com/office/drawing/2013/main/command" xmlns:pc="http://schemas.microsoft.com/office/powerpoint/2013/main/command">
   <pc:docChgLst>
     <pc:chgData name="Mihkel Nugis" userId="147e2f29-4501-45b3-8d2b-0a3f0bc4fbae" providerId="ADAL" clId="{19F9C2E8-51A5-4117-AA1C-CDF822D93710}"/>
-    <pc:docChg chg="modSld">
-      <pc:chgData name="Mihkel Nugis" userId="147e2f29-4501-45b3-8d2b-0a3f0bc4fbae" providerId="ADAL" clId="{19F9C2E8-51A5-4117-AA1C-CDF822D93710}" dt="2026-06-06T15:10:46.208" v="26" actId="1037"/>
+    <pc:docChg chg="custSel addSld modSld sldOrd">
+      <pc:chgData name="Mihkel Nugis" userId="147e2f29-4501-45b3-8d2b-0a3f0bc4fbae" providerId="ADAL" clId="{19F9C2E8-51A5-4117-AA1C-CDF822D93710}" dt="2026-06-07T10:55:39.588" v="80"/>
       <pc:docMkLst>
         <pc:docMk/>
       </pc:docMkLst>
@@ -193,6 +194,218 @@
           </ac:spMkLst>
         </pc:spChg>
       </pc:sldChg>
+      <pc:sldChg chg="ord">
+        <pc:chgData name="Mihkel Nugis" userId="147e2f29-4501-45b3-8d2b-0a3f0bc4fbae" providerId="ADAL" clId="{19F9C2E8-51A5-4117-AA1C-CDF822D93710}" dt="2026-06-07T10:55:39.588" v="80"/>
+        <pc:sldMkLst>
+          <pc:docMk/>
+          <pc:sldMk cId="0" sldId="261"/>
+        </pc:sldMkLst>
+      </pc:sldChg>
+      <pc:sldChg chg="addSp delSp modSp mod">
+        <pc:chgData name="Mihkel Nugis" userId="147e2f29-4501-45b3-8d2b-0a3f0bc4fbae" providerId="ADAL" clId="{19F9C2E8-51A5-4117-AA1C-CDF822D93710}" dt="2026-06-07T10:55:07.341" v="78" actId="404"/>
+        <pc:sldMkLst>
+          <pc:docMk/>
+          <pc:sldMk cId="0" sldId="262"/>
+        </pc:sldMkLst>
+        <pc:spChg chg="mod">
+          <ac:chgData name="Mihkel Nugis" userId="147e2f29-4501-45b3-8d2b-0a3f0bc4fbae" providerId="ADAL" clId="{19F9C2E8-51A5-4117-AA1C-CDF822D93710}" dt="2026-06-07T10:55:07.341" v="78" actId="404"/>
+          <ac:spMkLst>
+            <pc:docMk/>
+            <pc:sldMk cId="0" sldId="262"/>
+            <ac:spMk id="3" creationId="{00000000-0000-0000-0000-000000000000}"/>
+          </ac:spMkLst>
+        </pc:spChg>
+        <pc:spChg chg="del">
+          <ac:chgData name="Mihkel Nugis" userId="147e2f29-4501-45b3-8d2b-0a3f0bc4fbae" providerId="ADAL" clId="{19F9C2E8-51A5-4117-AA1C-CDF822D93710}" dt="2026-06-07T10:53:28.851" v="60" actId="478"/>
+          <ac:spMkLst>
+            <pc:docMk/>
+            <pc:sldMk cId="0" sldId="262"/>
+            <ac:spMk id="4" creationId="{00000000-0000-0000-0000-000000000000}"/>
+          </ac:spMkLst>
+        </pc:spChg>
+        <pc:spChg chg="del">
+          <ac:chgData name="Mihkel Nugis" userId="147e2f29-4501-45b3-8d2b-0a3f0bc4fbae" providerId="ADAL" clId="{19F9C2E8-51A5-4117-AA1C-CDF822D93710}" dt="2026-06-07T10:53:28.851" v="60" actId="478"/>
+          <ac:spMkLst>
+            <pc:docMk/>
+            <pc:sldMk cId="0" sldId="262"/>
+            <ac:spMk id="5" creationId="{00000000-0000-0000-0000-000000000000}"/>
+          </ac:spMkLst>
+        </pc:spChg>
+        <pc:spChg chg="del">
+          <ac:chgData name="Mihkel Nugis" userId="147e2f29-4501-45b3-8d2b-0a3f0bc4fbae" providerId="ADAL" clId="{19F9C2E8-51A5-4117-AA1C-CDF822D93710}" dt="2026-06-07T10:53:28.851" v="60" actId="478"/>
+          <ac:spMkLst>
+            <pc:docMk/>
+            <pc:sldMk cId="0" sldId="262"/>
+            <ac:spMk id="8" creationId="{00000000-0000-0000-0000-000000000000}"/>
+          </ac:spMkLst>
+        </pc:spChg>
+        <pc:spChg chg="del">
+          <ac:chgData name="Mihkel Nugis" userId="147e2f29-4501-45b3-8d2b-0a3f0bc4fbae" providerId="ADAL" clId="{19F9C2E8-51A5-4117-AA1C-CDF822D93710}" dt="2026-06-07T10:53:28.851" v="60" actId="478"/>
+          <ac:spMkLst>
+            <pc:docMk/>
+            <pc:sldMk cId="0" sldId="262"/>
+            <ac:spMk id="10" creationId="{00000000-0000-0000-0000-000000000000}"/>
+          </ac:spMkLst>
+        </pc:spChg>
+        <pc:spChg chg="del">
+          <ac:chgData name="Mihkel Nugis" userId="147e2f29-4501-45b3-8d2b-0a3f0bc4fbae" providerId="ADAL" clId="{19F9C2E8-51A5-4117-AA1C-CDF822D93710}" dt="2026-06-07T10:53:28.851" v="60" actId="478"/>
+          <ac:spMkLst>
+            <pc:docMk/>
+            <pc:sldMk cId="0" sldId="262"/>
+            <ac:spMk id="14" creationId="{00000000-0000-0000-0000-000000000000}"/>
+          </ac:spMkLst>
+        </pc:spChg>
+        <pc:spChg chg="del">
+          <ac:chgData name="Mihkel Nugis" userId="147e2f29-4501-45b3-8d2b-0a3f0bc4fbae" providerId="ADAL" clId="{19F9C2E8-51A5-4117-AA1C-CDF822D93710}" dt="2026-06-07T10:53:28.851" v="60" actId="478"/>
+          <ac:spMkLst>
+            <pc:docMk/>
+            <pc:sldMk cId="0" sldId="262"/>
+            <ac:spMk id="15" creationId="{00000000-0000-0000-0000-000000000000}"/>
+          </ac:spMkLst>
+        </pc:spChg>
+        <pc:spChg chg="del">
+          <ac:chgData name="Mihkel Nugis" userId="147e2f29-4501-45b3-8d2b-0a3f0bc4fbae" providerId="ADAL" clId="{19F9C2E8-51A5-4117-AA1C-CDF822D93710}" dt="2026-06-07T10:53:28.851" v="60" actId="478"/>
+          <ac:spMkLst>
+            <pc:docMk/>
+            <pc:sldMk cId="0" sldId="262"/>
+            <ac:spMk id="21" creationId="{00000000-0000-0000-0000-000000000000}"/>
+          </ac:spMkLst>
+        </pc:spChg>
+        <pc:spChg chg="del">
+          <ac:chgData name="Mihkel Nugis" userId="147e2f29-4501-45b3-8d2b-0a3f0bc4fbae" providerId="ADAL" clId="{19F9C2E8-51A5-4117-AA1C-CDF822D93710}" dt="2026-06-07T10:53:28.851" v="60" actId="478"/>
+          <ac:spMkLst>
+            <pc:docMk/>
+            <pc:sldMk cId="0" sldId="262"/>
+            <ac:spMk id="22" creationId="{00000000-0000-0000-0000-000000000000}"/>
+          </ac:spMkLst>
+        </pc:spChg>
+        <pc:spChg chg="del">
+          <ac:chgData name="Mihkel Nugis" userId="147e2f29-4501-45b3-8d2b-0a3f0bc4fbae" providerId="ADAL" clId="{19F9C2E8-51A5-4117-AA1C-CDF822D93710}" dt="2026-06-07T10:53:28.851" v="60" actId="478"/>
+          <ac:spMkLst>
+            <pc:docMk/>
+            <pc:sldMk cId="0" sldId="262"/>
+            <ac:spMk id="23" creationId="{00000000-0000-0000-0000-000000000000}"/>
+          </ac:spMkLst>
+        </pc:spChg>
+        <pc:spChg chg="del">
+          <ac:chgData name="Mihkel Nugis" userId="147e2f29-4501-45b3-8d2b-0a3f0bc4fbae" providerId="ADAL" clId="{19F9C2E8-51A5-4117-AA1C-CDF822D93710}" dt="2026-06-07T10:53:28.851" v="60" actId="478"/>
+          <ac:spMkLst>
+            <pc:docMk/>
+            <pc:sldMk cId="0" sldId="262"/>
+            <ac:spMk id="24" creationId="{00000000-0000-0000-0000-000000000000}"/>
+          </ac:spMkLst>
+        </pc:spChg>
+        <pc:picChg chg="add mod">
+          <ac:chgData name="Mihkel Nugis" userId="147e2f29-4501-45b3-8d2b-0a3f0bc4fbae" providerId="ADAL" clId="{19F9C2E8-51A5-4117-AA1C-CDF822D93710}" dt="2026-06-07T10:54:13.489" v="65" actId="14100"/>
+          <ac:picMkLst>
+            <pc:docMk/>
+            <pc:sldMk cId="0" sldId="262"/>
+            <ac:picMk id="26" creationId="{88946612-FC63-165D-60EA-7785DD8D208B}"/>
+          </ac:picMkLst>
+        </pc:picChg>
+      </pc:sldChg>
+      <pc:sldChg chg="modSp mod">
+        <pc:chgData name="Mihkel Nugis" userId="147e2f29-4501-45b3-8d2b-0a3f0bc4fbae" providerId="ADAL" clId="{19F9C2E8-51A5-4117-AA1C-CDF822D93710}" dt="2026-06-07T10:53:02.179" v="58" actId="1035"/>
+        <pc:sldMkLst>
+          <pc:docMk/>
+          <pc:sldMk cId="0" sldId="263"/>
+        </pc:sldMkLst>
+        <pc:spChg chg="mod ord">
+          <ac:chgData name="Mihkel Nugis" userId="147e2f29-4501-45b3-8d2b-0a3f0bc4fbae" providerId="ADAL" clId="{19F9C2E8-51A5-4117-AA1C-CDF822D93710}" dt="2026-06-07T10:53:02.179" v="58" actId="1035"/>
+          <ac:spMkLst>
+            <pc:docMk/>
+            <pc:sldMk cId="0" sldId="263"/>
+            <ac:spMk id="8" creationId="{00000000-0000-0000-0000-000000000000}"/>
+          </ac:spMkLst>
+        </pc:spChg>
+        <pc:spChg chg="mod">
+          <ac:chgData name="Mihkel Nugis" userId="147e2f29-4501-45b3-8d2b-0a3f0bc4fbae" providerId="ADAL" clId="{19F9C2E8-51A5-4117-AA1C-CDF822D93710}" dt="2026-06-07T10:52:12.792" v="47" actId="1036"/>
+          <ac:spMkLst>
+            <pc:docMk/>
+            <pc:sldMk cId="0" sldId="263"/>
+            <ac:spMk id="9" creationId="{00000000-0000-0000-0000-000000000000}"/>
+          </ac:spMkLst>
+        </pc:spChg>
+        <pc:spChg chg="mod">
+          <ac:chgData name="Mihkel Nugis" userId="147e2f29-4501-45b3-8d2b-0a3f0bc4fbae" providerId="ADAL" clId="{19F9C2E8-51A5-4117-AA1C-CDF822D93710}" dt="2026-06-07T10:52:12.792" v="47" actId="1036"/>
+          <ac:spMkLst>
+            <pc:docMk/>
+            <pc:sldMk cId="0" sldId="263"/>
+            <ac:spMk id="10" creationId="{00000000-0000-0000-0000-000000000000}"/>
+          </ac:spMkLst>
+        </pc:spChg>
+        <pc:spChg chg="mod">
+          <ac:chgData name="Mihkel Nugis" userId="147e2f29-4501-45b3-8d2b-0a3f0bc4fbae" providerId="ADAL" clId="{19F9C2E8-51A5-4117-AA1C-CDF822D93710}" dt="2026-06-07T10:52:12.792" v="47" actId="1036"/>
+          <ac:spMkLst>
+            <pc:docMk/>
+            <pc:sldMk cId="0" sldId="263"/>
+            <ac:spMk id="11" creationId="{00000000-0000-0000-0000-000000000000}"/>
+          </ac:spMkLst>
+        </pc:spChg>
+        <pc:spChg chg="mod">
+          <ac:chgData name="Mihkel Nugis" userId="147e2f29-4501-45b3-8d2b-0a3f0bc4fbae" providerId="ADAL" clId="{19F9C2E8-51A5-4117-AA1C-CDF822D93710}" dt="2026-06-07T10:52:12.792" v="47" actId="1036"/>
+          <ac:spMkLst>
+            <pc:docMk/>
+            <pc:sldMk cId="0" sldId="263"/>
+            <ac:spMk id="14" creationId="{00000000-0000-0000-0000-000000000000}"/>
+          </ac:spMkLst>
+        </pc:spChg>
+        <pc:spChg chg="mod">
+          <ac:chgData name="Mihkel Nugis" userId="147e2f29-4501-45b3-8d2b-0a3f0bc4fbae" providerId="ADAL" clId="{19F9C2E8-51A5-4117-AA1C-CDF822D93710}" dt="2026-06-07T10:52:12.792" v="47" actId="1036"/>
+          <ac:spMkLst>
+            <pc:docMk/>
+            <pc:sldMk cId="0" sldId="263"/>
+            <ac:spMk id="16" creationId="{00000000-0000-0000-0000-000000000000}"/>
+          </ac:spMkLst>
+        </pc:spChg>
+        <pc:spChg chg="mod">
+          <ac:chgData name="Mihkel Nugis" userId="147e2f29-4501-45b3-8d2b-0a3f0bc4fbae" providerId="ADAL" clId="{19F9C2E8-51A5-4117-AA1C-CDF822D93710}" dt="2026-06-07T10:52:12.792" v="47" actId="1036"/>
+          <ac:spMkLst>
+            <pc:docMk/>
+            <pc:sldMk cId="0" sldId="263"/>
+            <ac:spMk id="18" creationId="{00000000-0000-0000-0000-000000000000}"/>
+          </ac:spMkLst>
+        </pc:spChg>
+        <pc:spChg chg="mod">
+          <ac:chgData name="Mihkel Nugis" userId="147e2f29-4501-45b3-8d2b-0a3f0bc4fbae" providerId="ADAL" clId="{19F9C2E8-51A5-4117-AA1C-CDF822D93710}" dt="2026-06-07T10:52:12.792" v="47" actId="1036"/>
+          <ac:spMkLst>
+            <pc:docMk/>
+            <pc:sldMk cId="0" sldId="263"/>
+            <ac:spMk id="20" creationId="{00000000-0000-0000-0000-000000000000}"/>
+          </ac:spMkLst>
+        </pc:spChg>
+        <pc:spChg chg="mod">
+          <ac:chgData name="Mihkel Nugis" userId="147e2f29-4501-45b3-8d2b-0a3f0bc4fbae" providerId="ADAL" clId="{19F9C2E8-51A5-4117-AA1C-CDF822D93710}" dt="2026-06-07T10:52:12.792" v="47" actId="1036"/>
+          <ac:spMkLst>
+            <pc:docMk/>
+            <pc:sldMk cId="0" sldId="263"/>
+            <ac:spMk id="21" creationId="{00000000-0000-0000-0000-000000000000}"/>
+          </ac:spMkLst>
+        </pc:spChg>
+        <pc:spChg chg="mod">
+          <ac:chgData name="Mihkel Nugis" userId="147e2f29-4501-45b3-8d2b-0a3f0bc4fbae" providerId="ADAL" clId="{19F9C2E8-51A5-4117-AA1C-CDF822D93710}" dt="2026-06-07T10:52:12.792" v="47" actId="1036"/>
+          <ac:spMkLst>
+            <pc:docMk/>
+            <pc:sldMk cId="0" sldId="263"/>
+            <ac:spMk id="22" creationId="{00000000-0000-0000-0000-000000000000}"/>
+          </ac:spMkLst>
+        </pc:spChg>
+        <pc:spChg chg="mod">
+          <ac:chgData name="Mihkel Nugis" userId="147e2f29-4501-45b3-8d2b-0a3f0bc4fbae" providerId="ADAL" clId="{19F9C2E8-51A5-4117-AA1C-CDF822D93710}" dt="2026-06-07T10:52:12.792" v="47" actId="1036"/>
+          <ac:spMkLst>
+            <pc:docMk/>
+            <pc:sldMk cId="0" sldId="263"/>
+            <ac:spMk id="23" creationId="{00000000-0000-0000-0000-000000000000}"/>
+          </ac:spMkLst>
+        </pc:spChg>
+      </pc:sldChg>
+      <pc:sldChg chg="add">
+        <pc:chgData name="Mihkel Nugis" userId="147e2f29-4501-45b3-8d2b-0a3f0bc4fbae" providerId="ADAL" clId="{19F9C2E8-51A5-4117-AA1C-CDF822D93710}" dt="2026-06-07T10:53:16.073" v="59" actId="2890"/>
+        <pc:sldMkLst>
+          <pc:docMk/>
+          <pc:sldMk cId="77741135" sldId="264"/>
+        </pc:sldMkLst>
+      </pc:sldChg>
     </pc:docChg>
   </pc:docChgLst>
 </pc:chgInfo>
@@ -377,7 +590,7 @@
           <a:p>
             <a:fld id="{5BCAD085-E8A6-8845-BD4E-CB4CCA059FC4}" type="datetimeFigureOut">
               <a:rPr lang="en-US" smtClean="0"/>
-              <a:t>6/6/2026</a:t>
+              <a:t>6/7/2026</a:t>
             </a:fld>
             <a:endParaRPr lang="en-US"/>
           </a:p>
@@ -545,7 +758,7 @@
           <a:p>
             <a:fld id="{5BCAD085-E8A6-8845-BD4E-CB4CCA059FC4}" type="datetimeFigureOut">
               <a:rPr lang="en-US" smtClean="0"/>
-              <a:t>6/6/2026</a:t>
+              <a:t>6/7/2026</a:t>
             </a:fld>
             <a:endParaRPr lang="en-US"/>
           </a:p>
@@ -723,7 +936,7 @@
           <a:p>
             <a:fld id="{5BCAD085-E8A6-8845-BD4E-CB4CCA059FC4}" type="datetimeFigureOut">
               <a:rPr lang="en-US" smtClean="0"/>
-              <a:t>6/6/2026</a:t>
+              <a:t>6/7/2026</a:t>
             </a:fld>
             <a:endParaRPr lang="en-US"/>
           </a:p>
@@ -891,7 +1104,7 @@
           <a:p>
             <a:fld id="{5BCAD085-E8A6-8845-BD4E-CB4CCA059FC4}" type="datetimeFigureOut">
               <a:rPr lang="en-US" smtClean="0"/>
-              <a:t>6/6/2026</a:t>
+              <a:t>6/7/2026</a:t>
             </a:fld>
             <a:endParaRPr lang="en-US"/>
           </a:p>
@@ -1136,7 +1349,7 @@
           <a:p>
             <a:fld id="{5BCAD085-E8A6-8845-BD4E-CB4CCA059FC4}" type="datetimeFigureOut">
               <a:rPr lang="en-US" smtClean="0"/>
-              <a:t>6/6/2026</a:t>
+              <a:t>6/7/2026</a:t>
             </a:fld>
             <a:endParaRPr lang="en-US"/>
           </a:p>
@@ -1421,7 +1634,7 @@
           <a:p>
             <a:fld id="{5BCAD085-E8A6-8845-BD4E-CB4CCA059FC4}" type="datetimeFigureOut">
               <a:rPr lang="en-US" smtClean="0"/>
-              <a:t>6/6/2026</a:t>
+              <a:t>6/7/2026</a:t>
             </a:fld>
             <a:endParaRPr lang="en-US"/>
           </a:p>
@@ -1840,7 +2053,7 @@
           <a:p>
             <a:fld id="{5BCAD085-E8A6-8845-BD4E-CB4CCA059FC4}" type="datetimeFigureOut">
               <a:rPr lang="en-US" smtClean="0"/>
-              <a:t>6/6/2026</a:t>
+              <a:t>6/7/2026</a:t>
             </a:fld>
             <a:endParaRPr lang="en-US"/>
           </a:p>
@@ -1957,7 +2170,7 @@
           <a:p>
             <a:fld id="{5BCAD085-E8A6-8845-BD4E-CB4CCA059FC4}" type="datetimeFigureOut">
               <a:rPr lang="en-US" smtClean="0"/>
-              <a:t>6/6/2026</a:t>
+              <a:t>6/7/2026</a:t>
             </a:fld>
             <a:endParaRPr lang="en-US"/>
           </a:p>
@@ -2052,7 +2265,7 @@
           <a:p>
             <a:fld id="{5BCAD085-E8A6-8845-BD4E-CB4CCA059FC4}" type="datetimeFigureOut">
               <a:rPr lang="en-US" smtClean="0"/>
-              <a:t>6/6/2026</a:t>
+              <a:t>6/7/2026</a:t>
             </a:fld>
             <a:endParaRPr lang="en-US"/>
           </a:p>
@@ -2327,7 +2540,7 @@
           <a:p>
             <a:fld id="{5BCAD085-E8A6-8845-BD4E-CB4CCA059FC4}" type="datetimeFigureOut">
               <a:rPr lang="en-US" smtClean="0"/>
-              <a:t>6/6/2026</a:t>
+              <a:t>6/7/2026</a:t>
             </a:fld>
             <a:endParaRPr lang="en-US"/>
           </a:p>
@@ -2579,7 +2792,7 @@
           <a:p>
             <a:fld id="{5BCAD085-E8A6-8845-BD4E-CB4CCA059FC4}" type="datetimeFigureOut">
               <a:rPr lang="en-US" smtClean="0"/>
-              <a:t>6/6/2026</a:t>
+              <a:t>6/7/2026</a:t>
             </a:fld>
             <a:endParaRPr lang="en-US"/>
           </a:p>
@@ -2790,7 +3003,7 @@
           <a:p>
             <a:fld id="{5BCAD085-E8A6-8845-BD4E-CB4CCA059FC4}" type="datetimeFigureOut">
               <a:rPr lang="en-US" smtClean="0"/>
-              <a:t>6/6/2026</a:t>
+              <a:t>6/7/2026</a:t>
             </a:fld>
             <a:endParaRPr lang="en-US"/>
           </a:p>
@@ -3362,920 +3575,6 @@
 </p:sld>
 </file>
 
-<file path=ppt/slides/slide10.xml><?xml version="1.0" encoding="utf-8"?>
-<p:sld xmlns:a="http://schemas.openxmlformats.org/drawingml/2006/main" xmlns:p="http://schemas.openxmlformats.org/presentationml/2006/main" xmlns:r="http://schemas.openxmlformats.org/officeDocument/2006/relationships">
-  <p:cSld>
-    <p:bg>
-      <p:bgPr>
-        <a:solidFill>
-          <a:srgbClr val="FFFFFF"/>
-        </a:solidFill>
-        <a:effectLst/>
-      </p:bgPr>
-    </p:bg>
-    <p:spTree>
-      <p:nvGrpSpPr>
-        <p:cNvPr id="1" name=""/>
-        <p:cNvGrpSpPr/>
-        <p:nvPr/>
-      </p:nvGrpSpPr>
-      <p:grpSpPr/>
-      <p:sp>
-        <p:nvSpPr>
-          <p:cNvPr id="2" name="Rectangle 1"/>
-          <p:cNvSpPr/>
-          <p:nvPr/>
-        </p:nvSpPr>
-        <p:spPr>
-          <a:xfrm>
-            <a:off x="0" y="0"/>
-            <a:ext cx="12188952" cy="1005840"/>
-          </a:xfrm>
-          <a:prstGeom prst="rect">
-            <a:avLst/>
-          </a:prstGeom>
-          <a:solidFill>
-            <a:srgbClr val="1B376B"/>
-          </a:solidFill>
-          <a:ln>
-            <a:noFill/>
-          </a:ln>
-        </p:spPr>
-        <p:style>
-          <a:lnRef idx="1">
-            <a:schemeClr val="accent1"/>
-          </a:lnRef>
-          <a:fillRef idx="3">
-            <a:schemeClr val="accent1"/>
-          </a:fillRef>
-          <a:effectRef idx="2">
-            <a:schemeClr val="accent1"/>
-          </a:effectRef>
-          <a:fontRef idx="minor">
-            <a:schemeClr val="lt1"/>
-          </a:fontRef>
-        </p:style>
-        <p:txBody>
-          <a:bodyPr rtlCol="0" anchor="ctr"/>
-          <a:lstStyle/>
-          <a:p>
-            <a:pPr algn="ctr"/>
-          </a:p>
-        </p:txBody>
-      </p:sp>
-      <p:sp>
-        <p:nvSpPr>
-          <p:cNvPr id="3" name="TextBox 2"/>
-          <p:cNvSpPr txBox="1"/>
-          <p:nvPr/>
-        </p:nvSpPr>
-        <p:spPr>
-          <a:xfrm>
-            <a:off x="365760" y="91440"/>
-            <a:ext cx="11430000" cy="777240"/>
-          </a:xfrm>
-          <a:prstGeom prst="rect">
-            <a:avLst/>
-          </a:prstGeom>
-          <a:noFill/>
-        </p:spPr>
-        <p:txBody>
-          <a:bodyPr wrap="square">
-            <a:spAutoFit/>
-          </a:bodyPr>
-          <a:lstStyle/>
-          <a:p>
-            <a:pPr algn="l"/>
-            <a:r>
-              <a:rPr sz="2800" b="1">
-                <a:solidFill>
-                  <a:srgbClr val="FFFFFF"/>
-                </a:solidFill>
-              </a:rPr>
-              <a:t>Järeldused ja ärimeetrikud</a:t>
-            </a:r>
-          </a:p>
-        </p:txBody>
-      </p:sp>
-      <p:sp>
-        <p:nvSpPr>
-          <p:cNvPr id="4" name="Rectangle 3"/>
-          <p:cNvSpPr/>
-          <p:nvPr/>
-        </p:nvSpPr>
-        <p:spPr>
-          <a:xfrm>
-            <a:off x="274320" y="1143000"/>
-            <a:ext cx="7132320" cy="4343400"/>
-          </a:xfrm>
-          <a:prstGeom prst="rect">
-            <a:avLst/>
-          </a:prstGeom>
-          <a:solidFill>
-            <a:srgbClr val="F2F2F2"/>
-          </a:solidFill>
-          <a:ln>
-            <a:noFill/>
-          </a:ln>
-        </p:spPr>
-        <p:style>
-          <a:lnRef idx="1">
-            <a:schemeClr val="accent1"/>
-          </a:lnRef>
-          <a:fillRef idx="3">
-            <a:schemeClr val="accent1"/>
-          </a:fillRef>
-          <a:effectRef idx="2">
-            <a:schemeClr val="accent1"/>
-          </a:effectRef>
-          <a:fontRef idx="minor">
-            <a:schemeClr val="lt1"/>
-          </a:fontRef>
-        </p:style>
-        <p:txBody>
-          <a:bodyPr rtlCol="0" anchor="ctr"/>
-          <a:lstStyle/>
-          <a:p>
-            <a:pPr algn="ctr"/>
-          </a:p>
-        </p:txBody>
-      </p:sp>
-      <p:sp>
-        <p:nvSpPr>
-          <p:cNvPr id="5" name="TextBox 4"/>
-          <p:cNvSpPr txBox="1"/>
-          <p:nvPr/>
-        </p:nvSpPr>
-        <p:spPr>
-          <a:xfrm>
-            <a:off x="457200" y="1207008"/>
-            <a:ext cx="6766560" cy="457200"/>
-          </a:xfrm>
-          <a:prstGeom prst="rect">
-            <a:avLst/>
-          </a:prstGeom>
-          <a:noFill/>
-        </p:spPr>
-        <p:txBody>
-          <a:bodyPr wrap="square">
-            <a:spAutoFit/>
-          </a:bodyPr>
-          <a:lstStyle/>
-          <a:p>
-            <a:pPr algn="l"/>
-            <a:r>
-              <a:rPr sz="1600" b="1">
-                <a:solidFill>
-                  <a:srgbClr val="1B376B"/>
-                </a:solidFill>
-              </a:rPr>
-              <a:t>Peamised järeldused</a:t>
-            </a:r>
-          </a:p>
-        </p:txBody>
-      </p:sp>
-      <p:sp>
-        <p:nvSpPr>
-          <p:cNvPr id="6" name="TextBox 5"/>
-          <p:cNvSpPr txBox="1"/>
-          <p:nvPr/>
-        </p:nvSpPr>
-        <p:spPr>
-          <a:xfrm>
-            <a:off x="457200" y="1737360"/>
-            <a:ext cx="6858000" cy="3566160"/>
-          </a:xfrm>
-          <a:prstGeom prst="rect">
-            <a:avLst/>
-          </a:prstGeom>
-          <a:noFill/>
-        </p:spPr>
-        <p:txBody>
-          <a:bodyPr wrap="square">
-            <a:spAutoFit/>
-          </a:bodyPr>
-          <a:lstStyle/>
-          <a:p>
-            <a:pPr>
-              <a:spcBef>
-                <a:spcPts val="300"/>
-              </a:spcBef>
-            </a:pPr>
-            <a:r>
-              <a:rPr sz="1400">
-                <a:solidFill>
-                  <a:srgbClr val="404040"/>
-                </a:solidFill>
-              </a:rPr>
-              <a:t>•  Finantsiliselt tasuvam: Kambja vald (ROI 3.4) ja Saue vald (ROI 3.36)</a:t>
-            </a:r>
-          </a:p>
-          <a:p>
-            <a:pPr>
-              <a:spcBef>
-                <a:spcPts val="300"/>
-              </a:spcBef>
-            </a:pPr>
-            <a:r>
-              <a:rPr sz="1400">
-                <a:solidFill>
-                  <a:srgbClr val="404040"/>
-                </a:solidFill>
-              </a:rPr>
-              <a:t>•  Suurim absoluutne säästupotentsiaal: Tallinn (üle 100M €/aastas)</a:t>
-            </a:r>
-          </a:p>
-          <a:p>
-            <a:pPr>
-              <a:spcBef>
-                <a:spcPts val="300"/>
-              </a:spcBef>
-            </a:pPr>
-            <a:r>
-              <a:rPr sz="1400">
-                <a:solidFill>
-                  <a:srgbClr val="404040"/>
-                </a:solidFill>
-              </a:rPr>
-              <a:t>•  Vajaduspõhiselt haavatavaimad: Lääneranna, Kihnu ja Räpina vald</a:t>
-            </a:r>
-          </a:p>
-          <a:p>
-            <a:pPr>
-              <a:spcBef>
-                <a:spcPts val="300"/>
-              </a:spcBef>
-            </a:pPr>
-            <a:r>
-              <a:rPr sz="1400">
-                <a:solidFill>
-                  <a:srgbClr val="404040"/>
-                </a:solidFill>
-              </a:rPr>
-              <a:t>•  Tallinna ja Tartu linna ROI on madalam (2.26–2.27), aga kogu mõju suurim</a:t>
-            </a:r>
-          </a:p>
-          <a:p>
-            <a:pPr>
-              <a:spcBef>
-                <a:spcPts val="300"/>
-              </a:spcBef>
-            </a:pPr>
-            <a:r>
-              <a:rPr sz="1400">
-                <a:solidFill>
-                  <a:srgbClr val="404040"/>
-                </a:solidFill>
-              </a:rPr>
-              <a:t>•  Kokkuvõte: kõrge ROI → väiksemad vallad; suur säästusumma → linnad</a:t>
-            </a:r>
-          </a:p>
-        </p:txBody>
-      </p:sp>
-      <p:sp>
-        <p:nvSpPr>
-          <p:cNvPr id="7" name="Rectangle 6"/>
-          <p:cNvSpPr/>
-          <p:nvPr/>
-        </p:nvSpPr>
-        <p:spPr>
-          <a:xfrm>
-            <a:off x="7680960" y="1143000"/>
-            <a:ext cx="4206240" cy="4343400"/>
-          </a:xfrm>
-          <a:prstGeom prst="rect">
-            <a:avLst/>
-          </a:prstGeom>
-          <a:solidFill>
-            <a:srgbClr val="1B376B"/>
-          </a:solidFill>
-          <a:ln>
-            <a:noFill/>
-          </a:ln>
-        </p:spPr>
-        <p:style>
-          <a:lnRef idx="1">
-            <a:schemeClr val="accent1"/>
-          </a:lnRef>
-          <a:fillRef idx="3">
-            <a:schemeClr val="accent1"/>
-          </a:fillRef>
-          <a:effectRef idx="2">
-            <a:schemeClr val="accent1"/>
-          </a:effectRef>
-          <a:fontRef idx="minor">
-            <a:schemeClr val="lt1"/>
-          </a:fontRef>
-        </p:style>
-        <p:txBody>
-          <a:bodyPr rtlCol="0" anchor="ctr"/>
-          <a:lstStyle/>
-          <a:p>
-            <a:pPr algn="ctr"/>
-          </a:p>
-        </p:txBody>
-      </p:sp>
-      <p:sp>
-        <p:nvSpPr>
-          <p:cNvPr id="8" name="TextBox 7"/>
-          <p:cNvSpPr txBox="1"/>
-          <p:nvPr/>
-        </p:nvSpPr>
-        <p:spPr>
-          <a:xfrm>
-            <a:off x="7818120" y="1207008"/>
-            <a:ext cx="3931920" cy="457200"/>
-          </a:xfrm>
-          <a:prstGeom prst="rect">
-            <a:avLst/>
-          </a:prstGeom>
-          <a:noFill/>
-        </p:spPr>
-        <p:txBody>
-          <a:bodyPr wrap="square">
-            <a:spAutoFit/>
-          </a:bodyPr>
-          <a:lstStyle/>
-          <a:p>
-            <a:pPr algn="l"/>
-            <a:r>
-              <a:rPr sz="1400" b="1">
-                <a:solidFill>
-                  <a:srgbClr val="FFFFFF"/>
-                </a:solidFill>
-              </a:rPr>
-              <a:t>Ärimeetrikute valemid</a:t>
-            </a:r>
-          </a:p>
-        </p:txBody>
-      </p:sp>
-      <p:sp>
-        <p:nvSpPr>
-          <p:cNvPr id="9" name="Rectangle 8"/>
-          <p:cNvSpPr/>
-          <p:nvPr/>
-        </p:nvSpPr>
-        <p:spPr>
-          <a:xfrm>
-            <a:off x="7726679" y="1783080"/>
-            <a:ext cx="4069080" cy="749808"/>
-          </a:xfrm>
-          <a:prstGeom prst="rect">
-            <a:avLst/>
-          </a:prstGeom>
-          <a:solidFill>
-            <a:srgbClr val="2E75B6"/>
-          </a:solidFill>
-          <a:ln>
-            <a:noFill/>
-          </a:ln>
-        </p:spPr>
-        <p:style>
-          <a:lnRef idx="1">
-            <a:schemeClr val="accent1"/>
-          </a:lnRef>
-          <a:fillRef idx="3">
-            <a:schemeClr val="accent1"/>
-          </a:fillRef>
-          <a:effectRef idx="2">
-            <a:schemeClr val="accent1"/>
-          </a:effectRef>
-          <a:fontRef idx="minor">
-            <a:schemeClr val="lt1"/>
-          </a:fontRef>
-        </p:style>
-        <p:txBody>
-          <a:bodyPr rtlCol="0" anchor="ctr"/>
-          <a:lstStyle/>
-          <a:p>
-            <a:pPr algn="ctr"/>
-          </a:p>
-        </p:txBody>
-      </p:sp>
-      <p:sp>
-        <p:nvSpPr>
-          <p:cNvPr id="10" name="TextBox 9"/>
-          <p:cNvSpPr txBox="1"/>
-          <p:nvPr/>
-        </p:nvSpPr>
-        <p:spPr>
-          <a:xfrm>
-            <a:off x="7836408" y="1801368"/>
-            <a:ext cx="3840480" cy="320040"/>
-          </a:xfrm>
-          <a:prstGeom prst="rect">
-            <a:avLst/>
-          </a:prstGeom>
-          <a:noFill/>
-        </p:spPr>
-        <p:txBody>
-          <a:bodyPr wrap="square">
-            <a:spAutoFit/>
-          </a:bodyPr>
-          <a:lstStyle/>
-          <a:p>
-            <a:pPr algn="l"/>
-            <a:r>
-              <a:rPr sz="1100" b="1">
-                <a:solidFill>
-                  <a:srgbClr val="FFFFFF"/>
-                </a:solidFill>
-              </a:rPr>
-              <a:t>ROI</a:t>
-            </a:r>
-          </a:p>
-        </p:txBody>
-      </p:sp>
-      <p:sp>
-        <p:nvSpPr>
-          <p:cNvPr id="11" name="TextBox 10"/>
-          <p:cNvSpPr txBox="1"/>
-          <p:nvPr/>
-        </p:nvSpPr>
-        <p:spPr>
-          <a:xfrm>
-            <a:off x="7836408" y="2130552"/>
-            <a:ext cx="3840480" cy="384048"/>
-          </a:xfrm>
-          <a:prstGeom prst="rect">
-            <a:avLst/>
-          </a:prstGeom>
-          <a:noFill/>
-        </p:spPr>
-        <p:txBody>
-          <a:bodyPr wrap="square">
-            <a:spAutoFit/>
-          </a:bodyPr>
-          <a:lstStyle/>
-          <a:p>
-            <a:pPr algn="l"/>
-            <a:r>
-              <a:rPr sz="1000" b="0">
-                <a:solidFill>
-                  <a:srgbClr val="BDD7EE"/>
-                </a:solidFill>
-              </a:rPr>
-              <a:t>sääst_eur_aastas
-/ investeering</a:t>
-            </a:r>
-          </a:p>
-        </p:txBody>
-      </p:sp>
-      <p:sp>
-        <p:nvSpPr>
-          <p:cNvPr id="12" name="Rectangle 11"/>
-          <p:cNvSpPr/>
-          <p:nvPr/>
-        </p:nvSpPr>
-        <p:spPr>
-          <a:xfrm>
-            <a:off x="7726679" y="2606040"/>
-            <a:ext cx="4069080" cy="749808"/>
-          </a:xfrm>
-          <a:prstGeom prst="rect">
-            <a:avLst/>
-          </a:prstGeom>
-          <a:solidFill>
-            <a:srgbClr val="2E75B6"/>
-          </a:solidFill>
-          <a:ln>
-            <a:noFill/>
-          </a:ln>
-        </p:spPr>
-        <p:style>
-          <a:lnRef idx="1">
-            <a:schemeClr val="accent1"/>
-          </a:lnRef>
-          <a:fillRef idx="3">
-            <a:schemeClr val="accent1"/>
-          </a:fillRef>
-          <a:effectRef idx="2">
-            <a:schemeClr val="accent1"/>
-          </a:effectRef>
-          <a:fontRef idx="minor">
-            <a:schemeClr val="lt1"/>
-          </a:fontRef>
-        </p:style>
-        <p:txBody>
-          <a:bodyPr rtlCol="0" anchor="ctr"/>
-          <a:lstStyle/>
-          <a:p>
-            <a:pPr algn="ctr"/>
-          </a:p>
-        </p:txBody>
-      </p:sp>
-      <p:sp>
-        <p:nvSpPr>
-          <p:cNvPr id="13" name="TextBox 12"/>
-          <p:cNvSpPr txBox="1"/>
-          <p:nvPr/>
-        </p:nvSpPr>
-        <p:spPr>
-          <a:xfrm>
-            <a:off x="7836408" y="2624328"/>
-            <a:ext cx="3840480" cy="320040"/>
-          </a:xfrm>
-          <a:prstGeom prst="rect">
-            <a:avLst/>
-          </a:prstGeom>
-          <a:noFill/>
-        </p:spPr>
-        <p:txBody>
-          <a:bodyPr wrap="square">
-            <a:spAutoFit/>
-          </a:bodyPr>
-          <a:lstStyle/>
-          <a:p>
-            <a:pPr algn="l"/>
-            <a:r>
-              <a:rPr sz="1100" b="1">
-                <a:solidFill>
-                  <a:srgbClr val="FFFFFF"/>
-                </a:solidFill>
-              </a:rPr>
-              <a:t>VAJADUSE SKOOR</a:t>
-            </a:r>
-          </a:p>
-        </p:txBody>
-      </p:sp>
-      <p:sp>
-        <p:nvSpPr>
-          <p:cNvPr id="14" name="TextBox 13"/>
-          <p:cNvSpPr txBox="1"/>
-          <p:nvPr/>
-        </p:nvSpPr>
-        <p:spPr>
-          <a:xfrm>
-            <a:off x="7836408" y="2953512"/>
-            <a:ext cx="3840480" cy="384048"/>
-          </a:xfrm>
-          <a:prstGeom prst="rect">
-            <a:avLst/>
-          </a:prstGeom>
-          <a:noFill/>
-        </p:spPr>
-        <p:txBody>
-          <a:bodyPr wrap="square">
-            <a:spAutoFit/>
-          </a:bodyPr>
-          <a:lstStyle/>
-          <a:p>
-            <a:pPr algn="l"/>
-            <a:r>
-              <a:rPr sz="1000" b="0">
-                <a:solidFill>
-                  <a:srgbClr val="BDD7EE"/>
-                </a:solidFill>
-              </a:rPr>
-              <a:t>soojakadu_kwh
-/ kogupindala_m²</a:t>
-            </a:r>
-          </a:p>
-        </p:txBody>
-      </p:sp>
-      <p:sp>
-        <p:nvSpPr>
-          <p:cNvPr id="15" name="Rectangle 14"/>
-          <p:cNvSpPr/>
-          <p:nvPr/>
-        </p:nvSpPr>
-        <p:spPr>
-          <a:xfrm>
-            <a:off x="7726679" y="3429000"/>
-            <a:ext cx="4069080" cy="749808"/>
-          </a:xfrm>
-          <a:prstGeom prst="rect">
-            <a:avLst/>
-          </a:prstGeom>
-          <a:solidFill>
-            <a:srgbClr val="2E75B6"/>
-          </a:solidFill>
-          <a:ln>
-            <a:noFill/>
-          </a:ln>
-        </p:spPr>
-        <p:style>
-          <a:lnRef idx="1">
-            <a:schemeClr val="accent1"/>
-          </a:lnRef>
-          <a:fillRef idx="3">
-            <a:schemeClr val="accent1"/>
-          </a:fillRef>
-          <a:effectRef idx="2">
-            <a:schemeClr val="accent1"/>
-          </a:effectRef>
-          <a:fontRef idx="minor">
-            <a:schemeClr val="lt1"/>
-          </a:fontRef>
-        </p:style>
-        <p:txBody>
-          <a:bodyPr rtlCol="0" anchor="ctr"/>
-          <a:lstStyle/>
-          <a:p>
-            <a:pPr algn="ctr"/>
-          </a:p>
-        </p:txBody>
-      </p:sp>
-      <p:sp>
-        <p:nvSpPr>
-          <p:cNvPr id="16" name="TextBox 15"/>
-          <p:cNvSpPr txBox="1"/>
-          <p:nvPr/>
-        </p:nvSpPr>
-        <p:spPr>
-          <a:xfrm>
-            <a:off x="7836408" y="3447288"/>
-            <a:ext cx="3840480" cy="320040"/>
-          </a:xfrm>
-          <a:prstGeom prst="rect">
-            <a:avLst/>
-          </a:prstGeom>
-          <a:noFill/>
-        </p:spPr>
-        <p:txBody>
-          <a:bodyPr wrap="square">
-            <a:spAutoFit/>
-          </a:bodyPr>
-          <a:lstStyle/>
-          <a:p>
-            <a:pPr algn="l"/>
-            <a:r>
-              <a:rPr sz="1100" b="1">
-                <a:solidFill>
-                  <a:srgbClr val="FFFFFF"/>
-                </a:solidFill>
-              </a:rPr>
-              <a:t>INVESTEERING</a:t>
-            </a:r>
-          </a:p>
-        </p:txBody>
-      </p:sp>
-      <p:sp>
-        <p:nvSpPr>
-          <p:cNvPr id="17" name="TextBox 16"/>
-          <p:cNvSpPr txBox="1"/>
-          <p:nvPr/>
-        </p:nvSpPr>
-        <p:spPr>
-          <a:xfrm>
-            <a:off x="7836408" y="3776472"/>
-            <a:ext cx="3840480" cy="384048"/>
-          </a:xfrm>
-          <a:prstGeom prst="rect">
-            <a:avLst/>
-          </a:prstGeom>
-          <a:noFill/>
-        </p:spPr>
-        <p:txBody>
-          <a:bodyPr wrap="square">
-            <a:spAutoFit/>
-          </a:bodyPr>
-          <a:lstStyle/>
-          <a:p>
-            <a:pPr algn="l"/>
-            <a:r>
-              <a:rPr sz="1000" b="0">
-                <a:solidFill>
-                  <a:srgbClr val="BDD7EE"/>
-                </a:solidFill>
-              </a:rPr>
-              <a:t>kogupindala_m² × 250
-(€/m² proxy)</a:t>
-            </a:r>
-          </a:p>
-        </p:txBody>
-      </p:sp>
-      <p:sp>
-        <p:nvSpPr>
-          <p:cNvPr id="18" name="Rectangle 17"/>
-          <p:cNvSpPr/>
-          <p:nvPr/>
-        </p:nvSpPr>
-        <p:spPr>
-          <a:xfrm>
-            <a:off x="7726679" y="4251960"/>
-            <a:ext cx="4069080" cy="749808"/>
-          </a:xfrm>
-          <a:prstGeom prst="rect">
-            <a:avLst/>
-          </a:prstGeom>
-          <a:solidFill>
-            <a:srgbClr val="2E75B6"/>
-          </a:solidFill>
-          <a:ln>
-            <a:noFill/>
-          </a:ln>
-        </p:spPr>
-        <p:style>
-          <a:lnRef idx="1">
-            <a:schemeClr val="accent1"/>
-          </a:lnRef>
-          <a:fillRef idx="3">
-            <a:schemeClr val="accent1"/>
-          </a:fillRef>
-          <a:effectRef idx="2">
-            <a:schemeClr val="accent1"/>
-          </a:effectRef>
-          <a:fontRef idx="minor">
-            <a:schemeClr val="lt1"/>
-          </a:fontRef>
-        </p:style>
-        <p:txBody>
-          <a:bodyPr rtlCol="0" anchor="ctr"/>
-          <a:lstStyle/>
-          <a:p>
-            <a:pPr algn="ctr"/>
-          </a:p>
-        </p:txBody>
-      </p:sp>
-      <p:sp>
-        <p:nvSpPr>
-          <p:cNvPr id="19" name="TextBox 18"/>
-          <p:cNvSpPr txBox="1"/>
-          <p:nvPr/>
-        </p:nvSpPr>
-        <p:spPr>
-          <a:xfrm>
-            <a:off x="7836408" y="4270248"/>
-            <a:ext cx="3840480" cy="320040"/>
-          </a:xfrm>
-          <a:prstGeom prst="rect">
-            <a:avLst/>
-          </a:prstGeom>
-          <a:noFill/>
-        </p:spPr>
-        <p:txBody>
-          <a:bodyPr wrap="square">
-            <a:spAutoFit/>
-          </a:bodyPr>
-          <a:lstStyle/>
-          <a:p>
-            <a:pPr algn="l"/>
-            <a:r>
-              <a:rPr sz="1100" b="1">
-                <a:solidFill>
-                  <a:srgbClr val="FFFFFF"/>
-                </a:solidFill>
-              </a:rPr>
-              <a:t>PRIORITY</a:t>
-            </a:r>
-          </a:p>
-        </p:txBody>
-      </p:sp>
-      <p:sp>
-        <p:nvSpPr>
-          <p:cNvPr id="20" name="TextBox 19"/>
-          <p:cNvSpPr txBox="1"/>
-          <p:nvPr/>
-        </p:nvSpPr>
-        <p:spPr>
-          <a:xfrm>
-            <a:off x="7836408" y="4599432"/>
-            <a:ext cx="3840480" cy="384048"/>
-          </a:xfrm>
-          <a:prstGeom prst="rect">
-            <a:avLst/>
-          </a:prstGeom>
-          <a:noFill/>
-        </p:spPr>
-        <p:txBody>
-          <a:bodyPr wrap="square">
-            <a:spAutoFit/>
-          </a:bodyPr>
-          <a:lstStyle/>
-          <a:p>
-            <a:pPr algn="l"/>
-            <a:r>
-              <a:rPr sz="1000" b="0">
-                <a:solidFill>
-                  <a:srgbClr val="BDD7EE"/>
-                </a:solidFill>
-              </a:rPr>
-              <a:t>LOG(sääst+1) × LOG(skoor+1)
-× LOG(pindala+1)</a:t>
-            </a:r>
-          </a:p>
-        </p:txBody>
-      </p:sp>
-      <p:sp>
-        <p:nvSpPr>
-          <p:cNvPr id="21" name="Rectangle 20"/>
-          <p:cNvSpPr/>
-          <p:nvPr/>
-        </p:nvSpPr>
-        <p:spPr>
-          <a:xfrm>
-            <a:off x="7726679" y="5074920"/>
-            <a:ext cx="4069080" cy="749808"/>
-          </a:xfrm>
-          <a:prstGeom prst="rect">
-            <a:avLst/>
-          </a:prstGeom>
-          <a:solidFill>
-            <a:srgbClr val="2E75B6"/>
-          </a:solidFill>
-          <a:ln>
-            <a:noFill/>
-          </a:ln>
-        </p:spPr>
-        <p:style>
-          <a:lnRef idx="1">
-            <a:schemeClr val="accent1"/>
-          </a:lnRef>
-          <a:fillRef idx="3">
-            <a:schemeClr val="accent1"/>
-          </a:fillRef>
-          <a:effectRef idx="2">
-            <a:schemeClr val="accent1"/>
-          </a:effectRef>
-          <a:fontRef idx="minor">
-            <a:schemeClr val="lt1"/>
-          </a:fontRef>
-        </p:style>
-        <p:txBody>
-          <a:bodyPr rtlCol="0" anchor="ctr"/>
-          <a:lstStyle/>
-          <a:p>
-            <a:pPr algn="ctr"/>
-          </a:p>
-        </p:txBody>
-      </p:sp>
-      <p:sp>
-        <p:nvSpPr>
-          <p:cNvPr id="22" name="TextBox 21"/>
-          <p:cNvSpPr txBox="1"/>
-          <p:nvPr/>
-        </p:nvSpPr>
-        <p:spPr>
-          <a:xfrm>
-            <a:off x="7836408" y="5093208"/>
-            <a:ext cx="3840480" cy="320040"/>
-          </a:xfrm>
-          <a:prstGeom prst="rect">
-            <a:avLst/>
-          </a:prstGeom>
-          <a:noFill/>
-        </p:spPr>
-        <p:txBody>
-          <a:bodyPr wrap="square">
-            <a:spAutoFit/>
-          </a:bodyPr>
-          <a:lstStyle/>
-          <a:p>
-            <a:pPr algn="l"/>
-            <a:r>
-              <a:rPr sz="1100" b="1">
-                <a:solidFill>
-                  <a:srgbClr val="FFFFFF"/>
-                </a:solidFill>
-              </a:rPr>
-              <a:t>TASUVUS</a:t>
-            </a:r>
-          </a:p>
-        </p:txBody>
-      </p:sp>
-      <p:sp>
-        <p:nvSpPr>
-          <p:cNvPr id="23" name="TextBox 22"/>
-          <p:cNvSpPr txBox="1"/>
-          <p:nvPr/>
-        </p:nvSpPr>
-        <p:spPr>
-          <a:xfrm>
-            <a:off x="7836408" y="5422392"/>
-            <a:ext cx="3840480" cy="384048"/>
-          </a:xfrm>
-          <a:prstGeom prst="rect">
-            <a:avLst/>
-          </a:prstGeom>
-          <a:noFill/>
-        </p:spPr>
-        <p:txBody>
-          <a:bodyPr wrap="square">
-            <a:spAutoFit/>
-          </a:bodyPr>
-          <a:lstStyle/>
-          <a:p>
-            <a:pPr algn="l"/>
-            <a:r>
-              <a:rPr sz="1000" b="0">
-                <a:solidFill>
-                  <a:srgbClr val="BDD7EE"/>
-                </a:solidFill>
-              </a:rPr>
-              <a:t>1 / NULLIF(roi, 0)</a:t>
-            </a:r>
-          </a:p>
-        </p:txBody>
-      </p:sp>
-    </p:spTree>
-  </p:cSld>
-  <p:clrMapOvr>
-    <a:masterClrMapping/>
-  </p:clrMapOvr>
-</p:sld>
-</file>
-
 <file path=ppt/slides/slide2.xml><?xml version="1.0" encoding="utf-8"?>
 <p:sld xmlns:a="http://schemas.openxmlformats.org/drawingml/2006/main" xmlns:r="http://schemas.openxmlformats.org/officeDocument/2006/relationships" xmlns:p="http://schemas.openxmlformats.org/presentationml/2006/main">
   <p:cSld>
@@ -7946,7 +7245,7 @@
         <p:spPr>
           <a:xfrm>
             <a:off x="365760" y="91440"/>
-            <a:ext cx="11430000" cy="777240"/>
+            <a:ext cx="11430000" cy="523220"/>
           </a:xfrm>
           <a:prstGeom prst="rect">
             <a:avLst/>
@@ -7961,1361 +7260,75 @@
           <a:p>
             <a:pPr algn="l"/>
             <a:r>
-              <a:rPr sz="2800" b="1">
+              <a:rPr sz="2800" b="1" dirty="0">
                 <a:solidFill>
                   <a:srgbClr val="FFFFFF"/>
                 </a:solidFill>
               </a:rPr>
-              <a:t>Tööjaotus ja kokkuvõte</a:t>
-            </a:r>
-          </a:p>
-        </p:txBody>
-      </p:sp>
-      <p:sp>
-        <p:nvSpPr>
-          <p:cNvPr id="4" name="Rectangle 3"/>
-          <p:cNvSpPr/>
-          <p:nvPr/>
-        </p:nvSpPr>
-        <p:spPr>
-          <a:xfrm>
-            <a:off x="228600" y="1188720"/>
-            <a:ext cx="2697480" cy="594360"/>
-          </a:xfrm>
-          <a:prstGeom prst="rect">
-            <a:avLst/>
-          </a:prstGeom>
-          <a:solidFill>
-            <a:srgbClr val="2E75B6"/>
-          </a:solidFill>
-          <a:ln>
-            <a:noFill/>
-          </a:ln>
-        </p:spPr>
-        <p:style>
-          <a:lnRef idx="1">
-            <a:schemeClr val="accent1"/>
-          </a:lnRef>
-          <a:fillRef idx="3">
-            <a:schemeClr val="accent1"/>
-          </a:fillRef>
-          <a:effectRef idx="2">
-            <a:schemeClr val="accent1"/>
-          </a:effectRef>
-          <a:fontRef idx="minor">
-            <a:schemeClr val="lt1"/>
-          </a:fontRef>
-        </p:style>
-        <p:txBody>
-          <a:bodyPr rtlCol="0" anchor="ctr"/>
-          <a:lstStyle/>
-          <a:p>
-            <a:pPr algn="ctr"/>
-            <a:endParaRPr/>
-          </a:p>
-        </p:txBody>
-      </p:sp>
-      <p:sp>
-        <p:nvSpPr>
-          <p:cNvPr id="5" name="TextBox 4"/>
-          <p:cNvSpPr txBox="1"/>
-          <p:nvPr/>
-        </p:nvSpPr>
-        <p:spPr>
-          <a:xfrm>
-            <a:off x="320040" y="1207008"/>
-            <a:ext cx="2514600" cy="548640"/>
-          </a:xfrm>
-          <a:prstGeom prst="rect">
-            <a:avLst/>
-          </a:prstGeom>
-          <a:noFill/>
-        </p:spPr>
-        <p:txBody>
-          <a:bodyPr wrap="square">
-            <a:spAutoFit/>
-          </a:bodyPr>
-          <a:lstStyle/>
-          <a:p>
-            <a:pPr algn="ctr"/>
-            <a:r>
-              <a:rPr sz="1400" b="1">
+              <a:t>Dashboard</a:t>
+            </a:r>
+            <a:r>
+              <a:rPr lang="et-EE" sz="2800" b="1" dirty="0">
                 <a:solidFill>
                   <a:srgbClr val="FFFFFF"/>
                 </a:solidFill>
               </a:rPr>
-              <a:t>Toel Teemaa</a:t>
-            </a:r>
-          </a:p>
-        </p:txBody>
-      </p:sp>
-      <p:sp>
-        <p:nvSpPr>
-          <p:cNvPr id="6" name="Rectangle 5"/>
-          <p:cNvSpPr/>
-          <p:nvPr/>
-        </p:nvSpPr>
-        <p:spPr>
-          <a:xfrm>
-            <a:off x="228600" y="1783080"/>
-            <a:ext cx="2697480" cy="438912"/>
-          </a:xfrm>
-          <a:prstGeom prst="rect">
-            <a:avLst/>
-          </a:prstGeom>
-          <a:solidFill>
-            <a:srgbClr val="BDD7EE"/>
-          </a:solidFill>
-          <a:ln>
-            <a:noFill/>
-          </a:ln>
-        </p:spPr>
-        <p:style>
-          <a:lnRef idx="1">
-            <a:schemeClr val="accent1"/>
-          </a:lnRef>
-          <a:fillRef idx="3">
-            <a:schemeClr val="accent1"/>
-          </a:fillRef>
-          <a:effectRef idx="2">
-            <a:schemeClr val="accent1"/>
-          </a:effectRef>
-          <a:fontRef idx="minor">
-            <a:schemeClr val="lt1"/>
-          </a:fontRef>
-        </p:style>
-        <p:txBody>
-          <a:bodyPr rtlCol="0" anchor="ctr"/>
-          <a:lstStyle/>
-          <a:p>
-            <a:pPr algn="ctr"/>
-            <a:endParaRPr/>
-          </a:p>
-        </p:txBody>
-      </p:sp>
-      <p:sp>
-        <p:nvSpPr>
-          <p:cNvPr id="7" name="TextBox 6"/>
-          <p:cNvSpPr txBox="1"/>
-          <p:nvPr/>
-        </p:nvSpPr>
-        <p:spPr>
-          <a:xfrm>
-            <a:off x="274320" y="1801368"/>
-            <a:ext cx="2606040" cy="402336"/>
-          </a:xfrm>
-          <a:prstGeom prst="rect">
-            <a:avLst/>
-          </a:prstGeom>
-          <a:noFill/>
-        </p:spPr>
-        <p:txBody>
-          <a:bodyPr wrap="square">
-            <a:spAutoFit/>
-          </a:bodyPr>
-          <a:lstStyle/>
-          <a:p>
-            <a:pPr algn="ctr"/>
-            <a:r>
-              <a:rPr sz="1300" b="1">
-                <a:solidFill>
-                  <a:srgbClr val="1B376B"/>
-                </a:solidFill>
-              </a:rPr>
-              <a:t>Andmete laadimine</a:t>
-            </a:r>
-          </a:p>
-        </p:txBody>
-      </p:sp>
-      <p:sp>
-        <p:nvSpPr>
-          <p:cNvPr id="8" name="TextBox 7"/>
-          <p:cNvSpPr txBox="1"/>
-          <p:nvPr/>
-        </p:nvSpPr>
-        <p:spPr>
-          <a:xfrm>
-            <a:off x="320040" y="2286000"/>
-            <a:ext cx="2542032" cy="1280160"/>
-          </a:xfrm>
-          <a:prstGeom prst="rect">
-            <a:avLst/>
-          </a:prstGeom>
-          <a:noFill/>
-        </p:spPr>
-        <p:txBody>
-          <a:bodyPr wrap="square">
-            <a:spAutoFit/>
-          </a:bodyPr>
-          <a:lstStyle/>
-          <a:p>
-            <a:pPr algn="l"/>
-            <a:r>
-              <a:rPr sz="1200" b="0">
-                <a:solidFill>
-                  <a:srgbClr val="404040"/>
-                </a:solidFill>
-              </a:rPr>
-              <a:t>Airflow DAG-id, API integratsioonid (Open-Meteo, Elering, Nord Pool)</a:t>
-            </a:r>
-          </a:p>
-        </p:txBody>
-      </p:sp>
-      <p:sp>
-        <p:nvSpPr>
-          <p:cNvPr id="9" name="Rectangle 8"/>
-          <p:cNvSpPr/>
-          <p:nvPr/>
-        </p:nvSpPr>
-        <p:spPr>
-          <a:xfrm>
-            <a:off x="3136392" y="1188720"/>
-            <a:ext cx="2697480" cy="594360"/>
-          </a:xfrm>
-          <a:prstGeom prst="rect">
-            <a:avLst/>
-          </a:prstGeom>
-          <a:solidFill>
-            <a:srgbClr val="1B376B"/>
-          </a:solidFill>
-          <a:ln>
-            <a:noFill/>
-          </a:ln>
-        </p:spPr>
-        <p:style>
-          <a:lnRef idx="1">
-            <a:schemeClr val="accent1"/>
-          </a:lnRef>
-          <a:fillRef idx="3">
-            <a:schemeClr val="accent1"/>
-          </a:fillRef>
-          <a:effectRef idx="2">
-            <a:schemeClr val="accent1"/>
-          </a:effectRef>
-          <a:fontRef idx="minor">
-            <a:schemeClr val="lt1"/>
-          </a:fontRef>
-        </p:style>
-        <p:txBody>
-          <a:bodyPr rtlCol="0" anchor="ctr"/>
-          <a:lstStyle/>
-          <a:p>
-            <a:pPr algn="ctr"/>
-            <a:endParaRPr/>
-          </a:p>
-        </p:txBody>
-      </p:sp>
-      <p:sp>
-        <p:nvSpPr>
-          <p:cNvPr id="10" name="TextBox 9"/>
-          <p:cNvSpPr txBox="1"/>
-          <p:nvPr/>
-        </p:nvSpPr>
-        <p:spPr>
-          <a:xfrm>
-            <a:off x="3227832" y="1207008"/>
-            <a:ext cx="2514600" cy="548640"/>
-          </a:xfrm>
-          <a:prstGeom prst="rect">
-            <a:avLst/>
-          </a:prstGeom>
-          <a:noFill/>
-        </p:spPr>
-        <p:txBody>
-          <a:bodyPr wrap="square">
-            <a:spAutoFit/>
-          </a:bodyPr>
-          <a:lstStyle/>
-          <a:p>
-            <a:pPr algn="ctr"/>
-            <a:r>
-              <a:rPr sz="1400" b="1">
+              <a:t> (</a:t>
+            </a:r>
+            <a:r>
+              <a:rPr lang="et-EE" sz="2000" b="1" dirty="0" err="1">
                 <a:solidFill>
                   <a:srgbClr val="FFFFFF"/>
                 </a:solidFill>
               </a:rPr>
-              <a:t>Erkki Laaneoks</a:t>
-            </a:r>
-          </a:p>
-        </p:txBody>
-      </p:sp>
-      <p:sp>
-        <p:nvSpPr>
-          <p:cNvPr id="11" name="Rectangle 10"/>
-          <p:cNvSpPr/>
-          <p:nvPr/>
-        </p:nvSpPr>
-        <p:spPr>
-          <a:xfrm>
-            <a:off x="3136392" y="1783080"/>
-            <a:ext cx="2697480" cy="438912"/>
-          </a:xfrm>
-          <a:prstGeom prst="rect">
-            <a:avLst/>
-          </a:prstGeom>
-          <a:solidFill>
-            <a:srgbClr val="BDD7EE"/>
-          </a:solidFill>
-          <a:ln>
-            <a:noFill/>
-          </a:ln>
-        </p:spPr>
-        <p:style>
-          <a:lnRef idx="1">
-            <a:schemeClr val="accent1"/>
-          </a:lnRef>
-          <a:fillRef idx="3">
-            <a:schemeClr val="accent1"/>
-          </a:fillRef>
-          <a:effectRef idx="2">
-            <a:schemeClr val="accent1"/>
-          </a:effectRef>
-          <a:fontRef idx="minor">
-            <a:schemeClr val="lt1"/>
-          </a:fontRef>
-        </p:style>
-        <p:txBody>
-          <a:bodyPr rtlCol="0" anchor="ctr"/>
-          <a:lstStyle/>
-          <a:p>
-            <a:pPr algn="ctr"/>
-            <a:endParaRPr/>
-          </a:p>
-        </p:txBody>
-      </p:sp>
-      <p:sp>
-        <p:nvSpPr>
-          <p:cNvPr id="12" name="TextBox 11"/>
-          <p:cNvSpPr txBox="1"/>
-          <p:nvPr/>
-        </p:nvSpPr>
-        <p:spPr>
-          <a:xfrm>
-            <a:off x="3182112" y="1801368"/>
-            <a:ext cx="2606040" cy="402336"/>
-          </a:xfrm>
-          <a:prstGeom prst="rect">
-            <a:avLst/>
-          </a:prstGeom>
-          <a:noFill/>
-        </p:spPr>
-        <p:txBody>
-          <a:bodyPr wrap="square">
-            <a:spAutoFit/>
-          </a:bodyPr>
-          <a:lstStyle/>
-          <a:p>
-            <a:pPr algn="ctr"/>
-            <a:r>
-              <a:rPr sz="1300" b="1">
-                <a:solidFill>
-                  <a:srgbClr val="1B376B"/>
-                </a:solidFill>
-              </a:rPr>
-              <a:t>Teisendused</a:t>
-            </a:r>
-          </a:p>
-        </p:txBody>
-      </p:sp>
-      <p:sp>
-        <p:nvSpPr>
-          <p:cNvPr id="13" name="TextBox 12"/>
-          <p:cNvSpPr txBox="1"/>
-          <p:nvPr/>
-        </p:nvSpPr>
-        <p:spPr>
-          <a:xfrm>
-            <a:off x="3227832" y="2286000"/>
-            <a:ext cx="2542032" cy="1280160"/>
-          </a:xfrm>
-          <a:prstGeom prst="rect">
-            <a:avLst/>
-          </a:prstGeom>
-          <a:noFill/>
-        </p:spPr>
-        <p:txBody>
-          <a:bodyPr wrap="square">
-            <a:spAutoFit/>
-          </a:bodyPr>
-          <a:lstStyle/>
-          <a:p>
-            <a:pPr algn="l"/>
-            <a:r>
-              <a:rPr sz="1200" b="0">
-                <a:solidFill>
-                  <a:srgbClr val="404040"/>
-                </a:solidFill>
-              </a:rPr>
-              <a:t>dbt mudelid, soojakao arvutus, mart-kiht, pearson_r makro</a:t>
-            </a:r>
-          </a:p>
-        </p:txBody>
-      </p:sp>
-      <p:sp>
-        <p:nvSpPr>
-          <p:cNvPr id="14" name="Rectangle 13"/>
-          <p:cNvSpPr/>
-          <p:nvPr/>
-        </p:nvSpPr>
-        <p:spPr>
-          <a:xfrm>
-            <a:off x="6044184" y="1188720"/>
-            <a:ext cx="2697480" cy="594360"/>
-          </a:xfrm>
-          <a:prstGeom prst="rect">
-            <a:avLst/>
-          </a:prstGeom>
-          <a:solidFill>
-            <a:srgbClr val="5A9E6F"/>
-          </a:solidFill>
-          <a:ln>
-            <a:noFill/>
-          </a:ln>
-        </p:spPr>
-        <p:style>
-          <a:lnRef idx="1">
-            <a:schemeClr val="accent1"/>
-          </a:lnRef>
-          <a:fillRef idx="3">
-            <a:schemeClr val="accent1"/>
-          </a:fillRef>
-          <a:effectRef idx="2">
-            <a:schemeClr val="accent1"/>
-          </a:effectRef>
-          <a:fontRef idx="minor">
-            <a:schemeClr val="lt1"/>
-          </a:fontRef>
-        </p:style>
-        <p:txBody>
-          <a:bodyPr rtlCol="0" anchor="ctr"/>
-          <a:lstStyle/>
-          <a:p>
-            <a:pPr algn="ctr"/>
-            <a:endParaRPr/>
-          </a:p>
-        </p:txBody>
-      </p:sp>
-      <p:sp>
-        <p:nvSpPr>
-          <p:cNvPr id="15" name="TextBox 14"/>
-          <p:cNvSpPr txBox="1"/>
-          <p:nvPr/>
-        </p:nvSpPr>
-        <p:spPr>
-          <a:xfrm>
-            <a:off x="6135624" y="1207008"/>
-            <a:ext cx="2514600" cy="548640"/>
-          </a:xfrm>
-          <a:prstGeom prst="rect">
-            <a:avLst/>
-          </a:prstGeom>
-          <a:noFill/>
-        </p:spPr>
-        <p:txBody>
-          <a:bodyPr wrap="square">
-            <a:spAutoFit/>
-          </a:bodyPr>
-          <a:lstStyle/>
-          <a:p>
-            <a:pPr algn="ctr"/>
-            <a:r>
-              <a:rPr sz="1400" b="1">
+              <a:t>Superset</a:t>
+            </a:r>
+            <a:r>
+              <a:rPr lang="et-EE" sz="2800" b="1" dirty="0">
                 <a:solidFill>
                   <a:srgbClr val="FFFFFF"/>
                 </a:solidFill>
               </a:rPr>
-              <a:t>Mihkel Nugis</a:t>
-            </a:r>
-          </a:p>
-        </p:txBody>
-      </p:sp>
-      <p:sp>
-        <p:nvSpPr>
-          <p:cNvPr id="16" name="Rectangle 15"/>
-          <p:cNvSpPr/>
-          <p:nvPr/>
-        </p:nvSpPr>
-        <p:spPr>
-          <a:xfrm>
-            <a:off x="6044184" y="1783080"/>
-            <a:ext cx="2697480" cy="438912"/>
-          </a:xfrm>
-          <a:prstGeom prst="rect">
-            <a:avLst/>
-          </a:prstGeom>
-          <a:solidFill>
-            <a:srgbClr val="BDD7EE"/>
-          </a:solidFill>
-          <a:ln>
-            <a:noFill/>
-          </a:ln>
-        </p:spPr>
-        <p:style>
-          <a:lnRef idx="1">
-            <a:schemeClr val="accent1"/>
-          </a:lnRef>
-          <a:fillRef idx="3">
-            <a:schemeClr val="accent1"/>
-          </a:fillRef>
-          <a:effectRef idx="2">
-            <a:schemeClr val="accent1"/>
-          </a:effectRef>
-          <a:fontRef idx="minor">
-            <a:schemeClr val="lt1"/>
-          </a:fontRef>
-        </p:style>
-        <p:txBody>
-          <a:bodyPr rtlCol="0" anchor="ctr"/>
-          <a:lstStyle/>
-          <a:p>
-            <a:pPr algn="ctr"/>
-            <a:endParaRPr/>
-          </a:p>
-        </p:txBody>
-      </p:sp>
-      <p:sp>
-        <p:nvSpPr>
-          <p:cNvPr id="17" name="TextBox 16"/>
-          <p:cNvSpPr txBox="1"/>
-          <p:nvPr/>
-        </p:nvSpPr>
-        <p:spPr>
-          <a:xfrm>
-            <a:off x="6089904" y="1801368"/>
-            <a:ext cx="2606040" cy="402336"/>
-          </a:xfrm>
-          <a:prstGeom prst="rect">
-            <a:avLst/>
-          </a:prstGeom>
-          <a:noFill/>
-        </p:spPr>
-        <p:txBody>
-          <a:bodyPr wrap="square">
-            <a:spAutoFit/>
-          </a:bodyPr>
-          <a:lstStyle/>
-          <a:p>
-            <a:pPr algn="ctr"/>
-            <a:r>
-              <a:rPr sz="1300" b="1">
-                <a:solidFill>
-                  <a:srgbClr val="1B376B"/>
-                </a:solidFill>
-              </a:rPr>
-              <a:t>Andmekvaliteet</a:t>
-            </a:r>
-          </a:p>
-        </p:txBody>
-      </p:sp>
-      <p:sp>
-        <p:nvSpPr>
-          <p:cNvPr id="18" name="TextBox 17"/>
-          <p:cNvSpPr txBox="1"/>
-          <p:nvPr/>
-        </p:nvSpPr>
-        <p:spPr>
-          <a:xfrm>
-            <a:off x="6135624" y="2286000"/>
-            <a:ext cx="2542032" cy="1280160"/>
-          </a:xfrm>
-          <a:prstGeom prst="rect">
-            <a:avLst/>
-          </a:prstGeom>
-          <a:noFill/>
-        </p:spPr>
-        <p:txBody>
-          <a:bodyPr wrap="square">
-            <a:spAutoFit/>
-          </a:bodyPr>
-          <a:lstStyle/>
-          <a:p>
-            <a:pPr algn="l"/>
-            <a:r>
-              <a:rPr sz="1200" b="0">
-                <a:solidFill>
-                  <a:srgbClr val="404040"/>
-                </a:solidFill>
-              </a:rPr>
-              <a:t>dbt testid, vigade diagnoos, andmete valideerimise automatiseerimine</a:t>
-            </a:r>
-          </a:p>
-        </p:txBody>
-      </p:sp>
-      <p:sp>
-        <p:nvSpPr>
-          <p:cNvPr id="19" name="Rectangle 18"/>
-          <p:cNvSpPr/>
-          <p:nvPr/>
-        </p:nvSpPr>
-        <p:spPr>
-          <a:xfrm>
-            <a:off x="8951976" y="1188720"/>
-            <a:ext cx="2697480" cy="594360"/>
-          </a:xfrm>
-          <a:prstGeom prst="rect">
-            <a:avLst/>
-          </a:prstGeom>
-          <a:solidFill>
-            <a:srgbClr val="ED7D31"/>
-          </a:solidFill>
-          <a:ln>
-            <a:noFill/>
-          </a:ln>
-        </p:spPr>
-        <p:style>
-          <a:lnRef idx="1">
-            <a:schemeClr val="accent1"/>
-          </a:lnRef>
-          <a:fillRef idx="3">
-            <a:schemeClr val="accent1"/>
-          </a:fillRef>
-          <a:effectRef idx="2">
-            <a:schemeClr val="accent1"/>
-          </a:effectRef>
-          <a:fontRef idx="minor">
-            <a:schemeClr val="lt1"/>
-          </a:fontRef>
-        </p:style>
-        <p:txBody>
-          <a:bodyPr rtlCol="0" anchor="ctr"/>
-          <a:lstStyle/>
-          <a:p>
-            <a:pPr algn="ctr"/>
-            <a:endParaRPr/>
-          </a:p>
-        </p:txBody>
-      </p:sp>
-      <p:sp>
-        <p:nvSpPr>
-          <p:cNvPr id="20" name="TextBox 19"/>
-          <p:cNvSpPr txBox="1"/>
-          <p:nvPr/>
-        </p:nvSpPr>
-        <p:spPr>
-          <a:xfrm>
-            <a:off x="9043416" y="1207008"/>
-            <a:ext cx="2514600" cy="548640"/>
-          </a:xfrm>
-          <a:prstGeom prst="rect">
-            <a:avLst/>
-          </a:prstGeom>
-          <a:noFill/>
-        </p:spPr>
-        <p:txBody>
-          <a:bodyPr wrap="square">
-            <a:spAutoFit/>
-          </a:bodyPr>
-          <a:lstStyle/>
-          <a:p>
-            <a:pPr algn="ctr"/>
-            <a:r>
-              <a:rPr sz="1400" b="1">
-                <a:solidFill>
-                  <a:srgbClr val="FFFFFF"/>
-                </a:solidFill>
-              </a:rPr>
-              <a:t>Anna-Liisa Altmets</a:t>
-            </a:r>
-          </a:p>
-        </p:txBody>
-      </p:sp>
-      <p:sp>
-        <p:nvSpPr>
-          <p:cNvPr id="21" name="Rectangle 20"/>
-          <p:cNvSpPr/>
-          <p:nvPr/>
-        </p:nvSpPr>
-        <p:spPr>
-          <a:xfrm>
-            <a:off x="8951976" y="1783080"/>
-            <a:ext cx="2697480" cy="438912"/>
-          </a:xfrm>
-          <a:prstGeom prst="rect">
-            <a:avLst/>
-          </a:prstGeom>
-          <a:solidFill>
-            <a:srgbClr val="BDD7EE"/>
-          </a:solidFill>
-          <a:ln>
-            <a:noFill/>
-          </a:ln>
-        </p:spPr>
-        <p:style>
-          <a:lnRef idx="1">
-            <a:schemeClr val="accent1"/>
-          </a:lnRef>
-          <a:fillRef idx="3">
-            <a:schemeClr val="accent1"/>
-          </a:fillRef>
-          <a:effectRef idx="2">
-            <a:schemeClr val="accent1"/>
-          </a:effectRef>
-          <a:fontRef idx="minor">
-            <a:schemeClr val="lt1"/>
-          </a:fontRef>
-        </p:style>
-        <p:txBody>
-          <a:bodyPr rtlCol="0" anchor="ctr"/>
-          <a:lstStyle/>
-          <a:p>
-            <a:pPr algn="ctr"/>
-            <a:endParaRPr/>
-          </a:p>
-        </p:txBody>
-      </p:sp>
-      <p:sp>
-        <p:nvSpPr>
-          <p:cNvPr id="22" name="TextBox 21"/>
-          <p:cNvSpPr txBox="1"/>
-          <p:nvPr/>
-        </p:nvSpPr>
-        <p:spPr>
-          <a:xfrm>
-            <a:off x="8997696" y="1801368"/>
-            <a:ext cx="2606040" cy="402336"/>
-          </a:xfrm>
-          <a:prstGeom prst="rect">
-            <a:avLst/>
-          </a:prstGeom>
-          <a:noFill/>
-        </p:spPr>
-        <p:txBody>
-          <a:bodyPr wrap="square">
-            <a:spAutoFit/>
-          </a:bodyPr>
-          <a:lstStyle/>
-          <a:p>
-            <a:pPr algn="ctr"/>
-            <a:r>
-              <a:rPr sz="1300" b="1">
-                <a:solidFill>
-                  <a:srgbClr val="1B376B"/>
-                </a:solidFill>
-              </a:rPr>
-              <a:t>Visualiseerimine</a:t>
-            </a:r>
-          </a:p>
-        </p:txBody>
-      </p:sp>
-      <p:sp>
-        <p:nvSpPr>
-          <p:cNvPr id="23" name="TextBox 22"/>
-          <p:cNvSpPr txBox="1"/>
-          <p:nvPr/>
-        </p:nvSpPr>
-        <p:spPr>
-          <a:xfrm>
-            <a:off x="9043416" y="2286000"/>
-            <a:ext cx="2542032" cy="1280160"/>
-          </a:xfrm>
-          <a:prstGeom prst="rect">
-            <a:avLst/>
-          </a:prstGeom>
-          <a:noFill/>
-        </p:spPr>
-        <p:txBody>
-          <a:bodyPr wrap="square">
-            <a:spAutoFit/>
-          </a:bodyPr>
-          <a:lstStyle/>
-          <a:p>
-            <a:pPr algn="l"/>
-            <a:r>
-              <a:rPr sz="1200" b="0">
-                <a:solidFill>
-                  <a:srgbClr val="404040"/>
-                </a:solidFill>
-              </a:rPr>
-              <a:t>Superset näidikulaud, äriküsimuse sidumine tulemustega</a:t>
-            </a:r>
-          </a:p>
-        </p:txBody>
-      </p:sp>
-      <p:sp>
-        <p:nvSpPr>
-          <p:cNvPr id="24" name="Rectangle 23"/>
-          <p:cNvSpPr/>
-          <p:nvPr/>
-        </p:nvSpPr>
-        <p:spPr>
-          <a:xfrm>
-            <a:off x="365760" y="3840480"/>
-            <a:ext cx="11430000" cy="2697480"/>
-          </a:xfrm>
-          <a:prstGeom prst="rect">
-            <a:avLst/>
-          </a:prstGeom>
-          <a:solidFill>
-            <a:srgbClr val="F2F2F2"/>
-          </a:solidFill>
-          <a:ln>
-            <a:noFill/>
-          </a:ln>
-        </p:spPr>
-        <p:style>
-          <a:lnRef idx="1">
-            <a:schemeClr val="accent1"/>
-          </a:lnRef>
-          <a:fillRef idx="3">
-            <a:schemeClr val="accent1"/>
-          </a:fillRef>
-          <a:effectRef idx="2">
-            <a:schemeClr val="accent1"/>
-          </a:effectRef>
-          <a:fontRef idx="minor">
-            <a:schemeClr val="lt1"/>
-          </a:fontRef>
-        </p:style>
-        <p:txBody>
-          <a:bodyPr rtlCol="0" anchor="ctr"/>
-          <a:lstStyle/>
-          <a:p>
-            <a:pPr algn="ctr"/>
-            <a:endParaRPr/>
-          </a:p>
-        </p:txBody>
-      </p:sp>
-      <p:sp>
-        <p:nvSpPr>
-          <p:cNvPr id="25" name="TextBox 24"/>
-          <p:cNvSpPr txBox="1"/>
-          <p:nvPr/>
-        </p:nvSpPr>
-        <p:spPr>
-          <a:xfrm>
-            <a:off x="548640" y="3931920"/>
-            <a:ext cx="4572000" cy="457200"/>
-          </a:xfrm>
-          <a:prstGeom prst="rect">
-            <a:avLst/>
-          </a:prstGeom>
-          <a:noFill/>
-        </p:spPr>
-        <p:txBody>
-          <a:bodyPr wrap="square">
-            <a:spAutoFit/>
-          </a:bodyPr>
-          <a:lstStyle/>
-          <a:p>
-            <a:pPr algn="l"/>
-            <a:r>
-              <a:rPr sz="1600" b="1">
-                <a:solidFill>
-                  <a:srgbClr val="1B376B"/>
-                </a:solidFill>
-              </a:rPr>
-              <a:t>Kokkuvõte</a:t>
-            </a:r>
-          </a:p>
-        </p:txBody>
-      </p:sp>
-      <p:sp>
-        <p:nvSpPr>
-          <p:cNvPr id="26" name="TextBox 25"/>
-          <p:cNvSpPr txBox="1"/>
-          <p:nvPr/>
-        </p:nvSpPr>
-        <p:spPr>
-          <a:xfrm>
-            <a:off x="548640" y="4434840"/>
-            <a:ext cx="7772400" cy="2011680"/>
-          </a:xfrm>
-          <a:prstGeom prst="rect">
-            <a:avLst/>
-          </a:prstGeom>
-          <a:noFill/>
-        </p:spPr>
-        <p:txBody>
-          <a:bodyPr wrap="square">
-            <a:spAutoFit/>
-          </a:bodyPr>
-          <a:lstStyle/>
-          <a:p>
-            <a:pPr>
-              <a:spcBef>
-                <a:spcPts val="400"/>
-              </a:spcBef>
-            </a:pPr>
-            <a:r>
-              <a:rPr sz="1400">
-                <a:solidFill>
-                  <a:srgbClr val="404040"/>
-                </a:solidFill>
-              </a:rPr>
-              <a:t>•  Ühendame 300 000 hoone andmed ilmaandmete ja energiahindadega → omavalitsuste pingerida</a:t>
-            </a:r>
-          </a:p>
-          <a:p>
-            <a:pPr>
-              <a:spcBef>
-                <a:spcPts val="400"/>
-              </a:spcBef>
-            </a:pPr>
-            <a:r>
-              <a:rPr sz="1400">
-                <a:solidFill>
-                  <a:srgbClr val="404040"/>
-                </a:solidFill>
-              </a:rPr>
-              <a:t>•  Automatiseeritud torujuhe: Airflow + dbt + PostgreSQL + Superset, kõik Dockeris</a:t>
-            </a:r>
-          </a:p>
-          <a:p>
-            <a:pPr>
-              <a:spcBef>
-                <a:spcPts val="400"/>
-              </a:spcBef>
-            </a:pPr>
-            <a:r>
-              <a:rPr sz="1400">
-                <a:solidFill>
-                  <a:srgbClr val="404040"/>
-                </a:solidFill>
-              </a:rPr>
-              <a:t>•  Andmekvaliteedi testid tagavad tulemuste usaldusväärsuse (automaatne kontroll iga laadimise järel)</a:t>
-            </a:r>
-          </a:p>
-          <a:p>
-            <a:pPr>
-              <a:spcBef>
-                <a:spcPts val="400"/>
-              </a:spcBef>
-            </a:pPr>
-            <a:r>
-              <a:rPr sz="1400">
-                <a:solidFill>
-                  <a:srgbClr val="404040"/>
-                </a:solidFill>
-              </a:rPr>
-              <a:t>•  Tulemus on praktiline tööriist renoveerimiseelarve suunamiseks seal, kus mõju on suurim</a:t>
-            </a:r>
-          </a:p>
-        </p:txBody>
-      </p:sp>
-      <p:sp>
-        <p:nvSpPr>
-          <p:cNvPr id="27" name="TextBox 26"/>
-          <p:cNvSpPr txBox="1"/>
-          <p:nvPr/>
-        </p:nvSpPr>
-        <p:spPr>
-          <a:xfrm>
-            <a:off x="8503920" y="3931920"/>
-            <a:ext cx="914400" cy="365760"/>
-          </a:xfrm>
-          <a:prstGeom prst="rect">
-            <a:avLst/>
-          </a:prstGeom>
-          <a:noFill/>
-        </p:spPr>
-        <p:txBody>
-          <a:bodyPr wrap="square">
-            <a:spAutoFit/>
-          </a:bodyPr>
-          <a:lstStyle/>
-          <a:p>
-            <a:pPr algn="l"/>
-            <a:r>
-              <a:rPr sz="1300" b="1">
-                <a:solidFill>
-                  <a:srgbClr val="1B376B"/>
-                </a:solidFill>
-              </a:rPr>
-              <a:t>Stack:</a:t>
-            </a:r>
-          </a:p>
-        </p:txBody>
-      </p:sp>
-      <p:sp>
-        <p:nvSpPr>
-          <p:cNvPr id="28" name="Rectangle 27"/>
-          <p:cNvSpPr/>
-          <p:nvPr/>
-        </p:nvSpPr>
-        <p:spPr>
-          <a:xfrm>
-            <a:off x="8503920" y="4343400"/>
-            <a:ext cx="2926080" cy="347472"/>
-          </a:xfrm>
-          <a:prstGeom prst="rect">
-            <a:avLst/>
-          </a:prstGeom>
-          <a:solidFill>
-            <a:srgbClr val="2E75B6"/>
-          </a:solidFill>
-          <a:ln>
-            <a:noFill/>
-          </a:ln>
-        </p:spPr>
-        <p:style>
-          <a:lnRef idx="1">
-            <a:schemeClr val="accent1"/>
-          </a:lnRef>
-          <a:fillRef idx="3">
-            <a:schemeClr val="accent1"/>
-          </a:fillRef>
-          <a:effectRef idx="2">
-            <a:schemeClr val="accent1"/>
-          </a:effectRef>
-          <a:fontRef idx="minor">
-            <a:schemeClr val="lt1"/>
-          </a:fontRef>
-        </p:style>
-        <p:txBody>
-          <a:bodyPr rtlCol="0" anchor="ctr"/>
-          <a:lstStyle/>
-          <a:p>
-            <a:pPr algn="ctr"/>
-            <a:endParaRPr/>
-          </a:p>
-        </p:txBody>
-      </p:sp>
-      <p:sp>
-        <p:nvSpPr>
-          <p:cNvPr id="29" name="TextBox 28"/>
-          <p:cNvSpPr txBox="1"/>
-          <p:nvPr/>
-        </p:nvSpPr>
-        <p:spPr>
-          <a:xfrm>
-            <a:off x="8549640" y="4361688"/>
-            <a:ext cx="2834640" cy="310896"/>
-          </a:xfrm>
-          <a:prstGeom prst="rect">
-            <a:avLst/>
-          </a:prstGeom>
-          <a:noFill/>
-        </p:spPr>
-        <p:txBody>
-          <a:bodyPr wrap="square">
-            <a:spAutoFit/>
-          </a:bodyPr>
-          <a:lstStyle/>
-          <a:p>
-            <a:pPr algn="ctr"/>
-            <a:r>
-              <a:rPr sz="1300" b="0">
-                <a:solidFill>
-                  <a:srgbClr val="FFFFFF"/>
-                </a:solidFill>
-              </a:rPr>
-              <a:t>Apache Airflow</a:t>
-            </a:r>
-          </a:p>
-        </p:txBody>
-      </p:sp>
-      <p:sp>
-        <p:nvSpPr>
-          <p:cNvPr id="30" name="Rectangle 29"/>
-          <p:cNvSpPr/>
-          <p:nvPr/>
-        </p:nvSpPr>
-        <p:spPr>
-          <a:xfrm>
-            <a:off x="8503920" y="4764024"/>
-            <a:ext cx="2926080" cy="347472"/>
-          </a:xfrm>
-          <a:prstGeom prst="rect">
-            <a:avLst/>
-          </a:prstGeom>
-          <a:solidFill>
-            <a:srgbClr val="2E75B6"/>
-          </a:solidFill>
-          <a:ln>
-            <a:noFill/>
-          </a:ln>
-        </p:spPr>
-        <p:style>
-          <a:lnRef idx="1">
-            <a:schemeClr val="accent1"/>
-          </a:lnRef>
-          <a:fillRef idx="3">
-            <a:schemeClr val="accent1"/>
-          </a:fillRef>
-          <a:effectRef idx="2">
-            <a:schemeClr val="accent1"/>
-          </a:effectRef>
-          <a:fontRef idx="minor">
-            <a:schemeClr val="lt1"/>
-          </a:fontRef>
-        </p:style>
-        <p:txBody>
-          <a:bodyPr rtlCol="0" anchor="ctr"/>
-          <a:lstStyle/>
-          <a:p>
-            <a:pPr algn="ctr"/>
-            <a:endParaRPr/>
-          </a:p>
-        </p:txBody>
-      </p:sp>
-      <p:sp>
-        <p:nvSpPr>
-          <p:cNvPr id="31" name="TextBox 30"/>
-          <p:cNvSpPr txBox="1"/>
-          <p:nvPr/>
-        </p:nvSpPr>
-        <p:spPr>
-          <a:xfrm>
-            <a:off x="8549640" y="4782312"/>
-            <a:ext cx="2834640" cy="310896"/>
-          </a:xfrm>
-          <a:prstGeom prst="rect">
-            <a:avLst/>
-          </a:prstGeom>
-          <a:noFill/>
-        </p:spPr>
-        <p:txBody>
-          <a:bodyPr wrap="square">
-            <a:spAutoFit/>
-          </a:bodyPr>
-          <a:lstStyle/>
-          <a:p>
-            <a:pPr algn="ctr"/>
-            <a:r>
-              <a:rPr sz="1300" b="0">
-                <a:solidFill>
-                  <a:srgbClr val="FFFFFF"/>
-                </a:solidFill>
-              </a:rPr>
-              <a:t>dbt Core</a:t>
-            </a:r>
-          </a:p>
-        </p:txBody>
-      </p:sp>
-      <p:sp>
-        <p:nvSpPr>
-          <p:cNvPr id="32" name="Rectangle 31"/>
-          <p:cNvSpPr/>
-          <p:nvPr/>
-        </p:nvSpPr>
-        <p:spPr>
-          <a:xfrm>
-            <a:off x="8503920" y="5184648"/>
-            <a:ext cx="2926080" cy="347472"/>
-          </a:xfrm>
-          <a:prstGeom prst="rect">
-            <a:avLst/>
-          </a:prstGeom>
-          <a:solidFill>
-            <a:srgbClr val="2E75B6"/>
-          </a:solidFill>
-          <a:ln>
-            <a:noFill/>
-          </a:ln>
-        </p:spPr>
-        <p:style>
-          <a:lnRef idx="1">
-            <a:schemeClr val="accent1"/>
-          </a:lnRef>
-          <a:fillRef idx="3">
-            <a:schemeClr val="accent1"/>
-          </a:fillRef>
-          <a:effectRef idx="2">
-            <a:schemeClr val="accent1"/>
-          </a:effectRef>
-          <a:fontRef idx="minor">
-            <a:schemeClr val="lt1"/>
-          </a:fontRef>
-        </p:style>
-        <p:txBody>
-          <a:bodyPr rtlCol="0" anchor="ctr"/>
-          <a:lstStyle/>
-          <a:p>
-            <a:pPr algn="ctr"/>
-            <a:endParaRPr/>
-          </a:p>
-        </p:txBody>
-      </p:sp>
-      <p:sp>
-        <p:nvSpPr>
-          <p:cNvPr id="33" name="TextBox 32"/>
-          <p:cNvSpPr txBox="1"/>
-          <p:nvPr/>
-        </p:nvSpPr>
-        <p:spPr>
-          <a:xfrm>
-            <a:off x="8549640" y="5202936"/>
-            <a:ext cx="2834640" cy="310896"/>
-          </a:xfrm>
-          <a:prstGeom prst="rect">
-            <a:avLst/>
-          </a:prstGeom>
-          <a:noFill/>
-        </p:spPr>
-        <p:txBody>
-          <a:bodyPr wrap="square">
-            <a:spAutoFit/>
-          </a:bodyPr>
-          <a:lstStyle/>
-          <a:p>
-            <a:pPr algn="ctr"/>
-            <a:r>
-              <a:rPr sz="1300" b="0">
-                <a:solidFill>
-                  <a:srgbClr val="FFFFFF"/>
-                </a:solidFill>
-              </a:rPr>
-              <a:t>PostgreSQL</a:t>
-            </a:r>
-          </a:p>
-        </p:txBody>
-      </p:sp>
-      <p:sp>
-        <p:nvSpPr>
-          <p:cNvPr id="34" name="Rectangle 33"/>
-          <p:cNvSpPr/>
-          <p:nvPr/>
-        </p:nvSpPr>
-        <p:spPr>
-          <a:xfrm>
-            <a:off x="8503920" y="5605272"/>
-            <a:ext cx="2926080" cy="347472"/>
-          </a:xfrm>
-          <a:prstGeom prst="rect">
-            <a:avLst/>
-          </a:prstGeom>
-          <a:solidFill>
-            <a:srgbClr val="2E75B6"/>
-          </a:solidFill>
-          <a:ln>
-            <a:noFill/>
-          </a:ln>
-        </p:spPr>
-        <p:style>
-          <a:lnRef idx="1">
-            <a:schemeClr val="accent1"/>
-          </a:lnRef>
-          <a:fillRef idx="3">
-            <a:schemeClr val="accent1"/>
-          </a:fillRef>
-          <a:effectRef idx="2">
-            <a:schemeClr val="accent1"/>
-          </a:effectRef>
-          <a:fontRef idx="minor">
-            <a:schemeClr val="lt1"/>
-          </a:fontRef>
-        </p:style>
-        <p:txBody>
-          <a:bodyPr rtlCol="0" anchor="ctr"/>
-          <a:lstStyle/>
-          <a:p>
-            <a:pPr algn="ctr"/>
-            <a:endParaRPr/>
-          </a:p>
-        </p:txBody>
-      </p:sp>
-      <p:sp>
-        <p:nvSpPr>
-          <p:cNvPr id="35" name="TextBox 34"/>
-          <p:cNvSpPr txBox="1"/>
-          <p:nvPr/>
-        </p:nvSpPr>
-        <p:spPr>
-          <a:xfrm>
-            <a:off x="8549640" y="5623559"/>
-            <a:ext cx="2834640" cy="310896"/>
-          </a:xfrm>
-          <a:prstGeom prst="rect">
-            <a:avLst/>
-          </a:prstGeom>
-          <a:noFill/>
-        </p:spPr>
-        <p:txBody>
-          <a:bodyPr wrap="square">
-            <a:spAutoFit/>
-          </a:bodyPr>
-          <a:lstStyle/>
-          <a:p>
-            <a:pPr algn="ctr"/>
-            <a:r>
-              <a:rPr sz="1300" b="0">
-                <a:solidFill>
-                  <a:srgbClr val="FFFFFF"/>
-                </a:solidFill>
-              </a:rPr>
-              <a:t>Apache Superset</a:t>
-            </a:r>
-          </a:p>
-        </p:txBody>
-      </p:sp>
-      <p:sp>
-        <p:nvSpPr>
-          <p:cNvPr id="36" name="Rectangle 35"/>
-          <p:cNvSpPr/>
-          <p:nvPr/>
-        </p:nvSpPr>
-        <p:spPr>
-          <a:xfrm>
-            <a:off x="8503920" y="6025896"/>
-            <a:ext cx="2926080" cy="347472"/>
-          </a:xfrm>
-          <a:prstGeom prst="rect">
-            <a:avLst/>
-          </a:prstGeom>
-          <a:solidFill>
-            <a:srgbClr val="2E75B6"/>
-          </a:solidFill>
-          <a:ln>
-            <a:noFill/>
-          </a:ln>
-        </p:spPr>
-        <p:style>
-          <a:lnRef idx="1">
-            <a:schemeClr val="accent1"/>
-          </a:lnRef>
-          <a:fillRef idx="3">
-            <a:schemeClr val="accent1"/>
-          </a:fillRef>
-          <a:effectRef idx="2">
-            <a:schemeClr val="accent1"/>
-          </a:effectRef>
-          <a:fontRef idx="minor">
-            <a:schemeClr val="lt1"/>
-          </a:fontRef>
-        </p:style>
-        <p:txBody>
-          <a:bodyPr rtlCol="0" anchor="ctr"/>
-          <a:lstStyle/>
-          <a:p>
-            <a:pPr algn="ctr"/>
-            <a:endParaRPr/>
-          </a:p>
-        </p:txBody>
-      </p:sp>
-      <p:sp>
-        <p:nvSpPr>
-          <p:cNvPr id="37" name="TextBox 36"/>
-          <p:cNvSpPr txBox="1"/>
-          <p:nvPr/>
-        </p:nvSpPr>
-        <p:spPr>
-          <a:xfrm>
-            <a:off x="8549640" y="6044183"/>
-            <a:ext cx="2834640" cy="310896"/>
-          </a:xfrm>
-          <a:prstGeom prst="rect">
-            <a:avLst/>
-          </a:prstGeom>
-          <a:noFill/>
-        </p:spPr>
-        <p:txBody>
-          <a:bodyPr wrap="square">
-            <a:spAutoFit/>
-          </a:bodyPr>
-          <a:lstStyle/>
-          <a:p>
-            <a:pPr algn="ctr"/>
-            <a:r>
-              <a:rPr sz="1300" b="0">
-                <a:solidFill>
-                  <a:srgbClr val="FFFFFF"/>
-                </a:solidFill>
-              </a:rPr>
-              <a:t>Docker</a:t>
-            </a:r>
-          </a:p>
-        </p:txBody>
-      </p:sp>
+              <a:t>)</a:t>
+            </a:r>
+            <a:endParaRPr sz="2800" b="1" dirty="0">
+              <a:solidFill>
+                <a:srgbClr val="FFFFFF"/>
+              </a:solidFill>
+            </a:endParaRPr>
+          </a:p>
+        </p:txBody>
+      </p:sp>
+      <p:pic>
+        <p:nvPicPr>
+          <p:cNvPr id="26" name="Picture 25">
+            <a:extLst>
+              <a:ext uri="{FF2B5EF4-FFF2-40B4-BE49-F238E27FC236}">
+                <a16:creationId xmlns:a16="http://schemas.microsoft.com/office/drawing/2014/main" id="{88946612-FC63-165D-60EA-7785DD8D208B}"/>
+              </a:ext>
+            </a:extLst>
+          </p:cNvPr>
+          <p:cNvPicPr>
+            <a:picLocks noChangeAspect="1"/>
+          </p:cNvPicPr>
+          <p:nvPr/>
+        </p:nvPicPr>
+        <p:blipFill>
+          <a:blip r:embed="rId2"/>
+          <a:stretch>
+            <a:fillRect/>
+          </a:stretch>
+        </p:blipFill>
+        <p:spPr>
+          <a:xfrm>
+            <a:off x="1202499" y="1097280"/>
+            <a:ext cx="9107171" cy="5348094"/>
+          </a:xfrm>
+          <a:prstGeom prst="rect">
+            <a:avLst/>
+          </a:prstGeom>
+        </p:spPr>
+      </p:pic>
     </p:spTree>
   </p:cSld>
   <p:clrMapOvr>
@@ -9325,7 +7338,1054 @@
 </file>
 
 <file path=ppt/slides/slide7.xml><?xml version="1.0" encoding="utf-8"?>
-<p:sld xmlns:a="http://schemas.openxmlformats.org/drawingml/2006/main" xmlns:p="http://schemas.openxmlformats.org/presentationml/2006/main" xmlns:r="http://schemas.openxmlformats.org/officeDocument/2006/relationships">
+<p:sld xmlns:a="http://schemas.openxmlformats.org/drawingml/2006/main" xmlns:r="http://schemas.openxmlformats.org/officeDocument/2006/relationships" xmlns:p="http://schemas.openxmlformats.org/presentationml/2006/main">
+  <p:cSld>
+    <p:bg>
+      <p:bgPr>
+        <a:solidFill>
+          <a:srgbClr val="FFFFFF"/>
+        </a:solidFill>
+        <a:effectLst/>
+      </p:bgPr>
+    </p:bg>
+    <p:spTree>
+      <p:nvGrpSpPr>
+        <p:cNvPr id="1" name="">
+          <a:extLst>
+            <a:ext uri="{FF2B5EF4-FFF2-40B4-BE49-F238E27FC236}">
+              <a16:creationId xmlns:a16="http://schemas.microsoft.com/office/drawing/2014/main" id="{3592595B-C549-6798-E52C-50765AD9C698}"/>
+            </a:ext>
+          </a:extLst>
+        </p:cNvPr>
+        <p:cNvGrpSpPr/>
+        <p:nvPr/>
+      </p:nvGrpSpPr>
+      <p:grpSpPr>
+        <a:xfrm>
+          <a:off x="0" y="0"/>
+          <a:ext cx="0" cy="0"/>
+          <a:chOff x="0" y="0"/>
+          <a:chExt cx="0" cy="0"/>
+        </a:xfrm>
+      </p:grpSpPr>
+      <p:sp>
+        <p:nvSpPr>
+          <p:cNvPr id="2" name="Rectangle 1">
+            <a:extLst>
+              <a:ext uri="{FF2B5EF4-FFF2-40B4-BE49-F238E27FC236}">
+                <a16:creationId xmlns:a16="http://schemas.microsoft.com/office/drawing/2014/main" id="{8B956753-80E1-044D-871C-359E89318A93}"/>
+              </a:ext>
+            </a:extLst>
+          </p:cNvPr>
+          <p:cNvSpPr/>
+          <p:nvPr/>
+        </p:nvSpPr>
+        <p:spPr>
+          <a:xfrm>
+            <a:off x="0" y="0"/>
+            <a:ext cx="12188952" cy="1005840"/>
+          </a:xfrm>
+          <a:prstGeom prst="rect">
+            <a:avLst/>
+          </a:prstGeom>
+          <a:solidFill>
+            <a:srgbClr val="1B376B"/>
+          </a:solidFill>
+          <a:ln>
+            <a:noFill/>
+          </a:ln>
+        </p:spPr>
+        <p:style>
+          <a:lnRef idx="1">
+            <a:schemeClr val="accent1"/>
+          </a:lnRef>
+          <a:fillRef idx="3">
+            <a:schemeClr val="accent1"/>
+          </a:fillRef>
+          <a:effectRef idx="2">
+            <a:schemeClr val="accent1"/>
+          </a:effectRef>
+          <a:fontRef idx="minor">
+            <a:schemeClr val="lt1"/>
+          </a:fontRef>
+        </p:style>
+        <p:txBody>
+          <a:bodyPr rtlCol="0" anchor="ctr"/>
+          <a:lstStyle/>
+          <a:p>
+            <a:pPr algn="ctr"/>
+            <a:endParaRPr/>
+          </a:p>
+        </p:txBody>
+      </p:sp>
+      <p:sp>
+        <p:nvSpPr>
+          <p:cNvPr id="3" name="TextBox 2">
+            <a:extLst>
+              <a:ext uri="{FF2B5EF4-FFF2-40B4-BE49-F238E27FC236}">
+                <a16:creationId xmlns:a16="http://schemas.microsoft.com/office/drawing/2014/main" id="{4490B96F-5665-A6F4-47C6-377DB4EFB236}"/>
+              </a:ext>
+            </a:extLst>
+          </p:cNvPr>
+          <p:cNvSpPr txBox="1"/>
+          <p:nvPr/>
+        </p:nvSpPr>
+        <p:spPr>
+          <a:xfrm>
+            <a:off x="365760" y="91440"/>
+            <a:ext cx="11430000" cy="777240"/>
+          </a:xfrm>
+          <a:prstGeom prst="rect">
+            <a:avLst/>
+          </a:prstGeom>
+          <a:noFill/>
+        </p:spPr>
+        <p:txBody>
+          <a:bodyPr wrap="square">
+            <a:spAutoFit/>
+          </a:bodyPr>
+          <a:lstStyle/>
+          <a:p>
+            <a:pPr algn="l"/>
+            <a:r>
+              <a:rPr sz="2800" b="1">
+                <a:solidFill>
+                  <a:srgbClr val="FFFFFF"/>
+                </a:solidFill>
+              </a:rPr>
+              <a:t>Dashboard: põhitulemused</a:t>
+            </a:r>
+          </a:p>
+        </p:txBody>
+      </p:sp>
+      <p:sp>
+        <p:nvSpPr>
+          <p:cNvPr id="4" name="Rectangle 3">
+            <a:extLst>
+              <a:ext uri="{FF2B5EF4-FFF2-40B4-BE49-F238E27FC236}">
+                <a16:creationId xmlns:a16="http://schemas.microsoft.com/office/drawing/2014/main" id="{ED1ABF0C-2F81-2973-3E05-D1DAFC6476E9}"/>
+              </a:ext>
+            </a:extLst>
+          </p:cNvPr>
+          <p:cNvSpPr/>
+          <p:nvPr/>
+        </p:nvSpPr>
+        <p:spPr>
+          <a:xfrm>
+            <a:off x="274320" y="1143000"/>
+            <a:ext cx="2697480" cy="1371600"/>
+          </a:xfrm>
+          <a:prstGeom prst="rect">
+            <a:avLst/>
+          </a:prstGeom>
+          <a:solidFill>
+            <a:srgbClr val="1B376B"/>
+          </a:solidFill>
+          <a:ln>
+            <a:noFill/>
+          </a:ln>
+        </p:spPr>
+        <p:style>
+          <a:lnRef idx="1">
+            <a:schemeClr val="accent1"/>
+          </a:lnRef>
+          <a:fillRef idx="3">
+            <a:schemeClr val="accent1"/>
+          </a:fillRef>
+          <a:effectRef idx="2">
+            <a:schemeClr val="accent1"/>
+          </a:effectRef>
+          <a:fontRef idx="minor">
+            <a:schemeClr val="lt1"/>
+          </a:fontRef>
+        </p:style>
+        <p:txBody>
+          <a:bodyPr rtlCol="0" anchor="ctr"/>
+          <a:lstStyle/>
+          <a:p>
+            <a:pPr algn="ctr"/>
+            <a:endParaRPr/>
+          </a:p>
+        </p:txBody>
+      </p:sp>
+      <p:sp>
+        <p:nvSpPr>
+          <p:cNvPr id="5" name="TextBox 4">
+            <a:extLst>
+              <a:ext uri="{FF2B5EF4-FFF2-40B4-BE49-F238E27FC236}">
+                <a16:creationId xmlns:a16="http://schemas.microsoft.com/office/drawing/2014/main" id="{100A5AD3-3D38-FD03-6C87-26FC10AB0179}"/>
+              </a:ext>
+            </a:extLst>
+          </p:cNvPr>
+          <p:cNvSpPr txBox="1"/>
+          <p:nvPr/>
+        </p:nvSpPr>
+        <p:spPr>
+          <a:xfrm>
+            <a:off x="365760" y="1188720"/>
+            <a:ext cx="2514600" cy="502920"/>
+          </a:xfrm>
+          <a:prstGeom prst="rect">
+            <a:avLst/>
+          </a:prstGeom>
+          <a:noFill/>
+        </p:spPr>
+        <p:txBody>
+          <a:bodyPr wrap="square">
+            <a:spAutoFit/>
+          </a:bodyPr>
+          <a:lstStyle/>
+          <a:p>
+            <a:pPr algn="ctr"/>
+            <a:r>
+              <a:rPr sz="1300" b="0">
+                <a:solidFill>
+                  <a:srgbClr val="FFFFFF"/>
+                </a:solidFill>
+              </a:rPr>
+              <a:t>Soojakadu Eestis</a:t>
+            </a:r>
+          </a:p>
+        </p:txBody>
+      </p:sp>
+      <p:sp>
+        <p:nvSpPr>
+          <p:cNvPr id="6" name="TextBox 5">
+            <a:extLst>
+              <a:ext uri="{FF2B5EF4-FFF2-40B4-BE49-F238E27FC236}">
+                <a16:creationId xmlns:a16="http://schemas.microsoft.com/office/drawing/2014/main" id="{EC3D3E1E-B619-50D2-7F8F-D3EB3F876AE8}"/>
+              </a:ext>
+            </a:extLst>
+          </p:cNvPr>
+          <p:cNvSpPr txBox="1"/>
+          <p:nvPr/>
+        </p:nvSpPr>
+        <p:spPr>
+          <a:xfrm>
+            <a:off x="320040" y="1691640"/>
+            <a:ext cx="2606040" cy="685800"/>
+          </a:xfrm>
+          <a:prstGeom prst="rect">
+            <a:avLst/>
+          </a:prstGeom>
+          <a:noFill/>
+        </p:spPr>
+        <p:txBody>
+          <a:bodyPr wrap="square">
+            <a:spAutoFit/>
+          </a:bodyPr>
+          <a:lstStyle/>
+          <a:p>
+            <a:pPr algn="ctr"/>
+            <a:r>
+              <a:rPr sz="2200" b="1">
+                <a:solidFill>
+                  <a:srgbClr val="FFFFFF"/>
+                </a:solidFill>
+              </a:rPr>
+              <a:t>9.26B kWh</a:t>
+            </a:r>
+          </a:p>
+        </p:txBody>
+      </p:sp>
+      <p:sp>
+        <p:nvSpPr>
+          <p:cNvPr id="7" name="Rectangle 6">
+            <a:extLst>
+              <a:ext uri="{FF2B5EF4-FFF2-40B4-BE49-F238E27FC236}">
+                <a16:creationId xmlns:a16="http://schemas.microsoft.com/office/drawing/2014/main" id="{FFBFE4CD-C8A4-DAA0-4C63-0C4C2C963305}"/>
+              </a:ext>
+            </a:extLst>
+          </p:cNvPr>
+          <p:cNvSpPr/>
+          <p:nvPr/>
+        </p:nvSpPr>
+        <p:spPr>
+          <a:xfrm>
+            <a:off x="3182112" y="1143000"/>
+            <a:ext cx="2697480" cy="1371600"/>
+          </a:xfrm>
+          <a:prstGeom prst="rect">
+            <a:avLst/>
+          </a:prstGeom>
+          <a:solidFill>
+            <a:srgbClr val="2E75B6"/>
+          </a:solidFill>
+          <a:ln>
+            <a:noFill/>
+          </a:ln>
+        </p:spPr>
+        <p:style>
+          <a:lnRef idx="1">
+            <a:schemeClr val="accent1"/>
+          </a:lnRef>
+          <a:fillRef idx="3">
+            <a:schemeClr val="accent1"/>
+          </a:fillRef>
+          <a:effectRef idx="2">
+            <a:schemeClr val="accent1"/>
+          </a:effectRef>
+          <a:fontRef idx="minor">
+            <a:schemeClr val="lt1"/>
+          </a:fontRef>
+        </p:style>
+        <p:txBody>
+          <a:bodyPr rtlCol="0" anchor="ctr"/>
+          <a:lstStyle/>
+          <a:p>
+            <a:pPr algn="ctr"/>
+            <a:endParaRPr/>
+          </a:p>
+        </p:txBody>
+      </p:sp>
+      <p:sp>
+        <p:nvSpPr>
+          <p:cNvPr id="8" name="TextBox 7">
+            <a:extLst>
+              <a:ext uri="{FF2B5EF4-FFF2-40B4-BE49-F238E27FC236}">
+                <a16:creationId xmlns:a16="http://schemas.microsoft.com/office/drawing/2014/main" id="{C9A94690-59FB-D18E-9BD3-EDF6569966DB}"/>
+              </a:ext>
+            </a:extLst>
+          </p:cNvPr>
+          <p:cNvSpPr txBox="1"/>
+          <p:nvPr/>
+        </p:nvSpPr>
+        <p:spPr>
+          <a:xfrm>
+            <a:off x="3273552" y="1188720"/>
+            <a:ext cx="2514600" cy="502920"/>
+          </a:xfrm>
+          <a:prstGeom prst="rect">
+            <a:avLst/>
+          </a:prstGeom>
+          <a:noFill/>
+        </p:spPr>
+        <p:txBody>
+          <a:bodyPr wrap="square">
+            <a:spAutoFit/>
+          </a:bodyPr>
+          <a:lstStyle/>
+          <a:p>
+            <a:pPr algn="ctr"/>
+            <a:r>
+              <a:rPr sz="1300" b="0">
+                <a:solidFill>
+                  <a:srgbClr val="FFFFFF"/>
+                </a:solidFill>
+              </a:rPr>
+              <a:t>Kulu</a:t>
+            </a:r>
+          </a:p>
+        </p:txBody>
+      </p:sp>
+      <p:sp>
+        <p:nvSpPr>
+          <p:cNvPr id="9" name="TextBox 8">
+            <a:extLst>
+              <a:ext uri="{FF2B5EF4-FFF2-40B4-BE49-F238E27FC236}">
+                <a16:creationId xmlns:a16="http://schemas.microsoft.com/office/drawing/2014/main" id="{A728D942-0826-1375-8A25-BF719D8E4BE5}"/>
+              </a:ext>
+            </a:extLst>
+          </p:cNvPr>
+          <p:cNvSpPr txBox="1"/>
+          <p:nvPr/>
+        </p:nvSpPr>
+        <p:spPr>
+          <a:xfrm>
+            <a:off x="3227832" y="1691640"/>
+            <a:ext cx="2606040" cy="685800"/>
+          </a:xfrm>
+          <a:prstGeom prst="rect">
+            <a:avLst/>
+          </a:prstGeom>
+          <a:noFill/>
+        </p:spPr>
+        <p:txBody>
+          <a:bodyPr wrap="square">
+            <a:spAutoFit/>
+          </a:bodyPr>
+          <a:lstStyle/>
+          <a:p>
+            <a:pPr algn="ctr"/>
+            <a:r>
+              <a:rPr sz="2200" b="1">
+                <a:solidFill>
+                  <a:srgbClr val="FFFFFF"/>
+                </a:solidFill>
+              </a:rPr>
+              <a:t>660M €</a:t>
+            </a:r>
+          </a:p>
+        </p:txBody>
+      </p:sp>
+      <p:sp>
+        <p:nvSpPr>
+          <p:cNvPr id="10" name="Rectangle 9">
+            <a:extLst>
+              <a:ext uri="{FF2B5EF4-FFF2-40B4-BE49-F238E27FC236}">
+                <a16:creationId xmlns:a16="http://schemas.microsoft.com/office/drawing/2014/main" id="{ED3E14F9-A7CB-F0A4-9098-72437606025A}"/>
+              </a:ext>
+            </a:extLst>
+          </p:cNvPr>
+          <p:cNvSpPr/>
+          <p:nvPr/>
+        </p:nvSpPr>
+        <p:spPr>
+          <a:xfrm>
+            <a:off x="6089904" y="1143000"/>
+            <a:ext cx="2697480" cy="1371600"/>
+          </a:xfrm>
+          <a:prstGeom prst="rect">
+            <a:avLst/>
+          </a:prstGeom>
+          <a:solidFill>
+            <a:srgbClr val="5A9E6F"/>
+          </a:solidFill>
+          <a:ln>
+            <a:noFill/>
+          </a:ln>
+        </p:spPr>
+        <p:style>
+          <a:lnRef idx="1">
+            <a:schemeClr val="accent1"/>
+          </a:lnRef>
+          <a:fillRef idx="3">
+            <a:schemeClr val="accent1"/>
+          </a:fillRef>
+          <a:effectRef idx="2">
+            <a:schemeClr val="accent1"/>
+          </a:effectRef>
+          <a:fontRef idx="minor">
+            <a:schemeClr val="lt1"/>
+          </a:fontRef>
+        </p:style>
+        <p:txBody>
+          <a:bodyPr rtlCol="0" anchor="ctr"/>
+          <a:lstStyle/>
+          <a:p>
+            <a:pPr algn="ctr"/>
+            <a:endParaRPr/>
+          </a:p>
+        </p:txBody>
+      </p:sp>
+      <p:sp>
+        <p:nvSpPr>
+          <p:cNvPr id="11" name="TextBox 10">
+            <a:extLst>
+              <a:ext uri="{FF2B5EF4-FFF2-40B4-BE49-F238E27FC236}">
+                <a16:creationId xmlns:a16="http://schemas.microsoft.com/office/drawing/2014/main" id="{D50B4AB4-C55A-E9CE-6981-5A07135F26D3}"/>
+              </a:ext>
+            </a:extLst>
+          </p:cNvPr>
+          <p:cNvSpPr txBox="1"/>
+          <p:nvPr/>
+        </p:nvSpPr>
+        <p:spPr>
+          <a:xfrm>
+            <a:off x="6181344" y="1188720"/>
+            <a:ext cx="2514600" cy="502920"/>
+          </a:xfrm>
+          <a:prstGeom prst="rect">
+            <a:avLst/>
+          </a:prstGeom>
+          <a:noFill/>
+        </p:spPr>
+        <p:txBody>
+          <a:bodyPr wrap="square">
+            <a:spAutoFit/>
+          </a:bodyPr>
+          <a:lstStyle/>
+          <a:p>
+            <a:pPr algn="ctr"/>
+            <a:r>
+              <a:rPr sz="1300" b="0">
+                <a:solidFill>
+                  <a:srgbClr val="FFFFFF"/>
+                </a:solidFill>
+              </a:rPr>
+              <a:t>Säästupotentsiaal</a:t>
+            </a:r>
+          </a:p>
+        </p:txBody>
+      </p:sp>
+      <p:sp>
+        <p:nvSpPr>
+          <p:cNvPr id="12" name="TextBox 11">
+            <a:extLst>
+              <a:ext uri="{FF2B5EF4-FFF2-40B4-BE49-F238E27FC236}">
+                <a16:creationId xmlns:a16="http://schemas.microsoft.com/office/drawing/2014/main" id="{73336505-3B85-C77B-9FA7-CECFFB5C4312}"/>
+              </a:ext>
+            </a:extLst>
+          </p:cNvPr>
+          <p:cNvSpPr txBox="1"/>
+          <p:nvPr/>
+        </p:nvSpPr>
+        <p:spPr>
+          <a:xfrm>
+            <a:off x="6135624" y="1691640"/>
+            <a:ext cx="2606040" cy="685800"/>
+          </a:xfrm>
+          <a:prstGeom prst="rect">
+            <a:avLst/>
+          </a:prstGeom>
+          <a:noFill/>
+        </p:spPr>
+        <p:txBody>
+          <a:bodyPr wrap="square">
+            <a:spAutoFit/>
+          </a:bodyPr>
+          <a:lstStyle/>
+          <a:p>
+            <a:pPr algn="ctr"/>
+            <a:r>
+              <a:rPr sz="2200" b="1">
+                <a:solidFill>
+                  <a:srgbClr val="FFFFFF"/>
+                </a:solidFill>
+              </a:rPr>
+              <a:t>423M €/aastas</a:t>
+            </a:r>
+          </a:p>
+        </p:txBody>
+      </p:sp>
+      <p:sp>
+        <p:nvSpPr>
+          <p:cNvPr id="13" name="Rectangle 12">
+            <a:extLst>
+              <a:ext uri="{FF2B5EF4-FFF2-40B4-BE49-F238E27FC236}">
+                <a16:creationId xmlns:a16="http://schemas.microsoft.com/office/drawing/2014/main" id="{4AB55827-A508-9259-697D-441869BBBF3C}"/>
+              </a:ext>
+            </a:extLst>
+          </p:cNvPr>
+          <p:cNvSpPr/>
+          <p:nvPr/>
+        </p:nvSpPr>
+        <p:spPr>
+          <a:xfrm>
+            <a:off x="8997696" y="1143000"/>
+            <a:ext cx="2697480" cy="1371600"/>
+          </a:xfrm>
+          <a:prstGeom prst="rect">
+            <a:avLst/>
+          </a:prstGeom>
+          <a:solidFill>
+            <a:srgbClr val="ED7D31"/>
+          </a:solidFill>
+          <a:ln>
+            <a:noFill/>
+          </a:ln>
+        </p:spPr>
+        <p:style>
+          <a:lnRef idx="1">
+            <a:schemeClr val="accent1"/>
+          </a:lnRef>
+          <a:fillRef idx="3">
+            <a:schemeClr val="accent1"/>
+          </a:fillRef>
+          <a:effectRef idx="2">
+            <a:schemeClr val="accent1"/>
+          </a:effectRef>
+          <a:fontRef idx="minor">
+            <a:schemeClr val="lt1"/>
+          </a:fontRef>
+        </p:style>
+        <p:txBody>
+          <a:bodyPr rtlCol="0" anchor="ctr"/>
+          <a:lstStyle/>
+          <a:p>
+            <a:pPr algn="ctr"/>
+            <a:endParaRPr/>
+          </a:p>
+        </p:txBody>
+      </p:sp>
+      <p:sp>
+        <p:nvSpPr>
+          <p:cNvPr id="14" name="TextBox 13">
+            <a:extLst>
+              <a:ext uri="{FF2B5EF4-FFF2-40B4-BE49-F238E27FC236}">
+                <a16:creationId xmlns:a16="http://schemas.microsoft.com/office/drawing/2014/main" id="{A9DEFFF0-A44D-E2C8-402C-5163EE8E69DD}"/>
+              </a:ext>
+            </a:extLst>
+          </p:cNvPr>
+          <p:cNvSpPr txBox="1"/>
+          <p:nvPr/>
+        </p:nvSpPr>
+        <p:spPr>
+          <a:xfrm>
+            <a:off x="9089136" y="1188720"/>
+            <a:ext cx="2514600" cy="502920"/>
+          </a:xfrm>
+          <a:prstGeom prst="rect">
+            <a:avLst/>
+          </a:prstGeom>
+          <a:noFill/>
+        </p:spPr>
+        <p:txBody>
+          <a:bodyPr wrap="square">
+            <a:spAutoFit/>
+          </a:bodyPr>
+          <a:lstStyle/>
+          <a:p>
+            <a:pPr algn="ctr"/>
+            <a:r>
+              <a:rPr sz="1300" b="0">
+                <a:solidFill>
+                  <a:srgbClr val="FFFFFF"/>
+                </a:solidFill>
+              </a:rPr>
+              <a:t>Keskmine intensiivsus</a:t>
+            </a:r>
+          </a:p>
+        </p:txBody>
+      </p:sp>
+      <p:sp>
+        <p:nvSpPr>
+          <p:cNvPr id="15" name="TextBox 14">
+            <a:extLst>
+              <a:ext uri="{FF2B5EF4-FFF2-40B4-BE49-F238E27FC236}">
+                <a16:creationId xmlns:a16="http://schemas.microsoft.com/office/drawing/2014/main" id="{BB604A17-E63D-F4B1-7555-C5A6348992AA}"/>
+              </a:ext>
+            </a:extLst>
+          </p:cNvPr>
+          <p:cNvSpPr txBox="1"/>
+          <p:nvPr/>
+        </p:nvSpPr>
+        <p:spPr>
+          <a:xfrm>
+            <a:off x="9043416" y="1691640"/>
+            <a:ext cx="2606040" cy="685800"/>
+          </a:xfrm>
+          <a:prstGeom prst="rect">
+            <a:avLst/>
+          </a:prstGeom>
+          <a:noFill/>
+        </p:spPr>
+        <p:txBody>
+          <a:bodyPr wrap="square">
+            <a:spAutoFit/>
+          </a:bodyPr>
+          <a:lstStyle/>
+          <a:p>
+            <a:pPr algn="ctr"/>
+            <a:r>
+              <a:rPr sz="2200" b="1">
+                <a:solidFill>
+                  <a:srgbClr val="FFFFFF"/>
+                </a:solidFill>
+              </a:rPr>
+              <a:t>149.93 kWh/m²</a:t>
+            </a:r>
+          </a:p>
+        </p:txBody>
+      </p:sp>
+      <p:sp>
+        <p:nvSpPr>
+          <p:cNvPr id="16" name="Rectangle 15">
+            <a:extLst>
+              <a:ext uri="{FF2B5EF4-FFF2-40B4-BE49-F238E27FC236}">
+                <a16:creationId xmlns:a16="http://schemas.microsoft.com/office/drawing/2014/main" id="{2133BBC5-154B-E515-1939-B3EFDE0480AC}"/>
+              </a:ext>
+            </a:extLst>
+          </p:cNvPr>
+          <p:cNvSpPr/>
+          <p:nvPr/>
+        </p:nvSpPr>
+        <p:spPr>
+          <a:xfrm>
+            <a:off x="274320" y="2743200"/>
+            <a:ext cx="3794760" cy="3474720"/>
+          </a:xfrm>
+          <a:prstGeom prst="rect">
+            <a:avLst/>
+          </a:prstGeom>
+          <a:solidFill>
+            <a:srgbClr val="F2F2F2"/>
+          </a:solidFill>
+          <a:ln>
+            <a:noFill/>
+          </a:ln>
+        </p:spPr>
+        <p:style>
+          <a:lnRef idx="1">
+            <a:schemeClr val="accent1"/>
+          </a:lnRef>
+          <a:fillRef idx="3">
+            <a:schemeClr val="accent1"/>
+          </a:fillRef>
+          <a:effectRef idx="2">
+            <a:schemeClr val="accent1"/>
+          </a:effectRef>
+          <a:fontRef idx="minor">
+            <a:schemeClr val="lt1"/>
+          </a:fontRef>
+        </p:style>
+        <p:txBody>
+          <a:bodyPr rtlCol="0" anchor="ctr"/>
+          <a:lstStyle/>
+          <a:p>
+            <a:pPr algn="ctr"/>
+            <a:endParaRPr/>
+          </a:p>
+        </p:txBody>
+      </p:sp>
+      <p:sp>
+        <p:nvSpPr>
+          <p:cNvPr id="17" name="TextBox 16">
+            <a:extLst>
+              <a:ext uri="{FF2B5EF4-FFF2-40B4-BE49-F238E27FC236}">
+                <a16:creationId xmlns:a16="http://schemas.microsoft.com/office/drawing/2014/main" id="{D0F62BDC-6C24-7AEB-1999-02039F305230}"/>
+              </a:ext>
+            </a:extLst>
+          </p:cNvPr>
+          <p:cNvSpPr txBox="1"/>
+          <p:nvPr/>
+        </p:nvSpPr>
+        <p:spPr>
+          <a:xfrm>
+            <a:off x="384048" y="2807208"/>
+            <a:ext cx="3566160" cy="594360"/>
+          </a:xfrm>
+          <a:prstGeom prst="rect">
+            <a:avLst/>
+          </a:prstGeom>
+          <a:noFill/>
+        </p:spPr>
+        <p:txBody>
+          <a:bodyPr wrap="square">
+            <a:spAutoFit/>
+          </a:bodyPr>
+          <a:lstStyle/>
+          <a:p>
+            <a:pPr algn="l"/>
+            <a:r>
+              <a:rPr sz="1200" b="1">
+                <a:solidFill>
+                  <a:srgbClr val="2E75B6"/>
+                </a:solidFill>
+              </a:rPr>
+              <a:t>Suurim vajadus renoveerimiseks (vajaduse skoor)</a:t>
+            </a:r>
+          </a:p>
+        </p:txBody>
+      </p:sp>
+      <p:sp>
+        <p:nvSpPr>
+          <p:cNvPr id="18" name="TextBox 17">
+            <a:extLst>
+              <a:ext uri="{FF2B5EF4-FFF2-40B4-BE49-F238E27FC236}">
+                <a16:creationId xmlns:a16="http://schemas.microsoft.com/office/drawing/2014/main" id="{B204881B-97FD-3862-3576-FF77332ECC11}"/>
+              </a:ext>
+            </a:extLst>
+          </p:cNvPr>
+          <p:cNvSpPr txBox="1"/>
+          <p:nvPr/>
+        </p:nvSpPr>
+        <p:spPr>
+          <a:xfrm>
+            <a:off x="384048" y="3429000"/>
+            <a:ext cx="3566160" cy="2651760"/>
+          </a:xfrm>
+          <a:prstGeom prst="rect">
+            <a:avLst/>
+          </a:prstGeom>
+          <a:noFill/>
+        </p:spPr>
+        <p:txBody>
+          <a:bodyPr wrap="square">
+            <a:spAutoFit/>
+          </a:bodyPr>
+          <a:lstStyle/>
+          <a:p>
+            <a:pPr algn="l"/>
+            <a:r>
+              <a:rPr sz="1200" b="0">
+                <a:solidFill>
+                  <a:srgbClr val="404040"/>
+                </a:solidFill>
+              </a:rPr>
+              <a:t>Lääneranna vald · Kihnu vald · Räpina vald · Toila vald · Kanepi vald
+Mõõdik: soojakadu_kwh_aastas / kogupindala_m²</a:t>
+            </a:r>
+          </a:p>
+        </p:txBody>
+      </p:sp>
+      <p:sp>
+        <p:nvSpPr>
+          <p:cNvPr id="19" name="Rectangle 18">
+            <a:extLst>
+              <a:ext uri="{FF2B5EF4-FFF2-40B4-BE49-F238E27FC236}">
+                <a16:creationId xmlns:a16="http://schemas.microsoft.com/office/drawing/2014/main" id="{A6C410CB-001F-1DC5-9548-8CBFE4B5CB11}"/>
+              </a:ext>
+            </a:extLst>
+          </p:cNvPr>
+          <p:cNvSpPr/>
+          <p:nvPr/>
+        </p:nvSpPr>
+        <p:spPr>
+          <a:xfrm>
+            <a:off x="4251959" y="2743200"/>
+            <a:ext cx="3794760" cy="3474720"/>
+          </a:xfrm>
+          <a:prstGeom prst="rect">
+            <a:avLst/>
+          </a:prstGeom>
+          <a:solidFill>
+            <a:srgbClr val="F2F2F2"/>
+          </a:solidFill>
+          <a:ln>
+            <a:noFill/>
+          </a:ln>
+        </p:spPr>
+        <p:style>
+          <a:lnRef idx="1">
+            <a:schemeClr val="accent1"/>
+          </a:lnRef>
+          <a:fillRef idx="3">
+            <a:schemeClr val="accent1"/>
+          </a:fillRef>
+          <a:effectRef idx="2">
+            <a:schemeClr val="accent1"/>
+          </a:effectRef>
+          <a:fontRef idx="minor">
+            <a:schemeClr val="lt1"/>
+          </a:fontRef>
+        </p:style>
+        <p:txBody>
+          <a:bodyPr rtlCol="0" anchor="ctr"/>
+          <a:lstStyle/>
+          <a:p>
+            <a:pPr algn="ctr"/>
+            <a:endParaRPr/>
+          </a:p>
+        </p:txBody>
+      </p:sp>
+      <p:sp>
+        <p:nvSpPr>
+          <p:cNvPr id="20" name="TextBox 19">
+            <a:extLst>
+              <a:ext uri="{FF2B5EF4-FFF2-40B4-BE49-F238E27FC236}">
+                <a16:creationId xmlns:a16="http://schemas.microsoft.com/office/drawing/2014/main" id="{92EE062A-81ED-71E7-E9A1-F584F23A121E}"/>
+              </a:ext>
+            </a:extLst>
+          </p:cNvPr>
+          <p:cNvSpPr txBox="1"/>
+          <p:nvPr/>
+        </p:nvSpPr>
+        <p:spPr>
+          <a:xfrm>
+            <a:off x="4361688" y="2807208"/>
+            <a:ext cx="3566160" cy="594360"/>
+          </a:xfrm>
+          <a:prstGeom prst="rect">
+            <a:avLst/>
+          </a:prstGeom>
+          <a:noFill/>
+        </p:spPr>
+        <p:txBody>
+          <a:bodyPr wrap="square">
+            <a:spAutoFit/>
+          </a:bodyPr>
+          <a:lstStyle/>
+          <a:p>
+            <a:pPr algn="l"/>
+            <a:r>
+              <a:rPr sz="1200" b="1">
+                <a:solidFill>
+                  <a:srgbClr val="2E75B6"/>
+                </a:solidFill>
+              </a:rPr>
+              <a:t>TOP 10 KOV — suurim aastane säästupotentsiaal (€)</a:t>
+            </a:r>
+          </a:p>
+        </p:txBody>
+      </p:sp>
+      <p:sp>
+        <p:nvSpPr>
+          <p:cNvPr id="21" name="TextBox 20">
+            <a:extLst>
+              <a:ext uri="{FF2B5EF4-FFF2-40B4-BE49-F238E27FC236}">
+                <a16:creationId xmlns:a16="http://schemas.microsoft.com/office/drawing/2014/main" id="{296F2FE2-5530-077E-C959-3ABB11686633}"/>
+              </a:ext>
+            </a:extLst>
+          </p:cNvPr>
+          <p:cNvSpPr txBox="1"/>
+          <p:nvPr/>
+        </p:nvSpPr>
+        <p:spPr>
+          <a:xfrm>
+            <a:off x="4361688" y="3429000"/>
+            <a:ext cx="3566160" cy="2651760"/>
+          </a:xfrm>
+          <a:prstGeom prst="rect">
+            <a:avLst/>
+          </a:prstGeom>
+          <a:noFill/>
+        </p:spPr>
+        <p:txBody>
+          <a:bodyPr wrap="square">
+            <a:spAutoFit/>
+          </a:bodyPr>
+          <a:lstStyle/>
+          <a:p>
+            <a:pPr algn="l"/>
+            <a:r>
+              <a:rPr sz="1200" b="0">
+                <a:solidFill>
+                  <a:srgbClr val="404040"/>
+                </a:solidFill>
+              </a:rPr>
+              <a:t>Tallinn ~100M € · Tartu linn ~20M € · Pärnu linn · Narva linn
+Kohtla-Järve · Saaremaa vald · Viljandi vald · Jõgeva vald · Elva vald</a:t>
+            </a:r>
+          </a:p>
+        </p:txBody>
+      </p:sp>
+      <p:sp>
+        <p:nvSpPr>
+          <p:cNvPr id="22" name="Rectangle 21">
+            <a:extLst>
+              <a:ext uri="{FF2B5EF4-FFF2-40B4-BE49-F238E27FC236}">
+                <a16:creationId xmlns:a16="http://schemas.microsoft.com/office/drawing/2014/main" id="{7BA2454F-B13C-5ADB-7046-505C3774C3ED}"/>
+              </a:ext>
+            </a:extLst>
+          </p:cNvPr>
+          <p:cNvSpPr/>
+          <p:nvPr/>
+        </p:nvSpPr>
+        <p:spPr>
+          <a:xfrm>
+            <a:off x="8229600" y="2743200"/>
+            <a:ext cx="3794760" cy="3474720"/>
+          </a:xfrm>
+          <a:prstGeom prst="rect">
+            <a:avLst/>
+          </a:prstGeom>
+          <a:solidFill>
+            <a:srgbClr val="F2F2F2"/>
+          </a:solidFill>
+          <a:ln>
+            <a:noFill/>
+          </a:ln>
+        </p:spPr>
+        <p:style>
+          <a:lnRef idx="1">
+            <a:schemeClr val="accent1"/>
+          </a:lnRef>
+          <a:fillRef idx="3">
+            <a:schemeClr val="accent1"/>
+          </a:fillRef>
+          <a:effectRef idx="2">
+            <a:schemeClr val="accent1"/>
+          </a:effectRef>
+          <a:fontRef idx="minor">
+            <a:schemeClr val="lt1"/>
+          </a:fontRef>
+        </p:style>
+        <p:txBody>
+          <a:bodyPr rtlCol="0" anchor="ctr"/>
+          <a:lstStyle/>
+          <a:p>
+            <a:pPr algn="ctr"/>
+            <a:endParaRPr/>
+          </a:p>
+        </p:txBody>
+      </p:sp>
+      <p:sp>
+        <p:nvSpPr>
+          <p:cNvPr id="23" name="TextBox 22">
+            <a:extLst>
+              <a:ext uri="{FF2B5EF4-FFF2-40B4-BE49-F238E27FC236}">
+                <a16:creationId xmlns:a16="http://schemas.microsoft.com/office/drawing/2014/main" id="{7985D1C1-F626-7D0B-8C60-DFB1C814532B}"/>
+              </a:ext>
+            </a:extLst>
+          </p:cNvPr>
+          <p:cNvSpPr txBox="1"/>
+          <p:nvPr/>
+        </p:nvSpPr>
+        <p:spPr>
+          <a:xfrm>
+            <a:off x="8339327" y="2807208"/>
+            <a:ext cx="3566160" cy="594360"/>
+          </a:xfrm>
+          <a:prstGeom prst="rect">
+            <a:avLst/>
+          </a:prstGeom>
+          <a:noFill/>
+        </p:spPr>
+        <p:txBody>
+          <a:bodyPr wrap="square">
+            <a:spAutoFit/>
+          </a:bodyPr>
+          <a:lstStyle/>
+          <a:p>
+            <a:pPr algn="l"/>
+            <a:r>
+              <a:rPr sz="1200" b="1">
+                <a:solidFill>
+                  <a:srgbClr val="2E75B6"/>
+                </a:solidFill>
+              </a:rPr>
+              <a:t>Investeeringu tasuvus — ROI vs tasuvusaeg</a:t>
+            </a:r>
+          </a:p>
+        </p:txBody>
+      </p:sp>
+      <p:sp>
+        <p:nvSpPr>
+          <p:cNvPr id="24" name="TextBox 23">
+            <a:extLst>
+              <a:ext uri="{FF2B5EF4-FFF2-40B4-BE49-F238E27FC236}">
+                <a16:creationId xmlns:a16="http://schemas.microsoft.com/office/drawing/2014/main" id="{3B4CA468-122A-12A3-D6FA-F014BE7601EE}"/>
+              </a:ext>
+            </a:extLst>
+          </p:cNvPr>
+          <p:cNvSpPr txBox="1"/>
+          <p:nvPr/>
+        </p:nvSpPr>
+        <p:spPr>
+          <a:xfrm>
+            <a:off x="8339327" y="3429000"/>
+            <a:ext cx="3566160" cy="2651760"/>
+          </a:xfrm>
+          <a:prstGeom prst="rect">
+            <a:avLst/>
+          </a:prstGeom>
+          <a:noFill/>
+        </p:spPr>
+        <p:txBody>
+          <a:bodyPr wrap="square">
+            <a:spAutoFit/>
+          </a:bodyPr>
+          <a:lstStyle/>
+          <a:p>
+            <a:pPr algn="l"/>
+            <a:r>
+              <a:rPr sz="1200" b="0">
+                <a:solidFill>
+                  <a:srgbClr val="404040"/>
+                </a:solidFill>
+              </a:rPr>
+              <a:t>Kambja vald (ROI 3.4) · Saue vald (3.36) · Tori vald (3.31)
+Rapla vald (3.21) — finantsiliselt kõige tasuvam renoveerimine</a:t>
+            </a:r>
+          </a:p>
+        </p:txBody>
+      </p:sp>
+    </p:spTree>
+    <p:extLst>
+      <p:ext uri="{BB962C8B-B14F-4D97-AF65-F5344CB8AC3E}">
+        <p14:creationId xmlns:p14="http://schemas.microsoft.com/office/powerpoint/2010/main" val="77741135"/>
+      </p:ext>
+    </p:extLst>
+  </p:cSld>
+  <p:clrMapOvr>
+    <a:masterClrMapping/>
+  </p:clrMapOvr>
+</p:sld>
+</file>
+
+<file path=ppt/slides/slide8.xml><?xml version="1.0" encoding="utf-8"?>
+<p:sld xmlns:a="http://schemas.openxmlformats.org/drawingml/2006/main" xmlns:r="http://schemas.openxmlformats.org/officeDocument/2006/relationships" xmlns:p="http://schemas.openxmlformats.org/presentationml/2006/main">
   <p:cSld>
     <p:bg>
       <p:bgPr>
@@ -9341,7 +8401,14 @@
         <p:cNvGrpSpPr/>
         <p:nvPr/>
       </p:nvGrpSpPr>
-      <p:grpSpPr/>
+      <p:grpSpPr>
+        <a:xfrm>
+          <a:off x="0" y="0"/>
+          <a:ext cx="0" cy="0"/>
+          <a:chOff x="0" y="0"/>
+          <a:chExt cx="0" cy="0"/>
+        </a:xfrm>
+      </p:grpSpPr>
       <p:sp>
         <p:nvSpPr>
           <p:cNvPr id="2" name="Rectangle 1"/>
@@ -9382,6 +8449,7 @@
           <a:lstStyle/>
           <a:p>
             <a:pPr algn="ctr"/>
+            <a:endParaRPr/>
           </a:p>
         </p:txBody>
       </p:sp>
@@ -9414,7 +8482,7 @@
                   <a:srgbClr val="FFFFFF"/>
                 </a:solidFill>
               </a:rPr>
-              <a:t>Dashboard: põhitulemused</a:t>
+              <a:t>Järeldused ja ärimeetrikud</a:t>
             </a:r>
           </a:p>
         </p:txBody>
@@ -9428,7 +8496,183 @@
         <p:spPr>
           <a:xfrm>
             <a:off x="274320" y="1143000"/>
-            <a:ext cx="2697480" cy="1371600"/>
+            <a:ext cx="7132320" cy="4343400"/>
+          </a:xfrm>
+          <a:prstGeom prst="rect">
+            <a:avLst/>
+          </a:prstGeom>
+          <a:solidFill>
+            <a:srgbClr val="F2F2F2"/>
+          </a:solidFill>
+          <a:ln>
+            <a:noFill/>
+          </a:ln>
+        </p:spPr>
+        <p:style>
+          <a:lnRef idx="1">
+            <a:schemeClr val="accent1"/>
+          </a:lnRef>
+          <a:fillRef idx="3">
+            <a:schemeClr val="accent1"/>
+          </a:fillRef>
+          <a:effectRef idx="2">
+            <a:schemeClr val="accent1"/>
+          </a:effectRef>
+          <a:fontRef idx="minor">
+            <a:schemeClr val="lt1"/>
+          </a:fontRef>
+        </p:style>
+        <p:txBody>
+          <a:bodyPr rtlCol="0" anchor="ctr"/>
+          <a:lstStyle/>
+          <a:p>
+            <a:pPr algn="ctr"/>
+            <a:endParaRPr/>
+          </a:p>
+        </p:txBody>
+      </p:sp>
+      <p:sp>
+        <p:nvSpPr>
+          <p:cNvPr id="5" name="TextBox 4"/>
+          <p:cNvSpPr txBox="1"/>
+          <p:nvPr/>
+        </p:nvSpPr>
+        <p:spPr>
+          <a:xfrm>
+            <a:off x="457200" y="1207008"/>
+            <a:ext cx="6766560" cy="457200"/>
+          </a:xfrm>
+          <a:prstGeom prst="rect">
+            <a:avLst/>
+          </a:prstGeom>
+          <a:noFill/>
+        </p:spPr>
+        <p:txBody>
+          <a:bodyPr wrap="square">
+            <a:spAutoFit/>
+          </a:bodyPr>
+          <a:lstStyle/>
+          <a:p>
+            <a:pPr algn="l"/>
+            <a:r>
+              <a:rPr sz="1600" b="1">
+                <a:solidFill>
+                  <a:srgbClr val="1B376B"/>
+                </a:solidFill>
+              </a:rPr>
+              <a:t>Peamised järeldused</a:t>
+            </a:r>
+          </a:p>
+        </p:txBody>
+      </p:sp>
+      <p:sp>
+        <p:nvSpPr>
+          <p:cNvPr id="6" name="TextBox 5"/>
+          <p:cNvSpPr txBox="1"/>
+          <p:nvPr/>
+        </p:nvSpPr>
+        <p:spPr>
+          <a:xfrm>
+            <a:off x="457200" y="1737360"/>
+            <a:ext cx="6858000" cy="3566160"/>
+          </a:xfrm>
+          <a:prstGeom prst="rect">
+            <a:avLst/>
+          </a:prstGeom>
+          <a:noFill/>
+        </p:spPr>
+        <p:txBody>
+          <a:bodyPr wrap="square">
+            <a:spAutoFit/>
+          </a:bodyPr>
+          <a:lstStyle/>
+          <a:p>
+            <a:pPr>
+              <a:spcBef>
+                <a:spcPts val="300"/>
+              </a:spcBef>
+            </a:pPr>
+            <a:r>
+              <a:rPr sz="1400">
+                <a:solidFill>
+                  <a:srgbClr val="404040"/>
+                </a:solidFill>
+              </a:rPr>
+              <a:t>•  Finantsiliselt tasuvam: Kambja vald (ROI 3.4) ja Saue vald (ROI 3.36)</a:t>
+            </a:r>
+          </a:p>
+          <a:p>
+            <a:pPr>
+              <a:spcBef>
+                <a:spcPts val="300"/>
+              </a:spcBef>
+            </a:pPr>
+            <a:r>
+              <a:rPr sz="1400">
+                <a:solidFill>
+                  <a:srgbClr val="404040"/>
+                </a:solidFill>
+              </a:rPr>
+              <a:t>•  Suurim absoluutne säästupotentsiaal: Tallinn (üle 100M €/aastas)</a:t>
+            </a:r>
+          </a:p>
+          <a:p>
+            <a:pPr>
+              <a:spcBef>
+                <a:spcPts val="300"/>
+              </a:spcBef>
+            </a:pPr>
+            <a:r>
+              <a:rPr sz="1400">
+                <a:solidFill>
+                  <a:srgbClr val="404040"/>
+                </a:solidFill>
+              </a:rPr>
+              <a:t>•  Vajaduspõhiselt haavatavaimad: Lääneranna, Kihnu ja Räpina vald</a:t>
+            </a:r>
+          </a:p>
+          <a:p>
+            <a:pPr>
+              <a:spcBef>
+                <a:spcPts val="300"/>
+              </a:spcBef>
+            </a:pPr>
+            <a:r>
+              <a:rPr sz="1400">
+                <a:solidFill>
+                  <a:srgbClr val="404040"/>
+                </a:solidFill>
+              </a:rPr>
+              <a:t>•  Tallinna ja Tartu linna ROI on madalam (2.26–2.27), aga kogu mõju suurim</a:t>
+            </a:r>
+          </a:p>
+          <a:p>
+            <a:pPr>
+              <a:spcBef>
+                <a:spcPts val="300"/>
+              </a:spcBef>
+            </a:pPr>
+            <a:r>
+              <a:rPr sz="1400">
+                <a:solidFill>
+                  <a:srgbClr val="404040"/>
+                </a:solidFill>
+              </a:rPr>
+              <a:t>•  Kokkuvõte: kõrge ROI → väiksemad vallad; suur säästusumma → linnad</a:t>
+            </a:r>
+          </a:p>
+        </p:txBody>
+      </p:sp>
+      <p:sp>
+        <p:nvSpPr>
+          <p:cNvPr id="7" name="Rectangle 6"/>
+          <p:cNvSpPr/>
+          <p:nvPr/>
+        </p:nvSpPr>
+        <p:spPr>
+          <a:xfrm>
+            <a:off x="7680960" y="1143000"/>
+            <a:ext cx="4206240" cy="4343400"/>
           </a:xfrm>
           <a:prstGeom prst="rect">
             <a:avLst/>
@@ -9459,87 +8703,20 @@
           <a:lstStyle/>
           <a:p>
             <a:pPr algn="ctr"/>
-          </a:p>
-        </p:txBody>
-      </p:sp>
-      <p:sp>
-        <p:nvSpPr>
-          <p:cNvPr id="5" name="TextBox 4"/>
-          <p:cNvSpPr txBox="1"/>
-          <p:nvPr/>
-        </p:nvSpPr>
-        <p:spPr>
-          <a:xfrm>
-            <a:off x="365760" y="1188720"/>
-            <a:ext cx="2514600" cy="502920"/>
-          </a:xfrm>
-          <a:prstGeom prst="rect">
-            <a:avLst/>
-          </a:prstGeom>
-          <a:noFill/>
-        </p:spPr>
-        <p:txBody>
-          <a:bodyPr wrap="square">
-            <a:spAutoFit/>
-          </a:bodyPr>
-          <a:lstStyle/>
-          <a:p>
-            <a:pPr algn="ctr"/>
-            <a:r>
-              <a:rPr sz="1300" b="0">
-                <a:solidFill>
-                  <a:srgbClr val="FFFFFF"/>
-                </a:solidFill>
-              </a:rPr>
-              <a:t>Soojakadu Eestis</a:t>
-            </a:r>
-          </a:p>
-        </p:txBody>
-      </p:sp>
-      <p:sp>
-        <p:nvSpPr>
-          <p:cNvPr id="6" name="TextBox 5"/>
-          <p:cNvSpPr txBox="1"/>
-          <p:nvPr/>
-        </p:nvSpPr>
-        <p:spPr>
-          <a:xfrm>
-            <a:off x="320040" y="1691640"/>
-            <a:ext cx="2606040" cy="685800"/>
-          </a:xfrm>
-          <a:prstGeom prst="rect">
-            <a:avLst/>
-          </a:prstGeom>
-          <a:noFill/>
-        </p:spPr>
-        <p:txBody>
-          <a:bodyPr wrap="square">
-            <a:spAutoFit/>
-          </a:bodyPr>
-          <a:lstStyle/>
-          <a:p>
-            <a:pPr algn="ctr"/>
-            <a:r>
-              <a:rPr sz="2200" b="1">
-                <a:solidFill>
-                  <a:srgbClr val="FFFFFF"/>
-                </a:solidFill>
-              </a:rPr>
-              <a:t>9.26B kWh</a:t>
-            </a:r>
-          </a:p>
-        </p:txBody>
-      </p:sp>
-      <p:sp>
-        <p:nvSpPr>
-          <p:cNvPr id="7" name="Rectangle 6"/>
+            <a:endParaRPr/>
+          </a:p>
+        </p:txBody>
+      </p:sp>
+      <p:sp>
+        <p:nvSpPr>
+          <p:cNvPr id="9" name="Rectangle 8"/>
           <p:cNvSpPr/>
           <p:nvPr/>
         </p:nvSpPr>
         <p:spPr>
           <a:xfrm>
-            <a:off x="3182112" y="1143000"/>
-            <a:ext cx="2697480" cy="1371600"/>
+            <a:off x="7726679" y="1371600"/>
+            <a:ext cx="4069080" cy="749808"/>
           </a:xfrm>
           <a:prstGeom prst="rect">
             <a:avLst/>
@@ -9570,93 +8747,95 @@
           <a:lstStyle/>
           <a:p>
             <a:pPr algn="ctr"/>
-          </a:p>
-        </p:txBody>
-      </p:sp>
-      <p:sp>
-        <p:nvSpPr>
-          <p:cNvPr id="8" name="TextBox 7"/>
-          <p:cNvSpPr txBox="1"/>
-          <p:nvPr/>
-        </p:nvSpPr>
-        <p:spPr>
-          <a:xfrm>
-            <a:off x="3273552" y="1188720"/>
-            <a:ext cx="2514600" cy="502920"/>
-          </a:xfrm>
-          <a:prstGeom prst="rect">
-            <a:avLst/>
-          </a:prstGeom>
-          <a:noFill/>
-        </p:spPr>
-        <p:txBody>
-          <a:bodyPr wrap="square">
-            <a:spAutoFit/>
-          </a:bodyPr>
-          <a:lstStyle/>
-          <a:p>
-            <a:pPr algn="ctr"/>
-            <a:r>
-              <a:rPr sz="1300" b="0">
+            <a:endParaRPr/>
+          </a:p>
+        </p:txBody>
+      </p:sp>
+      <p:sp>
+        <p:nvSpPr>
+          <p:cNvPr id="10" name="TextBox 9"/>
+          <p:cNvSpPr txBox="1"/>
+          <p:nvPr/>
+        </p:nvSpPr>
+        <p:spPr>
+          <a:xfrm>
+            <a:off x="7836408" y="1389888"/>
+            <a:ext cx="3840480" cy="320040"/>
+          </a:xfrm>
+          <a:prstGeom prst="rect">
+            <a:avLst/>
+          </a:prstGeom>
+          <a:noFill/>
+        </p:spPr>
+        <p:txBody>
+          <a:bodyPr wrap="square">
+            <a:spAutoFit/>
+          </a:bodyPr>
+          <a:lstStyle/>
+          <a:p>
+            <a:pPr algn="l"/>
+            <a:r>
+              <a:rPr sz="1100" b="1">
                 <a:solidFill>
                   <a:srgbClr val="FFFFFF"/>
                 </a:solidFill>
               </a:rPr>
-              <a:t>Kulu</a:t>
-            </a:r>
-          </a:p>
-        </p:txBody>
-      </p:sp>
-      <p:sp>
-        <p:nvSpPr>
-          <p:cNvPr id="9" name="TextBox 8"/>
-          <p:cNvSpPr txBox="1"/>
-          <p:nvPr/>
-        </p:nvSpPr>
-        <p:spPr>
-          <a:xfrm>
-            <a:off x="3227832" y="1691640"/>
-            <a:ext cx="2606040" cy="685800"/>
-          </a:xfrm>
-          <a:prstGeom prst="rect">
-            <a:avLst/>
-          </a:prstGeom>
-          <a:noFill/>
-        </p:spPr>
-        <p:txBody>
-          <a:bodyPr wrap="square">
-            <a:spAutoFit/>
-          </a:bodyPr>
-          <a:lstStyle/>
-          <a:p>
-            <a:pPr algn="ctr"/>
-            <a:r>
-              <a:rPr sz="2200" b="1">
-                <a:solidFill>
-                  <a:srgbClr val="FFFFFF"/>
-                </a:solidFill>
-              </a:rPr>
-              <a:t>660M €</a:t>
-            </a:r>
-          </a:p>
-        </p:txBody>
-      </p:sp>
-      <p:sp>
-        <p:nvSpPr>
-          <p:cNvPr id="10" name="Rectangle 9"/>
+              <a:t>ROI</a:t>
+            </a:r>
+          </a:p>
+        </p:txBody>
+      </p:sp>
+      <p:sp>
+        <p:nvSpPr>
+          <p:cNvPr id="11" name="TextBox 10"/>
+          <p:cNvSpPr txBox="1"/>
+          <p:nvPr/>
+        </p:nvSpPr>
+        <p:spPr>
+          <a:xfrm>
+            <a:off x="7836408" y="1719072"/>
+            <a:ext cx="3840480" cy="384048"/>
+          </a:xfrm>
+          <a:prstGeom prst="rect">
+            <a:avLst/>
+          </a:prstGeom>
+          <a:noFill/>
+        </p:spPr>
+        <p:txBody>
+          <a:bodyPr wrap="square">
+            <a:spAutoFit/>
+          </a:bodyPr>
+          <a:lstStyle/>
+          <a:p>
+            <a:pPr algn="l"/>
+            <a:r>
+              <a:rPr sz="1000" b="0">
+                <a:solidFill>
+                  <a:srgbClr val="BDD7EE"/>
+                </a:solidFill>
+              </a:rPr>
+              <a:t>sääst_eur_aastas
+/ investeering</a:t>
+            </a:r>
+          </a:p>
+        </p:txBody>
+      </p:sp>
+      <p:sp>
+        <p:nvSpPr>
+          <p:cNvPr id="12" name="Rectangle 11"/>
           <p:cNvSpPr/>
           <p:nvPr/>
         </p:nvSpPr>
         <p:spPr>
           <a:xfrm>
-            <a:off x="6089904" y="1143000"/>
-            <a:ext cx="2697480" cy="1371600"/>
+            <a:off x="7726679" y="2194560"/>
+            <a:ext cx="4069080" cy="749808"/>
           </a:xfrm>
           <a:prstGeom prst="rect">
             <a:avLst/>
           </a:prstGeom>
           <a:solidFill>
-            <a:srgbClr val="5A9E6F"/>
+            <a:srgbClr val="2E75B6"/>
           </a:solidFill>
           <a:ln>
             <a:noFill/>
@@ -9681,93 +8860,95 @@
           <a:lstStyle/>
           <a:p>
             <a:pPr algn="ctr"/>
-          </a:p>
-        </p:txBody>
-      </p:sp>
-      <p:sp>
-        <p:nvSpPr>
-          <p:cNvPr id="11" name="TextBox 10"/>
-          <p:cNvSpPr txBox="1"/>
-          <p:nvPr/>
-        </p:nvSpPr>
-        <p:spPr>
-          <a:xfrm>
-            <a:off x="6181344" y="1188720"/>
-            <a:ext cx="2514600" cy="502920"/>
-          </a:xfrm>
-          <a:prstGeom prst="rect">
-            <a:avLst/>
-          </a:prstGeom>
-          <a:noFill/>
-        </p:spPr>
-        <p:txBody>
-          <a:bodyPr wrap="square">
-            <a:spAutoFit/>
-          </a:bodyPr>
-          <a:lstStyle/>
-          <a:p>
-            <a:pPr algn="ctr"/>
-            <a:r>
-              <a:rPr sz="1300" b="0">
+            <a:endParaRPr/>
+          </a:p>
+        </p:txBody>
+      </p:sp>
+      <p:sp>
+        <p:nvSpPr>
+          <p:cNvPr id="13" name="TextBox 12"/>
+          <p:cNvSpPr txBox="1"/>
+          <p:nvPr/>
+        </p:nvSpPr>
+        <p:spPr>
+          <a:xfrm>
+            <a:off x="7836408" y="2212848"/>
+            <a:ext cx="3840480" cy="320040"/>
+          </a:xfrm>
+          <a:prstGeom prst="rect">
+            <a:avLst/>
+          </a:prstGeom>
+          <a:noFill/>
+        </p:spPr>
+        <p:txBody>
+          <a:bodyPr wrap="square">
+            <a:spAutoFit/>
+          </a:bodyPr>
+          <a:lstStyle/>
+          <a:p>
+            <a:pPr algn="l"/>
+            <a:r>
+              <a:rPr sz="1100" b="1">
                 <a:solidFill>
                   <a:srgbClr val="FFFFFF"/>
                 </a:solidFill>
               </a:rPr>
-              <a:t>Säästupotentsiaal</a:t>
-            </a:r>
-          </a:p>
-        </p:txBody>
-      </p:sp>
-      <p:sp>
-        <p:nvSpPr>
-          <p:cNvPr id="12" name="TextBox 11"/>
-          <p:cNvSpPr txBox="1"/>
-          <p:nvPr/>
-        </p:nvSpPr>
-        <p:spPr>
-          <a:xfrm>
-            <a:off x="6135624" y="1691640"/>
-            <a:ext cx="2606040" cy="685800"/>
-          </a:xfrm>
-          <a:prstGeom prst="rect">
-            <a:avLst/>
-          </a:prstGeom>
-          <a:noFill/>
-        </p:spPr>
-        <p:txBody>
-          <a:bodyPr wrap="square">
-            <a:spAutoFit/>
-          </a:bodyPr>
-          <a:lstStyle/>
-          <a:p>
-            <a:pPr algn="ctr"/>
-            <a:r>
-              <a:rPr sz="2200" b="1">
-                <a:solidFill>
-                  <a:srgbClr val="FFFFFF"/>
-                </a:solidFill>
-              </a:rPr>
-              <a:t>423M €/aastas</a:t>
-            </a:r>
-          </a:p>
-        </p:txBody>
-      </p:sp>
-      <p:sp>
-        <p:nvSpPr>
-          <p:cNvPr id="13" name="Rectangle 12"/>
+              <a:t>VAJADUSE SKOOR</a:t>
+            </a:r>
+          </a:p>
+        </p:txBody>
+      </p:sp>
+      <p:sp>
+        <p:nvSpPr>
+          <p:cNvPr id="14" name="TextBox 13"/>
+          <p:cNvSpPr txBox="1"/>
+          <p:nvPr/>
+        </p:nvSpPr>
+        <p:spPr>
+          <a:xfrm>
+            <a:off x="7836408" y="2542032"/>
+            <a:ext cx="3840480" cy="384048"/>
+          </a:xfrm>
+          <a:prstGeom prst="rect">
+            <a:avLst/>
+          </a:prstGeom>
+          <a:noFill/>
+        </p:spPr>
+        <p:txBody>
+          <a:bodyPr wrap="square">
+            <a:spAutoFit/>
+          </a:bodyPr>
+          <a:lstStyle/>
+          <a:p>
+            <a:pPr algn="l"/>
+            <a:r>
+              <a:rPr sz="1000" b="0">
+                <a:solidFill>
+                  <a:srgbClr val="BDD7EE"/>
+                </a:solidFill>
+              </a:rPr>
+              <a:t>soojakadu_kwh
+/ kogupindala_m²</a:t>
+            </a:r>
+          </a:p>
+        </p:txBody>
+      </p:sp>
+      <p:sp>
+        <p:nvSpPr>
+          <p:cNvPr id="15" name="Rectangle 14"/>
           <p:cNvSpPr/>
           <p:nvPr/>
         </p:nvSpPr>
         <p:spPr>
           <a:xfrm>
-            <a:off x="8997696" y="1143000"/>
-            <a:ext cx="2697480" cy="1371600"/>
+            <a:off x="7726679" y="3017520"/>
+            <a:ext cx="4069080" cy="749808"/>
           </a:xfrm>
           <a:prstGeom prst="rect">
             <a:avLst/>
           </a:prstGeom>
           <a:solidFill>
-            <a:srgbClr val="ED7D31"/>
+            <a:srgbClr val="2E75B6"/>
           </a:solidFill>
           <a:ln>
             <a:noFill/>
@@ -9792,93 +8973,95 @@
           <a:lstStyle/>
           <a:p>
             <a:pPr algn="ctr"/>
-          </a:p>
-        </p:txBody>
-      </p:sp>
-      <p:sp>
-        <p:nvSpPr>
-          <p:cNvPr id="14" name="TextBox 13"/>
-          <p:cNvSpPr txBox="1"/>
-          <p:nvPr/>
-        </p:nvSpPr>
-        <p:spPr>
-          <a:xfrm>
-            <a:off x="9089136" y="1188720"/>
-            <a:ext cx="2514600" cy="502920"/>
-          </a:xfrm>
-          <a:prstGeom prst="rect">
-            <a:avLst/>
-          </a:prstGeom>
-          <a:noFill/>
-        </p:spPr>
-        <p:txBody>
-          <a:bodyPr wrap="square">
-            <a:spAutoFit/>
-          </a:bodyPr>
-          <a:lstStyle/>
-          <a:p>
-            <a:pPr algn="ctr"/>
-            <a:r>
-              <a:rPr sz="1300" b="0">
+            <a:endParaRPr/>
+          </a:p>
+        </p:txBody>
+      </p:sp>
+      <p:sp>
+        <p:nvSpPr>
+          <p:cNvPr id="16" name="TextBox 15"/>
+          <p:cNvSpPr txBox="1"/>
+          <p:nvPr/>
+        </p:nvSpPr>
+        <p:spPr>
+          <a:xfrm>
+            <a:off x="7836408" y="3035808"/>
+            <a:ext cx="3840480" cy="320040"/>
+          </a:xfrm>
+          <a:prstGeom prst="rect">
+            <a:avLst/>
+          </a:prstGeom>
+          <a:noFill/>
+        </p:spPr>
+        <p:txBody>
+          <a:bodyPr wrap="square">
+            <a:spAutoFit/>
+          </a:bodyPr>
+          <a:lstStyle/>
+          <a:p>
+            <a:pPr algn="l"/>
+            <a:r>
+              <a:rPr sz="1100" b="1">
                 <a:solidFill>
                   <a:srgbClr val="FFFFFF"/>
                 </a:solidFill>
               </a:rPr>
-              <a:t>Keskmine intensiivsus</a:t>
-            </a:r>
-          </a:p>
-        </p:txBody>
-      </p:sp>
-      <p:sp>
-        <p:nvSpPr>
-          <p:cNvPr id="15" name="TextBox 14"/>
-          <p:cNvSpPr txBox="1"/>
-          <p:nvPr/>
-        </p:nvSpPr>
-        <p:spPr>
-          <a:xfrm>
-            <a:off x="9043416" y="1691640"/>
-            <a:ext cx="2606040" cy="685800"/>
-          </a:xfrm>
-          <a:prstGeom prst="rect">
-            <a:avLst/>
-          </a:prstGeom>
-          <a:noFill/>
-        </p:spPr>
-        <p:txBody>
-          <a:bodyPr wrap="square">
-            <a:spAutoFit/>
-          </a:bodyPr>
-          <a:lstStyle/>
-          <a:p>
-            <a:pPr algn="ctr"/>
-            <a:r>
-              <a:rPr sz="2200" b="1">
-                <a:solidFill>
-                  <a:srgbClr val="FFFFFF"/>
-                </a:solidFill>
-              </a:rPr>
-              <a:t>149.93 kWh/m²</a:t>
-            </a:r>
-          </a:p>
-        </p:txBody>
-      </p:sp>
-      <p:sp>
-        <p:nvSpPr>
-          <p:cNvPr id="16" name="Rectangle 15"/>
+              <a:t>INVESTEERING</a:t>
+            </a:r>
+          </a:p>
+        </p:txBody>
+      </p:sp>
+      <p:sp>
+        <p:nvSpPr>
+          <p:cNvPr id="17" name="TextBox 16"/>
+          <p:cNvSpPr txBox="1"/>
+          <p:nvPr/>
+        </p:nvSpPr>
+        <p:spPr>
+          <a:xfrm>
+            <a:off x="7836408" y="3364992"/>
+            <a:ext cx="3840480" cy="384048"/>
+          </a:xfrm>
+          <a:prstGeom prst="rect">
+            <a:avLst/>
+          </a:prstGeom>
+          <a:noFill/>
+        </p:spPr>
+        <p:txBody>
+          <a:bodyPr wrap="square">
+            <a:spAutoFit/>
+          </a:bodyPr>
+          <a:lstStyle/>
+          <a:p>
+            <a:pPr algn="l"/>
+            <a:r>
+              <a:rPr sz="1000" b="0">
+                <a:solidFill>
+                  <a:srgbClr val="BDD7EE"/>
+                </a:solidFill>
+              </a:rPr>
+              <a:t>kogupindala_m² × 250
+(€/m² proxy)</a:t>
+            </a:r>
+          </a:p>
+        </p:txBody>
+      </p:sp>
+      <p:sp>
+        <p:nvSpPr>
+          <p:cNvPr id="18" name="Rectangle 17"/>
           <p:cNvSpPr/>
           <p:nvPr/>
         </p:nvSpPr>
         <p:spPr>
           <a:xfrm>
-            <a:off x="274320" y="2743200"/>
-            <a:ext cx="3794760" cy="3474720"/>
+            <a:off x="7726679" y="3840480"/>
+            <a:ext cx="4069080" cy="749808"/>
           </a:xfrm>
           <a:prstGeom prst="rect">
             <a:avLst/>
           </a:prstGeom>
           <a:solidFill>
-            <a:srgbClr val="F2F2F2"/>
+            <a:srgbClr val="2E75B6"/>
           </a:solidFill>
           <a:ln>
             <a:noFill/>
@@ -9903,19 +9086,20 @@
           <a:lstStyle/>
           <a:p>
             <a:pPr algn="ctr"/>
-          </a:p>
-        </p:txBody>
-      </p:sp>
-      <p:sp>
-        <p:nvSpPr>
-          <p:cNvPr id="17" name="TextBox 16"/>
-          <p:cNvSpPr txBox="1"/>
-          <p:nvPr/>
-        </p:nvSpPr>
-        <p:spPr>
-          <a:xfrm>
-            <a:off x="384048" y="2807208"/>
-            <a:ext cx="3566160" cy="594360"/>
+            <a:endParaRPr/>
+          </a:p>
+        </p:txBody>
+      </p:sp>
+      <p:sp>
+        <p:nvSpPr>
+          <p:cNvPr id="19" name="TextBox 18"/>
+          <p:cNvSpPr txBox="1"/>
+          <p:nvPr/>
+        </p:nvSpPr>
+        <p:spPr>
+          <a:xfrm>
+            <a:off x="7836408" y="3858768"/>
+            <a:ext cx="3840480" cy="320040"/>
           </a:xfrm>
           <a:prstGeom prst="rect">
             <a:avLst/>
@@ -9930,26 +9114,26 @@
           <a:p>
             <a:pPr algn="l"/>
             <a:r>
-              <a:rPr sz="1200" b="1">
-                <a:solidFill>
-                  <a:srgbClr val="2E75B6"/>
-                </a:solidFill>
-              </a:rPr>
-              <a:t>Suurim vajadus renoveerimiseks (vajaduse skoor)</a:t>
-            </a:r>
-          </a:p>
-        </p:txBody>
-      </p:sp>
-      <p:sp>
-        <p:nvSpPr>
-          <p:cNvPr id="18" name="TextBox 17"/>
-          <p:cNvSpPr txBox="1"/>
-          <p:nvPr/>
-        </p:nvSpPr>
-        <p:spPr>
-          <a:xfrm>
-            <a:off x="384048" y="3429000"/>
-            <a:ext cx="3566160" cy="2651760"/>
+              <a:rPr sz="1100" b="1">
+                <a:solidFill>
+                  <a:srgbClr val="FFFFFF"/>
+                </a:solidFill>
+              </a:rPr>
+              <a:t>PRIORITY</a:t>
+            </a:r>
+          </a:p>
+        </p:txBody>
+      </p:sp>
+      <p:sp>
+        <p:nvSpPr>
+          <p:cNvPr id="20" name="TextBox 19"/>
+          <p:cNvSpPr txBox="1"/>
+          <p:nvPr/>
+        </p:nvSpPr>
+        <p:spPr>
+          <a:xfrm>
+            <a:off x="7836408" y="4187952"/>
+            <a:ext cx="3840480" cy="384048"/>
           </a:xfrm>
           <a:prstGeom prst="rect">
             <a:avLst/>
@@ -9964,33 +9148,33 @@
           <a:p>
             <a:pPr algn="l"/>
             <a:r>
-              <a:rPr sz="1200" b="0">
-                <a:solidFill>
-                  <a:srgbClr val="404040"/>
-                </a:solidFill>
-              </a:rPr>
-              <a:t>Lääneranna vald · Kihnu vald · Räpina vald · Toila vald · Kanepi vald
-Mõõdik: soojakadu_kwh_aastas / kogupindala_m²</a:t>
-            </a:r>
-          </a:p>
-        </p:txBody>
-      </p:sp>
-      <p:sp>
-        <p:nvSpPr>
-          <p:cNvPr id="19" name="Rectangle 18"/>
+              <a:rPr sz="1000" b="0">
+                <a:solidFill>
+                  <a:srgbClr val="BDD7EE"/>
+                </a:solidFill>
+              </a:rPr>
+              <a:t>LOG(sääst+1) × LOG(skoor+1)
+× LOG(pindala+1)</a:t>
+            </a:r>
+          </a:p>
+        </p:txBody>
+      </p:sp>
+      <p:sp>
+        <p:nvSpPr>
+          <p:cNvPr id="21" name="Rectangle 20"/>
           <p:cNvSpPr/>
           <p:nvPr/>
         </p:nvSpPr>
         <p:spPr>
           <a:xfrm>
-            <a:off x="4251959" y="2743200"/>
-            <a:ext cx="3794760" cy="3474720"/>
+            <a:off x="7726679" y="4663440"/>
+            <a:ext cx="4069080" cy="749808"/>
           </a:xfrm>
           <a:prstGeom prst="rect">
             <a:avLst/>
           </a:prstGeom>
           <a:solidFill>
-            <a:srgbClr val="F2F2F2"/>
+            <a:srgbClr val="2E75B6"/>
           </a:solidFill>
           <a:ln>
             <a:noFill/>
@@ -10015,19 +9199,20 @@
           <a:lstStyle/>
           <a:p>
             <a:pPr algn="ctr"/>
-          </a:p>
-        </p:txBody>
-      </p:sp>
-      <p:sp>
-        <p:nvSpPr>
-          <p:cNvPr id="20" name="TextBox 19"/>
-          <p:cNvSpPr txBox="1"/>
-          <p:nvPr/>
-        </p:nvSpPr>
-        <p:spPr>
-          <a:xfrm>
-            <a:off x="4361688" y="2807208"/>
-            <a:ext cx="3566160" cy="594360"/>
+            <a:endParaRPr/>
+          </a:p>
+        </p:txBody>
+      </p:sp>
+      <p:sp>
+        <p:nvSpPr>
+          <p:cNvPr id="22" name="TextBox 21"/>
+          <p:cNvSpPr txBox="1"/>
+          <p:nvPr/>
+        </p:nvSpPr>
+        <p:spPr>
+          <a:xfrm>
+            <a:off x="7836408" y="4681728"/>
+            <a:ext cx="3840480" cy="320040"/>
           </a:xfrm>
           <a:prstGeom prst="rect">
             <a:avLst/>
@@ -10042,26 +9227,26 @@
           <a:p>
             <a:pPr algn="l"/>
             <a:r>
-              <a:rPr sz="1200" b="1">
-                <a:solidFill>
-                  <a:srgbClr val="2E75B6"/>
-                </a:solidFill>
-              </a:rPr>
-              <a:t>TOP 10 KOV — suurim aastane säästupotentsiaal (€)</a:t>
-            </a:r>
-          </a:p>
-        </p:txBody>
-      </p:sp>
-      <p:sp>
-        <p:nvSpPr>
-          <p:cNvPr id="21" name="TextBox 20"/>
-          <p:cNvSpPr txBox="1"/>
-          <p:nvPr/>
-        </p:nvSpPr>
-        <p:spPr>
-          <a:xfrm>
-            <a:off x="4361688" y="3429000"/>
-            <a:ext cx="3566160" cy="2651760"/>
+              <a:rPr sz="1100" b="1">
+                <a:solidFill>
+                  <a:srgbClr val="FFFFFF"/>
+                </a:solidFill>
+              </a:rPr>
+              <a:t>TASUVUS</a:t>
+            </a:r>
+          </a:p>
+        </p:txBody>
+      </p:sp>
+      <p:sp>
+        <p:nvSpPr>
+          <p:cNvPr id="23" name="TextBox 22"/>
+          <p:cNvSpPr txBox="1"/>
+          <p:nvPr/>
+        </p:nvSpPr>
+        <p:spPr>
+          <a:xfrm>
+            <a:off x="7836408" y="5010912"/>
+            <a:ext cx="3840480" cy="384048"/>
           </a:xfrm>
           <a:prstGeom prst="rect">
             <a:avLst/>
@@ -10076,70 +9261,26 @@
           <a:p>
             <a:pPr algn="l"/>
             <a:r>
-              <a:rPr sz="1200" b="0">
-                <a:solidFill>
-                  <a:srgbClr val="404040"/>
-                </a:solidFill>
-              </a:rPr>
-              <a:t>Tallinn ~100M € · Tartu linn ~20M € · Pärnu linn · Narva linn
-Kohtla-Järve · Saaremaa vald · Viljandi vald · Jõgeva vald · Elva vald</a:t>
-            </a:r>
-          </a:p>
-        </p:txBody>
-      </p:sp>
-      <p:sp>
-        <p:nvSpPr>
-          <p:cNvPr id="22" name="Rectangle 21"/>
-          <p:cNvSpPr/>
-          <p:nvPr/>
-        </p:nvSpPr>
-        <p:spPr>
-          <a:xfrm>
-            <a:off x="8229600" y="2743200"/>
-            <a:ext cx="3794760" cy="3474720"/>
-          </a:xfrm>
-          <a:prstGeom prst="rect">
-            <a:avLst/>
-          </a:prstGeom>
-          <a:solidFill>
-            <a:srgbClr val="F2F2F2"/>
-          </a:solidFill>
-          <a:ln>
-            <a:noFill/>
-          </a:ln>
-        </p:spPr>
-        <p:style>
-          <a:lnRef idx="1">
-            <a:schemeClr val="accent1"/>
-          </a:lnRef>
-          <a:fillRef idx="3">
-            <a:schemeClr val="accent1"/>
-          </a:fillRef>
-          <a:effectRef idx="2">
-            <a:schemeClr val="accent1"/>
-          </a:effectRef>
-          <a:fontRef idx="minor">
-            <a:schemeClr val="lt1"/>
-          </a:fontRef>
-        </p:style>
-        <p:txBody>
-          <a:bodyPr rtlCol="0" anchor="ctr"/>
-          <a:lstStyle/>
-          <a:p>
-            <a:pPr algn="ctr"/>
-          </a:p>
-        </p:txBody>
-      </p:sp>
-      <p:sp>
-        <p:nvSpPr>
-          <p:cNvPr id="23" name="TextBox 22"/>
-          <p:cNvSpPr txBox="1"/>
-          <p:nvPr/>
-        </p:nvSpPr>
-        <p:spPr>
-          <a:xfrm>
-            <a:off x="8339327" y="2807208"/>
-            <a:ext cx="3566160" cy="594360"/>
+              <a:rPr sz="1000" b="0">
+                <a:solidFill>
+                  <a:srgbClr val="BDD7EE"/>
+                </a:solidFill>
+              </a:rPr>
+              <a:t>1 / NULLIF(roi, 0)</a:t>
+            </a:r>
+          </a:p>
+        </p:txBody>
+      </p:sp>
+      <p:sp>
+        <p:nvSpPr>
+          <p:cNvPr id="8" name="TextBox 7"/>
+          <p:cNvSpPr txBox="1"/>
+          <p:nvPr/>
+        </p:nvSpPr>
+        <p:spPr>
+          <a:xfrm>
+            <a:off x="7818120" y="1115568"/>
+            <a:ext cx="3931920" cy="457200"/>
           </a:xfrm>
           <a:prstGeom prst="rect">
             <a:avLst/>
@@ -10154,48 +9295,26 @@
           <a:p>
             <a:pPr algn="l"/>
             <a:r>
-              <a:rPr sz="1200" b="1">
-                <a:solidFill>
-                  <a:srgbClr val="2E75B6"/>
-                </a:solidFill>
-              </a:rPr>
-              <a:t>Investeeringu tasuvus — ROI vs tasuvusaeg</a:t>
-            </a:r>
-          </a:p>
-        </p:txBody>
-      </p:sp>
-      <p:sp>
-        <p:nvSpPr>
-          <p:cNvPr id="24" name="TextBox 23"/>
-          <p:cNvSpPr txBox="1"/>
-          <p:nvPr/>
-        </p:nvSpPr>
-        <p:spPr>
-          <a:xfrm>
-            <a:off x="8339327" y="3429000"/>
-            <a:ext cx="3566160" cy="2651760"/>
-          </a:xfrm>
-          <a:prstGeom prst="rect">
-            <a:avLst/>
-          </a:prstGeom>
-          <a:noFill/>
-        </p:spPr>
-        <p:txBody>
-          <a:bodyPr wrap="square">
-            <a:spAutoFit/>
-          </a:bodyPr>
-          <a:lstStyle/>
-          <a:p>
-            <a:pPr algn="l"/>
-            <a:r>
-              <a:rPr sz="1200" b="0">
-                <a:solidFill>
-                  <a:srgbClr val="404040"/>
-                </a:solidFill>
-              </a:rPr>
-              <a:t>Kambja vald (ROI 3.4) · Saue vald (3.36) · Tori vald (3.31)
-Rapla vald (3.21) — finantsiliselt kõige tasuvam renoveerimine</a:t>
-            </a:r>
+              <a:rPr sz="1400" b="1" dirty="0">
+                <a:solidFill>
+                  <a:srgbClr val="FFFFFF"/>
+                </a:solidFill>
+              </a:rPr>
+              <a:t>Ärimeetrikute </a:t>
+            </a:r>
+            <a:r>
+              <a:rPr sz="1400" b="1" dirty="0" err="1">
+                <a:solidFill>
+                  <a:srgbClr val="FFFFFF"/>
+                </a:solidFill>
+              </a:rPr>
+              <a:t>valemid</a:t>
+            </a:r>
+            <a:endParaRPr sz="1400" b="1" dirty="0">
+              <a:solidFill>
+                <a:srgbClr val="FFFFFF"/>
+              </a:solidFill>
+            </a:endParaRPr>
           </a:p>
         </p:txBody>
       </p:sp>
@@ -10207,8 +9326,8 @@
 </p:sld>
 </file>
 
-<file path=ppt/slides/slide8.xml><?xml version="1.0" encoding="utf-8"?>
-<p:sld xmlns:a="http://schemas.openxmlformats.org/drawingml/2006/main" xmlns:p="http://schemas.openxmlformats.org/presentationml/2006/main" xmlns:r="http://schemas.openxmlformats.org/officeDocument/2006/relationships">
+<file path=ppt/slides/slide9.xml><?xml version="1.0" encoding="utf-8"?>
+<p:sld xmlns:a="http://schemas.openxmlformats.org/drawingml/2006/main" xmlns:r="http://schemas.openxmlformats.org/officeDocument/2006/relationships" xmlns:p="http://schemas.openxmlformats.org/presentationml/2006/main">
   <p:cSld>
     <p:bg>
       <p:bgPr>
@@ -10224,7 +9343,14 @@
         <p:cNvGrpSpPr/>
         <p:nvPr/>
       </p:nvGrpSpPr>
-      <p:grpSpPr/>
+      <p:grpSpPr>
+        <a:xfrm>
+          <a:off x="0" y="0"/>
+          <a:ext cx="0" cy="0"/>
+          <a:chOff x="0" y="0"/>
+          <a:chExt cx="0" cy="0"/>
+        </a:xfrm>
+      </p:grpSpPr>
       <p:sp>
         <p:nvSpPr>
           <p:cNvPr id="2" name="Rectangle 1"/>
@@ -10265,6 +9391,7 @@
           <a:lstStyle/>
           <a:p>
             <a:pPr algn="ctr"/>
+            <a:endParaRPr/>
           </a:p>
         </p:txBody>
       </p:sp>
@@ -10297,7 +9424,7 @@
                   <a:srgbClr val="FFFFFF"/>
                 </a:solidFill>
               </a:rPr>
-              <a:t>Järeldused ja ärimeetrikud</a:t>
+              <a:t>Tööjaotus ja kokkuvõte</a:t>
             </a:r>
           </a:p>
         </p:txBody>
@@ -10310,8 +9437,768 @@
         </p:nvSpPr>
         <p:spPr>
           <a:xfrm>
-            <a:off x="274320" y="1143000"/>
-            <a:ext cx="7132320" cy="4343400"/>
+            <a:off x="228600" y="1188720"/>
+            <a:ext cx="2697480" cy="594360"/>
+          </a:xfrm>
+          <a:prstGeom prst="rect">
+            <a:avLst/>
+          </a:prstGeom>
+          <a:solidFill>
+            <a:srgbClr val="2E75B6"/>
+          </a:solidFill>
+          <a:ln>
+            <a:noFill/>
+          </a:ln>
+        </p:spPr>
+        <p:style>
+          <a:lnRef idx="1">
+            <a:schemeClr val="accent1"/>
+          </a:lnRef>
+          <a:fillRef idx="3">
+            <a:schemeClr val="accent1"/>
+          </a:fillRef>
+          <a:effectRef idx="2">
+            <a:schemeClr val="accent1"/>
+          </a:effectRef>
+          <a:fontRef idx="minor">
+            <a:schemeClr val="lt1"/>
+          </a:fontRef>
+        </p:style>
+        <p:txBody>
+          <a:bodyPr rtlCol="0" anchor="ctr"/>
+          <a:lstStyle/>
+          <a:p>
+            <a:pPr algn="ctr"/>
+            <a:endParaRPr/>
+          </a:p>
+        </p:txBody>
+      </p:sp>
+      <p:sp>
+        <p:nvSpPr>
+          <p:cNvPr id="5" name="TextBox 4"/>
+          <p:cNvSpPr txBox="1"/>
+          <p:nvPr/>
+        </p:nvSpPr>
+        <p:spPr>
+          <a:xfrm>
+            <a:off x="320040" y="1207008"/>
+            <a:ext cx="2514600" cy="548640"/>
+          </a:xfrm>
+          <a:prstGeom prst="rect">
+            <a:avLst/>
+          </a:prstGeom>
+          <a:noFill/>
+        </p:spPr>
+        <p:txBody>
+          <a:bodyPr wrap="square">
+            <a:spAutoFit/>
+          </a:bodyPr>
+          <a:lstStyle/>
+          <a:p>
+            <a:pPr algn="ctr"/>
+            <a:r>
+              <a:rPr sz="1400" b="1">
+                <a:solidFill>
+                  <a:srgbClr val="FFFFFF"/>
+                </a:solidFill>
+              </a:rPr>
+              <a:t>Toel Teemaa</a:t>
+            </a:r>
+          </a:p>
+        </p:txBody>
+      </p:sp>
+      <p:sp>
+        <p:nvSpPr>
+          <p:cNvPr id="6" name="Rectangle 5"/>
+          <p:cNvSpPr/>
+          <p:nvPr/>
+        </p:nvSpPr>
+        <p:spPr>
+          <a:xfrm>
+            <a:off x="228600" y="1783080"/>
+            <a:ext cx="2697480" cy="438912"/>
+          </a:xfrm>
+          <a:prstGeom prst="rect">
+            <a:avLst/>
+          </a:prstGeom>
+          <a:solidFill>
+            <a:srgbClr val="BDD7EE"/>
+          </a:solidFill>
+          <a:ln>
+            <a:noFill/>
+          </a:ln>
+        </p:spPr>
+        <p:style>
+          <a:lnRef idx="1">
+            <a:schemeClr val="accent1"/>
+          </a:lnRef>
+          <a:fillRef idx="3">
+            <a:schemeClr val="accent1"/>
+          </a:fillRef>
+          <a:effectRef idx="2">
+            <a:schemeClr val="accent1"/>
+          </a:effectRef>
+          <a:fontRef idx="minor">
+            <a:schemeClr val="lt1"/>
+          </a:fontRef>
+        </p:style>
+        <p:txBody>
+          <a:bodyPr rtlCol="0" anchor="ctr"/>
+          <a:lstStyle/>
+          <a:p>
+            <a:pPr algn="ctr"/>
+            <a:endParaRPr/>
+          </a:p>
+        </p:txBody>
+      </p:sp>
+      <p:sp>
+        <p:nvSpPr>
+          <p:cNvPr id="7" name="TextBox 6"/>
+          <p:cNvSpPr txBox="1"/>
+          <p:nvPr/>
+        </p:nvSpPr>
+        <p:spPr>
+          <a:xfrm>
+            <a:off x="274320" y="1801368"/>
+            <a:ext cx="2606040" cy="402336"/>
+          </a:xfrm>
+          <a:prstGeom prst="rect">
+            <a:avLst/>
+          </a:prstGeom>
+          <a:noFill/>
+        </p:spPr>
+        <p:txBody>
+          <a:bodyPr wrap="square">
+            <a:spAutoFit/>
+          </a:bodyPr>
+          <a:lstStyle/>
+          <a:p>
+            <a:pPr algn="ctr"/>
+            <a:r>
+              <a:rPr sz="1300" b="1">
+                <a:solidFill>
+                  <a:srgbClr val="1B376B"/>
+                </a:solidFill>
+              </a:rPr>
+              <a:t>Andmete laadimine</a:t>
+            </a:r>
+          </a:p>
+        </p:txBody>
+      </p:sp>
+      <p:sp>
+        <p:nvSpPr>
+          <p:cNvPr id="8" name="TextBox 7"/>
+          <p:cNvSpPr txBox="1"/>
+          <p:nvPr/>
+        </p:nvSpPr>
+        <p:spPr>
+          <a:xfrm>
+            <a:off x="320040" y="2286000"/>
+            <a:ext cx="2542032" cy="1280160"/>
+          </a:xfrm>
+          <a:prstGeom prst="rect">
+            <a:avLst/>
+          </a:prstGeom>
+          <a:noFill/>
+        </p:spPr>
+        <p:txBody>
+          <a:bodyPr wrap="square">
+            <a:spAutoFit/>
+          </a:bodyPr>
+          <a:lstStyle/>
+          <a:p>
+            <a:pPr algn="l"/>
+            <a:r>
+              <a:rPr sz="1200" b="0">
+                <a:solidFill>
+                  <a:srgbClr val="404040"/>
+                </a:solidFill>
+              </a:rPr>
+              <a:t>Airflow DAG-id, API integratsioonid (Open-Meteo, Elering, Nord Pool)</a:t>
+            </a:r>
+          </a:p>
+        </p:txBody>
+      </p:sp>
+      <p:sp>
+        <p:nvSpPr>
+          <p:cNvPr id="9" name="Rectangle 8"/>
+          <p:cNvSpPr/>
+          <p:nvPr/>
+        </p:nvSpPr>
+        <p:spPr>
+          <a:xfrm>
+            <a:off x="3136392" y="1188720"/>
+            <a:ext cx="2697480" cy="594360"/>
+          </a:xfrm>
+          <a:prstGeom prst="rect">
+            <a:avLst/>
+          </a:prstGeom>
+          <a:solidFill>
+            <a:srgbClr val="1B376B"/>
+          </a:solidFill>
+          <a:ln>
+            <a:noFill/>
+          </a:ln>
+        </p:spPr>
+        <p:style>
+          <a:lnRef idx="1">
+            <a:schemeClr val="accent1"/>
+          </a:lnRef>
+          <a:fillRef idx="3">
+            <a:schemeClr val="accent1"/>
+          </a:fillRef>
+          <a:effectRef idx="2">
+            <a:schemeClr val="accent1"/>
+          </a:effectRef>
+          <a:fontRef idx="minor">
+            <a:schemeClr val="lt1"/>
+          </a:fontRef>
+        </p:style>
+        <p:txBody>
+          <a:bodyPr rtlCol="0" anchor="ctr"/>
+          <a:lstStyle/>
+          <a:p>
+            <a:pPr algn="ctr"/>
+            <a:endParaRPr/>
+          </a:p>
+        </p:txBody>
+      </p:sp>
+      <p:sp>
+        <p:nvSpPr>
+          <p:cNvPr id="10" name="TextBox 9"/>
+          <p:cNvSpPr txBox="1"/>
+          <p:nvPr/>
+        </p:nvSpPr>
+        <p:spPr>
+          <a:xfrm>
+            <a:off x="3227832" y="1207008"/>
+            <a:ext cx="2514600" cy="548640"/>
+          </a:xfrm>
+          <a:prstGeom prst="rect">
+            <a:avLst/>
+          </a:prstGeom>
+          <a:noFill/>
+        </p:spPr>
+        <p:txBody>
+          <a:bodyPr wrap="square">
+            <a:spAutoFit/>
+          </a:bodyPr>
+          <a:lstStyle/>
+          <a:p>
+            <a:pPr algn="ctr"/>
+            <a:r>
+              <a:rPr sz="1400" b="1">
+                <a:solidFill>
+                  <a:srgbClr val="FFFFFF"/>
+                </a:solidFill>
+              </a:rPr>
+              <a:t>Erkki Laaneoks</a:t>
+            </a:r>
+          </a:p>
+        </p:txBody>
+      </p:sp>
+      <p:sp>
+        <p:nvSpPr>
+          <p:cNvPr id="11" name="Rectangle 10"/>
+          <p:cNvSpPr/>
+          <p:nvPr/>
+        </p:nvSpPr>
+        <p:spPr>
+          <a:xfrm>
+            <a:off x="3136392" y="1783080"/>
+            <a:ext cx="2697480" cy="438912"/>
+          </a:xfrm>
+          <a:prstGeom prst="rect">
+            <a:avLst/>
+          </a:prstGeom>
+          <a:solidFill>
+            <a:srgbClr val="BDD7EE"/>
+          </a:solidFill>
+          <a:ln>
+            <a:noFill/>
+          </a:ln>
+        </p:spPr>
+        <p:style>
+          <a:lnRef idx="1">
+            <a:schemeClr val="accent1"/>
+          </a:lnRef>
+          <a:fillRef idx="3">
+            <a:schemeClr val="accent1"/>
+          </a:fillRef>
+          <a:effectRef idx="2">
+            <a:schemeClr val="accent1"/>
+          </a:effectRef>
+          <a:fontRef idx="minor">
+            <a:schemeClr val="lt1"/>
+          </a:fontRef>
+        </p:style>
+        <p:txBody>
+          <a:bodyPr rtlCol="0" anchor="ctr"/>
+          <a:lstStyle/>
+          <a:p>
+            <a:pPr algn="ctr"/>
+            <a:endParaRPr/>
+          </a:p>
+        </p:txBody>
+      </p:sp>
+      <p:sp>
+        <p:nvSpPr>
+          <p:cNvPr id="12" name="TextBox 11"/>
+          <p:cNvSpPr txBox="1"/>
+          <p:nvPr/>
+        </p:nvSpPr>
+        <p:spPr>
+          <a:xfrm>
+            <a:off x="3182112" y="1801368"/>
+            <a:ext cx="2606040" cy="402336"/>
+          </a:xfrm>
+          <a:prstGeom prst="rect">
+            <a:avLst/>
+          </a:prstGeom>
+          <a:noFill/>
+        </p:spPr>
+        <p:txBody>
+          <a:bodyPr wrap="square">
+            <a:spAutoFit/>
+          </a:bodyPr>
+          <a:lstStyle/>
+          <a:p>
+            <a:pPr algn="ctr"/>
+            <a:r>
+              <a:rPr sz="1300" b="1">
+                <a:solidFill>
+                  <a:srgbClr val="1B376B"/>
+                </a:solidFill>
+              </a:rPr>
+              <a:t>Teisendused</a:t>
+            </a:r>
+          </a:p>
+        </p:txBody>
+      </p:sp>
+      <p:sp>
+        <p:nvSpPr>
+          <p:cNvPr id="13" name="TextBox 12"/>
+          <p:cNvSpPr txBox="1"/>
+          <p:nvPr/>
+        </p:nvSpPr>
+        <p:spPr>
+          <a:xfrm>
+            <a:off x="3227832" y="2286000"/>
+            <a:ext cx="2542032" cy="1280160"/>
+          </a:xfrm>
+          <a:prstGeom prst="rect">
+            <a:avLst/>
+          </a:prstGeom>
+          <a:noFill/>
+        </p:spPr>
+        <p:txBody>
+          <a:bodyPr wrap="square">
+            <a:spAutoFit/>
+          </a:bodyPr>
+          <a:lstStyle/>
+          <a:p>
+            <a:pPr algn="l"/>
+            <a:r>
+              <a:rPr sz="1200" b="0">
+                <a:solidFill>
+                  <a:srgbClr val="404040"/>
+                </a:solidFill>
+              </a:rPr>
+              <a:t>dbt mudelid, soojakao arvutus, mart-kiht, pearson_r makro</a:t>
+            </a:r>
+          </a:p>
+        </p:txBody>
+      </p:sp>
+      <p:sp>
+        <p:nvSpPr>
+          <p:cNvPr id="14" name="Rectangle 13"/>
+          <p:cNvSpPr/>
+          <p:nvPr/>
+        </p:nvSpPr>
+        <p:spPr>
+          <a:xfrm>
+            <a:off x="6044184" y="1188720"/>
+            <a:ext cx="2697480" cy="594360"/>
+          </a:xfrm>
+          <a:prstGeom prst="rect">
+            <a:avLst/>
+          </a:prstGeom>
+          <a:solidFill>
+            <a:srgbClr val="5A9E6F"/>
+          </a:solidFill>
+          <a:ln>
+            <a:noFill/>
+          </a:ln>
+        </p:spPr>
+        <p:style>
+          <a:lnRef idx="1">
+            <a:schemeClr val="accent1"/>
+          </a:lnRef>
+          <a:fillRef idx="3">
+            <a:schemeClr val="accent1"/>
+          </a:fillRef>
+          <a:effectRef idx="2">
+            <a:schemeClr val="accent1"/>
+          </a:effectRef>
+          <a:fontRef idx="minor">
+            <a:schemeClr val="lt1"/>
+          </a:fontRef>
+        </p:style>
+        <p:txBody>
+          <a:bodyPr rtlCol="0" anchor="ctr"/>
+          <a:lstStyle/>
+          <a:p>
+            <a:pPr algn="ctr"/>
+            <a:endParaRPr/>
+          </a:p>
+        </p:txBody>
+      </p:sp>
+      <p:sp>
+        <p:nvSpPr>
+          <p:cNvPr id="15" name="TextBox 14"/>
+          <p:cNvSpPr txBox="1"/>
+          <p:nvPr/>
+        </p:nvSpPr>
+        <p:spPr>
+          <a:xfrm>
+            <a:off x="6135624" y="1207008"/>
+            <a:ext cx="2514600" cy="548640"/>
+          </a:xfrm>
+          <a:prstGeom prst="rect">
+            <a:avLst/>
+          </a:prstGeom>
+          <a:noFill/>
+        </p:spPr>
+        <p:txBody>
+          <a:bodyPr wrap="square">
+            <a:spAutoFit/>
+          </a:bodyPr>
+          <a:lstStyle/>
+          <a:p>
+            <a:pPr algn="ctr"/>
+            <a:r>
+              <a:rPr sz="1400" b="1">
+                <a:solidFill>
+                  <a:srgbClr val="FFFFFF"/>
+                </a:solidFill>
+              </a:rPr>
+              <a:t>Mihkel Nugis</a:t>
+            </a:r>
+          </a:p>
+        </p:txBody>
+      </p:sp>
+      <p:sp>
+        <p:nvSpPr>
+          <p:cNvPr id="16" name="Rectangle 15"/>
+          <p:cNvSpPr/>
+          <p:nvPr/>
+        </p:nvSpPr>
+        <p:spPr>
+          <a:xfrm>
+            <a:off x="6044184" y="1783080"/>
+            <a:ext cx="2697480" cy="438912"/>
+          </a:xfrm>
+          <a:prstGeom prst="rect">
+            <a:avLst/>
+          </a:prstGeom>
+          <a:solidFill>
+            <a:srgbClr val="BDD7EE"/>
+          </a:solidFill>
+          <a:ln>
+            <a:noFill/>
+          </a:ln>
+        </p:spPr>
+        <p:style>
+          <a:lnRef idx="1">
+            <a:schemeClr val="accent1"/>
+          </a:lnRef>
+          <a:fillRef idx="3">
+            <a:schemeClr val="accent1"/>
+          </a:fillRef>
+          <a:effectRef idx="2">
+            <a:schemeClr val="accent1"/>
+          </a:effectRef>
+          <a:fontRef idx="minor">
+            <a:schemeClr val="lt1"/>
+          </a:fontRef>
+        </p:style>
+        <p:txBody>
+          <a:bodyPr rtlCol="0" anchor="ctr"/>
+          <a:lstStyle/>
+          <a:p>
+            <a:pPr algn="ctr"/>
+            <a:endParaRPr/>
+          </a:p>
+        </p:txBody>
+      </p:sp>
+      <p:sp>
+        <p:nvSpPr>
+          <p:cNvPr id="17" name="TextBox 16"/>
+          <p:cNvSpPr txBox="1"/>
+          <p:nvPr/>
+        </p:nvSpPr>
+        <p:spPr>
+          <a:xfrm>
+            <a:off x="6089904" y="1801368"/>
+            <a:ext cx="2606040" cy="402336"/>
+          </a:xfrm>
+          <a:prstGeom prst="rect">
+            <a:avLst/>
+          </a:prstGeom>
+          <a:noFill/>
+        </p:spPr>
+        <p:txBody>
+          <a:bodyPr wrap="square">
+            <a:spAutoFit/>
+          </a:bodyPr>
+          <a:lstStyle/>
+          <a:p>
+            <a:pPr algn="ctr"/>
+            <a:r>
+              <a:rPr sz="1300" b="1">
+                <a:solidFill>
+                  <a:srgbClr val="1B376B"/>
+                </a:solidFill>
+              </a:rPr>
+              <a:t>Andmekvaliteet</a:t>
+            </a:r>
+          </a:p>
+        </p:txBody>
+      </p:sp>
+      <p:sp>
+        <p:nvSpPr>
+          <p:cNvPr id="18" name="TextBox 17"/>
+          <p:cNvSpPr txBox="1"/>
+          <p:nvPr/>
+        </p:nvSpPr>
+        <p:spPr>
+          <a:xfrm>
+            <a:off x="6135624" y="2286000"/>
+            <a:ext cx="2542032" cy="1280160"/>
+          </a:xfrm>
+          <a:prstGeom prst="rect">
+            <a:avLst/>
+          </a:prstGeom>
+          <a:noFill/>
+        </p:spPr>
+        <p:txBody>
+          <a:bodyPr wrap="square">
+            <a:spAutoFit/>
+          </a:bodyPr>
+          <a:lstStyle/>
+          <a:p>
+            <a:pPr algn="l"/>
+            <a:r>
+              <a:rPr sz="1200" b="0">
+                <a:solidFill>
+                  <a:srgbClr val="404040"/>
+                </a:solidFill>
+              </a:rPr>
+              <a:t>dbt testid, vigade diagnoos, andmete valideerimise automatiseerimine</a:t>
+            </a:r>
+          </a:p>
+        </p:txBody>
+      </p:sp>
+      <p:sp>
+        <p:nvSpPr>
+          <p:cNvPr id="19" name="Rectangle 18"/>
+          <p:cNvSpPr/>
+          <p:nvPr/>
+        </p:nvSpPr>
+        <p:spPr>
+          <a:xfrm>
+            <a:off x="8951976" y="1188720"/>
+            <a:ext cx="2697480" cy="594360"/>
+          </a:xfrm>
+          <a:prstGeom prst="rect">
+            <a:avLst/>
+          </a:prstGeom>
+          <a:solidFill>
+            <a:srgbClr val="ED7D31"/>
+          </a:solidFill>
+          <a:ln>
+            <a:noFill/>
+          </a:ln>
+        </p:spPr>
+        <p:style>
+          <a:lnRef idx="1">
+            <a:schemeClr val="accent1"/>
+          </a:lnRef>
+          <a:fillRef idx="3">
+            <a:schemeClr val="accent1"/>
+          </a:fillRef>
+          <a:effectRef idx="2">
+            <a:schemeClr val="accent1"/>
+          </a:effectRef>
+          <a:fontRef idx="minor">
+            <a:schemeClr val="lt1"/>
+          </a:fontRef>
+        </p:style>
+        <p:txBody>
+          <a:bodyPr rtlCol="0" anchor="ctr"/>
+          <a:lstStyle/>
+          <a:p>
+            <a:pPr algn="ctr"/>
+            <a:endParaRPr/>
+          </a:p>
+        </p:txBody>
+      </p:sp>
+      <p:sp>
+        <p:nvSpPr>
+          <p:cNvPr id="20" name="TextBox 19"/>
+          <p:cNvSpPr txBox="1"/>
+          <p:nvPr/>
+        </p:nvSpPr>
+        <p:spPr>
+          <a:xfrm>
+            <a:off x="9043416" y="1207008"/>
+            <a:ext cx="2514600" cy="548640"/>
+          </a:xfrm>
+          <a:prstGeom prst="rect">
+            <a:avLst/>
+          </a:prstGeom>
+          <a:noFill/>
+        </p:spPr>
+        <p:txBody>
+          <a:bodyPr wrap="square">
+            <a:spAutoFit/>
+          </a:bodyPr>
+          <a:lstStyle/>
+          <a:p>
+            <a:pPr algn="ctr"/>
+            <a:r>
+              <a:rPr sz="1400" b="1">
+                <a:solidFill>
+                  <a:srgbClr val="FFFFFF"/>
+                </a:solidFill>
+              </a:rPr>
+              <a:t>Anna-Liisa Altmets</a:t>
+            </a:r>
+          </a:p>
+        </p:txBody>
+      </p:sp>
+      <p:sp>
+        <p:nvSpPr>
+          <p:cNvPr id="21" name="Rectangle 20"/>
+          <p:cNvSpPr/>
+          <p:nvPr/>
+        </p:nvSpPr>
+        <p:spPr>
+          <a:xfrm>
+            <a:off x="8951976" y="1783080"/>
+            <a:ext cx="2697480" cy="438912"/>
+          </a:xfrm>
+          <a:prstGeom prst="rect">
+            <a:avLst/>
+          </a:prstGeom>
+          <a:solidFill>
+            <a:srgbClr val="BDD7EE"/>
+          </a:solidFill>
+          <a:ln>
+            <a:noFill/>
+          </a:ln>
+        </p:spPr>
+        <p:style>
+          <a:lnRef idx="1">
+            <a:schemeClr val="accent1"/>
+          </a:lnRef>
+          <a:fillRef idx="3">
+            <a:schemeClr val="accent1"/>
+          </a:fillRef>
+          <a:effectRef idx="2">
+            <a:schemeClr val="accent1"/>
+          </a:effectRef>
+          <a:fontRef idx="minor">
+            <a:schemeClr val="lt1"/>
+          </a:fontRef>
+        </p:style>
+        <p:txBody>
+          <a:bodyPr rtlCol="0" anchor="ctr"/>
+          <a:lstStyle/>
+          <a:p>
+            <a:pPr algn="ctr"/>
+            <a:endParaRPr/>
+          </a:p>
+        </p:txBody>
+      </p:sp>
+      <p:sp>
+        <p:nvSpPr>
+          <p:cNvPr id="22" name="TextBox 21"/>
+          <p:cNvSpPr txBox="1"/>
+          <p:nvPr/>
+        </p:nvSpPr>
+        <p:spPr>
+          <a:xfrm>
+            <a:off x="8997696" y="1801368"/>
+            <a:ext cx="2606040" cy="402336"/>
+          </a:xfrm>
+          <a:prstGeom prst="rect">
+            <a:avLst/>
+          </a:prstGeom>
+          <a:noFill/>
+        </p:spPr>
+        <p:txBody>
+          <a:bodyPr wrap="square">
+            <a:spAutoFit/>
+          </a:bodyPr>
+          <a:lstStyle/>
+          <a:p>
+            <a:pPr algn="ctr"/>
+            <a:r>
+              <a:rPr sz="1300" b="1">
+                <a:solidFill>
+                  <a:srgbClr val="1B376B"/>
+                </a:solidFill>
+              </a:rPr>
+              <a:t>Visualiseerimine</a:t>
+            </a:r>
+          </a:p>
+        </p:txBody>
+      </p:sp>
+      <p:sp>
+        <p:nvSpPr>
+          <p:cNvPr id="23" name="TextBox 22"/>
+          <p:cNvSpPr txBox="1"/>
+          <p:nvPr/>
+        </p:nvSpPr>
+        <p:spPr>
+          <a:xfrm>
+            <a:off x="9043416" y="2286000"/>
+            <a:ext cx="2542032" cy="1280160"/>
+          </a:xfrm>
+          <a:prstGeom prst="rect">
+            <a:avLst/>
+          </a:prstGeom>
+          <a:noFill/>
+        </p:spPr>
+        <p:txBody>
+          <a:bodyPr wrap="square">
+            <a:spAutoFit/>
+          </a:bodyPr>
+          <a:lstStyle/>
+          <a:p>
+            <a:pPr algn="l"/>
+            <a:r>
+              <a:rPr sz="1200" b="0">
+                <a:solidFill>
+                  <a:srgbClr val="404040"/>
+                </a:solidFill>
+              </a:rPr>
+              <a:t>Superset näidikulaud, äriküsimuse sidumine tulemustega</a:t>
+            </a:r>
+          </a:p>
+        </p:txBody>
+      </p:sp>
+      <p:sp>
+        <p:nvSpPr>
+          <p:cNvPr id="24" name="Rectangle 23"/>
+          <p:cNvSpPr/>
+          <p:nvPr/>
+        </p:nvSpPr>
+        <p:spPr>
+          <a:xfrm>
+            <a:off x="365760" y="3840480"/>
+            <a:ext cx="11430000" cy="2697480"/>
           </a:xfrm>
           <a:prstGeom prst="rect">
             <a:avLst/>
@@ -10342,19 +10229,20 @@
           <a:lstStyle/>
           <a:p>
             <a:pPr algn="ctr"/>
-          </a:p>
-        </p:txBody>
-      </p:sp>
-      <p:sp>
-        <p:nvSpPr>
-          <p:cNvPr id="5" name="TextBox 4"/>
-          <p:cNvSpPr txBox="1"/>
-          <p:nvPr/>
-        </p:nvSpPr>
-        <p:spPr>
-          <a:xfrm>
-            <a:off x="457200" y="1207008"/>
-            <a:ext cx="6766560" cy="457200"/>
+            <a:endParaRPr/>
+          </a:p>
+        </p:txBody>
+      </p:sp>
+      <p:sp>
+        <p:nvSpPr>
+          <p:cNvPr id="25" name="TextBox 24"/>
+          <p:cNvSpPr txBox="1"/>
+          <p:nvPr/>
+        </p:nvSpPr>
+        <p:spPr>
+          <a:xfrm>
+            <a:off x="548640" y="3931920"/>
+            <a:ext cx="4572000" cy="457200"/>
           </a:xfrm>
           <a:prstGeom prst="rect">
             <a:avLst/>
@@ -10374,21 +10262,21 @@
                   <a:srgbClr val="1B376B"/>
                 </a:solidFill>
               </a:rPr>
-              <a:t>Peamised järeldused</a:t>
-            </a:r>
-          </a:p>
-        </p:txBody>
-      </p:sp>
-      <p:sp>
-        <p:nvSpPr>
-          <p:cNvPr id="6" name="TextBox 5"/>
-          <p:cNvSpPr txBox="1"/>
-          <p:nvPr/>
-        </p:nvSpPr>
-        <p:spPr>
-          <a:xfrm>
-            <a:off x="457200" y="1737360"/>
-            <a:ext cx="6858000" cy="3566160"/>
+              <a:t>Kokkuvõte</a:t>
+            </a:r>
+          </a:p>
+        </p:txBody>
+      </p:sp>
+      <p:sp>
+        <p:nvSpPr>
+          <p:cNvPr id="26" name="TextBox 25"/>
+          <p:cNvSpPr txBox="1"/>
+          <p:nvPr/>
+        </p:nvSpPr>
+        <p:spPr>
+          <a:xfrm>
+            <a:off x="548640" y="4434840"/>
+            <a:ext cx="7772400" cy="2011680"/>
           </a:xfrm>
           <a:prstGeom prst="rect">
             <a:avLst/>
@@ -10403,7 +10291,7 @@
           <a:p>
             <a:pPr>
               <a:spcBef>
-                <a:spcPts val="300"/>
+                <a:spcPts val="400"/>
               </a:spcBef>
             </a:pPr>
             <a:r>
@@ -10412,13 +10300,13 @@
                   <a:srgbClr val="404040"/>
                 </a:solidFill>
               </a:rPr>
-              <a:t>•  Finantsiliselt tasuvam: Kambja vald (ROI 3.4) ja Saue vald (ROI 3.36)</a:t>
+              <a:t>•  Ühendame 300 000 hoone andmed ilmaandmete ja energiahindadega → omavalitsuste pingerida</a:t>
             </a:r>
           </a:p>
           <a:p>
             <a:pPr>
               <a:spcBef>
-                <a:spcPts val="300"/>
+                <a:spcPts val="400"/>
               </a:spcBef>
             </a:pPr>
             <a:r>
@@ -10427,13 +10315,13 @@
                   <a:srgbClr val="404040"/>
                 </a:solidFill>
               </a:rPr>
-              <a:t>•  Suurim absoluutne säästupotentsiaal: Tallinn (üle 100M €/aastas)</a:t>
+              <a:t>•  Automatiseeritud torujuhe: Airflow + dbt + PostgreSQL + Superset, kõik Dockeris</a:t>
             </a:r>
           </a:p>
           <a:p>
             <a:pPr>
               <a:spcBef>
-                <a:spcPts val="300"/>
+                <a:spcPts val="400"/>
               </a:spcBef>
             </a:pPr>
             <a:r>
@@ -10442,13 +10330,13 @@
                   <a:srgbClr val="404040"/>
                 </a:solidFill>
               </a:rPr>
-              <a:t>•  Vajaduspõhiselt haavatavaimad: Lääneranna, Kihnu ja Räpina vald</a:t>
+              <a:t>•  Andmekvaliteedi testid tagavad tulemuste usaldusväärsuse (automaatne kontroll iga laadimise järel)</a:t>
             </a:r>
           </a:p>
           <a:p>
             <a:pPr>
               <a:spcBef>
-                <a:spcPts val="300"/>
+                <a:spcPts val="400"/>
               </a:spcBef>
             </a:pPr>
             <a:r>
@@ -10457,113 +10345,55 @@
                   <a:srgbClr val="404040"/>
                 </a:solidFill>
               </a:rPr>
-              <a:t>•  Tallinna ja Tartu linna ROI on madalam (2.26–2.27), aga kogu mõju suurim</a:t>
-            </a:r>
-          </a:p>
-          <a:p>
-            <a:pPr>
-              <a:spcBef>
-                <a:spcPts val="300"/>
-              </a:spcBef>
-            </a:pPr>
-            <a:r>
-              <a:rPr sz="1400">
-                <a:solidFill>
-                  <a:srgbClr val="404040"/>
-                </a:solidFill>
-              </a:rPr>
-              <a:t>•  Kokkuvõte: kõrge ROI → väiksemad vallad; suur säästusumma → linnad</a:t>
-            </a:r>
-          </a:p>
-        </p:txBody>
-      </p:sp>
-      <p:sp>
-        <p:nvSpPr>
-          <p:cNvPr id="7" name="Rectangle 6"/>
+              <a:t>•  Tulemus on praktiline tööriist renoveerimiseelarve suunamiseks seal, kus mõju on suurim</a:t>
+            </a:r>
+          </a:p>
+        </p:txBody>
+      </p:sp>
+      <p:sp>
+        <p:nvSpPr>
+          <p:cNvPr id="27" name="TextBox 26"/>
+          <p:cNvSpPr txBox="1"/>
+          <p:nvPr/>
+        </p:nvSpPr>
+        <p:spPr>
+          <a:xfrm>
+            <a:off x="8503920" y="3931920"/>
+            <a:ext cx="914400" cy="365760"/>
+          </a:xfrm>
+          <a:prstGeom prst="rect">
+            <a:avLst/>
+          </a:prstGeom>
+          <a:noFill/>
+        </p:spPr>
+        <p:txBody>
+          <a:bodyPr wrap="square">
+            <a:spAutoFit/>
+          </a:bodyPr>
+          <a:lstStyle/>
+          <a:p>
+            <a:pPr algn="l"/>
+            <a:r>
+              <a:rPr sz="1300" b="1">
+                <a:solidFill>
+                  <a:srgbClr val="1B376B"/>
+                </a:solidFill>
+              </a:rPr>
+              <a:t>Stack:</a:t>
+            </a:r>
+          </a:p>
+        </p:txBody>
+      </p:sp>
+      <p:sp>
+        <p:nvSpPr>
+          <p:cNvPr id="28" name="Rectangle 27"/>
           <p:cNvSpPr/>
           <p:nvPr/>
         </p:nvSpPr>
         <p:spPr>
           <a:xfrm>
-            <a:off x="7680960" y="1143000"/>
-            <a:ext cx="4206240" cy="4343400"/>
-          </a:xfrm>
-          <a:prstGeom prst="rect">
-            <a:avLst/>
-          </a:prstGeom>
-          <a:solidFill>
-            <a:srgbClr val="1B376B"/>
-          </a:solidFill>
-          <a:ln>
-            <a:noFill/>
-          </a:ln>
-        </p:spPr>
-        <p:style>
-          <a:lnRef idx="1">
-            <a:schemeClr val="accent1"/>
-          </a:lnRef>
-          <a:fillRef idx="3">
-            <a:schemeClr val="accent1"/>
-          </a:fillRef>
-          <a:effectRef idx="2">
-            <a:schemeClr val="accent1"/>
-          </a:effectRef>
-          <a:fontRef idx="minor">
-            <a:schemeClr val="lt1"/>
-          </a:fontRef>
-        </p:style>
-        <p:txBody>
-          <a:bodyPr rtlCol="0" anchor="ctr"/>
-          <a:lstStyle/>
-          <a:p>
-            <a:pPr algn="ctr"/>
-          </a:p>
-        </p:txBody>
-      </p:sp>
-      <p:sp>
-        <p:nvSpPr>
-          <p:cNvPr id="8" name="TextBox 7"/>
-          <p:cNvSpPr txBox="1"/>
-          <p:nvPr/>
-        </p:nvSpPr>
-        <p:spPr>
-          <a:xfrm>
-            <a:off x="7818120" y="1207008"/>
-            <a:ext cx="3931920" cy="457200"/>
-          </a:xfrm>
-          <a:prstGeom prst="rect">
-            <a:avLst/>
-          </a:prstGeom>
-          <a:noFill/>
-        </p:spPr>
-        <p:txBody>
-          <a:bodyPr wrap="square">
-            <a:spAutoFit/>
-          </a:bodyPr>
-          <a:lstStyle/>
-          <a:p>
-            <a:pPr algn="l"/>
-            <a:r>
-              <a:rPr sz="1400" b="1">
-                <a:solidFill>
-                  <a:srgbClr val="FFFFFF"/>
-                </a:solidFill>
-              </a:rPr>
-              <a:t>Ärimeetrikute valemid</a:t>
-            </a:r>
-          </a:p>
-        </p:txBody>
-      </p:sp>
-      <p:sp>
-        <p:nvSpPr>
-          <p:cNvPr id="9" name="Rectangle 8"/>
-          <p:cNvSpPr/>
-          <p:nvPr/>
-        </p:nvSpPr>
-        <p:spPr>
-          <a:xfrm>
-            <a:off x="7726679" y="1783080"/>
-            <a:ext cx="4069080" cy="749808"/>
+            <a:off x="8503920" y="4343400"/>
+            <a:ext cx="2926080" cy="347472"/>
           </a:xfrm>
           <a:prstGeom prst="rect">
             <a:avLst/>
@@ -10594,88 +10424,54 @@
           <a:lstStyle/>
           <a:p>
             <a:pPr algn="ctr"/>
-          </a:p>
-        </p:txBody>
-      </p:sp>
-      <p:sp>
-        <p:nvSpPr>
-          <p:cNvPr id="10" name="TextBox 9"/>
-          <p:cNvSpPr txBox="1"/>
-          <p:nvPr/>
-        </p:nvSpPr>
-        <p:spPr>
-          <a:xfrm>
-            <a:off x="7836408" y="1801368"/>
-            <a:ext cx="3840480" cy="320040"/>
-          </a:xfrm>
-          <a:prstGeom prst="rect">
-            <a:avLst/>
-          </a:prstGeom>
-          <a:noFill/>
-        </p:spPr>
-        <p:txBody>
-          <a:bodyPr wrap="square">
-            <a:spAutoFit/>
-          </a:bodyPr>
-          <a:lstStyle/>
-          <a:p>
-            <a:pPr algn="l"/>
-            <a:r>
-              <a:rPr sz="1100" b="1">
+            <a:endParaRPr/>
+          </a:p>
+        </p:txBody>
+      </p:sp>
+      <p:sp>
+        <p:nvSpPr>
+          <p:cNvPr id="29" name="TextBox 28"/>
+          <p:cNvSpPr txBox="1"/>
+          <p:nvPr/>
+        </p:nvSpPr>
+        <p:spPr>
+          <a:xfrm>
+            <a:off x="8549640" y="4361688"/>
+            <a:ext cx="2834640" cy="310896"/>
+          </a:xfrm>
+          <a:prstGeom prst="rect">
+            <a:avLst/>
+          </a:prstGeom>
+          <a:noFill/>
+        </p:spPr>
+        <p:txBody>
+          <a:bodyPr wrap="square">
+            <a:spAutoFit/>
+          </a:bodyPr>
+          <a:lstStyle/>
+          <a:p>
+            <a:pPr algn="ctr"/>
+            <a:r>
+              <a:rPr sz="1300" b="0">
                 <a:solidFill>
                   <a:srgbClr val="FFFFFF"/>
                 </a:solidFill>
               </a:rPr>
-              <a:t>ROI</a:t>
-            </a:r>
-          </a:p>
-        </p:txBody>
-      </p:sp>
-      <p:sp>
-        <p:nvSpPr>
-          <p:cNvPr id="11" name="TextBox 10"/>
-          <p:cNvSpPr txBox="1"/>
-          <p:nvPr/>
-        </p:nvSpPr>
-        <p:spPr>
-          <a:xfrm>
-            <a:off x="7836408" y="2130552"/>
-            <a:ext cx="3840480" cy="384048"/>
-          </a:xfrm>
-          <a:prstGeom prst="rect">
-            <a:avLst/>
-          </a:prstGeom>
-          <a:noFill/>
-        </p:spPr>
-        <p:txBody>
-          <a:bodyPr wrap="square">
-            <a:spAutoFit/>
-          </a:bodyPr>
-          <a:lstStyle/>
-          <a:p>
-            <a:pPr algn="l"/>
-            <a:r>
-              <a:rPr sz="1000" b="0">
-                <a:solidFill>
-                  <a:srgbClr val="BDD7EE"/>
-                </a:solidFill>
-              </a:rPr>
-              <a:t>sääst_eur_aastas
-/ investeering</a:t>
-            </a:r>
-          </a:p>
-        </p:txBody>
-      </p:sp>
-      <p:sp>
-        <p:nvSpPr>
-          <p:cNvPr id="12" name="Rectangle 11"/>
+              <a:t>Apache Airflow</a:t>
+            </a:r>
+          </a:p>
+        </p:txBody>
+      </p:sp>
+      <p:sp>
+        <p:nvSpPr>
+          <p:cNvPr id="30" name="Rectangle 29"/>
           <p:cNvSpPr/>
           <p:nvPr/>
         </p:nvSpPr>
         <p:spPr>
           <a:xfrm>
-            <a:off x="7726679" y="2606040"/>
-            <a:ext cx="4069080" cy="749808"/>
+            <a:off x="8503920" y="4764024"/>
+            <a:ext cx="2926080" cy="347472"/>
           </a:xfrm>
           <a:prstGeom prst="rect">
             <a:avLst/>
@@ -10706,88 +10502,54 @@
           <a:lstStyle/>
           <a:p>
             <a:pPr algn="ctr"/>
-          </a:p>
-        </p:txBody>
-      </p:sp>
-      <p:sp>
-        <p:nvSpPr>
-          <p:cNvPr id="13" name="TextBox 12"/>
-          <p:cNvSpPr txBox="1"/>
-          <p:nvPr/>
-        </p:nvSpPr>
-        <p:spPr>
-          <a:xfrm>
-            <a:off x="7836408" y="2624328"/>
-            <a:ext cx="3840480" cy="320040"/>
-          </a:xfrm>
-          <a:prstGeom prst="rect">
-            <a:avLst/>
-          </a:prstGeom>
-          <a:noFill/>
-        </p:spPr>
-        <p:txBody>
-          <a:bodyPr wrap="square">
-            <a:spAutoFit/>
-          </a:bodyPr>
-          <a:lstStyle/>
-          <a:p>
-            <a:pPr algn="l"/>
-            <a:r>
-              <a:rPr sz="1100" b="1">
+            <a:endParaRPr/>
+          </a:p>
+        </p:txBody>
+      </p:sp>
+      <p:sp>
+        <p:nvSpPr>
+          <p:cNvPr id="31" name="TextBox 30"/>
+          <p:cNvSpPr txBox="1"/>
+          <p:nvPr/>
+        </p:nvSpPr>
+        <p:spPr>
+          <a:xfrm>
+            <a:off x="8549640" y="4782312"/>
+            <a:ext cx="2834640" cy="310896"/>
+          </a:xfrm>
+          <a:prstGeom prst="rect">
+            <a:avLst/>
+          </a:prstGeom>
+          <a:noFill/>
+        </p:spPr>
+        <p:txBody>
+          <a:bodyPr wrap="square">
+            <a:spAutoFit/>
+          </a:bodyPr>
+          <a:lstStyle/>
+          <a:p>
+            <a:pPr algn="ctr"/>
+            <a:r>
+              <a:rPr sz="1300" b="0">
                 <a:solidFill>
                   <a:srgbClr val="FFFFFF"/>
                 </a:solidFill>
               </a:rPr>
-              <a:t>VAJADUSE SKOOR</a:t>
-            </a:r>
-          </a:p>
-        </p:txBody>
-      </p:sp>
-      <p:sp>
-        <p:nvSpPr>
-          <p:cNvPr id="14" name="TextBox 13"/>
-          <p:cNvSpPr txBox="1"/>
-          <p:nvPr/>
-        </p:nvSpPr>
-        <p:spPr>
-          <a:xfrm>
-            <a:off x="7836408" y="2953512"/>
-            <a:ext cx="3840480" cy="384048"/>
-          </a:xfrm>
-          <a:prstGeom prst="rect">
-            <a:avLst/>
-          </a:prstGeom>
-          <a:noFill/>
-        </p:spPr>
-        <p:txBody>
-          <a:bodyPr wrap="square">
-            <a:spAutoFit/>
-          </a:bodyPr>
-          <a:lstStyle/>
-          <a:p>
-            <a:pPr algn="l"/>
-            <a:r>
-              <a:rPr sz="1000" b="0">
-                <a:solidFill>
-                  <a:srgbClr val="BDD7EE"/>
-                </a:solidFill>
-              </a:rPr>
-              <a:t>soojakadu_kwh
-/ kogupindala_m²</a:t>
-            </a:r>
-          </a:p>
-        </p:txBody>
-      </p:sp>
-      <p:sp>
-        <p:nvSpPr>
-          <p:cNvPr id="15" name="Rectangle 14"/>
+              <a:t>dbt Core</a:t>
+            </a:r>
+          </a:p>
+        </p:txBody>
+      </p:sp>
+      <p:sp>
+        <p:nvSpPr>
+          <p:cNvPr id="32" name="Rectangle 31"/>
           <p:cNvSpPr/>
           <p:nvPr/>
         </p:nvSpPr>
         <p:spPr>
           <a:xfrm>
-            <a:off x="7726679" y="3429000"/>
-            <a:ext cx="4069080" cy="749808"/>
+            <a:off x="8503920" y="5184648"/>
+            <a:ext cx="2926080" cy="347472"/>
           </a:xfrm>
           <a:prstGeom prst="rect">
             <a:avLst/>
@@ -10818,88 +10580,54 @@
           <a:lstStyle/>
           <a:p>
             <a:pPr algn="ctr"/>
-          </a:p>
-        </p:txBody>
-      </p:sp>
-      <p:sp>
-        <p:nvSpPr>
-          <p:cNvPr id="16" name="TextBox 15"/>
-          <p:cNvSpPr txBox="1"/>
-          <p:nvPr/>
-        </p:nvSpPr>
-        <p:spPr>
-          <a:xfrm>
-            <a:off x="7836408" y="3447288"/>
-            <a:ext cx="3840480" cy="320040"/>
-          </a:xfrm>
-          <a:prstGeom prst="rect">
-            <a:avLst/>
-          </a:prstGeom>
-          <a:noFill/>
-        </p:spPr>
-        <p:txBody>
-          <a:bodyPr wrap="square">
-            <a:spAutoFit/>
-          </a:bodyPr>
-          <a:lstStyle/>
-          <a:p>
-            <a:pPr algn="l"/>
-            <a:r>
-              <a:rPr sz="1100" b="1">
+            <a:endParaRPr/>
+          </a:p>
+        </p:txBody>
+      </p:sp>
+      <p:sp>
+        <p:nvSpPr>
+          <p:cNvPr id="33" name="TextBox 32"/>
+          <p:cNvSpPr txBox="1"/>
+          <p:nvPr/>
+        </p:nvSpPr>
+        <p:spPr>
+          <a:xfrm>
+            <a:off x="8549640" y="5202936"/>
+            <a:ext cx="2834640" cy="310896"/>
+          </a:xfrm>
+          <a:prstGeom prst="rect">
+            <a:avLst/>
+          </a:prstGeom>
+          <a:noFill/>
+        </p:spPr>
+        <p:txBody>
+          <a:bodyPr wrap="square">
+            <a:spAutoFit/>
+          </a:bodyPr>
+          <a:lstStyle/>
+          <a:p>
+            <a:pPr algn="ctr"/>
+            <a:r>
+              <a:rPr sz="1300" b="0">
                 <a:solidFill>
                   <a:srgbClr val="FFFFFF"/>
                 </a:solidFill>
               </a:rPr>
-              <a:t>INVESTEERING</a:t>
-            </a:r>
-          </a:p>
-        </p:txBody>
-      </p:sp>
-      <p:sp>
-        <p:nvSpPr>
-          <p:cNvPr id="17" name="TextBox 16"/>
-          <p:cNvSpPr txBox="1"/>
-          <p:nvPr/>
-        </p:nvSpPr>
-        <p:spPr>
-          <a:xfrm>
-            <a:off x="7836408" y="3776472"/>
-            <a:ext cx="3840480" cy="384048"/>
-          </a:xfrm>
-          <a:prstGeom prst="rect">
-            <a:avLst/>
-          </a:prstGeom>
-          <a:noFill/>
-        </p:spPr>
-        <p:txBody>
-          <a:bodyPr wrap="square">
-            <a:spAutoFit/>
-          </a:bodyPr>
-          <a:lstStyle/>
-          <a:p>
-            <a:pPr algn="l"/>
-            <a:r>
-              <a:rPr sz="1000" b="0">
-                <a:solidFill>
-                  <a:srgbClr val="BDD7EE"/>
-                </a:solidFill>
-              </a:rPr>
-              <a:t>kogupindala_m² × 250
-(€/m² proxy)</a:t>
-            </a:r>
-          </a:p>
-        </p:txBody>
-      </p:sp>
-      <p:sp>
-        <p:nvSpPr>
-          <p:cNvPr id="18" name="Rectangle 17"/>
+              <a:t>PostgreSQL</a:t>
+            </a:r>
+          </a:p>
+        </p:txBody>
+      </p:sp>
+      <p:sp>
+        <p:nvSpPr>
+          <p:cNvPr id="34" name="Rectangle 33"/>
           <p:cNvSpPr/>
           <p:nvPr/>
         </p:nvSpPr>
         <p:spPr>
           <a:xfrm>
-            <a:off x="7726679" y="4251960"/>
-            <a:ext cx="4069080" cy="749808"/>
+            <a:off x="8503920" y="5605272"/>
+            <a:ext cx="2926080" cy="347472"/>
           </a:xfrm>
           <a:prstGeom prst="rect">
             <a:avLst/>
@@ -10930,88 +10658,54 @@
           <a:lstStyle/>
           <a:p>
             <a:pPr algn="ctr"/>
-          </a:p>
-        </p:txBody>
-      </p:sp>
-      <p:sp>
-        <p:nvSpPr>
-          <p:cNvPr id="19" name="TextBox 18"/>
-          <p:cNvSpPr txBox="1"/>
-          <p:nvPr/>
-        </p:nvSpPr>
-        <p:spPr>
-          <a:xfrm>
-            <a:off x="7836408" y="4270248"/>
-            <a:ext cx="3840480" cy="320040"/>
-          </a:xfrm>
-          <a:prstGeom prst="rect">
-            <a:avLst/>
-          </a:prstGeom>
-          <a:noFill/>
-        </p:spPr>
-        <p:txBody>
-          <a:bodyPr wrap="square">
-            <a:spAutoFit/>
-          </a:bodyPr>
-          <a:lstStyle/>
-          <a:p>
-            <a:pPr algn="l"/>
-            <a:r>
-              <a:rPr sz="1100" b="1">
+            <a:endParaRPr/>
+          </a:p>
+        </p:txBody>
+      </p:sp>
+      <p:sp>
+        <p:nvSpPr>
+          <p:cNvPr id="35" name="TextBox 34"/>
+          <p:cNvSpPr txBox="1"/>
+          <p:nvPr/>
+        </p:nvSpPr>
+        <p:spPr>
+          <a:xfrm>
+            <a:off x="8549640" y="5623559"/>
+            <a:ext cx="2834640" cy="310896"/>
+          </a:xfrm>
+          <a:prstGeom prst="rect">
+            <a:avLst/>
+          </a:prstGeom>
+          <a:noFill/>
+        </p:spPr>
+        <p:txBody>
+          <a:bodyPr wrap="square">
+            <a:spAutoFit/>
+          </a:bodyPr>
+          <a:lstStyle/>
+          <a:p>
+            <a:pPr algn="ctr"/>
+            <a:r>
+              <a:rPr sz="1300" b="0">
                 <a:solidFill>
                   <a:srgbClr val="FFFFFF"/>
                 </a:solidFill>
               </a:rPr>
-              <a:t>PRIORITY</a:t>
-            </a:r>
-          </a:p>
-        </p:txBody>
-      </p:sp>
-      <p:sp>
-        <p:nvSpPr>
-          <p:cNvPr id="20" name="TextBox 19"/>
-          <p:cNvSpPr txBox="1"/>
-          <p:nvPr/>
-        </p:nvSpPr>
-        <p:spPr>
-          <a:xfrm>
-            <a:off x="7836408" y="4599432"/>
-            <a:ext cx="3840480" cy="384048"/>
-          </a:xfrm>
-          <a:prstGeom prst="rect">
-            <a:avLst/>
-          </a:prstGeom>
-          <a:noFill/>
-        </p:spPr>
-        <p:txBody>
-          <a:bodyPr wrap="square">
-            <a:spAutoFit/>
-          </a:bodyPr>
-          <a:lstStyle/>
-          <a:p>
-            <a:pPr algn="l"/>
-            <a:r>
-              <a:rPr sz="1000" b="0">
-                <a:solidFill>
-                  <a:srgbClr val="BDD7EE"/>
-                </a:solidFill>
-              </a:rPr>
-              <a:t>LOG(sääst+1) × LOG(skoor+1)
-× LOG(pindala+1)</a:t>
-            </a:r>
-          </a:p>
-        </p:txBody>
-      </p:sp>
-      <p:sp>
-        <p:nvSpPr>
-          <p:cNvPr id="21" name="Rectangle 20"/>
+              <a:t>Apache Superset</a:t>
+            </a:r>
+          </a:p>
+        </p:txBody>
+      </p:sp>
+      <p:sp>
+        <p:nvSpPr>
+          <p:cNvPr id="36" name="Rectangle 35"/>
           <p:cNvSpPr/>
           <p:nvPr/>
         </p:nvSpPr>
         <p:spPr>
           <a:xfrm>
-            <a:off x="7726679" y="5074920"/>
-            <a:ext cx="4069080" cy="749808"/>
+            <a:off x="8503920" y="6025896"/>
+            <a:ext cx="2926080" cy="347472"/>
           </a:xfrm>
           <a:prstGeom prst="rect">
             <a:avLst/>
@@ -11042,956 +10736,40 @@
           <a:lstStyle/>
           <a:p>
             <a:pPr algn="ctr"/>
-          </a:p>
-        </p:txBody>
-      </p:sp>
-      <p:sp>
-        <p:nvSpPr>
-          <p:cNvPr id="22" name="TextBox 21"/>
-          <p:cNvSpPr txBox="1"/>
-          <p:nvPr/>
-        </p:nvSpPr>
-        <p:spPr>
-          <a:xfrm>
-            <a:off x="7836408" y="5093208"/>
-            <a:ext cx="3840480" cy="320040"/>
-          </a:xfrm>
-          <a:prstGeom prst="rect">
-            <a:avLst/>
-          </a:prstGeom>
-          <a:noFill/>
-        </p:spPr>
-        <p:txBody>
-          <a:bodyPr wrap="square">
-            <a:spAutoFit/>
-          </a:bodyPr>
-          <a:lstStyle/>
-          <a:p>
-            <a:pPr algn="l"/>
-            <a:r>
-              <a:rPr sz="1100" b="1">
+            <a:endParaRPr/>
+          </a:p>
+        </p:txBody>
+      </p:sp>
+      <p:sp>
+        <p:nvSpPr>
+          <p:cNvPr id="37" name="TextBox 36"/>
+          <p:cNvSpPr txBox="1"/>
+          <p:nvPr/>
+        </p:nvSpPr>
+        <p:spPr>
+          <a:xfrm>
+            <a:off x="8549640" y="6044183"/>
+            <a:ext cx="2834640" cy="310896"/>
+          </a:xfrm>
+          <a:prstGeom prst="rect">
+            <a:avLst/>
+          </a:prstGeom>
+          <a:noFill/>
+        </p:spPr>
+        <p:txBody>
+          <a:bodyPr wrap="square">
+            <a:spAutoFit/>
+          </a:bodyPr>
+          <a:lstStyle/>
+          <a:p>
+            <a:pPr algn="ctr"/>
+            <a:r>
+              <a:rPr sz="1300" b="0">
                 <a:solidFill>
                   <a:srgbClr val="FFFFFF"/>
                 </a:solidFill>
               </a:rPr>
-              <a:t>TASUVUS</a:t>
-            </a:r>
-          </a:p>
-        </p:txBody>
-      </p:sp>
-      <p:sp>
-        <p:nvSpPr>
-          <p:cNvPr id="23" name="TextBox 22"/>
-          <p:cNvSpPr txBox="1"/>
-          <p:nvPr/>
-        </p:nvSpPr>
-        <p:spPr>
-          <a:xfrm>
-            <a:off x="7836408" y="5422392"/>
-            <a:ext cx="3840480" cy="384048"/>
-          </a:xfrm>
-          <a:prstGeom prst="rect">
-            <a:avLst/>
-          </a:prstGeom>
-          <a:noFill/>
-        </p:spPr>
-        <p:txBody>
-          <a:bodyPr wrap="square">
-            <a:spAutoFit/>
-          </a:bodyPr>
-          <a:lstStyle/>
-          <a:p>
-            <a:pPr algn="l"/>
-            <a:r>
-              <a:rPr sz="1000" b="0">
-                <a:solidFill>
-                  <a:srgbClr val="BDD7EE"/>
-                </a:solidFill>
-              </a:rPr>
-              <a:t>1 / NULLIF(roi, 0)</a:t>
-            </a:r>
-          </a:p>
-        </p:txBody>
-      </p:sp>
-    </p:spTree>
-  </p:cSld>
-  <p:clrMapOvr>
-    <a:masterClrMapping/>
-  </p:clrMapOvr>
-</p:sld>
-</file>
-
-<file path=ppt/slides/slide9.xml><?xml version="1.0" encoding="utf-8"?>
-<p:sld xmlns:a="http://schemas.openxmlformats.org/drawingml/2006/main" xmlns:p="http://schemas.openxmlformats.org/presentationml/2006/main" xmlns:r="http://schemas.openxmlformats.org/officeDocument/2006/relationships">
-  <p:cSld>
-    <p:bg>
-      <p:bgPr>
-        <a:solidFill>
-          <a:srgbClr val="FFFFFF"/>
-        </a:solidFill>
-        <a:effectLst/>
-      </p:bgPr>
-    </p:bg>
-    <p:spTree>
-      <p:nvGrpSpPr>
-        <p:cNvPr id="1" name=""/>
-        <p:cNvGrpSpPr/>
-        <p:nvPr/>
-      </p:nvGrpSpPr>
-      <p:grpSpPr/>
-      <p:sp>
-        <p:nvSpPr>
-          <p:cNvPr id="2" name="Rectangle 1"/>
-          <p:cNvSpPr/>
-          <p:nvPr/>
-        </p:nvSpPr>
-        <p:spPr>
-          <a:xfrm>
-            <a:off x="0" y="0"/>
-            <a:ext cx="12188952" cy="1005840"/>
-          </a:xfrm>
-          <a:prstGeom prst="rect">
-            <a:avLst/>
-          </a:prstGeom>
-          <a:solidFill>
-            <a:srgbClr val="1B376B"/>
-          </a:solidFill>
-          <a:ln>
-            <a:noFill/>
-          </a:ln>
-        </p:spPr>
-        <p:style>
-          <a:lnRef idx="1">
-            <a:schemeClr val="accent1"/>
-          </a:lnRef>
-          <a:fillRef idx="3">
-            <a:schemeClr val="accent1"/>
-          </a:fillRef>
-          <a:effectRef idx="2">
-            <a:schemeClr val="accent1"/>
-          </a:effectRef>
-          <a:fontRef idx="minor">
-            <a:schemeClr val="lt1"/>
-          </a:fontRef>
-        </p:style>
-        <p:txBody>
-          <a:bodyPr rtlCol="0" anchor="ctr"/>
-          <a:lstStyle/>
-          <a:p>
-            <a:pPr algn="ctr"/>
-          </a:p>
-        </p:txBody>
-      </p:sp>
-      <p:sp>
-        <p:nvSpPr>
-          <p:cNvPr id="3" name="TextBox 2"/>
-          <p:cNvSpPr txBox="1"/>
-          <p:nvPr/>
-        </p:nvSpPr>
-        <p:spPr>
-          <a:xfrm>
-            <a:off x="365760" y="91440"/>
-            <a:ext cx="11430000" cy="777240"/>
-          </a:xfrm>
-          <a:prstGeom prst="rect">
-            <a:avLst/>
-          </a:prstGeom>
-          <a:noFill/>
-        </p:spPr>
-        <p:txBody>
-          <a:bodyPr wrap="square">
-            <a:spAutoFit/>
-          </a:bodyPr>
-          <a:lstStyle/>
-          <a:p>
-            <a:pPr algn="l"/>
-            <a:r>
-              <a:rPr sz="2800" b="1">
-                <a:solidFill>
-                  <a:srgbClr val="FFFFFF"/>
-                </a:solidFill>
-              </a:rPr>
-              <a:t>Dashboard: põhitulemused</a:t>
-            </a:r>
-          </a:p>
-        </p:txBody>
-      </p:sp>
-      <p:sp>
-        <p:nvSpPr>
-          <p:cNvPr id="4" name="Rectangle 3"/>
-          <p:cNvSpPr/>
-          <p:nvPr/>
-        </p:nvSpPr>
-        <p:spPr>
-          <a:xfrm>
-            <a:off x="274320" y="1143000"/>
-            <a:ext cx="2697480" cy="1371600"/>
-          </a:xfrm>
-          <a:prstGeom prst="rect">
-            <a:avLst/>
-          </a:prstGeom>
-          <a:solidFill>
-            <a:srgbClr val="1B376B"/>
-          </a:solidFill>
-          <a:ln>
-            <a:noFill/>
-          </a:ln>
-        </p:spPr>
-        <p:style>
-          <a:lnRef idx="1">
-            <a:schemeClr val="accent1"/>
-          </a:lnRef>
-          <a:fillRef idx="3">
-            <a:schemeClr val="accent1"/>
-          </a:fillRef>
-          <a:effectRef idx="2">
-            <a:schemeClr val="accent1"/>
-          </a:effectRef>
-          <a:fontRef idx="minor">
-            <a:schemeClr val="lt1"/>
-          </a:fontRef>
-        </p:style>
-        <p:txBody>
-          <a:bodyPr rtlCol="0" anchor="ctr"/>
-          <a:lstStyle/>
-          <a:p>
-            <a:pPr algn="ctr"/>
-          </a:p>
-        </p:txBody>
-      </p:sp>
-      <p:sp>
-        <p:nvSpPr>
-          <p:cNvPr id="5" name="TextBox 4"/>
-          <p:cNvSpPr txBox="1"/>
-          <p:nvPr/>
-        </p:nvSpPr>
-        <p:spPr>
-          <a:xfrm>
-            <a:off x="365760" y="1188720"/>
-            <a:ext cx="2514600" cy="502920"/>
-          </a:xfrm>
-          <a:prstGeom prst="rect">
-            <a:avLst/>
-          </a:prstGeom>
-          <a:noFill/>
-        </p:spPr>
-        <p:txBody>
-          <a:bodyPr wrap="square">
-            <a:spAutoFit/>
-          </a:bodyPr>
-          <a:lstStyle/>
-          <a:p>
-            <a:pPr algn="ctr"/>
-            <a:r>
-              <a:rPr sz="1300" b="0">
-                <a:solidFill>
-                  <a:srgbClr val="FFFFFF"/>
-                </a:solidFill>
-              </a:rPr>
-              <a:t>Soojakadu Eestis</a:t>
-            </a:r>
-          </a:p>
-        </p:txBody>
-      </p:sp>
-      <p:sp>
-        <p:nvSpPr>
-          <p:cNvPr id="6" name="TextBox 5"/>
-          <p:cNvSpPr txBox="1"/>
-          <p:nvPr/>
-        </p:nvSpPr>
-        <p:spPr>
-          <a:xfrm>
-            <a:off x="320040" y="1691640"/>
-            <a:ext cx="2606040" cy="685800"/>
-          </a:xfrm>
-          <a:prstGeom prst="rect">
-            <a:avLst/>
-          </a:prstGeom>
-          <a:noFill/>
-        </p:spPr>
-        <p:txBody>
-          <a:bodyPr wrap="square">
-            <a:spAutoFit/>
-          </a:bodyPr>
-          <a:lstStyle/>
-          <a:p>
-            <a:pPr algn="ctr"/>
-            <a:r>
-              <a:rPr sz="2200" b="1">
-                <a:solidFill>
-                  <a:srgbClr val="FFFFFF"/>
-                </a:solidFill>
-              </a:rPr>
-              <a:t>9.26B kWh</a:t>
-            </a:r>
-          </a:p>
-        </p:txBody>
-      </p:sp>
-      <p:sp>
-        <p:nvSpPr>
-          <p:cNvPr id="7" name="Rectangle 6"/>
-          <p:cNvSpPr/>
-          <p:nvPr/>
-        </p:nvSpPr>
-        <p:spPr>
-          <a:xfrm>
-            <a:off x="3182112" y="1143000"/>
-            <a:ext cx="2697480" cy="1371600"/>
-          </a:xfrm>
-          <a:prstGeom prst="rect">
-            <a:avLst/>
-          </a:prstGeom>
-          <a:solidFill>
-            <a:srgbClr val="2E75B6"/>
-          </a:solidFill>
-          <a:ln>
-            <a:noFill/>
-          </a:ln>
-        </p:spPr>
-        <p:style>
-          <a:lnRef idx="1">
-            <a:schemeClr val="accent1"/>
-          </a:lnRef>
-          <a:fillRef idx="3">
-            <a:schemeClr val="accent1"/>
-          </a:fillRef>
-          <a:effectRef idx="2">
-            <a:schemeClr val="accent1"/>
-          </a:effectRef>
-          <a:fontRef idx="minor">
-            <a:schemeClr val="lt1"/>
-          </a:fontRef>
-        </p:style>
-        <p:txBody>
-          <a:bodyPr rtlCol="0" anchor="ctr"/>
-          <a:lstStyle/>
-          <a:p>
-            <a:pPr algn="ctr"/>
-          </a:p>
-        </p:txBody>
-      </p:sp>
-      <p:sp>
-        <p:nvSpPr>
-          <p:cNvPr id="8" name="TextBox 7"/>
-          <p:cNvSpPr txBox="1"/>
-          <p:nvPr/>
-        </p:nvSpPr>
-        <p:spPr>
-          <a:xfrm>
-            <a:off x="3273552" y="1188720"/>
-            <a:ext cx="2514600" cy="502920"/>
-          </a:xfrm>
-          <a:prstGeom prst="rect">
-            <a:avLst/>
-          </a:prstGeom>
-          <a:noFill/>
-        </p:spPr>
-        <p:txBody>
-          <a:bodyPr wrap="square">
-            <a:spAutoFit/>
-          </a:bodyPr>
-          <a:lstStyle/>
-          <a:p>
-            <a:pPr algn="ctr"/>
-            <a:r>
-              <a:rPr sz="1300" b="0">
-                <a:solidFill>
-                  <a:srgbClr val="FFFFFF"/>
-                </a:solidFill>
-              </a:rPr>
-              <a:t>Kulu</a:t>
-            </a:r>
-          </a:p>
-        </p:txBody>
-      </p:sp>
-      <p:sp>
-        <p:nvSpPr>
-          <p:cNvPr id="9" name="TextBox 8"/>
-          <p:cNvSpPr txBox="1"/>
-          <p:nvPr/>
-        </p:nvSpPr>
-        <p:spPr>
-          <a:xfrm>
-            <a:off x="3227832" y="1691640"/>
-            <a:ext cx="2606040" cy="685800"/>
-          </a:xfrm>
-          <a:prstGeom prst="rect">
-            <a:avLst/>
-          </a:prstGeom>
-          <a:noFill/>
-        </p:spPr>
-        <p:txBody>
-          <a:bodyPr wrap="square">
-            <a:spAutoFit/>
-          </a:bodyPr>
-          <a:lstStyle/>
-          <a:p>
-            <a:pPr algn="ctr"/>
-            <a:r>
-              <a:rPr sz="2200" b="1">
-                <a:solidFill>
-                  <a:srgbClr val="FFFFFF"/>
-                </a:solidFill>
-              </a:rPr>
-              <a:t>660M €</a:t>
-            </a:r>
-          </a:p>
-        </p:txBody>
-      </p:sp>
-      <p:sp>
-        <p:nvSpPr>
-          <p:cNvPr id="10" name="Rectangle 9"/>
-          <p:cNvSpPr/>
-          <p:nvPr/>
-        </p:nvSpPr>
-        <p:spPr>
-          <a:xfrm>
-            <a:off x="6089904" y="1143000"/>
-            <a:ext cx="2697480" cy="1371600"/>
-          </a:xfrm>
-          <a:prstGeom prst="rect">
-            <a:avLst/>
-          </a:prstGeom>
-          <a:solidFill>
-            <a:srgbClr val="5A9E6F"/>
-          </a:solidFill>
-          <a:ln>
-            <a:noFill/>
-          </a:ln>
-        </p:spPr>
-        <p:style>
-          <a:lnRef idx="1">
-            <a:schemeClr val="accent1"/>
-          </a:lnRef>
-          <a:fillRef idx="3">
-            <a:schemeClr val="accent1"/>
-          </a:fillRef>
-          <a:effectRef idx="2">
-            <a:schemeClr val="accent1"/>
-          </a:effectRef>
-          <a:fontRef idx="minor">
-            <a:schemeClr val="lt1"/>
-          </a:fontRef>
-        </p:style>
-        <p:txBody>
-          <a:bodyPr rtlCol="0" anchor="ctr"/>
-          <a:lstStyle/>
-          <a:p>
-            <a:pPr algn="ctr"/>
-          </a:p>
-        </p:txBody>
-      </p:sp>
-      <p:sp>
-        <p:nvSpPr>
-          <p:cNvPr id="11" name="TextBox 10"/>
-          <p:cNvSpPr txBox="1"/>
-          <p:nvPr/>
-        </p:nvSpPr>
-        <p:spPr>
-          <a:xfrm>
-            <a:off x="6181344" y="1188720"/>
-            <a:ext cx="2514600" cy="502920"/>
-          </a:xfrm>
-          <a:prstGeom prst="rect">
-            <a:avLst/>
-          </a:prstGeom>
-          <a:noFill/>
-        </p:spPr>
-        <p:txBody>
-          <a:bodyPr wrap="square">
-            <a:spAutoFit/>
-          </a:bodyPr>
-          <a:lstStyle/>
-          <a:p>
-            <a:pPr algn="ctr"/>
-            <a:r>
-              <a:rPr sz="1300" b="0">
-                <a:solidFill>
-                  <a:srgbClr val="FFFFFF"/>
-                </a:solidFill>
-              </a:rPr>
-              <a:t>Säästupotentsiaal</a:t>
-            </a:r>
-          </a:p>
-        </p:txBody>
-      </p:sp>
-      <p:sp>
-        <p:nvSpPr>
-          <p:cNvPr id="12" name="TextBox 11"/>
-          <p:cNvSpPr txBox="1"/>
-          <p:nvPr/>
-        </p:nvSpPr>
-        <p:spPr>
-          <a:xfrm>
-            <a:off x="6135624" y="1691640"/>
-            <a:ext cx="2606040" cy="685800"/>
-          </a:xfrm>
-          <a:prstGeom prst="rect">
-            <a:avLst/>
-          </a:prstGeom>
-          <a:noFill/>
-        </p:spPr>
-        <p:txBody>
-          <a:bodyPr wrap="square">
-            <a:spAutoFit/>
-          </a:bodyPr>
-          <a:lstStyle/>
-          <a:p>
-            <a:pPr algn="ctr"/>
-            <a:r>
-              <a:rPr sz="2200" b="1">
-                <a:solidFill>
-                  <a:srgbClr val="FFFFFF"/>
-                </a:solidFill>
-              </a:rPr>
-              <a:t>423M €/aastas</a:t>
-            </a:r>
-          </a:p>
-        </p:txBody>
-      </p:sp>
-      <p:sp>
-        <p:nvSpPr>
-          <p:cNvPr id="13" name="Rectangle 12"/>
-          <p:cNvSpPr/>
-          <p:nvPr/>
-        </p:nvSpPr>
-        <p:spPr>
-          <a:xfrm>
-            <a:off x="8997696" y="1143000"/>
-            <a:ext cx="2697480" cy="1371600"/>
-          </a:xfrm>
-          <a:prstGeom prst="rect">
-            <a:avLst/>
-          </a:prstGeom>
-          <a:solidFill>
-            <a:srgbClr val="ED7D31"/>
-          </a:solidFill>
-          <a:ln>
-            <a:noFill/>
-          </a:ln>
-        </p:spPr>
-        <p:style>
-          <a:lnRef idx="1">
-            <a:schemeClr val="accent1"/>
-          </a:lnRef>
-          <a:fillRef idx="3">
-            <a:schemeClr val="accent1"/>
-          </a:fillRef>
-          <a:effectRef idx="2">
-            <a:schemeClr val="accent1"/>
-          </a:effectRef>
-          <a:fontRef idx="minor">
-            <a:schemeClr val="lt1"/>
-          </a:fontRef>
-        </p:style>
-        <p:txBody>
-          <a:bodyPr rtlCol="0" anchor="ctr"/>
-          <a:lstStyle/>
-          <a:p>
-            <a:pPr algn="ctr"/>
-          </a:p>
-        </p:txBody>
-      </p:sp>
-      <p:sp>
-        <p:nvSpPr>
-          <p:cNvPr id="14" name="TextBox 13"/>
-          <p:cNvSpPr txBox="1"/>
-          <p:nvPr/>
-        </p:nvSpPr>
-        <p:spPr>
-          <a:xfrm>
-            <a:off x="9089136" y="1188720"/>
-            <a:ext cx="2514600" cy="502920"/>
-          </a:xfrm>
-          <a:prstGeom prst="rect">
-            <a:avLst/>
-          </a:prstGeom>
-          <a:noFill/>
-        </p:spPr>
-        <p:txBody>
-          <a:bodyPr wrap="square">
-            <a:spAutoFit/>
-          </a:bodyPr>
-          <a:lstStyle/>
-          <a:p>
-            <a:pPr algn="ctr"/>
-            <a:r>
-              <a:rPr sz="1300" b="0">
-                <a:solidFill>
-                  <a:srgbClr val="FFFFFF"/>
-                </a:solidFill>
-              </a:rPr>
-              <a:t>Keskmine intensiivsus</a:t>
-            </a:r>
-          </a:p>
-        </p:txBody>
-      </p:sp>
-      <p:sp>
-        <p:nvSpPr>
-          <p:cNvPr id="15" name="TextBox 14"/>
-          <p:cNvSpPr txBox="1"/>
-          <p:nvPr/>
-        </p:nvSpPr>
-        <p:spPr>
-          <a:xfrm>
-            <a:off x="9043416" y="1691640"/>
-            <a:ext cx="2606040" cy="685800"/>
-          </a:xfrm>
-          <a:prstGeom prst="rect">
-            <a:avLst/>
-          </a:prstGeom>
-          <a:noFill/>
-        </p:spPr>
-        <p:txBody>
-          <a:bodyPr wrap="square">
-            <a:spAutoFit/>
-          </a:bodyPr>
-          <a:lstStyle/>
-          <a:p>
-            <a:pPr algn="ctr"/>
-            <a:r>
-              <a:rPr sz="2200" b="1">
-                <a:solidFill>
-                  <a:srgbClr val="FFFFFF"/>
-                </a:solidFill>
-              </a:rPr>
-              <a:t>149.93 kWh/m²</a:t>
-            </a:r>
-          </a:p>
-        </p:txBody>
-      </p:sp>
-      <p:sp>
-        <p:nvSpPr>
-          <p:cNvPr id="16" name="Rectangle 15"/>
-          <p:cNvSpPr/>
-          <p:nvPr/>
-        </p:nvSpPr>
-        <p:spPr>
-          <a:xfrm>
-            <a:off x="274320" y="2743200"/>
-            <a:ext cx="3794760" cy="3474720"/>
-          </a:xfrm>
-          <a:prstGeom prst="rect">
-            <a:avLst/>
-          </a:prstGeom>
-          <a:solidFill>
-            <a:srgbClr val="F2F2F2"/>
-          </a:solidFill>
-          <a:ln>
-            <a:noFill/>
-          </a:ln>
-        </p:spPr>
-        <p:style>
-          <a:lnRef idx="1">
-            <a:schemeClr val="accent1"/>
-          </a:lnRef>
-          <a:fillRef idx="3">
-            <a:schemeClr val="accent1"/>
-          </a:fillRef>
-          <a:effectRef idx="2">
-            <a:schemeClr val="accent1"/>
-          </a:effectRef>
-          <a:fontRef idx="minor">
-            <a:schemeClr val="lt1"/>
-          </a:fontRef>
-        </p:style>
-        <p:txBody>
-          <a:bodyPr rtlCol="0" anchor="ctr"/>
-          <a:lstStyle/>
-          <a:p>
-            <a:pPr algn="ctr"/>
-          </a:p>
-        </p:txBody>
-      </p:sp>
-      <p:sp>
-        <p:nvSpPr>
-          <p:cNvPr id="17" name="TextBox 16"/>
-          <p:cNvSpPr txBox="1"/>
-          <p:nvPr/>
-        </p:nvSpPr>
-        <p:spPr>
-          <a:xfrm>
-            <a:off x="384048" y="2807208"/>
-            <a:ext cx="3566160" cy="594360"/>
-          </a:xfrm>
-          <a:prstGeom prst="rect">
-            <a:avLst/>
-          </a:prstGeom>
-          <a:noFill/>
-        </p:spPr>
-        <p:txBody>
-          <a:bodyPr wrap="square">
-            <a:spAutoFit/>
-          </a:bodyPr>
-          <a:lstStyle/>
-          <a:p>
-            <a:pPr algn="l"/>
-            <a:r>
-              <a:rPr sz="1200" b="1">
-                <a:solidFill>
-                  <a:srgbClr val="2E75B6"/>
-                </a:solidFill>
-              </a:rPr>
-              <a:t>Suurim vajadus renoveerimiseks (vajaduse skoor)</a:t>
-            </a:r>
-          </a:p>
-        </p:txBody>
-      </p:sp>
-      <p:sp>
-        <p:nvSpPr>
-          <p:cNvPr id="18" name="TextBox 17"/>
-          <p:cNvSpPr txBox="1"/>
-          <p:nvPr/>
-        </p:nvSpPr>
-        <p:spPr>
-          <a:xfrm>
-            <a:off x="384048" y="3429000"/>
-            <a:ext cx="3566160" cy="2651760"/>
-          </a:xfrm>
-          <a:prstGeom prst="rect">
-            <a:avLst/>
-          </a:prstGeom>
-          <a:noFill/>
-        </p:spPr>
-        <p:txBody>
-          <a:bodyPr wrap="square">
-            <a:spAutoFit/>
-          </a:bodyPr>
-          <a:lstStyle/>
-          <a:p>
-            <a:pPr algn="l"/>
-            <a:r>
-              <a:rPr sz="1200" b="0">
-                <a:solidFill>
-                  <a:srgbClr val="404040"/>
-                </a:solidFill>
-              </a:rPr>
-              <a:t>Lääneranna vald · Kihnu vald · Räpina vald · Toila vald · Kanepi vald
-Mõõdik: soojakadu_kwh_aastas / kogupindala_m²</a:t>
-            </a:r>
-          </a:p>
-        </p:txBody>
-      </p:sp>
-      <p:sp>
-        <p:nvSpPr>
-          <p:cNvPr id="19" name="Rectangle 18"/>
-          <p:cNvSpPr/>
-          <p:nvPr/>
-        </p:nvSpPr>
-        <p:spPr>
-          <a:xfrm>
-            <a:off x="4251959" y="2743200"/>
-            <a:ext cx="3794760" cy="3474720"/>
-          </a:xfrm>
-          <a:prstGeom prst="rect">
-            <a:avLst/>
-          </a:prstGeom>
-          <a:solidFill>
-            <a:srgbClr val="F2F2F2"/>
-          </a:solidFill>
-          <a:ln>
-            <a:noFill/>
-          </a:ln>
-        </p:spPr>
-        <p:style>
-          <a:lnRef idx="1">
-            <a:schemeClr val="accent1"/>
-          </a:lnRef>
-          <a:fillRef idx="3">
-            <a:schemeClr val="accent1"/>
-          </a:fillRef>
-          <a:effectRef idx="2">
-            <a:schemeClr val="accent1"/>
-          </a:effectRef>
-          <a:fontRef idx="minor">
-            <a:schemeClr val="lt1"/>
-          </a:fontRef>
-        </p:style>
-        <p:txBody>
-          <a:bodyPr rtlCol="0" anchor="ctr"/>
-          <a:lstStyle/>
-          <a:p>
-            <a:pPr algn="ctr"/>
-          </a:p>
-        </p:txBody>
-      </p:sp>
-      <p:sp>
-        <p:nvSpPr>
-          <p:cNvPr id="20" name="TextBox 19"/>
-          <p:cNvSpPr txBox="1"/>
-          <p:nvPr/>
-        </p:nvSpPr>
-        <p:spPr>
-          <a:xfrm>
-            <a:off x="4361688" y="2807208"/>
-            <a:ext cx="3566160" cy="594360"/>
-          </a:xfrm>
-          <a:prstGeom prst="rect">
-            <a:avLst/>
-          </a:prstGeom>
-          <a:noFill/>
-        </p:spPr>
-        <p:txBody>
-          <a:bodyPr wrap="square">
-            <a:spAutoFit/>
-          </a:bodyPr>
-          <a:lstStyle/>
-          <a:p>
-            <a:pPr algn="l"/>
-            <a:r>
-              <a:rPr sz="1200" b="1">
-                <a:solidFill>
-                  <a:srgbClr val="2E75B6"/>
-                </a:solidFill>
-              </a:rPr>
-              <a:t>TOP 10 KOV — suurim aastane säästupotentsiaal (€)</a:t>
-            </a:r>
-          </a:p>
-        </p:txBody>
-      </p:sp>
-      <p:sp>
-        <p:nvSpPr>
-          <p:cNvPr id="21" name="TextBox 20"/>
-          <p:cNvSpPr txBox="1"/>
-          <p:nvPr/>
-        </p:nvSpPr>
-        <p:spPr>
-          <a:xfrm>
-            <a:off x="4361688" y="3429000"/>
-            <a:ext cx="3566160" cy="2651760"/>
-          </a:xfrm>
-          <a:prstGeom prst="rect">
-            <a:avLst/>
-          </a:prstGeom>
-          <a:noFill/>
-        </p:spPr>
-        <p:txBody>
-          <a:bodyPr wrap="square">
-            <a:spAutoFit/>
-          </a:bodyPr>
-          <a:lstStyle/>
-          <a:p>
-            <a:pPr algn="l"/>
-            <a:r>
-              <a:rPr sz="1200" b="0">
-                <a:solidFill>
-                  <a:srgbClr val="404040"/>
-                </a:solidFill>
-              </a:rPr>
-              <a:t>Tallinn ~100M € · Tartu linn ~20M € · Pärnu linn · Narva linn
-Kohtla-Järve · Saaremaa vald · Viljandi vald · Jõgeva vald · Elva vald</a:t>
-            </a:r>
-          </a:p>
-        </p:txBody>
-      </p:sp>
-      <p:sp>
-        <p:nvSpPr>
-          <p:cNvPr id="22" name="Rectangle 21"/>
-          <p:cNvSpPr/>
-          <p:nvPr/>
-        </p:nvSpPr>
-        <p:spPr>
-          <a:xfrm>
-            <a:off x="8229600" y="2743200"/>
-            <a:ext cx="3794760" cy="3474720"/>
-          </a:xfrm>
-          <a:prstGeom prst="rect">
-            <a:avLst/>
-          </a:prstGeom>
-          <a:solidFill>
-            <a:srgbClr val="F2F2F2"/>
-          </a:solidFill>
-          <a:ln>
-            <a:noFill/>
-          </a:ln>
-        </p:spPr>
-        <p:style>
-          <a:lnRef idx="1">
-            <a:schemeClr val="accent1"/>
-          </a:lnRef>
-          <a:fillRef idx="3">
-            <a:schemeClr val="accent1"/>
-          </a:fillRef>
-          <a:effectRef idx="2">
-            <a:schemeClr val="accent1"/>
-          </a:effectRef>
-          <a:fontRef idx="minor">
-            <a:schemeClr val="lt1"/>
-          </a:fontRef>
-        </p:style>
-        <p:txBody>
-          <a:bodyPr rtlCol="0" anchor="ctr"/>
-          <a:lstStyle/>
-          <a:p>
-            <a:pPr algn="ctr"/>
-          </a:p>
-        </p:txBody>
-      </p:sp>
-      <p:sp>
-        <p:nvSpPr>
-          <p:cNvPr id="23" name="TextBox 22"/>
-          <p:cNvSpPr txBox="1"/>
-          <p:nvPr/>
-        </p:nvSpPr>
-        <p:spPr>
-          <a:xfrm>
-            <a:off x="8339327" y="2807208"/>
-            <a:ext cx="3566160" cy="594360"/>
-          </a:xfrm>
-          <a:prstGeom prst="rect">
-            <a:avLst/>
-          </a:prstGeom>
-          <a:noFill/>
-        </p:spPr>
-        <p:txBody>
-          <a:bodyPr wrap="square">
-            <a:spAutoFit/>
-          </a:bodyPr>
-          <a:lstStyle/>
-          <a:p>
-            <a:pPr algn="l"/>
-            <a:r>
-              <a:rPr sz="1200" b="1">
-                <a:solidFill>
-                  <a:srgbClr val="2E75B6"/>
-                </a:solidFill>
-              </a:rPr>
-              <a:t>Investeeringu tasuvus — ROI vs tasuvusaeg</a:t>
-            </a:r>
-          </a:p>
-        </p:txBody>
-      </p:sp>
-      <p:sp>
-        <p:nvSpPr>
-          <p:cNvPr id="24" name="TextBox 23"/>
-          <p:cNvSpPr txBox="1"/>
-          <p:nvPr/>
-        </p:nvSpPr>
-        <p:spPr>
-          <a:xfrm>
-            <a:off x="8339327" y="3429000"/>
-            <a:ext cx="3566160" cy="2651760"/>
-          </a:xfrm>
-          <a:prstGeom prst="rect">
-            <a:avLst/>
-          </a:prstGeom>
-          <a:noFill/>
-        </p:spPr>
-        <p:txBody>
-          <a:bodyPr wrap="square">
-            <a:spAutoFit/>
-          </a:bodyPr>
-          <a:lstStyle/>
-          <a:p>
-            <a:pPr algn="l"/>
-            <a:r>
-              <a:rPr sz="1200" b="0">
-                <a:solidFill>
-                  <a:srgbClr val="404040"/>
-                </a:solidFill>
-              </a:rPr>
-              <a:t>Kambja vald (ROI 3.4) · Saue vald (3.36) · Tori vald (3.31)
-Rapla vald (3.21) — finantsiliselt kõige tasuvam renoveerimine</a:t>
+              <a:t>Docker</a:t>
             </a:r>
           </a:p>
         </p:txBody>
